--- a/Workspaces/Work/Projects/PPL CMDB-CSDM/Contract/CO6-Deliverables-2026-07-10.pptx
+++ b/Workspaces/Work/Projects/PPL CMDB-CSDM/Contract/CO6-Deliverables-2026-07-10.pptx
@@ -10,7 +10,6 @@
     <p:sldId id="258" r:id="rId9"/>
     <p:sldId id="259" r:id="rId10"/>
     <p:sldId id="260" r:id="rId11"/>
-    <p:sldId id="261" r:id="rId12"/>
   </p:sldIdLst>
   <p:sldSz cx="12191695" cy="6858000" type="screen4x3"/>
   <p:notesSz cx="6858000" cy="9144000"/>
@@ -3189,7 +3188,7 @@
         </p:nvSpPr>
         <p:spPr>
           <a:xfrm>
-            <a:off x="731520" y="1554480"/>
+            <a:off x="731520" y="1645920"/>
             <a:ext cx="10698480" cy="1005840"/>
           </a:xfrm>
           <a:prstGeom prst="rect">
@@ -3211,7 +3210,7 @@
                 </a:solidFill>
                 <a:latin typeface="Segoe UI"/>
               </a:rPr>
-              <a:t>CO6 Deliverables - Team Overview</a:t>
+              <a:t>CO6 Deliverables - Team Focus</a:t>
             </a:r>
           </a:p>
         </p:txBody>
@@ -3224,7 +3223,7 @@
         </p:nvSpPr>
         <p:spPr>
           <a:xfrm>
-            <a:off x="749808" y="2560320"/>
+            <a:off x="749808" y="2651760"/>
             <a:ext cx="10698480" cy="548640"/>
           </a:xfrm>
           <a:prstGeom prst="rect">
@@ -3246,95 +3245,14 @@
                 </a:solidFill>
                 <a:latin typeface="Segoe UI"/>
               </a:rPr>
-              <a:t>Change Order #6  ·  what's coming for CMDB / CSDM</a:t>
-            </a:r>
-          </a:p>
-        </p:txBody>
-      </p:sp>
-      <p:sp>
-        <p:nvSpPr>
-          <p:cNvPr id="6" name="Rectangle 5"/>
-          <p:cNvSpPr/>
-          <p:nvPr/>
-        </p:nvSpPr>
-        <p:spPr>
-          <a:xfrm>
-            <a:off x="749808" y="3291840"/>
-            <a:ext cx="5120640" cy="457200"/>
-          </a:xfrm>
-          <a:prstGeom prst="rect">
-            <a:avLst/>
-          </a:prstGeom>
-          <a:solidFill>
-            <a:srgbClr val="7A4F10"/>
-          </a:solidFill>
-          <a:ln w="9525">
-            <a:solidFill>
-              <a:srgbClr val="E08A00"/>
-            </a:solidFill>
-          </a:ln>
-          <a:effectLst/>
-        </p:spPr>
-        <p:style>
-          <a:lnRef idx="1">
-            <a:schemeClr val="accent1"/>
-          </a:lnRef>
-          <a:fillRef idx="3">
-            <a:schemeClr val="accent1"/>
-          </a:fillRef>
-          <a:effectRef idx="2">
-            <a:schemeClr val="accent1"/>
-          </a:effectRef>
-          <a:fontRef idx="minor">
-            <a:schemeClr val="lt1"/>
-          </a:fontRef>
-        </p:style>
-        <p:txBody>
-          <a:bodyPr rtlCol="0" anchor="ctr"/>
-          <a:lstStyle/>
-          <a:p>
-            <a:pPr algn="ctr"/>
-          </a:p>
-        </p:txBody>
-      </p:sp>
-      <p:sp>
-        <p:nvSpPr>
-          <p:cNvPr id="7" name="TextBox 6"/>
-          <p:cNvSpPr txBox="1"/>
-          <p:nvPr/>
-        </p:nvSpPr>
-        <p:spPr>
-          <a:xfrm>
-            <a:off x="868680" y="3310128"/>
-            <a:ext cx="4937760" cy="420624"/>
-          </a:xfrm>
-          <a:prstGeom prst="rect">
-            <a:avLst/>
-          </a:prstGeom>
-          <a:noFill/>
-        </p:spPr>
-        <p:txBody>
-          <a:bodyPr wrap="square" anchor="ctr" lIns="50800" rIns="50800" tIns="25400" bIns="25400">
-            <a:spAutoFit/>
-          </a:bodyPr>
-          <a:lstStyle/>
-          <a:p>
-            <a:pPr algn="l"/>
-            <a:r>
-              <a:rPr sz="1200" b="1" i="0">
-                <a:solidFill>
-                  <a:srgbClr val="FFE6C2"/>
-                </a:solidFill>
-                <a:latin typeface="Segoe UI"/>
-              </a:rPr>
-              <a:t>DRAFT / UNSIGNED  -  tentative until executed</a:t>
-            </a:r>
-          </a:p>
-        </p:txBody>
-      </p:sp>
-      <p:sp>
-        <p:nvSpPr>
-          <p:cNvPr id="8" name="TextBox 7"/>
+              <a:t>Deliverables, dates &amp; where to focus  ·  for Development + supporting roles</a:t>
+            </a:r>
+          </a:p>
+        </p:txBody>
+      </p:sp>
+      <p:sp>
+        <p:nvSpPr>
+          <p:cNvPr id="6" name="TextBox 5"/>
           <p:cNvSpPr txBox="1"/>
           <p:nvPr/>
         </p:nvSpPr>
@@ -3362,7 +3280,7 @@
                 </a:solidFill>
                 <a:latin typeface="Segoe UI"/>
               </a:rPr>
-              <a:t>9 deliverables  ·  6 net-new  ·  3 continue current CO5 work</a:t>
+              <a:t>What we deliver, by when, and where to focus</a:t>
             </a:r>
           </a:p>
           <a:p>
@@ -3374,7 +3292,7 @@
                 </a:solidFill>
                 <a:latin typeface="Segoe UI"/>
               </a:rPr>
-              <a:t>Proposed term: Jul 1 - Oct 30, 2026  (spans the tail of PI-2 + all of PI-3)</a:t>
+              <a:t>Delivery window: Jul 1 - Oct 30, 2026  (tail of PI-2 + all of PI-3)</a:t>
             </a:r>
           </a:p>
           <a:p>
@@ -3387,6 +3305,41 @@
                 <a:latin typeface="Segoe UI"/>
               </a:rPr>
               <a:t>Manuel Vazquez  -  Scrum Master, CMDB-CSDM</a:t>
+            </a:r>
+          </a:p>
+        </p:txBody>
+      </p:sp>
+      <p:sp>
+        <p:nvSpPr>
+          <p:cNvPr id="7" name="TextBox 6"/>
+          <p:cNvSpPr txBox="1"/>
+          <p:nvPr/>
+        </p:nvSpPr>
+        <p:spPr>
+          <a:xfrm>
+            <a:off x="749808" y="5989320"/>
+            <a:ext cx="10698480" cy="292608"/>
+          </a:xfrm>
+          <a:prstGeom prst="rect">
+            <a:avLst/>
+          </a:prstGeom>
+          <a:noFill/>
+        </p:spPr>
+        <p:txBody>
+          <a:bodyPr wrap="square" anchor="t" lIns="50800" rIns="50800" tIns="25400" bIns="25400">
+            <a:spAutoFit/>
+          </a:bodyPr>
+          <a:lstStyle/>
+          <a:p>
+            <a:pPr algn="l"/>
+            <a:r>
+              <a:rPr sz="1100" b="0" i="1">
+                <a:solidFill>
+                  <a:srgbClr val="7F8CA6"/>
+                </a:solidFill>
+                <a:latin typeface="Segoe UI"/>
+              </a:rPr>
+              <a:t>Planning view - dates &amp; scope firm up at PI-3 planning.</a:t>
             </a:r>
           </a:p>
         </p:txBody>
@@ -3527,7 +3480,7 @@
                 </a:solidFill>
                 <a:latin typeface="Segoe UI"/>
               </a:rPr>
-              <a:t>CO6 Deliverables - All 9 at a Glance</a:t>
+              <a:t>Deliverables &amp; Dates</a:t>
             </a:r>
           </a:p>
         </p:txBody>
@@ -3562,7 +3515,7 @@
                 </a:solidFill>
                 <a:latin typeface="Segoe UI"/>
               </a:rPr>
-              <a:t>6 net-new  ·  3 continue current CO5 work  ·  staged monthly acceptance</a:t>
+              <a:t>Ordered by due date - soonest first</a:t>
             </a:r>
           </a:p>
         </p:txBody>
@@ -3597,103 +3550,22 @@
                 </a:solidFill>
                 <a:latin typeface="Segoe UI"/>
               </a:rPr>
-              <a:t>PPL CMDB-CSDM  |  CO6 Deliverables (DRAFT)  |  Team FYI  -  Jul 10, 2026</a:t>
-            </a:r>
-          </a:p>
-        </p:txBody>
-      </p:sp>
-      <p:sp>
-        <p:nvSpPr>
-          <p:cNvPr id="7" name="Rectangle 6"/>
-          <p:cNvSpPr/>
-          <p:nvPr/>
-        </p:nvSpPr>
-        <p:spPr>
-          <a:xfrm>
-            <a:off x="502920" y="1115568"/>
-            <a:ext cx="11155680" cy="457200"/>
-          </a:xfrm>
-          <a:prstGeom prst="rect">
-            <a:avLst/>
-          </a:prstGeom>
-          <a:solidFill>
-            <a:srgbClr val="FBEEDB"/>
-          </a:solidFill>
-          <a:ln w="9525">
-            <a:solidFill>
-              <a:srgbClr val="E08A00"/>
-            </a:solidFill>
-          </a:ln>
-          <a:effectLst/>
-        </p:spPr>
-        <p:style>
-          <a:lnRef idx="1">
-            <a:schemeClr val="accent1"/>
-          </a:lnRef>
-          <a:fillRef idx="3">
-            <a:schemeClr val="accent1"/>
-          </a:fillRef>
-          <a:effectRef idx="2">
-            <a:schemeClr val="accent1"/>
-          </a:effectRef>
-          <a:fontRef idx="minor">
-            <a:schemeClr val="lt1"/>
-          </a:fontRef>
-        </p:style>
-        <p:txBody>
-          <a:bodyPr rtlCol="0" anchor="ctr"/>
-          <a:lstStyle/>
-          <a:p>
-            <a:pPr algn="ctr"/>
-          </a:p>
-        </p:txBody>
-      </p:sp>
-      <p:sp>
-        <p:nvSpPr>
-          <p:cNvPr id="8" name="TextBox 7"/>
-          <p:cNvSpPr txBox="1"/>
-          <p:nvPr/>
-        </p:nvSpPr>
-        <p:spPr>
-          <a:xfrm>
-            <a:off x="658368" y="1133856"/>
-            <a:ext cx="10881360" cy="420624"/>
-          </a:xfrm>
-          <a:prstGeom prst="rect">
-            <a:avLst/>
-          </a:prstGeom>
-          <a:noFill/>
-        </p:spPr>
-        <p:txBody>
-          <a:bodyPr wrap="square" anchor="ctr" lIns="50800" rIns="50800" tIns="25400" bIns="25400">
-            <a:spAutoFit/>
-          </a:bodyPr>
-          <a:lstStyle/>
-          <a:p>
-            <a:pPr algn="l"/>
-            <a:r>
-              <a:rPr sz="1050" b="1" i="0">
-                <a:solidFill>
-                  <a:srgbClr val="7A4F10"/>
-                </a:solidFill>
-                <a:latin typeface="Segoe UI"/>
-              </a:rPr>
-              <a:t>DRAFT / UNSIGNED (3/27 working draft).  Scope, numbering and dates are TENTATIVE until the contract is executed - nothing here changes our current commitments yet.</a:t>
+              <a:t>PPL CMDB-CSDM  |  CO6 Deliverables  |  Team Focus  -  Jul 10, 2026</a:t>
             </a:r>
           </a:p>
         </p:txBody>
       </p:sp>
       <p:graphicFrame>
         <p:nvGraphicFramePr>
-          <p:cNvPr id="9" name="Table 8"/>
+          <p:cNvPr id="7" name="Table 6"/>
           <p:cNvGraphicFramePr>
             <a:graphicFrameLocks noGrp="1"/>
           </p:cNvGraphicFramePr>
           <p:nvPr/>
         </p:nvGraphicFramePr>
         <p:xfrm>
-          <a:off x="502920" y="1737360"/>
-          <a:ext cx="11155680" cy="4114800"/>
+          <a:off x="502920" y="1280160"/>
+          <a:ext cx="11155680" cy="4297680"/>
         </p:xfrm>
         <a:graphic>
           <a:graphicData uri="http://schemas.openxmlformats.org/drawingml/2006/table">
@@ -3702,13 +3574,35 @@
                 <a:tableStyleId>{5C22544A-7EE6-4342-B048-85BDC9FD1C3A}</a:tableStyleId>
               </a:tblPr>
               <a:tblGrid>
-                <a:gridCol w="640080"/>
-                <a:gridCol w="3931920"/>
-                <a:gridCol w="1737360"/>
-                <a:gridCol w="3108960"/>
-                <a:gridCol w="1737360"/>
+                <a:gridCol w="2743200"/>
+                <a:gridCol w="1828800"/>
+                <a:gridCol w="822960"/>
+                <a:gridCol w="5760720"/>
               </a:tblGrid>
-              <a:tr h="374072">
+              <a:tr h="390698">
+                <a:tc>
+                  <a:txBody>
+                    <a:bodyPr wrap="square"/>
+                    <a:lstStyle/>
+                    <a:p>
+                      <a:pPr algn="l"/>
+                      <a:r>
+                        <a:rPr sz="1150" b="1" i="0">
+                          <a:solidFill>
+                            <a:srgbClr val="FFFFFF"/>
+                          </a:solidFill>
+                          <a:latin typeface="Segoe UI"/>
+                        </a:rPr>
+                        <a:t>Deliverable</a:t>
+                      </a:r>
+                    </a:p>
+                  </a:txBody>
+                  <a:tcPr>
+                    <a:solidFill>
+                      <a:srgbClr val="1F3A5F"/>
+                    </a:solidFill>
+                  </a:tcPr>
+                </a:tc>
                 <a:tc>
                   <a:txBody>
                     <a:bodyPr wrap="square"/>
@@ -3722,7 +3616,7 @@
                           </a:solidFill>
                           <a:latin typeface="Segoe UI"/>
                         </a:rPr>
-                        <a:t>#</a:t>
+                        <a:t>Due</a:t>
                       </a:r>
                     </a:p>
                   </a:txBody>
@@ -3737,6 +3631,29 @@
                     <a:bodyPr wrap="square"/>
                     <a:lstStyle/>
                     <a:p>
+                      <a:pPr algn="ctr"/>
+                      <a:r>
+                        <a:rPr sz="1150" b="1" i="0">
+                          <a:solidFill>
+                            <a:srgbClr val="FFFFFF"/>
+                          </a:solidFill>
+                          <a:latin typeface="Segoe UI"/>
+                        </a:rPr>
+                        <a:t>PI</a:t>
+                      </a:r>
+                    </a:p>
+                  </a:txBody>
+                  <a:tcPr>
+                    <a:solidFill>
+                      <a:srgbClr val="1F3A5F"/>
+                    </a:solidFill>
+                  </a:tcPr>
+                </a:tc>
+                <a:tc>
+                  <a:txBody>
+                    <a:bodyPr wrap="square"/>
+                    <a:lstStyle/>
+                    <a:p>
                       <a:pPr algn="l"/>
                       <a:r>
                         <a:rPr sz="1150" b="1" i="0">
@@ -3745,7 +3662,7 @@
                           </a:solidFill>
                           <a:latin typeface="Segoe UI"/>
                         </a:rPr>
-                        <a:t>Deliverable</a:t>
+                        <a:t>What we focus on</a:t>
                       </a:r>
                     </a:p>
                   </a:txBody>
@@ -3755,6 +3672,31 @@
                     </a:solidFill>
                   </a:tcPr>
                 </a:tc>
+              </a:tr>
+              <a:tr h="390698">
+                <a:tc>
+                  <a:txBody>
+                    <a:bodyPr wrap="square"/>
+                    <a:lstStyle/>
+                    <a:p>
+                      <a:pPr algn="l"/>
+                      <a:r>
+                        <a:rPr sz="1050" b="1" i="0">
+                          <a:solidFill>
+                            <a:srgbClr val="1F3A5F"/>
+                          </a:solidFill>
+                          <a:latin typeface="Segoe UI"/>
+                        </a:rPr>
+                        <a:t>CMDB Governance</a:t>
+                      </a:r>
+                    </a:p>
+                  </a:txBody>
+                  <a:tcPr>
+                    <a:solidFill>
+                      <a:srgbClr val="F4F6F9"/>
+                    </a:solidFill>
+                  </a:tcPr>
+                </a:tc>
                 <a:tc>
                   <a:txBody>
                     <a:bodyPr wrap="square"/>
@@ -3762,19 +3704,19 @@
                     <a:p>
                       <a:pPr algn="ctr"/>
                       <a:r>
-                        <a:rPr sz="1150" b="1" i="0">
-                          <a:solidFill>
-                            <a:srgbClr val="FFFFFF"/>
-                          </a:solidFill>
-                          <a:latin typeface="Segoe UI"/>
-                        </a:rPr>
-                        <a:t>Type</a:t>
-                      </a:r>
-                    </a:p>
-                  </a:txBody>
-                  <a:tcPr>
-                    <a:solidFill>
-                      <a:srgbClr val="1F3A5F"/>
+                        <a:rPr sz="1000" b="1" i="0">
+                          <a:solidFill>
+                            <a:srgbClr val="2E6DB4"/>
+                          </a:solidFill>
+                          <a:latin typeface="Segoe UI"/>
+                        </a:rPr>
+                        <a:t>Jul 31</a:t>
+                      </a:r>
+                    </a:p>
+                  </a:txBody>
+                  <a:tcPr>
+                    <a:solidFill>
+                      <a:srgbClr val="F4F6F9"/>
                     </a:solidFill>
                   </a:tcPr>
                 </a:tc>
@@ -3785,19 +3727,67 @@
                     <a:p>
                       <a:pPr algn="ctr"/>
                       <a:r>
-                        <a:rPr sz="1150" b="1" i="0">
-                          <a:solidFill>
-                            <a:srgbClr val="FFFFFF"/>
-                          </a:solidFill>
-                          <a:latin typeface="Segoe UI"/>
-                        </a:rPr>
-                        <a:t>Due (draft)</a:t>
-                      </a:r>
-                    </a:p>
-                  </a:txBody>
-                  <a:tcPr>
-                    <a:solidFill>
-                      <a:srgbClr val="1F3A5F"/>
+                        <a:rPr sz="1000" b="1" i="0">
+                          <a:solidFill>
+                            <a:srgbClr val="2D2D2D"/>
+                          </a:solidFill>
+                          <a:latin typeface="Segoe UI"/>
+                        </a:rPr>
+                        <a:t>PI-2</a:t>
+                      </a:r>
+                    </a:p>
+                  </a:txBody>
+                  <a:tcPr>
+                    <a:solidFill>
+                      <a:srgbClr val="F4F6F9"/>
+                    </a:solidFill>
+                  </a:tcPr>
+                </a:tc>
+                <a:tc>
+                  <a:txBody>
+                    <a:bodyPr wrap="square"/>
+                    <a:lstStyle/>
+                    <a:p>
+                      <a:pPr algn="l"/>
+                      <a:r>
+                        <a:rPr sz="950" b="0" i="0">
+                          <a:solidFill>
+                            <a:srgbClr val="2D2D2D"/>
+                          </a:solidFill>
+                          <a:latin typeface="Segoe UI"/>
+                        </a:rPr>
+                        <a:t>Data dictionary incl. Databases; Data Certification for ALL CI classes + KB articles; ESS-02; SOX BA review</a:t>
+                      </a:r>
+                    </a:p>
+                  </a:txBody>
+                  <a:tcPr>
+                    <a:solidFill>
+                      <a:srgbClr val="F4F6F9"/>
+                    </a:solidFill>
+                  </a:tcPr>
+                </a:tc>
+              </a:tr>
+              <a:tr h="390698">
+                <a:tc>
+                  <a:txBody>
+                    <a:bodyPr wrap="square"/>
+                    <a:lstStyle/>
+                    <a:p>
+                      <a:pPr algn="l"/>
+                      <a:r>
+                        <a:rPr sz="1050" b="1" i="0">
+                          <a:solidFill>
+                            <a:srgbClr val="1F3A5F"/>
+                          </a:solidFill>
+                          <a:latin typeface="Segoe UI"/>
+                        </a:rPr>
+                        <a:t>CI Coverage - Computers</a:t>
+                      </a:r>
+                    </a:p>
+                  </a:txBody>
+                  <a:tcPr>
+                    <a:solidFill>
+                      <a:srgbClr val="FFFFFF"/>
                     </a:solidFill>
                   </a:tcPr>
                 </a:tc>
@@ -3808,24 +3798,93 @@
                     <a:p>
                       <a:pPr algn="ctr"/>
                       <a:r>
-                        <a:rPr sz="1150" b="1" i="0">
-                          <a:solidFill>
-                            <a:srgbClr val="FFFFFF"/>
-                          </a:solidFill>
-                          <a:latin typeface="Segoe UI"/>
-                        </a:rPr>
-                        <a:t>PI</a:t>
-                      </a:r>
-                    </a:p>
-                  </a:txBody>
-                  <a:tcPr>
-                    <a:solidFill>
-                      <a:srgbClr val="1F3A5F"/>
+                        <a:rPr sz="1000" b="1" i="0">
+                          <a:solidFill>
+                            <a:srgbClr val="2E6DB4"/>
+                          </a:solidFill>
+                          <a:latin typeface="Segoe UI"/>
+                        </a:rPr>
+                        <a:t>Jul 31 -&gt; Sep 30</a:t>
+                      </a:r>
+                    </a:p>
+                  </a:txBody>
+                  <a:tcPr>
+                    <a:solidFill>
+                      <a:srgbClr val="FFFFFF"/>
+                    </a:solidFill>
+                  </a:tcPr>
+                </a:tc>
+                <a:tc>
+                  <a:txBody>
+                    <a:bodyPr wrap="square"/>
+                    <a:lstStyle/>
+                    <a:p>
+                      <a:pPr algn="ctr"/>
+                      <a:r>
+                        <a:rPr sz="1000" b="1" i="0">
+                          <a:solidFill>
+                            <a:srgbClr val="2D2D2D"/>
+                          </a:solidFill>
+                          <a:latin typeface="Segoe UI"/>
+                        </a:rPr>
+                        <a:t>PI-2/3</a:t>
+                      </a:r>
+                    </a:p>
+                  </a:txBody>
+                  <a:tcPr>
+                    <a:solidFill>
+                      <a:srgbClr val="FFFFFF"/>
+                    </a:solidFill>
+                  </a:tcPr>
+                </a:tc>
+                <a:tc>
+                  <a:txBody>
+                    <a:bodyPr wrap="square"/>
+                    <a:lstStyle/>
+                    <a:p>
+                      <a:pPr algn="l"/>
+                      <a:r>
+                        <a:rPr sz="950" b="0" i="0">
+                          <a:solidFill>
+                            <a:srgbClr val="2D2D2D"/>
+                          </a:solidFill>
+                          <a:latin typeface="Segoe UI"/>
+                        </a:rPr>
+                        <a:t>SCCM/Discovery precedence + bulk life-cycle; 90% of devices managed</a:t>
+                      </a:r>
+                    </a:p>
+                  </a:txBody>
+                  <a:tcPr>
+                    <a:solidFill>
+                      <a:srgbClr val="FFFFFF"/>
                     </a:solidFill>
                   </a:tcPr>
                 </a:tc>
               </a:tr>
-              <a:tr h="374072">
+              <a:tr h="390698">
+                <a:tc>
+                  <a:txBody>
+                    <a:bodyPr wrap="square"/>
+                    <a:lstStyle/>
+                    <a:p>
+                      <a:pPr algn="l"/>
+                      <a:r>
+                        <a:rPr sz="1050" b="1" i="0">
+                          <a:solidFill>
+                            <a:srgbClr val="1F3A5F"/>
+                          </a:solidFill>
+                          <a:latin typeface="Segoe UI"/>
+                        </a:rPr>
+                        <a:t>CI Coverage - Servers</a:t>
+                      </a:r>
+                    </a:p>
+                  </a:txBody>
+                  <a:tcPr>
+                    <a:solidFill>
+                      <a:srgbClr val="F4F6F9"/>
+                    </a:solidFill>
+                  </a:tcPr>
+                </a:tc>
                 <a:tc>
                   <a:txBody>
                     <a:bodyPr wrap="square"/>
@@ -3833,19 +3892,606 @@
                     <a:p>
                       <a:pPr algn="ctr"/>
                       <a:r>
-                        <a:rPr sz="1100" b="1" i="0">
+                        <a:rPr sz="1000" b="1" i="0">
+                          <a:solidFill>
+                            <a:srgbClr val="2E6DB4"/>
+                          </a:solidFill>
+                          <a:latin typeface="Segoe UI"/>
+                        </a:rPr>
+                        <a:t>Jul 31 -&gt; Oct 30</a:t>
+                      </a:r>
+                    </a:p>
+                  </a:txBody>
+                  <a:tcPr>
+                    <a:solidFill>
+                      <a:srgbClr val="F4F6F9"/>
+                    </a:solidFill>
+                  </a:tcPr>
+                </a:tc>
+                <a:tc>
+                  <a:txBody>
+                    <a:bodyPr wrap="square"/>
+                    <a:lstStyle/>
+                    <a:p>
+                      <a:pPr algn="ctr"/>
+                      <a:r>
+                        <a:rPr sz="1000" b="1" i="0">
+                          <a:solidFill>
+                            <a:srgbClr val="2D2D2D"/>
+                          </a:solidFill>
+                          <a:latin typeface="Segoe UI"/>
+                        </a:rPr>
+                        <a:t>PI-2/3</a:t>
+                      </a:r>
+                    </a:p>
+                  </a:txBody>
+                  <a:tcPr>
+                    <a:solidFill>
+                      <a:srgbClr val="F4F6F9"/>
+                    </a:solidFill>
+                  </a:tcPr>
+                </a:tc>
+                <a:tc>
+                  <a:txBody>
+                    <a:bodyPr wrap="square"/>
+                    <a:lstStyle/>
+                    <a:p>
+                      <a:pPr algn="l"/>
+                      <a:r>
+                        <a:rPr sz="950" b="0" i="0">
+                          <a:solidFill>
+                            <a:srgbClr val="2D2D2D"/>
+                          </a:solidFill>
+                          <a:latin typeface="Segoe UI"/>
+                        </a:rPr>
+                        <a:t>SCCM/Discovery precedence; enhanced DB Discovery (MS-SQL/Oracle); 90% of non-NERC-CIP servers</a:t>
+                      </a:r>
+                    </a:p>
+                  </a:txBody>
+                  <a:tcPr>
+                    <a:solidFill>
+                      <a:srgbClr val="F4F6F9"/>
+                    </a:solidFill>
+                  </a:tcPr>
+                </a:tc>
+              </a:tr>
+              <a:tr h="390698">
+                <a:tc>
+                  <a:txBody>
+                    <a:bodyPr wrap="square"/>
+                    <a:lstStyle/>
+                    <a:p>
+                      <a:pPr algn="l"/>
+                      <a:r>
+                        <a:rPr sz="1050" b="1" i="0">
+                          <a:solidFill>
+                            <a:srgbClr val="1F3A5F"/>
+                          </a:solidFill>
+                          <a:latin typeface="Segoe UI"/>
+                        </a:rPr>
+                        <a:t>Network Gear Discovery</a:t>
+                      </a:r>
+                    </a:p>
+                  </a:txBody>
+                  <a:tcPr>
+                    <a:solidFill>
+                      <a:srgbClr val="FFFFFF"/>
+                    </a:solidFill>
+                  </a:tcPr>
+                </a:tc>
+                <a:tc>
+                  <a:txBody>
+                    <a:bodyPr wrap="square"/>
+                    <a:lstStyle/>
+                    <a:p>
+                      <a:pPr algn="ctr"/>
+                      <a:r>
+                        <a:rPr sz="1000" b="1" i="0">
+                          <a:solidFill>
+                            <a:srgbClr val="2E6DB4"/>
+                          </a:solidFill>
+                          <a:latin typeface="Segoe UI"/>
+                        </a:rPr>
+                        <a:t>Aug 31 -&gt; Oct 30</a:t>
+                      </a:r>
+                    </a:p>
+                  </a:txBody>
+                  <a:tcPr>
+                    <a:solidFill>
+                      <a:srgbClr val="FFFFFF"/>
+                    </a:solidFill>
+                  </a:tcPr>
+                </a:tc>
+                <a:tc>
+                  <a:txBody>
+                    <a:bodyPr wrap="square"/>
+                    <a:lstStyle/>
+                    <a:p>
+                      <a:pPr algn="ctr"/>
+                      <a:r>
+                        <a:rPr sz="1000" b="1" i="0">
+                          <a:solidFill>
+                            <a:srgbClr val="2D2D2D"/>
+                          </a:solidFill>
+                          <a:latin typeface="Segoe UI"/>
+                        </a:rPr>
+                        <a:t>PI-3</a:t>
+                      </a:r>
+                    </a:p>
+                  </a:txBody>
+                  <a:tcPr>
+                    <a:solidFill>
+                      <a:srgbClr val="FFFFFF"/>
+                    </a:solidFill>
+                  </a:tcPr>
+                </a:tc>
+                <a:tc>
+                  <a:txBody>
+                    <a:bodyPr wrap="square"/>
+                    <a:lstStyle/>
+                    <a:p>
+                      <a:pPr algn="l"/>
+                      <a:r>
+                        <a:rPr sz="950" b="0" i="0">
+                          <a:solidFill>
+                            <a:srgbClr val="2D2D2D"/>
+                          </a:solidFill>
+                          <a:latin typeface="Segoe UI"/>
+                        </a:rPr>
+                        <a:t>Credentials / SNMP (excl. OT); discovery schedules; mandatory attributes; 90% coverage, owner-validated</a:t>
+                      </a:r>
+                    </a:p>
+                  </a:txBody>
+                  <a:tcPr>
+                    <a:solidFill>
+                      <a:srgbClr val="FFFFFF"/>
+                    </a:solidFill>
+                  </a:tcPr>
+                </a:tc>
+              </a:tr>
+              <a:tr h="390698">
+                <a:tc>
+                  <a:txBody>
+                    <a:bodyPr wrap="square"/>
+                    <a:lstStyle/>
+                    <a:p>
+                      <a:pPr algn="l"/>
+                      <a:r>
+                        <a:rPr sz="1050" b="1" i="0">
+                          <a:solidFill>
+                            <a:srgbClr val="1F3A5F"/>
+                          </a:solidFill>
+                          <a:latin typeface="Segoe UI"/>
+                        </a:rPr>
+                        <a:t>Service Mapping</a:t>
+                      </a:r>
+                    </a:p>
+                  </a:txBody>
+                  <a:tcPr>
+                    <a:solidFill>
+                      <a:srgbClr val="F4F6F9"/>
+                    </a:solidFill>
+                  </a:tcPr>
+                </a:tc>
+                <a:tc>
+                  <a:txBody>
+                    <a:bodyPr wrap="square"/>
+                    <a:lstStyle/>
+                    <a:p>
+                      <a:pPr algn="ctr"/>
+                      <a:r>
+                        <a:rPr sz="1000" b="1" i="0">
+                          <a:solidFill>
+                            <a:srgbClr val="2E6DB4"/>
+                          </a:solidFill>
+                          <a:latin typeface="Segoe UI"/>
+                        </a:rPr>
+                        <a:t>Aug 31 -&gt; Oct 30</a:t>
+                      </a:r>
+                    </a:p>
+                  </a:txBody>
+                  <a:tcPr>
+                    <a:solidFill>
+                      <a:srgbClr val="F4F6F9"/>
+                    </a:solidFill>
+                  </a:tcPr>
+                </a:tc>
+                <a:tc>
+                  <a:txBody>
+                    <a:bodyPr wrap="square"/>
+                    <a:lstStyle/>
+                    <a:p>
+                      <a:pPr algn="ctr"/>
+                      <a:r>
+                        <a:rPr sz="1000" b="1" i="0">
+                          <a:solidFill>
+                            <a:srgbClr val="2D2D2D"/>
+                          </a:solidFill>
+                          <a:latin typeface="Segoe UI"/>
+                        </a:rPr>
+                        <a:t>PI-3</a:t>
+                      </a:r>
+                    </a:p>
+                  </a:txBody>
+                  <a:tcPr>
+                    <a:solidFill>
+                      <a:srgbClr val="F4F6F9"/>
+                    </a:solidFill>
+                  </a:tcPr>
+                </a:tc>
+                <a:tc>
+                  <a:txBody>
+                    <a:bodyPr wrap="square"/>
+                    <a:lstStyle/>
+                    <a:p>
+                      <a:pPr algn="l"/>
+                      <a:r>
+                        <a:rPr sz="950" b="0" i="0">
+                          <a:solidFill>
+                            <a:srgbClr val="2D2D2D"/>
+                          </a:solidFill>
+                          <a:latin typeface="Segoe UI"/>
+                        </a:rPr>
+                        <a:t>End-to-end maps for 10 priority apps down to infra CIs; owner-validated; consumable in ServiceNow</a:t>
+                      </a:r>
+                    </a:p>
+                  </a:txBody>
+                  <a:tcPr>
+                    <a:solidFill>
+                      <a:srgbClr val="F4F6F9"/>
+                    </a:solidFill>
+                  </a:tcPr>
+                </a:tc>
+              </a:tr>
+              <a:tr h="390698">
+                <a:tc>
+                  <a:txBody>
+                    <a:bodyPr wrap="square"/>
+                    <a:lstStyle/>
+                    <a:p>
+                      <a:pPr algn="l"/>
+                      <a:r>
+                        <a:rPr sz="1050" b="1" i="0">
+                          <a:solidFill>
+                            <a:srgbClr val="1F3A5F"/>
+                          </a:solidFill>
+                          <a:latin typeface="Segoe UI"/>
+                        </a:rPr>
+                        <a:t>Legacy Platform Rationalization</a:t>
+                      </a:r>
+                    </a:p>
+                  </a:txBody>
+                  <a:tcPr>
+                    <a:solidFill>
+                      <a:srgbClr val="FFFFFF"/>
+                    </a:solidFill>
+                  </a:tcPr>
+                </a:tc>
+                <a:tc>
+                  <a:txBody>
+                    <a:bodyPr wrap="square"/>
+                    <a:lstStyle/>
+                    <a:p>
+                      <a:pPr algn="ctr"/>
+                      <a:r>
+                        <a:rPr sz="1000" b="1" i="0">
+                          <a:solidFill>
+                            <a:srgbClr val="2E6DB4"/>
+                          </a:solidFill>
+                          <a:latin typeface="Segoe UI"/>
+                        </a:rPr>
+                        <a:t>Aug 31 -&gt; Oct 30</a:t>
+                      </a:r>
+                    </a:p>
+                  </a:txBody>
+                  <a:tcPr>
+                    <a:solidFill>
+                      <a:srgbClr val="FFFFFF"/>
+                    </a:solidFill>
+                  </a:tcPr>
+                </a:tc>
+                <a:tc>
+                  <a:txBody>
+                    <a:bodyPr wrap="square"/>
+                    <a:lstStyle/>
+                    <a:p>
+                      <a:pPr algn="ctr"/>
+                      <a:r>
+                        <a:rPr sz="1000" b="1" i="0">
+                          <a:solidFill>
+                            <a:srgbClr val="2D2D2D"/>
+                          </a:solidFill>
+                          <a:latin typeface="Segoe UI"/>
+                        </a:rPr>
+                        <a:t>PI-3</a:t>
+                      </a:r>
+                    </a:p>
+                  </a:txBody>
+                  <a:tcPr>
+                    <a:solidFill>
+                      <a:srgbClr val="FFFFFF"/>
+                    </a:solidFill>
+                  </a:tcPr>
+                </a:tc>
+                <a:tc>
+                  <a:txBody>
+                    <a:bodyPr wrap="square"/>
+                    <a:lstStyle/>
+                    <a:p>
+                      <a:pPr algn="l"/>
+                      <a:r>
+                        <a:rPr sz="950" b="0" i="0">
+                          <a:solidFill>
+                            <a:srgbClr val="2D2D2D"/>
+                          </a:solidFill>
+                          <a:latin typeface="Segoe UI"/>
+                        </a:rPr>
+                        <a:t>Analysis + migration plan: iTeam -&gt; DISCO / Cherwell -&gt; AIM</a:t>
+                      </a:r>
+                    </a:p>
+                  </a:txBody>
+                  <a:tcPr>
+                    <a:solidFill>
+                      <a:srgbClr val="FFFFFF"/>
+                    </a:solidFill>
+                  </a:tcPr>
+                </a:tc>
+              </a:tr>
+              <a:tr h="390698">
+                <a:tc>
+                  <a:txBody>
+                    <a:bodyPr wrap="square"/>
+                    <a:lstStyle/>
+                    <a:p>
+                      <a:pPr algn="l"/>
+                      <a:r>
+                        <a:rPr sz="1050" b="1" i="0">
+                          <a:solidFill>
+                            <a:srgbClr val="1F3A5F"/>
+                          </a:solidFill>
+                          <a:latin typeface="Segoe UI"/>
+                        </a:rPr>
+                        <a:t>Qualys Integration</a:t>
+                      </a:r>
+                    </a:p>
+                  </a:txBody>
+                  <a:tcPr>
+                    <a:solidFill>
+                      <a:srgbClr val="F4F6F9"/>
+                    </a:solidFill>
+                  </a:tcPr>
+                </a:tc>
+                <a:tc>
+                  <a:txBody>
+                    <a:bodyPr wrap="square"/>
+                    <a:lstStyle/>
+                    <a:p>
+                      <a:pPr algn="ctr"/>
+                      <a:r>
+                        <a:rPr sz="1000" b="1" i="0">
+                          <a:solidFill>
+                            <a:srgbClr val="2E6DB4"/>
+                          </a:solidFill>
+                          <a:latin typeface="Segoe UI"/>
+                        </a:rPr>
+                        <a:t>Oct 27</a:t>
+                      </a:r>
+                    </a:p>
+                  </a:txBody>
+                  <a:tcPr>
+                    <a:solidFill>
+                      <a:srgbClr val="F4F6F9"/>
+                    </a:solidFill>
+                  </a:tcPr>
+                </a:tc>
+                <a:tc>
+                  <a:txBody>
+                    <a:bodyPr wrap="square"/>
+                    <a:lstStyle/>
+                    <a:p>
+                      <a:pPr algn="ctr"/>
+                      <a:r>
+                        <a:rPr sz="1000" b="1" i="0">
+                          <a:solidFill>
+                            <a:srgbClr val="2D2D2D"/>
+                          </a:solidFill>
+                          <a:latin typeface="Segoe UI"/>
+                        </a:rPr>
+                        <a:t>PI-3</a:t>
+                      </a:r>
+                    </a:p>
+                  </a:txBody>
+                  <a:tcPr>
+                    <a:solidFill>
+                      <a:srgbClr val="F4F6F9"/>
+                    </a:solidFill>
+                  </a:tcPr>
+                </a:tc>
+                <a:tc>
+                  <a:txBody>
+                    <a:bodyPr wrap="square"/>
+                    <a:lstStyle/>
+                    <a:p>
+                      <a:pPr algn="l"/>
+                      <a:r>
+                        <a:rPr sz="950" b="0" i="0">
+                          <a:solidFill>
+                            <a:srgbClr val="2D2D2D"/>
+                          </a:solidFill>
+                          <a:latin typeface="Segoe UI"/>
+                        </a:rPr>
+                        <a:t>One-way Qualys -&gt; ServiceNow feed; configured, tested, deployed to PROD</a:t>
+                      </a:r>
+                    </a:p>
+                  </a:txBody>
+                  <a:tcPr>
+                    <a:solidFill>
+                      <a:srgbClr val="F4F6F9"/>
+                    </a:solidFill>
+                  </a:tcPr>
+                </a:tc>
+              </a:tr>
+              <a:tr h="390698">
+                <a:tc>
+                  <a:txBody>
+                    <a:bodyPr wrap="square"/>
+                    <a:lstStyle/>
+                    <a:p>
+                      <a:pPr algn="l"/>
+                      <a:r>
+                        <a:rPr sz="1050" b="1" i="0">
+                          <a:solidFill>
+                            <a:srgbClr val="1F3A5F"/>
+                          </a:solidFill>
+                          <a:latin typeface="Segoe UI"/>
+                        </a:rPr>
+                        <a:t>ATF Strategy</a:t>
+                      </a:r>
+                    </a:p>
+                  </a:txBody>
+                  <a:tcPr>
+                    <a:solidFill>
+                      <a:srgbClr val="FFFFFF"/>
+                    </a:solidFill>
+                  </a:tcPr>
+                </a:tc>
+                <a:tc>
+                  <a:txBody>
+                    <a:bodyPr wrap="square"/>
+                    <a:lstStyle/>
+                    <a:p>
+                      <a:pPr algn="ctr"/>
+                      <a:r>
+                        <a:rPr sz="1000" b="1" i="0">
+                          <a:solidFill>
+                            <a:srgbClr val="2E6DB4"/>
+                          </a:solidFill>
+                          <a:latin typeface="Segoe UI"/>
+                        </a:rPr>
+                        <a:t>Oct 31</a:t>
+                      </a:r>
+                    </a:p>
+                  </a:txBody>
+                  <a:tcPr>
+                    <a:solidFill>
+                      <a:srgbClr val="FFFFFF"/>
+                    </a:solidFill>
+                  </a:tcPr>
+                </a:tc>
+                <a:tc>
+                  <a:txBody>
+                    <a:bodyPr wrap="square"/>
+                    <a:lstStyle/>
+                    <a:p>
+                      <a:pPr algn="ctr"/>
+                      <a:r>
+                        <a:rPr sz="1000" b="1" i="0">
+                          <a:solidFill>
+                            <a:srgbClr val="2D2D2D"/>
+                          </a:solidFill>
+                          <a:latin typeface="Segoe UI"/>
+                        </a:rPr>
+                        <a:t>PI-3</a:t>
+                      </a:r>
+                    </a:p>
+                  </a:txBody>
+                  <a:tcPr>
+                    <a:solidFill>
+                      <a:srgbClr val="FFFFFF"/>
+                    </a:solidFill>
+                  </a:tcPr>
+                </a:tc>
+                <a:tc>
+                  <a:txBody>
+                    <a:bodyPr wrap="square"/>
+                    <a:lstStyle/>
+                    <a:p>
+                      <a:pPr algn="l"/>
+                      <a:r>
+                        <a:rPr sz="950" b="0" i="0">
+                          <a:solidFill>
+                            <a:srgbClr val="2D2D2D"/>
+                          </a:solidFill>
+                          <a:latin typeface="Segoe UI"/>
+                        </a:rPr>
+                        <a:t>Plan for Automated Test Framework rollout across in-prod ServiceNow capabilities</a:t>
+                      </a:r>
+                    </a:p>
+                  </a:txBody>
+                  <a:tcPr>
+                    <a:solidFill>
+                      <a:srgbClr val="FFFFFF"/>
+                    </a:solidFill>
+                  </a:tcPr>
+                </a:tc>
+              </a:tr>
+              <a:tr h="390698">
+                <a:tc>
+                  <a:txBody>
+                    <a:bodyPr wrap="square"/>
+                    <a:lstStyle/>
+                    <a:p>
+                      <a:pPr algn="l"/>
+                      <a:r>
+                        <a:rPr sz="1050" b="1" i="0">
                           <a:solidFill>
                             <a:srgbClr val="6B7280"/>
                           </a:solidFill>
                           <a:latin typeface="Segoe UI"/>
                         </a:rPr>
-                        <a:t>1</a:t>
-                      </a:r>
-                    </a:p>
-                  </a:txBody>
-                  <a:tcPr>
-                    <a:solidFill>
-                      <a:srgbClr val="F4F6F9"/>
+                        <a:t>ITSM Product Management</a:t>
+                      </a:r>
+                    </a:p>
+                  </a:txBody>
+                  <a:tcPr>
+                    <a:solidFill>
+                      <a:srgbClr val="ECEEF1"/>
+                    </a:solidFill>
+                  </a:tcPr>
+                </a:tc>
+                <a:tc>
+                  <a:txBody>
+                    <a:bodyPr wrap="square"/>
+                    <a:lstStyle/>
+                    <a:p>
+                      <a:pPr algn="ctr"/>
+                      <a:r>
+                        <a:rPr sz="1000" b="1" i="0">
+                          <a:solidFill>
+                            <a:srgbClr val="6B7280"/>
+                          </a:solidFill>
+                          <a:latin typeface="Segoe UI"/>
+                        </a:rPr>
+                        <a:t>Monthly</a:t>
+                      </a:r>
+                    </a:p>
+                  </a:txBody>
+                  <a:tcPr>
+                    <a:solidFill>
+                      <a:srgbClr val="ECEEF1"/>
+                    </a:solidFill>
+                  </a:tcPr>
+                </a:tc>
+                <a:tc>
+                  <a:txBody>
+                    <a:bodyPr wrap="square"/>
+                    <a:lstStyle/>
+                    <a:p>
+                      <a:pPr algn="ctr"/>
+                      <a:r>
+                        <a:rPr sz="1000" b="1" i="0">
+                          <a:solidFill>
+                            <a:srgbClr val="2D2D2D"/>
+                          </a:solidFill>
+                          <a:latin typeface="Segoe UI"/>
+                        </a:rPr>
+                        <a:t>PI-2/3</a:t>
+                      </a:r>
+                    </a:p>
+                  </a:txBody>
+                  <a:tcPr>
+                    <a:solidFill>
+                      <a:srgbClr val="ECEEF1"/>
                     </a:solidFill>
                   </a:tcPr>
                 </a:tc>
@@ -3856,19 +4502,44 @@
                     <a:p>
                       <a:pPr algn="l"/>
                       <a:r>
-                        <a:rPr sz="1150" b="1" i="0">
-                          <a:solidFill>
-                            <a:srgbClr val="1F3A5F"/>
-                          </a:solidFill>
-                          <a:latin typeface="Segoe UI"/>
-                        </a:rPr>
-                        <a:t>Network Gear Discovery</a:t>
-                      </a:r>
-                    </a:p>
-                  </a:txBody>
-                  <a:tcPr>
-                    <a:solidFill>
-                      <a:srgbClr val="F4F6F9"/>
+                        <a:rPr sz="950" b="0" i="0">
+                          <a:solidFill>
+                            <a:srgbClr val="6B7280"/>
+                          </a:solidFill>
+                          <a:latin typeface="Segoe UI"/>
+                        </a:rPr>
+                        <a:t>Separate ITSM lane (Product Owner role) - outside core CMDB delivery</a:t>
+                      </a:r>
+                    </a:p>
+                  </a:txBody>
+                  <a:tcPr>
+                    <a:solidFill>
+                      <a:srgbClr val="ECEEF1"/>
+                    </a:solidFill>
+                  </a:tcPr>
+                </a:tc>
+              </a:tr>
+              <a:tr h="390700">
+                <a:tc>
+                  <a:txBody>
+                    <a:bodyPr wrap="square"/>
+                    <a:lstStyle/>
+                    <a:p>
+                      <a:pPr algn="l"/>
+                      <a:r>
+                        <a:rPr sz="1050" b="1" i="0">
+                          <a:solidFill>
+                            <a:srgbClr val="6B7280"/>
+                          </a:solidFill>
+                          <a:latin typeface="Segoe UI"/>
+                        </a:rPr>
+                        <a:t>Platform Support</a:t>
+                      </a:r>
+                    </a:p>
+                  </a:txBody>
+                  <a:tcPr>
+                    <a:solidFill>
+                      <a:srgbClr val="ECEEF1"/>
                     </a:solidFill>
                   </a:tcPr>
                 </a:tc>
@@ -3879,19 +4550,19 @@
                     <a:p>
                       <a:pPr algn="ctr"/>
                       <a:r>
-                        <a:rPr sz="1050" b="1" i="0">
-                          <a:solidFill>
-                            <a:srgbClr val="FFFFFF"/>
-                          </a:solidFill>
-                          <a:latin typeface="Segoe UI"/>
-                        </a:rPr>
-                        <a:t>New</a:t>
-                      </a:r>
-                    </a:p>
-                  </a:txBody>
-                  <a:tcPr>
-                    <a:solidFill>
-                      <a:srgbClr val="2E6DB4"/>
+                        <a:rPr sz="1000" b="1" i="0">
+                          <a:solidFill>
+                            <a:srgbClr val="6B7280"/>
+                          </a:solidFill>
+                          <a:latin typeface="Segoe UI"/>
+                        </a:rPr>
+                        <a:t>Monthly</a:t>
+                      </a:r>
+                    </a:p>
+                  </a:txBody>
+                  <a:tcPr>
+                    <a:solidFill>
+                      <a:srgbClr val="ECEEF1"/>
                     </a:solidFill>
                   </a:tcPr>
                 </a:tc>
@@ -3902,1095 +4573,42 @@
                     <a:p>
                       <a:pPr algn="ctr"/>
                       <a:r>
-                        <a:rPr sz="1100" b="0" i="0">
+                        <a:rPr sz="1000" b="1" i="0">
                           <a:solidFill>
                             <a:srgbClr val="2D2D2D"/>
                           </a:solidFill>
                           <a:latin typeface="Segoe UI"/>
                         </a:rPr>
-                        <a:t>Aug 31 -&gt; Oct 30</a:t>
-                      </a:r>
-                    </a:p>
-                  </a:txBody>
-                  <a:tcPr>
-                    <a:solidFill>
-                      <a:srgbClr val="F4F6F9"/>
-                    </a:solidFill>
-                  </a:tcPr>
-                </a:tc>
-                <a:tc>
-                  <a:txBody>
-                    <a:bodyPr wrap="square"/>
-                    <a:lstStyle/>
-                    <a:p>
-                      <a:pPr algn="ctr"/>
-                      <a:r>
-                        <a:rPr sz="1100" b="1" i="0">
-                          <a:solidFill>
-                            <a:srgbClr val="2D2D2D"/>
-                          </a:solidFill>
-                          <a:latin typeface="Segoe UI"/>
-                        </a:rPr>
                         <a:t>PI-3</a:t>
                       </a:r>
                     </a:p>
                   </a:txBody>
                   <a:tcPr>
                     <a:solidFill>
-                      <a:srgbClr val="F4F6F9"/>
-                    </a:solidFill>
-                  </a:tcPr>
-                </a:tc>
-              </a:tr>
-              <a:tr h="374072">
-                <a:tc>
-                  <a:txBody>
-                    <a:bodyPr wrap="square"/>
-                    <a:lstStyle/>
-                    <a:p>
-                      <a:pPr algn="ctr"/>
-                      <a:r>
-                        <a:rPr sz="1100" b="1" i="0">
+                      <a:srgbClr val="ECEEF1"/>
+                    </a:solidFill>
+                  </a:tcPr>
+                </a:tc>
+                <a:tc>
+                  <a:txBody>
+                    <a:bodyPr wrap="square"/>
+                    <a:lstStyle/>
+                    <a:p>
+                      <a:pPr algn="l"/>
+                      <a:r>
+                        <a:rPr sz="950" b="0" i="0">
                           <a:solidFill>
                             <a:srgbClr val="6B7280"/>
                           </a:solidFill>
                           <a:latin typeface="Segoe UI"/>
                         </a:rPr>
-                        <a:t>2</a:t>
-                      </a:r>
-                    </a:p>
-                  </a:txBody>
-                  <a:tcPr>
-                    <a:solidFill>
-                      <a:srgbClr val="FFFFFF"/>
-                    </a:solidFill>
-                  </a:tcPr>
-                </a:tc>
-                <a:tc>
-                  <a:txBody>
-                    <a:bodyPr wrap="square"/>
-                    <a:lstStyle/>
-                    <a:p>
-                      <a:pPr algn="l"/>
-                      <a:r>
-                        <a:rPr sz="1150" b="1" i="0">
-                          <a:solidFill>
-                            <a:srgbClr val="1F3A5F"/>
-                          </a:solidFill>
-                          <a:latin typeface="Segoe UI"/>
-                        </a:rPr>
-                        <a:t>Service Mapping</a:t>
-                      </a:r>
-                    </a:p>
-                  </a:txBody>
-                  <a:tcPr>
-                    <a:solidFill>
-                      <a:srgbClr val="FFFFFF"/>
-                    </a:solidFill>
-                  </a:tcPr>
-                </a:tc>
-                <a:tc>
-                  <a:txBody>
-                    <a:bodyPr wrap="square"/>
-                    <a:lstStyle/>
-                    <a:p>
-                      <a:pPr algn="ctr"/>
-                      <a:r>
-                        <a:rPr sz="1050" b="1" i="0">
-                          <a:solidFill>
-                            <a:srgbClr val="FFFFFF"/>
-                          </a:solidFill>
-                          <a:latin typeface="Segoe UI"/>
-                        </a:rPr>
-                        <a:t>New</a:t>
-                      </a:r>
-                    </a:p>
-                  </a:txBody>
-                  <a:tcPr>
-                    <a:solidFill>
-                      <a:srgbClr val="2E6DB4"/>
-                    </a:solidFill>
-                  </a:tcPr>
-                </a:tc>
-                <a:tc>
-                  <a:txBody>
-                    <a:bodyPr wrap="square"/>
-                    <a:lstStyle/>
-                    <a:p>
-                      <a:pPr algn="ctr"/>
-                      <a:r>
-                        <a:rPr sz="1100" b="0" i="0">
-                          <a:solidFill>
-                            <a:srgbClr val="2D2D2D"/>
-                          </a:solidFill>
-                          <a:latin typeface="Segoe UI"/>
-                        </a:rPr>
-                        <a:t>Aug 31 -&gt; Oct 30</a:t>
-                      </a:r>
-                    </a:p>
-                  </a:txBody>
-                  <a:tcPr>
-                    <a:solidFill>
-                      <a:srgbClr val="FFFFFF"/>
-                    </a:solidFill>
-                  </a:tcPr>
-                </a:tc>
-                <a:tc>
-                  <a:txBody>
-                    <a:bodyPr wrap="square"/>
-                    <a:lstStyle/>
-                    <a:p>
-                      <a:pPr algn="ctr"/>
-                      <a:r>
-                        <a:rPr sz="1100" b="1" i="0">
-                          <a:solidFill>
-                            <a:srgbClr val="2D2D2D"/>
-                          </a:solidFill>
-                          <a:latin typeface="Segoe UI"/>
-                        </a:rPr>
-                        <a:t>PI-3</a:t>
-                      </a:r>
-                    </a:p>
-                  </a:txBody>
-                  <a:tcPr>
-                    <a:solidFill>
-                      <a:srgbClr val="FFFFFF"/>
-                    </a:solidFill>
-                  </a:tcPr>
-                </a:tc>
-              </a:tr>
-              <a:tr h="374072">
-                <a:tc>
-                  <a:txBody>
-                    <a:bodyPr wrap="square"/>
-                    <a:lstStyle/>
-                    <a:p>
-                      <a:pPr algn="ctr"/>
-                      <a:r>
-                        <a:rPr sz="1100" b="1" i="0">
-                          <a:solidFill>
-                            <a:srgbClr val="6B7280"/>
-                          </a:solidFill>
-                          <a:latin typeface="Segoe UI"/>
-                        </a:rPr>
-                        <a:t>3a</a:t>
-                      </a:r>
-                    </a:p>
-                  </a:txBody>
-                  <a:tcPr>
-                    <a:solidFill>
-                      <a:srgbClr val="F4F6F9"/>
-                    </a:solidFill>
-                  </a:tcPr>
-                </a:tc>
-                <a:tc>
-                  <a:txBody>
-                    <a:bodyPr wrap="square"/>
-                    <a:lstStyle/>
-                    <a:p>
-                      <a:pPr algn="l"/>
-                      <a:r>
-                        <a:rPr sz="1150" b="1" i="0">
-                          <a:solidFill>
-                            <a:srgbClr val="1F3A5F"/>
-                          </a:solidFill>
-                          <a:latin typeface="Segoe UI"/>
-                        </a:rPr>
-                        <a:t>Qualys Integration</a:t>
-                      </a:r>
-                    </a:p>
-                  </a:txBody>
-                  <a:tcPr>
-                    <a:solidFill>
-                      <a:srgbClr val="F4F6F9"/>
-                    </a:solidFill>
-                  </a:tcPr>
-                </a:tc>
-                <a:tc>
-                  <a:txBody>
-                    <a:bodyPr wrap="square"/>
-                    <a:lstStyle/>
-                    <a:p>
-                      <a:pPr algn="ctr"/>
-                      <a:r>
-                        <a:rPr sz="1050" b="1" i="0">
-                          <a:solidFill>
-                            <a:srgbClr val="FFFFFF"/>
-                          </a:solidFill>
-                          <a:latin typeface="Segoe UI"/>
-                        </a:rPr>
-                        <a:t>Continues</a:t>
-                      </a:r>
-                    </a:p>
-                  </a:txBody>
-                  <a:tcPr>
-                    <a:solidFill>
-                      <a:srgbClr val="5B6B7B"/>
-                    </a:solidFill>
-                  </a:tcPr>
-                </a:tc>
-                <a:tc>
-                  <a:txBody>
-                    <a:bodyPr wrap="square"/>
-                    <a:lstStyle/>
-                    <a:p>
-                      <a:pPr algn="ctr"/>
-                      <a:r>
-                        <a:rPr sz="1100" b="0" i="0">
-                          <a:solidFill>
-                            <a:srgbClr val="2D2D2D"/>
-                          </a:solidFill>
-                          <a:latin typeface="Segoe UI"/>
-                        </a:rPr>
-                        <a:t>Oct 27</a:t>
-                      </a:r>
-                    </a:p>
-                  </a:txBody>
-                  <a:tcPr>
-                    <a:solidFill>
-                      <a:srgbClr val="F4F6F9"/>
-                    </a:solidFill>
-                  </a:tcPr>
-                </a:tc>
-                <a:tc>
-                  <a:txBody>
-                    <a:bodyPr wrap="square"/>
-                    <a:lstStyle/>
-                    <a:p>
-                      <a:pPr algn="ctr"/>
-                      <a:r>
-                        <a:rPr sz="1100" b="1" i="0">
-                          <a:solidFill>
-                            <a:srgbClr val="2D2D2D"/>
-                          </a:solidFill>
-                          <a:latin typeface="Segoe UI"/>
-                        </a:rPr>
-                        <a:t>PI-3</a:t>
-                      </a:r>
-                    </a:p>
-                  </a:txBody>
-                  <a:tcPr>
-                    <a:solidFill>
-                      <a:srgbClr val="F4F6F9"/>
-                    </a:solidFill>
-                  </a:tcPr>
-                </a:tc>
-              </a:tr>
-              <a:tr h="374072">
-                <a:tc>
-                  <a:txBody>
-                    <a:bodyPr wrap="square"/>
-                    <a:lstStyle/>
-                    <a:p>
-                      <a:pPr algn="ctr"/>
-                      <a:r>
-                        <a:rPr sz="1100" b="1" i="0">
-                          <a:solidFill>
-                            <a:srgbClr val="6B7280"/>
-                          </a:solidFill>
-                          <a:latin typeface="Segoe UI"/>
-                        </a:rPr>
-                        <a:t>3b</a:t>
-                      </a:r>
-                    </a:p>
-                  </a:txBody>
-                  <a:tcPr>
-                    <a:solidFill>
-                      <a:srgbClr val="FFFFFF"/>
-                    </a:solidFill>
-                  </a:tcPr>
-                </a:tc>
-                <a:tc>
-                  <a:txBody>
-                    <a:bodyPr wrap="square"/>
-                    <a:lstStyle/>
-                    <a:p>
-                      <a:pPr algn="l"/>
-                      <a:r>
-                        <a:rPr sz="1150" b="1" i="0">
-                          <a:solidFill>
-                            <a:srgbClr val="1F3A5F"/>
-                          </a:solidFill>
-                          <a:latin typeface="Segoe UI"/>
-                        </a:rPr>
-                        <a:t>CMDB Governance</a:t>
-                      </a:r>
-                    </a:p>
-                  </a:txBody>
-                  <a:tcPr>
-                    <a:solidFill>
-                      <a:srgbClr val="FFFFFF"/>
-                    </a:solidFill>
-                  </a:tcPr>
-                </a:tc>
-                <a:tc>
-                  <a:txBody>
-                    <a:bodyPr wrap="square"/>
-                    <a:lstStyle/>
-                    <a:p>
-                      <a:pPr algn="ctr"/>
-                      <a:r>
-                        <a:rPr sz="1050" b="1" i="0">
-                          <a:solidFill>
-                            <a:srgbClr val="FFFFFF"/>
-                          </a:solidFill>
-                          <a:latin typeface="Segoe UI"/>
-                        </a:rPr>
-                        <a:t>Continues</a:t>
-                      </a:r>
-                    </a:p>
-                  </a:txBody>
-                  <a:tcPr>
-                    <a:solidFill>
-                      <a:srgbClr val="5B6B7B"/>
-                    </a:solidFill>
-                  </a:tcPr>
-                </a:tc>
-                <a:tc>
-                  <a:txBody>
-                    <a:bodyPr wrap="square"/>
-                    <a:lstStyle/>
-                    <a:p>
-                      <a:pPr algn="ctr"/>
-                      <a:r>
-                        <a:rPr sz="1100" b="0" i="0">
-                          <a:solidFill>
-                            <a:srgbClr val="2D2D2D"/>
-                          </a:solidFill>
-                          <a:latin typeface="Segoe UI"/>
-                        </a:rPr>
-                        <a:t>Jul 31</a:t>
-                      </a:r>
-                    </a:p>
-                  </a:txBody>
-                  <a:tcPr>
-                    <a:solidFill>
-                      <a:srgbClr val="FFFFFF"/>
-                    </a:solidFill>
-                  </a:tcPr>
-                </a:tc>
-                <a:tc>
-                  <a:txBody>
-                    <a:bodyPr wrap="square"/>
-                    <a:lstStyle/>
-                    <a:p>
-                      <a:pPr algn="ctr"/>
-                      <a:r>
-                        <a:rPr sz="1100" b="1" i="0">
-                          <a:solidFill>
-                            <a:srgbClr val="2D2D2D"/>
-                          </a:solidFill>
-                          <a:latin typeface="Segoe UI"/>
-                        </a:rPr>
-                        <a:t>PI-2</a:t>
-                      </a:r>
-                    </a:p>
-                  </a:txBody>
-                  <a:tcPr>
-                    <a:solidFill>
-                      <a:srgbClr val="FFFFFF"/>
-                    </a:solidFill>
-                  </a:tcPr>
-                </a:tc>
-              </a:tr>
-              <a:tr h="374072">
-                <a:tc>
-                  <a:txBody>
-                    <a:bodyPr wrap="square"/>
-                    <a:lstStyle/>
-                    <a:p>
-                      <a:pPr algn="ctr"/>
-                      <a:r>
-                        <a:rPr sz="1100" b="1" i="0">
-                          <a:solidFill>
-                            <a:srgbClr val="6B7280"/>
-                          </a:solidFill>
-                          <a:latin typeface="Segoe UI"/>
-                        </a:rPr>
-                        <a:t>4</a:t>
-                      </a:r>
-                    </a:p>
-                  </a:txBody>
-                  <a:tcPr>
-                    <a:solidFill>
-                      <a:srgbClr val="F4F6F9"/>
-                    </a:solidFill>
-                  </a:tcPr>
-                </a:tc>
-                <a:tc>
-                  <a:txBody>
-                    <a:bodyPr wrap="square"/>
-                    <a:lstStyle/>
-                    <a:p>
-                      <a:pPr algn="l"/>
-                      <a:r>
-                        <a:rPr sz="1150" b="1" i="0">
-                          <a:solidFill>
-                            <a:srgbClr val="1F3A5F"/>
-                          </a:solidFill>
-                          <a:latin typeface="Segoe UI"/>
-                        </a:rPr>
-                        <a:t>CI Coverage - Computers</a:t>
-                      </a:r>
-                    </a:p>
-                  </a:txBody>
-                  <a:tcPr>
-                    <a:solidFill>
-                      <a:srgbClr val="F4F6F9"/>
-                    </a:solidFill>
-                  </a:tcPr>
-                </a:tc>
-                <a:tc>
-                  <a:txBody>
-                    <a:bodyPr wrap="square"/>
-                    <a:lstStyle/>
-                    <a:p>
-                      <a:pPr algn="ctr"/>
-                      <a:r>
-                        <a:rPr sz="1050" b="1" i="0">
-                          <a:solidFill>
-                            <a:srgbClr val="FFFFFF"/>
-                          </a:solidFill>
-                          <a:latin typeface="Segoe UI"/>
-                        </a:rPr>
-                        <a:t>Continues</a:t>
-                      </a:r>
-                    </a:p>
-                  </a:txBody>
-                  <a:tcPr>
-                    <a:solidFill>
-                      <a:srgbClr val="5B6B7B"/>
-                    </a:solidFill>
-                  </a:tcPr>
-                </a:tc>
-                <a:tc>
-                  <a:txBody>
-                    <a:bodyPr wrap="square"/>
-                    <a:lstStyle/>
-                    <a:p>
-                      <a:pPr algn="ctr"/>
-                      <a:r>
-                        <a:rPr sz="1100" b="0" i="0">
-                          <a:solidFill>
-                            <a:srgbClr val="2D2D2D"/>
-                          </a:solidFill>
-                          <a:latin typeface="Segoe UI"/>
-                        </a:rPr>
-                        <a:t>Jul 31 -&gt; Sep 30</a:t>
-                      </a:r>
-                    </a:p>
-                  </a:txBody>
-                  <a:tcPr>
-                    <a:solidFill>
-                      <a:srgbClr val="F4F6F9"/>
-                    </a:solidFill>
-                  </a:tcPr>
-                </a:tc>
-                <a:tc>
-                  <a:txBody>
-                    <a:bodyPr wrap="square"/>
-                    <a:lstStyle/>
-                    <a:p>
-                      <a:pPr algn="ctr"/>
-                      <a:r>
-                        <a:rPr sz="1100" b="1" i="0">
-                          <a:solidFill>
-                            <a:srgbClr val="2D2D2D"/>
-                          </a:solidFill>
-                          <a:latin typeface="Segoe UI"/>
-                        </a:rPr>
-                        <a:t>PI-2/3</a:t>
-                      </a:r>
-                    </a:p>
-                  </a:txBody>
-                  <a:tcPr>
-                    <a:solidFill>
-                      <a:srgbClr val="F4F6F9"/>
-                    </a:solidFill>
-                  </a:tcPr>
-                </a:tc>
-              </a:tr>
-              <a:tr h="374072">
-                <a:tc>
-                  <a:txBody>
-                    <a:bodyPr wrap="square"/>
-                    <a:lstStyle/>
-                    <a:p>
-                      <a:pPr algn="ctr"/>
-                      <a:r>
-                        <a:rPr sz="1100" b="1" i="0">
-                          <a:solidFill>
-                            <a:srgbClr val="6B7280"/>
-                          </a:solidFill>
-                          <a:latin typeface="Segoe UI"/>
-                        </a:rPr>
-                        <a:t>5</a:t>
-                      </a:r>
-                    </a:p>
-                  </a:txBody>
-                  <a:tcPr>
-                    <a:solidFill>
-                      <a:srgbClr val="FFFFFF"/>
-                    </a:solidFill>
-                  </a:tcPr>
-                </a:tc>
-                <a:tc>
-                  <a:txBody>
-                    <a:bodyPr wrap="square"/>
-                    <a:lstStyle/>
-                    <a:p>
-                      <a:pPr algn="l"/>
-                      <a:r>
-                        <a:rPr sz="1150" b="1" i="0">
-                          <a:solidFill>
-                            <a:srgbClr val="1F3A5F"/>
-                          </a:solidFill>
-                          <a:latin typeface="Segoe UI"/>
-                        </a:rPr>
-                        <a:t>CI Coverage - Servers</a:t>
-                      </a:r>
-                    </a:p>
-                  </a:txBody>
-                  <a:tcPr>
-                    <a:solidFill>
-                      <a:srgbClr val="FFFFFF"/>
-                    </a:solidFill>
-                  </a:tcPr>
-                </a:tc>
-                <a:tc>
-                  <a:txBody>
-                    <a:bodyPr wrap="square"/>
-                    <a:lstStyle/>
-                    <a:p>
-                      <a:pPr algn="ctr"/>
-                      <a:r>
-                        <a:rPr sz="1050" b="1" i="0">
-                          <a:solidFill>
-                            <a:srgbClr val="FFFFFF"/>
-                          </a:solidFill>
-                          <a:latin typeface="Segoe UI"/>
-                        </a:rPr>
-                        <a:t>Continues</a:t>
-                      </a:r>
-                    </a:p>
-                  </a:txBody>
-                  <a:tcPr>
-                    <a:solidFill>
-                      <a:srgbClr val="5B6B7B"/>
-                    </a:solidFill>
-                  </a:tcPr>
-                </a:tc>
-                <a:tc>
-                  <a:txBody>
-                    <a:bodyPr wrap="square"/>
-                    <a:lstStyle/>
-                    <a:p>
-                      <a:pPr algn="ctr"/>
-                      <a:r>
-                        <a:rPr sz="1100" b="0" i="0">
-                          <a:solidFill>
-                            <a:srgbClr val="2D2D2D"/>
-                          </a:solidFill>
-                          <a:latin typeface="Segoe UI"/>
-                        </a:rPr>
-                        <a:t>Jul 31 -&gt; Oct 30</a:t>
-                      </a:r>
-                    </a:p>
-                  </a:txBody>
-                  <a:tcPr>
-                    <a:solidFill>
-                      <a:srgbClr val="FFFFFF"/>
-                    </a:solidFill>
-                  </a:tcPr>
-                </a:tc>
-                <a:tc>
-                  <a:txBody>
-                    <a:bodyPr wrap="square"/>
-                    <a:lstStyle/>
-                    <a:p>
-                      <a:pPr algn="ctr"/>
-                      <a:r>
-                        <a:rPr sz="1100" b="1" i="0">
-                          <a:solidFill>
-                            <a:srgbClr val="2D2D2D"/>
-                          </a:solidFill>
-                          <a:latin typeface="Segoe UI"/>
-                        </a:rPr>
-                        <a:t>PI-2/3</a:t>
-                      </a:r>
-                    </a:p>
-                  </a:txBody>
-                  <a:tcPr>
-                    <a:solidFill>
-                      <a:srgbClr val="FFFFFF"/>
-                    </a:solidFill>
-                  </a:tcPr>
-                </a:tc>
-              </a:tr>
-              <a:tr h="374072">
-                <a:tc>
-                  <a:txBody>
-                    <a:bodyPr wrap="square"/>
-                    <a:lstStyle/>
-                    <a:p>
-                      <a:pPr algn="ctr"/>
-                      <a:r>
-                        <a:rPr sz="1100" b="1" i="0">
-                          <a:solidFill>
-                            <a:srgbClr val="6B7280"/>
-                          </a:solidFill>
-                          <a:latin typeface="Segoe UI"/>
-                        </a:rPr>
-                        <a:t>6</a:t>
-                      </a:r>
-                    </a:p>
-                  </a:txBody>
-                  <a:tcPr>
-                    <a:solidFill>
-                      <a:srgbClr val="F4F6F9"/>
-                    </a:solidFill>
-                  </a:tcPr>
-                </a:tc>
-                <a:tc>
-                  <a:txBody>
-                    <a:bodyPr wrap="square"/>
-                    <a:lstStyle/>
-                    <a:p>
-                      <a:pPr algn="l"/>
-                      <a:r>
-                        <a:rPr sz="1150" b="1" i="0">
-                          <a:solidFill>
-                            <a:srgbClr val="1F3A5F"/>
-                          </a:solidFill>
-                          <a:latin typeface="Segoe UI"/>
-                        </a:rPr>
-                        <a:t>Legacy Platform Rationalization</a:t>
-                      </a:r>
-                    </a:p>
-                  </a:txBody>
-                  <a:tcPr>
-                    <a:solidFill>
-                      <a:srgbClr val="F4F6F9"/>
-                    </a:solidFill>
-                  </a:tcPr>
-                </a:tc>
-                <a:tc>
-                  <a:txBody>
-                    <a:bodyPr wrap="square"/>
-                    <a:lstStyle/>
-                    <a:p>
-                      <a:pPr algn="ctr"/>
-                      <a:r>
-                        <a:rPr sz="1050" b="1" i="0">
-                          <a:solidFill>
-                            <a:srgbClr val="FFFFFF"/>
-                          </a:solidFill>
-                          <a:latin typeface="Segoe UI"/>
-                        </a:rPr>
-                        <a:t>New</a:t>
-                      </a:r>
-                    </a:p>
-                  </a:txBody>
-                  <a:tcPr>
-                    <a:solidFill>
-                      <a:srgbClr val="2E6DB4"/>
-                    </a:solidFill>
-                  </a:tcPr>
-                </a:tc>
-                <a:tc>
-                  <a:txBody>
-                    <a:bodyPr wrap="square"/>
-                    <a:lstStyle/>
-                    <a:p>
-                      <a:pPr algn="ctr"/>
-                      <a:r>
-                        <a:rPr sz="1100" b="0" i="0">
-                          <a:solidFill>
-                            <a:srgbClr val="2D2D2D"/>
-                          </a:solidFill>
-                          <a:latin typeface="Segoe UI"/>
-                        </a:rPr>
-                        <a:t>Aug 31 -&gt; Oct 30</a:t>
-                      </a:r>
-                    </a:p>
-                  </a:txBody>
-                  <a:tcPr>
-                    <a:solidFill>
-                      <a:srgbClr val="F4F6F9"/>
-                    </a:solidFill>
-                  </a:tcPr>
-                </a:tc>
-                <a:tc>
-                  <a:txBody>
-                    <a:bodyPr wrap="square"/>
-                    <a:lstStyle/>
-                    <a:p>
-                      <a:pPr algn="ctr"/>
-                      <a:r>
-                        <a:rPr sz="1100" b="1" i="0">
-                          <a:solidFill>
-                            <a:srgbClr val="2D2D2D"/>
-                          </a:solidFill>
-                          <a:latin typeface="Segoe UI"/>
-                        </a:rPr>
-                        <a:t>PI-3</a:t>
-                      </a:r>
-                    </a:p>
-                  </a:txBody>
-                  <a:tcPr>
-                    <a:solidFill>
-                      <a:srgbClr val="F4F6F9"/>
-                    </a:solidFill>
-                  </a:tcPr>
-                </a:tc>
-              </a:tr>
-              <a:tr h="374072">
-                <a:tc>
-                  <a:txBody>
-                    <a:bodyPr wrap="square"/>
-                    <a:lstStyle/>
-                    <a:p>
-                      <a:pPr algn="ctr"/>
-                      <a:r>
-                        <a:rPr sz="1100" b="1" i="0">
-                          <a:solidFill>
-                            <a:srgbClr val="6B7280"/>
-                          </a:solidFill>
-                          <a:latin typeface="Segoe UI"/>
-                        </a:rPr>
-                        <a:t>7</a:t>
-                      </a:r>
-                    </a:p>
-                  </a:txBody>
-                  <a:tcPr>
-                    <a:solidFill>
-                      <a:srgbClr val="FFFFFF"/>
-                    </a:solidFill>
-                  </a:tcPr>
-                </a:tc>
-                <a:tc>
-                  <a:txBody>
-                    <a:bodyPr wrap="square"/>
-                    <a:lstStyle/>
-                    <a:p>
-                      <a:pPr algn="l"/>
-                      <a:r>
-                        <a:rPr sz="1150" b="1" i="0">
-                          <a:solidFill>
-                            <a:srgbClr val="1F3A5F"/>
-                          </a:solidFill>
-                          <a:latin typeface="Segoe UI"/>
-                        </a:rPr>
-                        <a:t>ITSM Product Management</a:t>
-                      </a:r>
-                    </a:p>
-                  </a:txBody>
-                  <a:tcPr>
-                    <a:solidFill>
-                      <a:srgbClr val="FFFFFF"/>
-                    </a:solidFill>
-                  </a:tcPr>
-                </a:tc>
-                <a:tc>
-                  <a:txBody>
-                    <a:bodyPr wrap="square"/>
-                    <a:lstStyle/>
-                    <a:p>
-                      <a:pPr algn="ctr"/>
-                      <a:r>
-                        <a:rPr sz="1050" b="1" i="0">
-                          <a:solidFill>
-                            <a:srgbClr val="FFFFFF"/>
-                          </a:solidFill>
-                          <a:latin typeface="Segoe UI"/>
-                        </a:rPr>
-                        <a:t>New</a:t>
-                      </a:r>
-                    </a:p>
-                  </a:txBody>
-                  <a:tcPr>
-                    <a:solidFill>
-                      <a:srgbClr val="2E6DB4"/>
-                    </a:solidFill>
-                  </a:tcPr>
-                </a:tc>
-                <a:tc>
-                  <a:txBody>
-                    <a:bodyPr wrap="square"/>
-                    <a:lstStyle/>
-                    <a:p>
-                      <a:pPr algn="ctr"/>
-                      <a:r>
-                        <a:rPr sz="1100" b="0" i="0">
-                          <a:solidFill>
-                            <a:srgbClr val="2D2D2D"/>
-                          </a:solidFill>
-                          <a:latin typeface="Segoe UI"/>
-                        </a:rPr>
-                        <a:t>Monthly Jul 31-Oct 30</a:t>
-                      </a:r>
-                    </a:p>
-                  </a:txBody>
-                  <a:tcPr>
-                    <a:solidFill>
-                      <a:srgbClr val="FFFFFF"/>
-                    </a:solidFill>
-                  </a:tcPr>
-                </a:tc>
-                <a:tc>
-                  <a:txBody>
-                    <a:bodyPr wrap="square"/>
-                    <a:lstStyle/>
-                    <a:p>
-                      <a:pPr algn="ctr"/>
-                      <a:r>
-                        <a:rPr sz="1100" b="1" i="0">
-                          <a:solidFill>
-                            <a:srgbClr val="2D2D2D"/>
-                          </a:solidFill>
-                          <a:latin typeface="Segoe UI"/>
-                        </a:rPr>
-                        <a:t>PI-2/3</a:t>
-                      </a:r>
-                    </a:p>
-                  </a:txBody>
-                  <a:tcPr>
-                    <a:solidFill>
-                      <a:srgbClr val="FFFFFF"/>
-                    </a:solidFill>
-                  </a:tcPr>
-                </a:tc>
-              </a:tr>
-              <a:tr h="374072">
-                <a:tc>
-                  <a:txBody>
-                    <a:bodyPr wrap="square"/>
-                    <a:lstStyle/>
-                    <a:p>
-                      <a:pPr algn="ctr"/>
-                      <a:r>
-                        <a:rPr sz="1100" b="1" i="0">
-                          <a:solidFill>
-                            <a:srgbClr val="6B7280"/>
-                          </a:solidFill>
-                          <a:latin typeface="Segoe UI"/>
-                        </a:rPr>
-                        <a:t>8</a:t>
-                      </a:r>
-                    </a:p>
-                  </a:txBody>
-                  <a:tcPr>
-                    <a:solidFill>
-                      <a:srgbClr val="F4F6F9"/>
-                    </a:solidFill>
-                  </a:tcPr>
-                </a:tc>
-                <a:tc>
-                  <a:txBody>
-                    <a:bodyPr wrap="square"/>
-                    <a:lstStyle/>
-                    <a:p>
-                      <a:pPr algn="l"/>
-                      <a:r>
-                        <a:rPr sz="1150" b="1" i="0">
-                          <a:solidFill>
-                            <a:srgbClr val="1F3A5F"/>
-                          </a:solidFill>
-                          <a:latin typeface="Segoe UI"/>
-                        </a:rPr>
-                        <a:t>ATF Strategy</a:t>
-                      </a:r>
-                    </a:p>
-                  </a:txBody>
-                  <a:tcPr>
-                    <a:solidFill>
-                      <a:srgbClr val="F4F6F9"/>
-                    </a:solidFill>
-                  </a:tcPr>
-                </a:tc>
-                <a:tc>
-                  <a:txBody>
-                    <a:bodyPr wrap="square"/>
-                    <a:lstStyle/>
-                    <a:p>
-                      <a:pPr algn="ctr"/>
-                      <a:r>
-                        <a:rPr sz="1050" b="1" i="0">
-                          <a:solidFill>
-                            <a:srgbClr val="FFFFFF"/>
-                          </a:solidFill>
-                          <a:latin typeface="Segoe UI"/>
-                        </a:rPr>
-                        <a:t>New</a:t>
-                      </a:r>
-                    </a:p>
-                  </a:txBody>
-                  <a:tcPr>
-                    <a:solidFill>
-                      <a:srgbClr val="2E6DB4"/>
-                    </a:solidFill>
-                  </a:tcPr>
-                </a:tc>
-                <a:tc>
-                  <a:txBody>
-                    <a:bodyPr wrap="square"/>
-                    <a:lstStyle/>
-                    <a:p>
-                      <a:pPr algn="ctr"/>
-                      <a:r>
-                        <a:rPr sz="1100" b="0" i="0">
-                          <a:solidFill>
-                            <a:srgbClr val="2D2D2D"/>
-                          </a:solidFill>
-                          <a:latin typeface="Segoe UI"/>
-                        </a:rPr>
-                        <a:t>Oct 31</a:t>
-                      </a:r>
-                    </a:p>
-                  </a:txBody>
-                  <a:tcPr>
-                    <a:solidFill>
-                      <a:srgbClr val="F4F6F9"/>
-                    </a:solidFill>
-                  </a:tcPr>
-                </a:tc>
-                <a:tc>
-                  <a:txBody>
-                    <a:bodyPr wrap="square"/>
-                    <a:lstStyle/>
-                    <a:p>
-                      <a:pPr algn="ctr"/>
-                      <a:r>
-                        <a:rPr sz="1100" b="1" i="0">
-                          <a:solidFill>
-                            <a:srgbClr val="2D2D2D"/>
-                          </a:solidFill>
-                          <a:latin typeface="Segoe UI"/>
-                        </a:rPr>
-                        <a:t>PI-3</a:t>
-                      </a:r>
-                    </a:p>
-                  </a:txBody>
-                  <a:tcPr>
-                    <a:solidFill>
-                      <a:srgbClr val="F4F6F9"/>
-                    </a:solidFill>
-                  </a:tcPr>
-                </a:tc>
-              </a:tr>
-              <a:tr h="374080">
-                <a:tc>
-                  <a:txBody>
-                    <a:bodyPr wrap="square"/>
-                    <a:lstStyle/>
-                    <a:p>
-                      <a:pPr algn="ctr"/>
-                      <a:r>
-                        <a:rPr sz="1100" b="1" i="0">
-                          <a:solidFill>
-                            <a:srgbClr val="6B7280"/>
-                          </a:solidFill>
-                          <a:latin typeface="Segoe UI"/>
-                        </a:rPr>
-                        <a:t>9</a:t>
-                      </a:r>
-                    </a:p>
-                  </a:txBody>
-                  <a:tcPr>
-                    <a:solidFill>
-                      <a:srgbClr val="FFFFFF"/>
-                    </a:solidFill>
-                  </a:tcPr>
-                </a:tc>
-                <a:tc>
-                  <a:txBody>
-                    <a:bodyPr wrap="square"/>
-                    <a:lstStyle/>
-                    <a:p>
-                      <a:pPr algn="l"/>
-                      <a:r>
-                        <a:rPr sz="1150" b="1" i="0">
-                          <a:solidFill>
-                            <a:srgbClr val="1F3A5F"/>
-                          </a:solidFill>
-                          <a:latin typeface="Segoe UI"/>
-                        </a:rPr>
-                        <a:t>Platform Support</a:t>
-                      </a:r>
-                    </a:p>
-                  </a:txBody>
-                  <a:tcPr>
-                    <a:solidFill>
-                      <a:srgbClr val="FFFFFF"/>
-                    </a:solidFill>
-                  </a:tcPr>
-                </a:tc>
-                <a:tc>
-                  <a:txBody>
-                    <a:bodyPr wrap="square"/>
-                    <a:lstStyle/>
-                    <a:p>
-                      <a:pPr algn="ctr"/>
-                      <a:r>
-                        <a:rPr sz="1050" b="1" i="0">
-                          <a:solidFill>
-                            <a:srgbClr val="FFFFFF"/>
-                          </a:solidFill>
-                          <a:latin typeface="Segoe UI"/>
-                        </a:rPr>
-                        <a:t>New</a:t>
-                      </a:r>
-                    </a:p>
-                  </a:txBody>
-                  <a:tcPr>
-                    <a:solidFill>
-                      <a:srgbClr val="2E6DB4"/>
-                    </a:solidFill>
-                  </a:tcPr>
-                </a:tc>
-                <a:tc>
-                  <a:txBody>
-                    <a:bodyPr wrap="square"/>
-                    <a:lstStyle/>
-                    <a:p>
-                      <a:pPr algn="ctr"/>
-                      <a:r>
-                        <a:rPr sz="1100" b="0" i="0">
-                          <a:solidFill>
-                            <a:srgbClr val="2D2D2D"/>
-                          </a:solidFill>
-                          <a:latin typeface="Segoe UI"/>
-                        </a:rPr>
-                        <a:t>Monthly Aug 31-Oct 30</a:t>
-                      </a:r>
-                    </a:p>
-                  </a:txBody>
-                  <a:tcPr>
-                    <a:solidFill>
-                      <a:srgbClr val="FFFFFF"/>
-                    </a:solidFill>
-                  </a:tcPr>
-                </a:tc>
-                <a:tc>
-                  <a:txBody>
-                    <a:bodyPr wrap="square"/>
-                    <a:lstStyle/>
-                    <a:p>
-                      <a:pPr algn="ctr"/>
-                      <a:r>
-                        <a:rPr sz="1100" b="1" i="0">
-                          <a:solidFill>
-                            <a:srgbClr val="2D2D2D"/>
-                          </a:solidFill>
-                          <a:latin typeface="Segoe UI"/>
-                        </a:rPr>
-                        <a:t>PI-3</a:t>
-                      </a:r>
-                    </a:p>
-                  </a:txBody>
-                  <a:tcPr>
-                    <a:solidFill>
-                      <a:srgbClr val="FFFFFF"/>
+                        <a:t>Standing BAU / DevOps support - ongoing capacity, not a finite deliverable</a:t>
+                      </a:r>
+                    </a:p>
+                  </a:txBody>
+                  <a:tcPr>
+                    <a:solidFill>
+                      <a:srgbClr val="ECEEF1"/>
                     </a:solidFill>
                   </a:tcPr>
                 </a:tc>
@@ -5001,14 +4619,14 @@
       </p:graphicFrame>
       <p:sp>
         <p:nvSpPr>
-          <p:cNvPr id="10" name="TextBox 9"/>
+          <p:cNvPr id="8" name="TextBox 7"/>
           <p:cNvSpPr txBox="1"/>
           <p:nvPr/>
         </p:nvSpPr>
         <p:spPr>
           <a:xfrm>
-            <a:off x="502920" y="5943600"/>
-            <a:ext cx="11155680" cy="502920"/>
+            <a:off x="502920" y="5715000"/>
+            <a:ext cx="11155680" cy="548640"/>
           </a:xfrm>
           <a:prstGeom prst="rect">
             <a:avLst/>
@@ -5023,13 +4641,13 @@
           <a:p>
             <a:pPr algn="l"/>
             <a:r>
-              <a:rPr sz="1050" b="0" i="0">
+              <a:rPr sz="1000" b="0" i="0">
                 <a:solidFill>
                   <a:srgbClr val="2D2D2D"/>
                 </a:solidFill>
                 <a:latin typeface="Segoe UI"/>
               </a:rPr>
-              <a:t>6 net-new  ·  3 continue current CO5 work (Governance, CI Coverage, Qualys).  Draft numbers two items '3' (Qualys + CMDB Governance) - shown here as 3a / 3b.</a:t>
+              <a:t>Ordered by due date.  Bottom two are standing PO / BAU lanes - separate from core CMDB delivery.  Planning view - dates &amp; scope firm up at PI-3 planning.</a:t>
             </a:r>
           </a:p>
         </p:txBody>
@@ -5170,7 +4788,7 @@
                 </a:solidFill>
                 <a:latin typeface="Segoe UI"/>
               </a:rPr>
-              <a:t>The 6 Net-New Deliverables</a:t>
+              <a:t>In-Flight Now - Current Work &amp; Stories</a:t>
             </a:r>
           </a:p>
         </p:txBody>
@@ -5205,7 +4823,7 @@
                 </a:solidFill>
                 <a:latin typeface="Segoe UI"/>
               </a:rPr>
-              <a:t>Brand-new scope with no CO5 antecedent - mostly planned &amp; staffed at PI-3</a:t>
+              <a:t>The threads already in motion - what to do next, and the ADO items</a:t>
             </a:r>
           </a:p>
         </p:txBody>
@@ -5240,7 +4858,7 @@
                 </a:solidFill>
                 <a:latin typeface="Segoe UI"/>
               </a:rPr>
-              <a:t>PPL CMDB-CSDM  |  CO6 Deliverables (DRAFT)  |  Team FYI  -  Jul 10, 2026</a:t>
+              <a:t>PPL CMDB-CSDM  |  CO6 Deliverables  |  Team Focus  -  Jul 10, 2026</a:t>
             </a:r>
           </a:p>
         </p:txBody>
@@ -5254,8 +4872,8 @@
           <p:nvPr/>
         </p:nvGraphicFramePr>
         <p:xfrm>
-          <a:off x="502920" y="1188720"/>
-          <a:ext cx="11155680" cy="4114800"/>
+          <a:off x="502920" y="1280160"/>
+          <a:ext cx="11155680" cy="3931920"/>
         </p:xfrm>
         <a:graphic>
           <a:graphicData uri="http://schemas.openxmlformats.org/drawingml/2006/table">
@@ -5264,12 +4882,11 @@
                 <a:tableStyleId>{5C22544A-7EE6-4342-B048-85BDC9FD1C3A}</a:tableStyleId>
               </a:tblPr>
               <a:tblGrid>
-                <a:gridCol w="2468880"/>
-                <a:gridCol w="4480560"/>
-                <a:gridCol w="1737360"/>
-                <a:gridCol w="2468880"/>
+                <a:gridCol w="2743200"/>
+                <a:gridCol w="5029200"/>
+                <a:gridCol w="3383280"/>
               </a:tblGrid>
-              <a:tr h="587828">
+              <a:tr h="561702">
                 <a:tc>
                   <a:txBody>
                     <a:bodyPr wrap="square"/>
@@ -5277,13 +4894,13 @@
                     <a:p>
                       <a:pPr algn="l"/>
                       <a:r>
-                        <a:rPr sz="1100" b="1" i="0">
+                        <a:rPr sz="1150" b="1" i="0">
                           <a:solidFill>
                             <a:srgbClr val="FFFFFF"/>
                           </a:solidFill>
                           <a:latin typeface="Segoe UI"/>
                         </a:rPr>
-                        <a:t>Deliverable</a:t>
+                        <a:t>Focus area</a:t>
                       </a:r>
                     </a:p>
                   </a:txBody>
@@ -5300,13 +4917,13 @@
                     <a:p>
                       <a:pPr algn="l"/>
                       <a:r>
-                        <a:rPr sz="1100" b="1" i="0">
+                        <a:rPr sz="1150" b="1" i="0">
                           <a:solidFill>
                             <a:srgbClr val="FFFFFF"/>
                           </a:solidFill>
                           <a:latin typeface="Segoe UI"/>
                         </a:rPr>
-                        <a:t>What it adds</a:t>
+                        <a:t>What to do next</a:t>
                       </a:r>
                     </a:p>
                   </a:txBody>
@@ -5321,15 +4938,15 @@
                     <a:bodyPr wrap="square"/>
                     <a:lstStyle/>
                     <a:p>
-                      <a:pPr algn="ctr"/>
-                      <a:r>
-                        <a:rPr sz="1100" b="1" i="0">
+                      <a:pPr algn="l"/>
+                      <a:r>
+                        <a:rPr sz="1150" b="1" i="0">
                           <a:solidFill>
                             <a:srgbClr val="FFFFFF"/>
                           </a:solidFill>
                           <a:latin typeface="Segoe UI"/>
                         </a:rPr>
-                        <a:t>Due (draft)</a:t>
+                        <a:t>Current stories</a:t>
                       </a:r>
                     </a:p>
                   </a:txBody>
@@ -5339,6 +4956,8 @@
                     </a:solidFill>
                   </a:tcPr>
                 </a:tc>
+              </a:tr>
+              <a:tr h="561702">
                 <a:tc>
                   <a:txBody>
                     <a:bodyPr wrap="square"/>
@@ -5346,24 +4965,70 @@
                     <a:p>
                       <a:pPr algn="l"/>
                       <a:r>
-                        <a:rPr sz="1100" b="1" i="0">
-                          <a:solidFill>
-                            <a:srgbClr val="FFFFFF"/>
-                          </a:solidFill>
-                          <a:latin typeface="Segoe UI"/>
-                        </a:rPr>
-                        <a:t>Where it stands today</a:t>
-                      </a:r>
-                    </a:p>
-                  </a:txBody>
-                  <a:tcPr>
-                    <a:solidFill>
-                      <a:srgbClr val="1F3A5F"/>
+                        <a:rPr sz="1050" b="1" i="0">
+                          <a:solidFill>
+                            <a:srgbClr val="1F3A5F"/>
+                          </a:solidFill>
+                          <a:latin typeface="Segoe UI"/>
+                        </a:rPr>
+                        <a:t>CMDB Governance</a:t>
+                      </a:r>
+                    </a:p>
+                  </a:txBody>
+                  <a:tcPr>
+                    <a:solidFill>
+                      <a:srgbClr val="F4F6F9"/>
+                    </a:solidFill>
+                  </a:tcPr>
+                </a:tc>
+                <a:tc>
+                  <a:txBody>
+                    <a:bodyPr wrap="square"/>
+                    <a:lstStyle/>
+                    <a:p>
+                      <a:pPr algn="l"/>
+                      <a:r>
+                        <a:rPr sz="950" b="0" i="0">
+                          <a:solidFill>
+                            <a:srgbClr val="2D2D2D"/>
+                          </a:solidFill>
+                          <a:latin typeface="Segoe UI"/>
+                        </a:rPr>
+                        <a:t>Roll Data Certification out to all CI classes + KB; close data dictionary incl. Databases; ESS-02; SOX BA review</a:t>
+                      </a:r>
+                    </a:p>
+                  </a:txBody>
+                  <a:tcPr>
+                    <a:solidFill>
+                      <a:srgbClr val="F4F6F9"/>
+                    </a:solidFill>
+                  </a:tcPr>
+                </a:tc>
+                <a:tc>
+                  <a:txBody>
+                    <a:bodyPr wrap="square"/>
+                    <a:lstStyle/>
+                    <a:p>
+                      <a:pPr algn="l"/>
+                      <a:r>
+                        <a:rPr sz="900" b="0" i="0">
+                          <a:solidFill>
+                            <a:srgbClr val="2D2D2D"/>
+                          </a:solidFill>
+                          <a:latin typeface="Segoe UI"/>
+                        </a:rPr>
+                        <a:t>Data Cert 1247179 / 1402727 / 1402958  ·  ESS-02 spike 1420244  ·  SOX 1438967 / 1455827</a:t>
+                      </a:r>
+                    </a:p>
+                  </a:txBody>
+                  <a:tcPr>
+                    <a:solidFill>
+                      <a:srgbClr val="F4F6F9"/>
                     </a:solidFill>
                   </a:tcPr>
                 </a:tc>
               </a:tr>
-              <a:tr h="587828">
+              <a:tr h="561702">
                 <a:tc>
                   <a:txBody>
                     <a:bodyPr wrap="square"/>
@@ -5377,6 +5042,219 @@
                           </a:solidFill>
                           <a:latin typeface="Segoe UI"/>
                         </a:rPr>
+                        <a:t>CI Coverage - Computers</a:t>
+                      </a:r>
+                    </a:p>
+                  </a:txBody>
+                  <a:tcPr>
+                    <a:solidFill>
+                      <a:srgbClr val="FFFFFF"/>
+                    </a:solidFill>
+                  </a:tcPr>
+                </a:tc>
+                <a:tc>
+                  <a:txBody>
+                    <a:bodyPr wrap="square"/>
+                    <a:lstStyle/>
+                    <a:p>
+                      <a:pPr algn="l"/>
+                      <a:r>
+                        <a:rPr sz="950" b="0" i="0">
+                          <a:solidFill>
+                            <a:srgbClr val="2D2D2D"/>
+                          </a:solidFill>
+                          <a:latin typeface="Segoe UI"/>
+                        </a:rPr>
+                        <a:t>Land SCCM/Discovery precedence + bulk life-cycle; stand up the 90% coverage measurement</a:t>
+                      </a:r>
+                    </a:p>
+                  </a:txBody>
+                  <a:tcPr>
+                    <a:solidFill>
+                      <a:srgbClr val="FFFFFF"/>
+                    </a:solidFill>
+                  </a:tcPr>
+                </a:tc>
+                <a:tc>
+                  <a:txBody>
+                    <a:bodyPr wrap="square"/>
+                    <a:lstStyle/>
+                    <a:p>
+                      <a:pPr algn="l"/>
+                      <a:r>
+                        <a:rPr sz="900" b="0" i="0">
+                          <a:solidFill>
+                            <a:srgbClr val="2D2D2D"/>
+                          </a:solidFill>
+                          <a:latin typeface="Segoe UI"/>
+                        </a:rPr>
+                        <a:t>SCCM Computer 1348712 / 16 / 17 / 15  ·  Computer Class 1354794</a:t>
+                      </a:r>
+                    </a:p>
+                  </a:txBody>
+                  <a:tcPr>
+                    <a:solidFill>
+                      <a:srgbClr val="FFFFFF"/>
+                    </a:solidFill>
+                  </a:tcPr>
+                </a:tc>
+              </a:tr>
+              <a:tr h="561702">
+                <a:tc>
+                  <a:txBody>
+                    <a:bodyPr wrap="square"/>
+                    <a:lstStyle/>
+                    <a:p>
+                      <a:pPr algn="l"/>
+                      <a:r>
+                        <a:rPr sz="1050" b="1" i="0">
+                          <a:solidFill>
+                            <a:srgbClr val="1F3A5F"/>
+                          </a:solidFill>
+                          <a:latin typeface="Segoe UI"/>
+                        </a:rPr>
+                        <a:t>CI Coverage - Servers</a:t>
+                      </a:r>
+                    </a:p>
+                  </a:txBody>
+                  <a:tcPr>
+                    <a:solidFill>
+                      <a:srgbClr val="F4F6F9"/>
+                    </a:solidFill>
+                  </a:tcPr>
+                </a:tc>
+                <a:tc>
+                  <a:txBody>
+                    <a:bodyPr wrap="square"/>
+                    <a:lstStyle/>
+                    <a:p>
+                      <a:pPr algn="l"/>
+                      <a:r>
+                        <a:rPr sz="950" b="0" i="0">
+                          <a:solidFill>
+                            <a:srgbClr val="2D2D2D"/>
+                          </a:solidFill>
+                          <a:latin typeface="Segoe UI"/>
+                        </a:rPr>
+                        <a:t>Land server precedence; enhanced DB Discovery (MS-SQL / Oracle); stand up 90% measurement</a:t>
+                      </a:r>
+                    </a:p>
+                  </a:txBody>
+                  <a:tcPr>
+                    <a:solidFill>
+                      <a:srgbClr val="F4F6F9"/>
+                    </a:solidFill>
+                  </a:tcPr>
+                </a:tc>
+                <a:tc>
+                  <a:txBody>
+                    <a:bodyPr wrap="square"/>
+                    <a:lstStyle/>
+                    <a:p>
+                      <a:pPr algn="l"/>
+                      <a:r>
+                        <a:rPr sz="900" b="0" i="0">
+                          <a:solidFill>
+                            <a:srgbClr val="2D2D2D"/>
+                          </a:solidFill>
+                          <a:latin typeface="Segoe UI"/>
+                        </a:rPr>
+                        <a:t>SCCM Server 1356826 (1403759 / 60 / 62 / 63)  ·  creds 1444864</a:t>
+                      </a:r>
+                    </a:p>
+                  </a:txBody>
+                  <a:tcPr>
+                    <a:solidFill>
+                      <a:srgbClr val="F4F6F9"/>
+                    </a:solidFill>
+                  </a:tcPr>
+                </a:tc>
+              </a:tr>
+              <a:tr h="561702">
+                <a:tc>
+                  <a:txBody>
+                    <a:bodyPr wrap="square"/>
+                    <a:lstStyle/>
+                    <a:p>
+                      <a:pPr algn="l"/>
+                      <a:r>
+                        <a:rPr sz="1050" b="1" i="0">
+                          <a:solidFill>
+                            <a:srgbClr val="1F3A5F"/>
+                          </a:solidFill>
+                          <a:latin typeface="Segoe UI"/>
+                        </a:rPr>
+                        <a:t>Service Mapping</a:t>
+                      </a:r>
+                    </a:p>
+                  </a:txBody>
+                  <a:tcPr>
+                    <a:solidFill>
+                      <a:srgbClr val="FFFFFF"/>
+                    </a:solidFill>
+                  </a:tcPr>
+                </a:tc>
+                <a:tc>
+                  <a:txBody>
+                    <a:bodyPr wrap="square"/>
+                    <a:lstStyle/>
+                    <a:p>
+                      <a:pPr algn="l"/>
+                      <a:r>
+                        <a:rPr sz="950" b="0" i="0">
+                          <a:solidFill>
+                            <a:srgbClr val="2D2D2D"/>
+                          </a:solidFill>
+                          <a:latin typeface="Segoe UI"/>
+                        </a:rPr>
+                        <a:t>Build maps for the 10 priority apps; get app-owner validation; make consumable in SNOW</a:t>
+                      </a:r>
+                    </a:p>
+                  </a:txBody>
+                  <a:tcPr>
+                    <a:solidFill>
+                      <a:srgbClr val="FFFFFF"/>
+                    </a:solidFill>
+                  </a:tcPr>
+                </a:tc>
+                <a:tc>
+                  <a:txBody>
+                    <a:bodyPr wrap="square"/>
+                    <a:lstStyle/>
+                    <a:p>
+                      <a:pPr algn="l"/>
+                      <a:r>
+                        <a:rPr sz="900" b="0" i="0">
+                          <a:solidFill>
+                            <a:srgbClr val="2D2D2D"/>
+                          </a:solidFill>
+                          <a:latin typeface="Segoe UI"/>
+                        </a:rPr>
+                        <a:t>Wave 1355866 / 68 / 71  ·  per-app: WATT, Oceana, SolarWinds PoC 1431652</a:t>
+                      </a:r>
+                    </a:p>
+                  </a:txBody>
+                  <a:tcPr>
+                    <a:solidFill>
+                      <a:srgbClr val="FFFFFF"/>
+                    </a:solidFill>
+                  </a:tcPr>
+                </a:tc>
+              </a:tr>
+              <a:tr h="561702">
+                <a:tc>
+                  <a:txBody>
+                    <a:bodyPr wrap="square"/>
+                    <a:lstStyle/>
+                    <a:p>
+                      <a:pPr algn="l"/>
+                      <a:r>
+                        <a:rPr sz="1050" b="1" i="0">
+                          <a:solidFill>
+                            <a:srgbClr val="1F3A5F"/>
+                          </a:solidFill>
+                          <a:latin typeface="Segoe UI"/>
+                        </a:rPr>
                         <a:t>Network Gear Discovery</a:t>
                       </a:r>
                     </a:p>
@@ -5400,7 +5278,7 @@
                           </a:solidFill>
                           <a:latin typeface="Segoe UI"/>
                         </a:rPr>
-                        <a:t>Discover &amp; populate network devices in CMDB (excl. OT); 90% coverage, business-owner validated</a:t>
+                        <a:t>Fix creds / SNMP (excl. OT); activate discovery schedules; populate mandatory attributes</a:t>
                       </a:r>
                     </a:p>
                   </a:txBody>
@@ -5415,15 +5293,15 @@
                     <a:bodyPr wrap="square"/>
                     <a:lstStyle/>
                     <a:p>
-                      <a:pPr algn="ctr"/>
-                      <a:r>
-                        <a:rPr sz="950" b="1" i="0">
-                          <a:solidFill>
-                            <a:srgbClr val="2E6DB4"/>
-                          </a:solidFill>
-                          <a:latin typeface="Segoe UI"/>
-                        </a:rPr>
-                        <a:t>Aug 31 -&gt; Oct 30</a:t>
+                      <a:pPr algn="l"/>
+                      <a:r>
+                        <a:rPr sz="900" b="0" i="0">
+                          <a:solidFill>
+                            <a:srgbClr val="2D2D2D"/>
+                          </a:solidFill>
+                          <a:latin typeface="Segoe UI"/>
+                        </a:rPr>
+                        <a:t>1356646  ·  1402572 / 574 / 575  ·  creds 1444864 / 1459721  ·  dep 1383487</a:t>
                       </a:r>
                     </a:p>
                   </a:txBody>
@@ -5433,6 +5311,8 @@
                     </a:solidFill>
                   </a:tcPr>
                 </a:tc>
+              </a:tr>
+              <a:tr h="561708">
                 <a:tc>
                   <a:txBody>
                     <a:bodyPr wrap="square"/>
@@ -5440,483 +5320,59 @@
                     <a:p>
                       <a:pPr algn="l"/>
                       <a:r>
+                        <a:rPr sz="1050" b="1" i="0">
+                          <a:solidFill>
+                            <a:srgbClr val="1F3A5F"/>
+                          </a:solidFill>
+                          <a:latin typeface="Segoe UI"/>
+                        </a:rPr>
+                        <a:t>Qualys Integration</a:t>
+                      </a:r>
+                    </a:p>
+                  </a:txBody>
+                  <a:tcPr>
+                    <a:solidFill>
+                      <a:srgbClr val="FFFFFF"/>
+                    </a:solidFill>
+                  </a:tcPr>
+                </a:tc>
+                <a:tc>
+                  <a:txBody>
+                    <a:bodyPr wrap="square"/>
+                    <a:lstStyle/>
+                    <a:p>
+                      <a:pPr algn="l"/>
+                      <a:r>
+                        <a:rPr sz="950" b="0" i="0">
+                          <a:solidFill>
+                            <a:srgbClr val="2D2D2D"/>
+                          </a:solidFill>
+                          <a:latin typeface="Segoe UI"/>
+                        </a:rPr>
+                        <a:t>Clear the plugin blocker; configure + test the one-way feed; deploy to PROD</a:t>
+                      </a:r>
+                    </a:p>
+                  </a:txBody>
+                  <a:tcPr>
+                    <a:solidFill>
+                      <a:srgbClr val="FFFFFF"/>
+                    </a:solidFill>
+                  </a:tcPr>
+                </a:tc>
+                <a:tc>
+                  <a:txBody>
+                    <a:bodyPr wrap="square"/>
+                    <a:lstStyle/>
+                    <a:p>
+                      <a:pPr algn="l"/>
+                      <a:r>
                         <a:rPr sz="900" b="0" i="0">
                           <a:solidFill>
                             <a:srgbClr val="2D2D2D"/>
                           </a:solidFill>
                           <a:latin typeface="Segoe UI"/>
                         </a:rPr>
-                        <a:t>Scaffolding from PI-2 Obj 1 (feat 1356646; stories 1402572/574/575) - no acceptance met yet</a:t>
-                      </a:r>
-                    </a:p>
-                  </a:txBody>
-                  <a:tcPr>
-                    <a:solidFill>
-                      <a:srgbClr val="F4F6F9"/>
-                    </a:solidFill>
-                  </a:tcPr>
-                </a:tc>
-              </a:tr>
-              <a:tr h="587828">
-                <a:tc>
-                  <a:txBody>
-                    <a:bodyPr wrap="square"/>
-                    <a:lstStyle/>
-                    <a:p>
-                      <a:pPr algn="l"/>
-                      <a:r>
-                        <a:rPr sz="1050" b="1" i="0">
-                          <a:solidFill>
-                            <a:srgbClr val="1F3A5F"/>
-                          </a:solidFill>
-                          <a:latin typeface="Segoe UI"/>
-                        </a:rPr>
-                        <a:t>Service Mapping</a:t>
-                      </a:r>
-                    </a:p>
-                  </a:txBody>
-                  <a:tcPr>
-                    <a:solidFill>
-                      <a:srgbClr val="FFFFFF"/>
-                    </a:solidFill>
-                  </a:tcPr>
-                </a:tc>
-                <a:tc>
-                  <a:txBody>
-                    <a:bodyPr wrap="square"/>
-                    <a:lstStyle/>
-                    <a:p>
-                      <a:pPr algn="l"/>
-                      <a:r>
-                        <a:rPr sz="950" b="0" i="0">
-                          <a:solidFill>
-                            <a:srgbClr val="2D2D2D"/>
-                          </a:solidFill>
-                          <a:latin typeface="Segoe UI"/>
-                        </a:rPr>
-                        <a:t>End-to-end maps for 10 priority business apps down to infra CIs; consumable in ServiceNow</a:t>
-                      </a:r>
-                    </a:p>
-                  </a:txBody>
-                  <a:tcPr>
-                    <a:solidFill>
-                      <a:srgbClr val="FFFFFF"/>
-                    </a:solidFill>
-                  </a:tcPr>
-                </a:tc>
-                <a:tc>
-                  <a:txBody>
-                    <a:bodyPr wrap="square"/>
-                    <a:lstStyle/>
-                    <a:p>
-                      <a:pPr algn="ctr"/>
-                      <a:r>
-                        <a:rPr sz="950" b="1" i="0">
-                          <a:solidFill>
-                            <a:srgbClr val="2E6DB4"/>
-                          </a:solidFill>
-                          <a:latin typeface="Segoe UI"/>
-                        </a:rPr>
-                        <a:t>Aug 31 -&gt; Oct 30</a:t>
-                      </a:r>
-                    </a:p>
-                  </a:txBody>
-                  <a:tcPr>
-                    <a:solidFill>
-                      <a:srgbClr val="FFFFFF"/>
-                    </a:solidFill>
-                  </a:tcPr>
-                </a:tc>
-                <a:tc>
-                  <a:txBody>
-                    <a:bodyPr wrap="square"/>
-                    <a:lstStyle/>
-                    <a:p>
-                      <a:pPr algn="l"/>
-                      <a:r>
-                        <a:rPr sz="900" b="0" i="0">
-                          <a:solidFill>
-                            <a:srgbClr val="2D2D2D"/>
-                          </a:solidFill>
-                          <a:latin typeface="Segoe UI"/>
-                        </a:rPr>
-                        <a:t>Wave features 1355866/68/71 + per-app stories (WATT, Oceana, SolarWinds PoC 1431652); 10-app target is new</a:t>
-                      </a:r>
-                    </a:p>
-                  </a:txBody>
-                  <a:tcPr>
-                    <a:solidFill>
-                      <a:srgbClr val="FFFFFF"/>
-                    </a:solidFill>
-                  </a:tcPr>
-                </a:tc>
-              </a:tr>
-              <a:tr h="587828">
-                <a:tc>
-                  <a:txBody>
-                    <a:bodyPr wrap="square"/>
-                    <a:lstStyle/>
-                    <a:p>
-                      <a:pPr algn="l"/>
-                      <a:r>
-                        <a:rPr sz="1050" b="1" i="0">
-                          <a:solidFill>
-                            <a:srgbClr val="1F3A5F"/>
-                          </a:solidFill>
-                          <a:latin typeface="Segoe UI"/>
-                        </a:rPr>
-                        <a:t>Legacy Platform Rationalization</a:t>
-                      </a:r>
-                    </a:p>
-                  </a:txBody>
-                  <a:tcPr>
-                    <a:solidFill>
-                      <a:srgbClr val="F4F6F9"/>
-                    </a:solidFill>
-                  </a:tcPr>
-                </a:tc>
-                <a:tc>
-                  <a:txBody>
-                    <a:bodyPr wrap="square"/>
-                    <a:lstStyle/>
-                    <a:p>
-                      <a:pPr algn="l"/>
-                      <a:r>
-                        <a:rPr sz="950" b="0" i="0">
-                          <a:solidFill>
-                            <a:srgbClr val="2D2D2D"/>
-                          </a:solidFill>
-                          <a:latin typeface="Segoe UI"/>
-                        </a:rPr>
-                        <a:t>Analysis + migration plan: iTeam -&gt; DISCO / Cherwell -&gt; AIM (Cherwell/AIM 'if applicable')</a:t>
-                      </a:r>
-                    </a:p>
-                  </a:txBody>
-                  <a:tcPr>
-                    <a:solidFill>
-                      <a:srgbClr val="F4F6F9"/>
-                    </a:solidFill>
-                  </a:tcPr>
-                </a:tc>
-                <a:tc>
-                  <a:txBody>
-                    <a:bodyPr wrap="square"/>
-                    <a:lstStyle/>
-                    <a:p>
-                      <a:pPr algn="ctr"/>
-                      <a:r>
-                        <a:rPr sz="950" b="1" i="0">
-                          <a:solidFill>
-                            <a:srgbClr val="2E6DB4"/>
-                          </a:solidFill>
-                          <a:latin typeface="Segoe UI"/>
-                        </a:rPr>
-                        <a:t>Aug 31 -&gt; Oct 30</a:t>
-                      </a:r>
-                    </a:p>
-                  </a:txBody>
-                  <a:tcPr>
-                    <a:solidFill>
-                      <a:srgbClr val="F4F6F9"/>
-                    </a:solidFill>
-                  </a:tcPr>
-                </a:tc>
-                <a:tc>
-                  <a:txBody>
-                    <a:bodyPr wrap="square"/>
-                    <a:lstStyle/>
-                    <a:p>
-                      <a:pPr algn="l"/>
-                      <a:r>
-                        <a:rPr sz="900" b="0" i="0">
-                          <a:solidFill>
-                            <a:srgbClr val="2D2D2D"/>
-                          </a:solidFill>
-                          <a:latin typeface="Segoe UI"/>
-                        </a:rPr>
-                        <a:t>Only iTeam import 1452028 today - no analysis/plan stories yet</a:t>
-                      </a:r>
-                    </a:p>
-                  </a:txBody>
-                  <a:tcPr>
-                    <a:solidFill>
-                      <a:srgbClr val="F4F6F9"/>
-                    </a:solidFill>
-                  </a:tcPr>
-                </a:tc>
-              </a:tr>
-              <a:tr h="587828">
-                <a:tc>
-                  <a:txBody>
-                    <a:bodyPr wrap="square"/>
-                    <a:lstStyle/>
-                    <a:p>
-                      <a:pPr algn="l"/>
-                      <a:r>
-                        <a:rPr sz="1050" b="1" i="0">
-                          <a:solidFill>
-                            <a:srgbClr val="1F3A5F"/>
-                          </a:solidFill>
-                          <a:latin typeface="Segoe UI"/>
-                        </a:rPr>
-                        <a:t>ITSM Product Management</a:t>
-                      </a:r>
-                    </a:p>
-                  </a:txBody>
-                  <a:tcPr>
-                    <a:solidFill>
-                      <a:srgbClr val="FFFFFF"/>
-                    </a:solidFill>
-                  </a:tcPr>
-                </a:tc>
-                <a:tc>
-                  <a:txBody>
-                    <a:bodyPr wrap="square"/>
-                    <a:lstStyle/>
-                    <a:p>
-                      <a:pPr algn="l"/>
-                      <a:r>
-                        <a:rPr sz="950" b="0" i="0">
-                          <a:solidFill>
-                            <a:srgbClr val="2D2D2D"/>
-                          </a:solidFill>
-                          <a:latin typeface="Segoe UI"/>
-                        </a:rPr>
-                        <a:t>New ITSM Product Owner role + ITSM workstream (outside CMDB)</a:t>
-                      </a:r>
-                    </a:p>
-                  </a:txBody>
-                  <a:tcPr>
-                    <a:solidFill>
-                      <a:srgbClr val="FFFFFF"/>
-                    </a:solidFill>
-                  </a:tcPr>
-                </a:tc>
-                <a:tc>
-                  <a:txBody>
-                    <a:bodyPr wrap="square"/>
-                    <a:lstStyle/>
-                    <a:p>
-                      <a:pPr algn="ctr"/>
-                      <a:r>
-                        <a:rPr sz="950" b="1" i="0">
-                          <a:solidFill>
-                            <a:srgbClr val="2E6DB4"/>
-                          </a:solidFill>
-                          <a:latin typeface="Segoe UI"/>
-                        </a:rPr>
-                        <a:t>Monthly Jul 31 -&gt; Oct 30</a:t>
-                      </a:r>
-                    </a:p>
-                  </a:txBody>
-                  <a:tcPr>
-                    <a:solidFill>
-                      <a:srgbClr val="FFFFFF"/>
-                    </a:solidFill>
-                  </a:tcPr>
-                </a:tc>
-                <a:tc>
-                  <a:txBody>
-                    <a:bodyPr wrap="square"/>
-                    <a:lstStyle/>
-                    <a:p>
-                      <a:pPr algn="l"/>
-                      <a:r>
-                        <a:rPr sz="900" b="0" i="0">
-                          <a:solidFill>
-                            <a:srgbClr val="2D2D2D"/>
-                          </a:solidFill>
-                          <a:latin typeface="Segoe UI"/>
-                        </a:rPr>
-                        <a:t>No stories; owner TBD</a:t>
-                      </a:r>
-                    </a:p>
-                  </a:txBody>
-                  <a:tcPr>
-                    <a:solidFill>
-                      <a:srgbClr val="FFFFFF"/>
-                    </a:solidFill>
-                  </a:tcPr>
-                </a:tc>
-              </a:tr>
-              <a:tr h="587828">
-                <a:tc>
-                  <a:txBody>
-                    <a:bodyPr wrap="square"/>
-                    <a:lstStyle/>
-                    <a:p>
-                      <a:pPr algn="l"/>
-                      <a:r>
-                        <a:rPr sz="1050" b="1" i="0">
-                          <a:solidFill>
-                            <a:srgbClr val="1F3A5F"/>
-                          </a:solidFill>
-                          <a:latin typeface="Segoe UI"/>
-                        </a:rPr>
-                        <a:t>ATF Strategy</a:t>
-                      </a:r>
-                    </a:p>
-                  </a:txBody>
-                  <a:tcPr>
-                    <a:solidFill>
-                      <a:srgbClr val="F4F6F9"/>
-                    </a:solidFill>
-                  </a:tcPr>
-                </a:tc>
-                <a:tc>
-                  <a:txBody>
-                    <a:bodyPr wrap="square"/>
-                    <a:lstStyle/>
-                    <a:p>
-                      <a:pPr algn="l"/>
-                      <a:r>
-                        <a:rPr sz="950" b="0" i="0">
-                          <a:solidFill>
-                            <a:srgbClr val="2D2D2D"/>
-                          </a:solidFill>
-                          <a:latin typeface="Segoe UI"/>
-                        </a:rPr>
-                        <a:t>Plan for Automated Test Framework rollout across in-prod ServiceNow capabilities</a:t>
-                      </a:r>
-                    </a:p>
-                  </a:txBody>
-                  <a:tcPr>
-                    <a:solidFill>
-                      <a:srgbClr val="F4F6F9"/>
-                    </a:solidFill>
-                  </a:tcPr>
-                </a:tc>
-                <a:tc>
-                  <a:txBody>
-                    <a:bodyPr wrap="square"/>
-                    <a:lstStyle/>
-                    <a:p>
-                      <a:pPr algn="ctr"/>
-                      <a:r>
-                        <a:rPr sz="950" b="1" i="0">
-                          <a:solidFill>
-                            <a:srgbClr val="2E6DB4"/>
-                          </a:solidFill>
-                          <a:latin typeface="Segoe UI"/>
-                        </a:rPr>
-                        <a:t>Oct 31</a:t>
-                      </a:r>
-                    </a:p>
-                  </a:txBody>
-                  <a:tcPr>
-                    <a:solidFill>
-                      <a:srgbClr val="F4F6F9"/>
-                    </a:solidFill>
-                  </a:tcPr>
-                </a:tc>
-                <a:tc>
-                  <a:txBody>
-                    <a:bodyPr wrap="square"/>
-                    <a:lstStyle/>
-                    <a:p>
-                      <a:pPr algn="l"/>
-                      <a:r>
-                        <a:rPr sz="900" b="0" i="0">
-                          <a:solidFill>
-                            <a:srgbClr val="2D2D2D"/>
-                          </a:solidFill>
-                          <a:latin typeface="Segoe UI"/>
-                        </a:rPr>
-                        <a:t>Greenfield - no stories</a:t>
-                      </a:r>
-                    </a:p>
-                  </a:txBody>
-                  <a:tcPr>
-                    <a:solidFill>
-                      <a:srgbClr val="F4F6F9"/>
-                    </a:solidFill>
-                  </a:tcPr>
-                </a:tc>
-              </a:tr>
-              <a:tr h="587832">
-                <a:tc>
-                  <a:txBody>
-                    <a:bodyPr wrap="square"/>
-                    <a:lstStyle/>
-                    <a:p>
-                      <a:pPr algn="l"/>
-                      <a:r>
-                        <a:rPr sz="1050" b="1" i="0">
-                          <a:solidFill>
-                            <a:srgbClr val="1F3A5F"/>
-                          </a:solidFill>
-                          <a:latin typeface="Segoe UI"/>
-                        </a:rPr>
-                        <a:t>Platform Support</a:t>
-                      </a:r>
-                    </a:p>
-                  </a:txBody>
-                  <a:tcPr>
-                    <a:solidFill>
-                      <a:srgbClr val="FFFFFF"/>
-                    </a:solidFill>
-                  </a:tcPr>
-                </a:tc>
-                <a:tc>
-                  <a:txBody>
-                    <a:bodyPr wrap="square"/>
-                    <a:lstStyle/>
-                    <a:p>
-                      <a:pPr algn="l"/>
-                      <a:r>
-                        <a:rPr sz="950" b="0" i="0">
-                          <a:solidFill>
-                            <a:srgbClr val="2D2D2D"/>
-                          </a:solidFill>
-                          <a:latin typeface="Segoe UI"/>
-                        </a:rPr>
-                        <a:t>Dedicated BAU / DevOps team; ~40 hrs of stories per week per member</a:t>
-                      </a:r>
-                    </a:p>
-                  </a:txBody>
-                  <a:tcPr>
-                    <a:solidFill>
-                      <a:srgbClr val="FFFFFF"/>
-                    </a:solidFill>
-                  </a:tcPr>
-                </a:tc>
-                <a:tc>
-                  <a:txBody>
-                    <a:bodyPr wrap="square"/>
-                    <a:lstStyle/>
-                    <a:p>
-                      <a:pPr algn="ctr"/>
-                      <a:r>
-                        <a:rPr sz="950" b="1" i="0">
-                          <a:solidFill>
-                            <a:srgbClr val="2E6DB4"/>
-                          </a:solidFill>
-                          <a:latin typeface="Segoe UI"/>
-                        </a:rPr>
-                        <a:t>Monthly Aug 31 -&gt; Oct 30</a:t>
-                      </a:r>
-                    </a:p>
-                  </a:txBody>
-                  <a:tcPr>
-                    <a:solidFill>
-                      <a:srgbClr val="FFFFFF"/>
-                    </a:solidFill>
-                  </a:tcPr>
-                </a:tc>
-                <a:tc>
-                  <a:txBody>
-                    <a:bodyPr wrap="square"/>
-                    <a:lstStyle/>
-                    <a:p>
-                      <a:pPr algn="l"/>
-                      <a:r>
-                        <a:rPr sz="900" b="0" i="0">
-                          <a:solidFill>
-                            <a:srgbClr val="2D2D2D"/>
-                          </a:solidFill>
-                          <a:latin typeface="Segoe UI"/>
-                        </a:rPr>
-                        <a:t>No stories; team size TBD</a:t>
+                        <a:t>1428703 / 1428704 (blocked)  ·  data-scope spike 1234585</a:t>
                       </a:r>
                     </a:p>
                   </a:txBody>
@@ -5939,18 +5395,18 @@
         </p:nvSpPr>
         <p:spPr>
           <a:xfrm>
-            <a:off x="502920" y="5440680"/>
-            <a:ext cx="11155680" cy="822960"/>
+            <a:off x="502920" y="5394960"/>
+            <a:ext cx="11155680" cy="777240"/>
           </a:xfrm>
           <a:prstGeom prst="rect">
             <a:avLst/>
           </a:prstGeom>
           <a:solidFill>
-            <a:srgbClr val="FBEEDB"/>
+            <a:srgbClr val="E9F0F8"/>
           </a:solidFill>
           <a:ln w="9525">
             <a:solidFill>
-              <a:srgbClr val="E08A00"/>
+              <a:srgbClr val="2E6DB4"/>
             </a:solidFill>
           </a:ln>
           <a:effectLst/>
@@ -5985,8 +5441,8 @@
         </p:nvSpPr>
         <p:spPr>
           <a:xfrm>
-            <a:off x="658368" y="5486400"/>
-            <a:ext cx="10881360" cy="749808"/>
+            <a:off x="658368" y="5449824"/>
+            <a:ext cx="10881360" cy="694944"/>
           </a:xfrm>
           <a:prstGeom prst="rect">
             <a:avLst/>
@@ -6003,11 +5459,11 @@
             <a:r>
               <a:rPr sz="1000" b="0" i="0">
                 <a:solidFill>
-                  <a:srgbClr val="5A4A2A"/>
+                  <a:srgbClr val="1F3A5F"/>
                 </a:solidFill>
                 <a:latin typeface="Segoe UI"/>
               </a:rPr>
-              <a:t>Net-new is not free:  ITSM PM and Platform Support are ongoing-capacity commitments (~40 hrs/wk per person), not finite deliverables - they need people, not just backlog.  #1 and #2 have story scaffolding from PI-2 objectives but no contractual acceptance met yet.</a:t>
+              <a:t>These are the threads already in motion - the same work you're on now.  Legacy Platform Rationalization and ATF Strategy are greenfield (no stories yet) - scoped at PI-3 planning.</a:t>
             </a:r>
           </a:p>
         </p:txBody>
@@ -6148,7 +5604,7 @@
                 </a:solidFill>
                 <a:latin typeface="Segoe UI"/>
               </a:rPr>
-              <a:t>Continuing From CO5 - Re-Baselined &amp; Escalated</a:t>
+              <a:t>Timeline - Where It Lands</a:t>
             </a:r>
           </a:p>
         </p:txBody>
@@ -6183,7 +5639,7 @@
                 </a:solidFill>
                 <a:latin typeface="Segoe UI"/>
               </a:rPr>
-              <a:t>These continue work we're already doing, with new (later) dates</a:t>
+              <a:t>Tail of PI-2 + all of PI-3  ·  staged monthly acceptance</a:t>
             </a:r>
           </a:p>
         </p:txBody>
@@ -6218,614 +5674,30 @@
                 </a:solidFill>
                 <a:latin typeface="Segoe UI"/>
               </a:rPr>
-              <a:t>PPL CMDB-CSDM  |  CO6 Deliverables (DRAFT)  |  Team FYI  -  Jul 10, 2026</a:t>
-            </a:r>
-          </a:p>
-        </p:txBody>
-      </p:sp>
-      <p:graphicFrame>
-        <p:nvGraphicFramePr>
-          <p:cNvPr id="7" name="Table 6"/>
-          <p:cNvGraphicFramePr>
-            <a:graphicFrameLocks noGrp="1"/>
-          </p:cNvGraphicFramePr>
-          <p:nvPr/>
-        </p:nvGraphicFramePr>
-        <p:xfrm>
-          <a:off x="502920" y="1188720"/>
-          <a:ext cx="11155680" cy="3840480"/>
-        </p:xfrm>
-        <a:graphic>
-          <a:graphicData uri="http://schemas.openxmlformats.org/drawingml/2006/table">
-            <a:tbl>
-              <a:tblPr firstRow="1" bandRow="1">
-                <a:tableStyleId>{5C22544A-7EE6-4342-B048-85BDC9FD1C3A}</a:tableStyleId>
-              </a:tblPr>
-              <a:tblGrid>
-                <a:gridCol w="2194560"/>
-                <a:gridCol w="4480560"/>
-                <a:gridCol w="1463040"/>
-                <a:gridCol w="3017520"/>
-              </a:tblGrid>
-              <a:tr h="768096">
-                <a:tc>
-                  <a:txBody>
-                    <a:bodyPr wrap="square"/>
-                    <a:lstStyle/>
-                    <a:p>
-                      <a:pPr algn="l"/>
-                      <a:r>
-                        <a:rPr sz="1100" b="1" i="0">
-                          <a:solidFill>
-                            <a:srgbClr val="FFFFFF"/>
-                          </a:solidFill>
-                          <a:latin typeface="Segoe UI"/>
-                        </a:rPr>
-                        <a:t>Workstream</a:t>
-                      </a:r>
-                    </a:p>
-                  </a:txBody>
-                  <a:tcPr>
-                    <a:solidFill>
-                      <a:srgbClr val="1F3A5F"/>
-                    </a:solidFill>
-                  </a:tcPr>
-                </a:tc>
-                <a:tc>
-                  <a:txBody>
-                    <a:bodyPr wrap="square"/>
-                    <a:lstStyle/>
-                    <a:p>
-                      <a:pPr algn="l"/>
-                      <a:r>
-                        <a:rPr sz="1100" b="1" i="0">
-                          <a:solidFill>
-                            <a:srgbClr val="FFFFFF"/>
-                          </a:solidFill>
-                          <a:latin typeface="Segoe UI"/>
-                        </a:rPr>
-                        <a:t>What changes in CO6</a:t>
-                      </a:r>
-                    </a:p>
-                  </a:txBody>
-                  <a:tcPr>
-                    <a:solidFill>
-                      <a:srgbClr val="1F3A5F"/>
-                    </a:solidFill>
-                  </a:tcPr>
-                </a:tc>
-                <a:tc>
-                  <a:txBody>
-                    <a:bodyPr wrap="square"/>
-                    <a:lstStyle/>
-                    <a:p>
-                      <a:pPr algn="ctr"/>
-                      <a:r>
-                        <a:rPr sz="1100" b="1" i="0">
-                          <a:solidFill>
-                            <a:srgbClr val="FFFFFF"/>
-                          </a:solidFill>
-                          <a:latin typeface="Segoe UI"/>
-                        </a:rPr>
-                        <a:t>New date</a:t>
-                      </a:r>
-                    </a:p>
-                  </a:txBody>
-                  <a:tcPr>
-                    <a:solidFill>
-                      <a:srgbClr val="1F3A5F"/>
-                    </a:solidFill>
-                  </a:tcPr>
-                </a:tc>
-                <a:tc>
-                  <a:txBody>
-                    <a:bodyPr wrap="square"/>
-                    <a:lstStyle/>
-                    <a:p>
-                      <a:pPr algn="l"/>
-                      <a:r>
-                        <a:rPr sz="1100" b="1" i="0">
-                          <a:solidFill>
-                            <a:srgbClr val="FFFFFF"/>
-                          </a:solidFill>
-                          <a:latin typeface="Segoe UI"/>
-                        </a:rPr>
-                        <a:t>Current stories</a:t>
-                      </a:r>
-                    </a:p>
-                  </a:txBody>
-                  <a:tcPr>
-                    <a:solidFill>
-                      <a:srgbClr val="1F3A5F"/>
-                    </a:solidFill>
-                  </a:tcPr>
-                </a:tc>
-              </a:tr>
-              <a:tr h="768096">
-                <a:tc>
-                  <a:txBody>
-                    <a:bodyPr wrap="square"/>
-                    <a:lstStyle/>
-                    <a:p>
-                      <a:pPr algn="l"/>
-                      <a:r>
-                        <a:rPr sz="1000" b="1" i="0">
-                          <a:solidFill>
-                            <a:srgbClr val="1F3A5F"/>
-                          </a:solidFill>
-                          <a:latin typeface="Segoe UI"/>
-                        </a:rPr>
-                        <a:t>CMDB Governance</a:t>
-                      </a:r>
-                    </a:p>
-                    <a:p>
-                      <a:pPr algn="l"/>
-                      <a:r>
-                        <a:rPr sz="1000" b="1" i="0">
-                          <a:solidFill>
-                            <a:srgbClr val="1F3A5F"/>
-                          </a:solidFill>
-                          <a:latin typeface="Segoe UI"/>
-                        </a:rPr>
-                        <a:t>(was CO5 D1)</a:t>
-                      </a:r>
-                    </a:p>
-                  </a:txBody>
-                  <a:tcPr>
-                    <a:solidFill>
-                      <a:srgbClr val="F4F6F9"/>
-                    </a:solidFill>
-                  </a:tcPr>
-                </a:tc>
-                <a:tc>
-                  <a:txBody>
-                    <a:bodyPr wrap="square"/>
-                    <a:lstStyle/>
-                    <a:p>
-                      <a:pPr algn="l"/>
-                      <a:r>
-                        <a:rPr sz="950" b="0" i="0">
-                          <a:solidFill>
-                            <a:srgbClr val="2D2D2D"/>
-                          </a:solidFill>
-                          <a:latin typeface="Segoe UI"/>
-                        </a:rPr>
-                        <a:t>Data dictionary now includes Databases; Data Cert pilot expands from Business-App-only to ALL CI classes + KB; ESS-02; SOX BA review</a:t>
-                      </a:r>
-                    </a:p>
-                  </a:txBody>
-                  <a:tcPr>
-                    <a:solidFill>
-                      <a:srgbClr val="F4F6F9"/>
-                    </a:solidFill>
-                  </a:tcPr>
-                </a:tc>
-                <a:tc>
-                  <a:txBody>
-                    <a:bodyPr wrap="square"/>
-                    <a:lstStyle/>
-                    <a:p>
-                      <a:pPr algn="ctr"/>
-                      <a:r>
-                        <a:rPr sz="950" b="1" i="0">
-                          <a:solidFill>
-                            <a:srgbClr val="2E8B57"/>
-                          </a:solidFill>
-                          <a:latin typeface="Segoe UI"/>
-                        </a:rPr>
-                        <a:t>Jul 31</a:t>
-                      </a:r>
-                    </a:p>
-                    <a:p>
-                      <a:pPr algn="ctr"/>
-                      <a:r>
-                        <a:rPr sz="950" b="1" i="0">
-                          <a:solidFill>
-                            <a:srgbClr val="2E8B57"/>
-                          </a:solidFill>
-                          <a:latin typeface="Segoe UI"/>
-                        </a:rPr>
-                        <a:t>(+1 mo)</a:t>
-                      </a:r>
-                    </a:p>
-                  </a:txBody>
-                  <a:tcPr>
-                    <a:solidFill>
-                      <a:srgbClr val="F4F6F9"/>
-                    </a:solidFill>
-                  </a:tcPr>
-                </a:tc>
-                <a:tc>
-                  <a:txBody>
-                    <a:bodyPr wrap="square"/>
-                    <a:lstStyle/>
-                    <a:p>
-                      <a:pPr algn="l"/>
-                      <a:r>
-                        <a:rPr sz="900" b="0" i="0">
-                          <a:solidFill>
-                            <a:srgbClr val="2D2D2D"/>
-                          </a:solidFill>
-                          <a:latin typeface="Segoe UI"/>
-                        </a:rPr>
-                        <a:t>Data Cert 1247179 / 1402727 / 1402958 ; ESS-02 spike 1420244 ; SOX 1438967 / 1455827</a:t>
-                      </a:r>
-                    </a:p>
-                  </a:txBody>
-                  <a:tcPr>
-                    <a:solidFill>
-                      <a:srgbClr val="F4F6F9"/>
-                    </a:solidFill>
-                  </a:tcPr>
-                </a:tc>
-              </a:tr>
-              <a:tr h="768096">
-                <a:tc>
-                  <a:txBody>
-                    <a:bodyPr wrap="square"/>
-                    <a:lstStyle/>
-                    <a:p>
-                      <a:pPr algn="l"/>
-                      <a:r>
-                        <a:rPr sz="1000" b="1" i="0">
-                          <a:solidFill>
-                            <a:srgbClr val="1F3A5F"/>
-                          </a:solidFill>
-                          <a:latin typeface="Segoe UI"/>
-                        </a:rPr>
-                        <a:t>CI Coverage - Computers</a:t>
-                      </a:r>
-                    </a:p>
-                    <a:p>
-                      <a:pPr algn="l"/>
-                      <a:r>
-                        <a:rPr sz="1000" b="1" i="0">
-                          <a:solidFill>
-                            <a:srgbClr val="1F3A5F"/>
-                          </a:solidFill>
-                          <a:latin typeface="Segoe UI"/>
-                        </a:rPr>
-                        <a:t>(was CO5 D2.1)</a:t>
-                      </a:r>
-                    </a:p>
-                  </a:txBody>
-                  <a:tcPr>
-                    <a:solidFill>
-                      <a:srgbClr val="FFFFFF"/>
-                    </a:solidFill>
-                  </a:tcPr>
-                </a:tc>
-                <a:tc>
-                  <a:txBody>
-                    <a:bodyPr wrap="square"/>
-                    <a:lstStyle/>
-                    <a:p>
-                      <a:pPr algn="l"/>
-                      <a:r>
-                        <a:rPr sz="950" b="0" i="0">
-                          <a:solidFill>
-                            <a:srgbClr val="2D2D2D"/>
-                          </a:solidFill>
-                          <a:latin typeface="Segoe UI"/>
-                        </a:rPr>
-                        <a:t>SCCM/Discovery precedence + bulk life-cycle; 90% of devices managed</a:t>
-                      </a:r>
-                    </a:p>
-                  </a:txBody>
-                  <a:tcPr>
-                    <a:solidFill>
-                      <a:srgbClr val="FFFFFF"/>
-                    </a:solidFill>
-                  </a:tcPr>
-                </a:tc>
-                <a:tc>
-                  <a:txBody>
-                    <a:bodyPr wrap="square"/>
-                    <a:lstStyle/>
-                    <a:p>
-                      <a:pPr algn="ctr"/>
-                      <a:r>
-                        <a:rPr sz="950" b="1" i="0">
-                          <a:solidFill>
-                            <a:srgbClr val="2E8B57"/>
-                          </a:solidFill>
-                          <a:latin typeface="Segoe UI"/>
-                        </a:rPr>
-                        <a:t>Jul 31 -&gt;</a:t>
-                      </a:r>
-                    </a:p>
-                    <a:p>
-                      <a:pPr algn="ctr"/>
-                      <a:r>
-                        <a:rPr sz="950" b="1" i="0">
-                          <a:solidFill>
-                            <a:srgbClr val="2E8B57"/>
-                          </a:solidFill>
-                          <a:latin typeface="Segoe UI"/>
-                        </a:rPr>
-                        <a:t>Sep 30</a:t>
-                      </a:r>
-                    </a:p>
-                  </a:txBody>
-                  <a:tcPr>
-                    <a:solidFill>
-                      <a:srgbClr val="FFFFFF"/>
-                    </a:solidFill>
-                  </a:tcPr>
-                </a:tc>
-                <a:tc>
-                  <a:txBody>
-                    <a:bodyPr wrap="square"/>
-                    <a:lstStyle/>
-                    <a:p>
-                      <a:pPr algn="l"/>
-                      <a:r>
-                        <a:rPr sz="900" b="0" i="0">
-                          <a:solidFill>
-                            <a:srgbClr val="2D2D2D"/>
-                          </a:solidFill>
-                          <a:latin typeface="Segoe UI"/>
-                        </a:rPr>
-                        <a:t>SCCM Computer 1348712/16/17/15 ; Computer Class 1354794</a:t>
-                      </a:r>
-                    </a:p>
-                  </a:txBody>
-                  <a:tcPr>
-                    <a:solidFill>
-                      <a:srgbClr val="FFFFFF"/>
-                    </a:solidFill>
-                  </a:tcPr>
-                </a:tc>
-              </a:tr>
-              <a:tr h="768096">
-                <a:tc>
-                  <a:txBody>
-                    <a:bodyPr wrap="square"/>
-                    <a:lstStyle/>
-                    <a:p>
-                      <a:pPr algn="l"/>
-                      <a:r>
-                        <a:rPr sz="1000" b="1" i="0">
-                          <a:solidFill>
-                            <a:srgbClr val="1F3A5F"/>
-                          </a:solidFill>
-                          <a:latin typeface="Segoe UI"/>
-                        </a:rPr>
-                        <a:t>CI Coverage - Servers</a:t>
-                      </a:r>
-                    </a:p>
-                    <a:p>
-                      <a:pPr algn="l"/>
-                      <a:r>
-                        <a:rPr sz="1000" b="1" i="0">
-                          <a:solidFill>
-                            <a:srgbClr val="1F3A5F"/>
-                          </a:solidFill>
-                          <a:latin typeface="Segoe UI"/>
-                        </a:rPr>
-                        <a:t>(was CO5 D2.2/2.3)</a:t>
-                      </a:r>
-                    </a:p>
-                  </a:txBody>
-                  <a:tcPr>
-                    <a:solidFill>
-                      <a:srgbClr val="F4F6F9"/>
-                    </a:solidFill>
-                  </a:tcPr>
-                </a:tc>
-                <a:tc>
-                  <a:txBody>
-                    <a:bodyPr wrap="square"/>
-                    <a:lstStyle/>
-                    <a:p>
-                      <a:pPr algn="l"/>
-                      <a:r>
-                        <a:rPr sz="950" b="0" i="0">
-                          <a:solidFill>
-                            <a:srgbClr val="2D2D2D"/>
-                          </a:solidFill>
-                          <a:latin typeface="Segoe UI"/>
-                        </a:rPr>
-                        <a:t>SCCM/Discovery precedence; enhanced DB Discovery (MS-SQL / Oracle); 90% of non-NERC-CIP servers</a:t>
-                      </a:r>
-                    </a:p>
-                  </a:txBody>
-                  <a:tcPr>
-                    <a:solidFill>
-                      <a:srgbClr val="F4F6F9"/>
-                    </a:solidFill>
-                  </a:tcPr>
-                </a:tc>
-                <a:tc>
-                  <a:txBody>
-                    <a:bodyPr wrap="square"/>
-                    <a:lstStyle/>
-                    <a:p>
-                      <a:pPr algn="ctr"/>
-                      <a:r>
-                        <a:rPr sz="950" b="1" i="0">
-                          <a:solidFill>
-                            <a:srgbClr val="2E8B57"/>
-                          </a:solidFill>
-                          <a:latin typeface="Segoe UI"/>
-                        </a:rPr>
-                        <a:t>Jul 31 -&gt;</a:t>
-                      </a:r>
-                    </a:p>
-                    <a:p>
-                      <a:pPr algn="ctr"/>
-                      <a:r>
-                        <a:rPr sz="950" b="1" i="0">
-                          <a:solidFill>
-                            <a:srgbClr val="2E8B57"/>
-                          </a:solidFill>
-                          <a:latin typeface="Segoe UI"/>
-                        </a:rPr>
-                        <a:t>Oct 30</a:t>
-                      </a:r>
-                    </a:p>
-                  </a:txBody>
-                  <a:tcPr>
-                    <a:solidFill>
-                      <a:srgbClr val="F4F6F9"/>
-                    </a:solidFill>
-                  </a:tcPr>
-                </a:tc>
-                <a:tc>
-                  <a:txBody>
-                    <a:bodyPr wrap="square"/>
-                    <a:lstStyle/>
-                    <a:p>
-                      <a:pPr algn="l"/>
-                      <a:r>
-                        <a:rPr sz="900" b="0" i="0">
-                          <a:solidFill>
-                            <a:srgbClr val="2D2D2D"/>
-                          </a:solidFill>
-                          <a:latin typeface="Segoe UI"/>
-                        </a:rPr>
-                        <a:t>SCCM Server 1356826 (1403759/60/62/63) ; creds 1444864</a:t>
-                      </a:r>
-                    </a:p>
-                  </a:txBody>
-                  <a:tcPr>
-                    <a:solidFill>
-                      <a:srgbClr val="F4F6F9"/>
-                    </a:solidFill>
-                  </a:tcPr>
-                </a:tc>
-              </a:tr>
-              <a:tr h="768096">
-                <a:tc>
-                  <a:txBody>
-                    <a:bodyPr wrap="square"/>
-                    <a:lstStyle/>
-                    <a:p>
-                      <a:pPr algn="l"/>
-                      <a:r>
-                        <a:rPr sz="1000" b="1" i="0">
-                          <a:solidFill>
-                            <a:srgbClr val="1F3A5F"/>
-                          </a:solidFill>
-                          <a:latin typeface="Segoe UI"/>
-                        </a:rPr>
-                        <a:t>Qualys Integration</a:t>
-                      </a:r>
-                    </a:p>
-                    <a:p>
-                      <a:pPr algn="l"/>
-                      <a:r>
-                        <a:rPr sz="1000" b="1" i="0">
-                          <a:solidFill>
-                            <a:srgbClr val="1F3A5F"/>
-                          </a:solidFill>
-                          <a:latin typeface="Segoe UI"/>
-                        </a:rPr>
-                        <a:t>(was CO5 D3)</a:t>
-                      </a:r>
-                    </a:p>
-                  </a:txBody>
-                  <a:tcPr>
-                    <a:solidFill>
-                      <a:srgbClr val="FFFFFF"/>
-                    </a:solidFill>
-                  </a:tcPr>
-                </a:tc>
-                <a:tc>
-                  <a:txBody>
-                    <a:bodyPr wrap="square"/>
-                    <a:lstStyle/>
-                    <a:p>
-                      <a:pPr algn="l"/>
-                      <a:r>
-                        <a:rPr sz="950" b="0" i="0">
-                          <a:solidFill>
-                            <a:srgbClr val="2D2D2D"/>
-                          </a:solidFill>
-                          <a:latin typeface="Segoe UI"/>
-                        </a:rPr>
-                        <a:t>Escalates from 'evaluate one integration' to a full one-way Qualys -&gt; ServiceNow feed, deployed to PROD</a:t>
-                      </a:r>
-                    </a:p>
-                  </a:txBody>
-                  <a:tcPr>
-                    <a:solidFill>
-                      <a:srgbClr val="FFFFFF"/>
-                    </a:solidFill>
-                  </a:tcPr>
-                </a:tc>
-                <a:tc>
-                  <a:txBody>
-                    <a:bodyPr wrap="square"/>
-                    <a:lstStyle/>
-                    <a:p>
-                      <a:pPr algn="ctr"/>
-                      <a:r>
-                        <a:rPr sz="950" b="1" i="0">
-                          <a:solidFill>
-                            <a:srgbClr val="2E8B57"/>
-                          </a:solidFill>
-                          <a:latin typeface="Segoe UI"/>
-                        </a:rPr>
-                        <a:t>Oct 27</a:t>
-                      </a:r>
-                    </a:p>
-                  </a:txBody>
-                  <a:tcPr>
-                    <a:solidFill>
-                      <a:srgbClr val="FFFFFF"/>
-                    </a:solidFill>
-                  </a:tcPr>
-                </a:tc>
-                <a:tc>
-                  <a:txBody>
-                    <a:bodyPr wrap="square"/>
-                    <a:lstStyle/>
-                    <a:p>
-                      <a:pPr algn="l"/>
-                      <a:r>
-                        <a:rPr sz="900" b="0" i="0">
-                          <a:solidFill>
-                            <a:srgbClr val="2D2D2D"/>
-                          </a:solidFill>
-                          <a:latin typeface="Segoe UI"/>
-                        </a:rPr>
-                        <a:t>Stream C 1428703 / 1428704 (currently blocked) ; spike 1234585</a:t>
-                      </a:r>
-                    </a:p>
-                  </a:txBody>
-                  <a:tcPr>
-                    <a:solidFill>
-                      <a:srgbClr val="FFFFFF"/>
-                    </a:solidFill>
-                  </a:tcPr>
-                </a:tc>
-              </a:tr>
-            </a:tbl>
-          </a:graphicData>
-        </a:graphic>
-      </p:graphicFrame>
-      <p:sp>
-        <p:nvSpPr>
-          <p:cNvPr id="8" name="Rectangle 7"/>
+              <a:t>PPL CMDB-CSDM  |  CO6 Deliverables  |  Team Focus  -  Jul 10, 2026</a:t>
+            </a:r>
+          </a:p>
+        </p:txBody>
+      </p:sp>
+      <p:sp>
+        <p:nvSpPr>
+          <p:cNvPr id="7" name="Rectangle 6"/>
           <p:cNvSpPr/>
           <p:nvPr/>
         </p:nvSpPr>
         <p:spPr>
           <a:xfrm>
-            <a:off x="502920" y="5212080"/>
-            <a:ext cx="11155680" cy="1005840"/>
+            <a:off x="1828800" y="1188720"/>
+            <a:ext cx="12700" cy="1234440"/>
           </a:xfrm>
           <a:prstGeom prst="rect">
             <a:avLst/>
           </a:prstGeom>
           <a:solidFill>
-            <a:srgbClr val="E6F3EC"/>
+            <a:srgbClr val="DDE3EA"/>
           </a:solidFill>
-          <a:ln w="9525">
-            <a:solidFill>
-              <a:srgbClr val="2E8B57"/>
-            </a:solidFill>
+          <a:ln>
+            <a:noFill/>
           </a:ln>
           <a:effectLst/>
         </p:spPr>
@@ -6853,14 +5725,14 @@
       </p:sp>
       <p:sp>
         <p:nvSpPr>
-          <p:cNvPr id="9" name="TextBox 8"/>
+          <p:cNvPr id="8" name="TextBox 7"/>
           <p:cNvSpPr txBox="1"/>
           <p:nvPr/>
         </p:nvSpPr>
         <p:spPr>
           <a:xfrm>
-            <a:off x="658368" y="5285232"/>
-            <a:ext cx="10881360" cy="896112"/>
+            <a:off x="1554480" y="2441448"/>
+            <a:ext cx="548640" cy="228600"/>
           </a:xfrm>
           <a:prstGeom prst="rect">
             <a:avLst/>
@@ -6868,6 +5740,436 @@
           <a:noFill/>
         </p:spPr>
         <p:txBody>
+          <a:bodyPr wrap="square" anchor="t" lIns="50800" rIns="50800" tIns="25400" bIns="25400">
+            <a:spAutoFit/>
+          </a:bodyPr>
+          <a:lstStyle/>
+          <a:p>
+            <a:pPr algn="ctr"/>
+            <a:r>
+              <a:rPr sz="900" b="0" i="0">
+                <a:solidFill>
+                  <a:srgbClr val="6B7280"/>
+                </a:solidFill>
+                <a:latin typeface="Segoe UI"/>
+              </a:rPr>
+              <a:t>Jun</a:t>
+            </a:r>
+          </a:p>
+        </p:txBody>
+      </p:sp>
+      <p:sp>
+        <p:nvSpPr>
+          <p:cNvPr id="9" name="Rectangle 8"/>
+          <p:cNvSpPr/>
+          <p:nvPr/>
+        </p:nvSpPr>
+        <p:spPr>
+          <a:xfrm>
+            <a:off x="3767328" y="1188720"/>
+            <a:ext cx="12700" cy="1234440"/>
+          </a:xfrm>
+          <a:prstGeom prst="rect">
+            <a:avLst/>
+          </a:prstGeom>
+          <a:solidFill>
+            <a:srgbClr val="DDE3EA"/>
+          </a:solidFill>
+          <a:ln>
+            <a:noFill/>
+          </a:ln>
+          <a:effectLst/>
+        </p:spPr>
+        <p:style>
+          <a:lnRef idx="1">
+            <a:schemeClr val="accent1"/>
+          </a:lnRef>
+          <a:fillRef idx="3">
+            <a:schemeClr val="accent1"/>
+          </a:fillRef>
+          <a:effectRef idx="2">
+            <a:schemeClr val="accent1"/>
+          </a:effectRef>
+          <a:fontRef idx="minor">
+            <a:schemeClr val="lt1"/>
+          </a:fontRef>
+        </p:style>
+        <p:txBody>
+          <a:bodyPr rtlCol="0" anchor="ctr"/>
+          <a:lstStyle/>
+          <a:p>
+            <a:pPr algn="ctr"/>
+          </a:p>
+        </p:txBody>
+      </p:sp>
+      <p:sp>
+        <p:nvSpPr>
+          <p:cNvPr id="10" name="TextBox 9"/>
+          <p:cNvSpPr txBox="1"/>
+          <p:nvPr/>
+        </p:nvSpPr>
+        <p:spPr>
+          <a:xfrm>
+            <a:off x="3493008" y="2441448"/>
+            <a:ext cx="548640" cy="228600"/>
+          </a:xfrm>
+          <a:prstGeom prst="rect">
+            <a:avLst/>
+          </a:prstGeom>
+          <a:noFill/>
+        </p:spPr>
+        <p:txBody>
+          <a:bodyPr wrap="square" anchor="t" lIns="50800" rIns="50800" tIns="25400" bIns="25400">
+            <a:spAutoFit/>
+          </a:bodyPr>
+          <a:lstStyle/>
+          <a:p>
+            <a:pPr algn="ctr"/>
+            <a:r>
+              <a:rPr sz="900" b="0" i="0">
+                <a:solidFill>
+                  <a:srgbClr val="6B7280"/>
+                </a:solidFill>
+                <a:latin typeface="Segoe UI"/>
+              </a:rPr>
+              <a:t>Jul</a:t>
+            </a:r>
+          </a:p>
+        </p:txBody>
+      </p:sp>
+      <p:sp>
+        <p:nvSpPr>
+          <p:cNvPr id="11" name="Rectangle 10"/>
+          <p:cNvSpPr/>
+          <p:nvPr/>
+        </p:nvSpPr>
+        <p:spPr>
+          <a:xfrm>
+            <a:off x="5705856" y="1188720"/>
+            <a:ext cx="12700" cy="1234440"/>
+          </a:xfrm>
+          <a:prstGeom prst="rect">
+            <a:avLst/>
+          </a:prstGeom>
+          <a:solidFill>
+            <a:srgbClr val="DDE3EA"/>
+          </a:solidFill>
+          <a:ln>
+            <a:noFill/>
+          </a:ln>
+          <a:effectLst/>
+        </p:spPr>
+        <p:style>
+          <a:lnRef idx="1">
+            <a:schemeClr val="accent1"/>
+          </a:lnRef>
+          <a:fillRef idx="3">
+            <a:schemeClr val="accent1"/>
+          </a:fillRef>
+          <a:effectRef idx="2">
+            <a:schemeClr val="accent1"/>
+          </a:effectRef>
+          <a:fontRef idx="minor">
+            <a:schemeClr val="lt1"/>
+          </a:fontRef>
+        </p:style>
+        <p:txBody>
+          <a:bodyPr rtlCol="0" anchor="ctr"/>
+          <a:lstStyle/>
+          <a:p>
+            <a:pPr algn="ctr"/>
+          </a:p>
+        </p:txBody>
+      </p:sp>
+      <p:sp>
+        <p:nvSpPr>
+          <p:cNvPr id="12" name="TextBox 11"/>
+          <p:cNvSpPr txBox="1"/>
+          <p:nvPr/>
+        </p:nvSpPr>
+        <p:spPr>
+          <a:xfrm>
+            <a:off x="5431536" y="2441448"/>
+            <a:ext cx="548640" cy="228600"/>
+          </a:xfrm>
+          <a:prstGeom prst="rect">
+            <a:avLst/>
+          </a:prstGeom>
+          <a:noFill/>
+        </p:spPr>
+        <p:txBody>
+          <a:bodyPr wrap="square" anchor="t" lIns="50800" rIns="50800" tIns="25400" bIns="25400">
+            <a:spAutoFit/>
+          </a:bodyPr>
+          <a:lstStyle/>
+          <a:p>
+            <a:pPr algn="ctr"/>
+            <a:r>
+              <a:rPr sz="900" b="0" i="0">
+                <a:solidFill>
+                  <a:srgbClr val="6B7280"/>
+                </a:solidFill>
+                <a:latin typeface="Segoe UI"/>
+              </a:rPr>
+              <a:t>Aug</a:t>
+            </a:r>
+          </a:p>
+        </p:txBody>
+      </p:sp>
+      <p:sp>
+        <p:nvSpPr>
+          <p:cNvPr id="13" name="Rectangle 12"/>
+          <p:cNvSpPr/>
+          <p:nvPr/>
+        </p:nvSpPr>
+        <p:spPr>
+          <a:xfrm>
+            <a:off x="7644383" y="1188720"/>
+            <a:ext cx="12700" cy="1234440"/>
+          </a:xfrm>
+          <a:prstGeom prst="rect">
+            <a:avLst/>
+          </a:prstGeom>
+          <a:solidFill>
+            <a:srgbClr val="DDE3EA"/>
+          </a:solidFill>
+          <a:ln>
+            <a:noFill/>
+          </a:ln>
+          <a:effectLst/>
+        </p:spPr>
+        <p:style>
+          <a:lnRef idx="1">
+            <a:schemeClr val="accent1"/>
+          </a:lnRef>
+          <a:fillRef idx="3">
+            <a:schemeClr val="accent1"/>
+          </a:fillRef>
+          <a:effectRef idx="2">
+            <a:schemeClr val="accent1"/>
+          </a:effectRef>
+          <a:fontRef idx="minor">
+            <a:schemeClr val="lt1"/>
+          </a:fontRef>
+        </p:style>
+        <p:txBody>
+          <a:bodyPr rtlCol="0" anchor="ctr"/>
+          <a:lstStyle/>
+          <a:p>
+            <a:pPr algn="ctr"/>
+          </a:p>
+        </p:txBody>
+      </p:sp>
+      <p:sp>
+        <p:nvSpPr>
+          <p:cNvPr id="14" name="TextBox 13"/>
+          <p:cNvSpPr txBox="1"/>
+          <p:nvPr/>
+        </p:nvSpPr>
+        <p:spPr>
+          <a:xfrm>
+            <a:off x="7370063" y="2441448"/>
+            <a:ext cx="548640" cy="228600"/>
+          </a:xfrm>
+          <a:prstGeom prst="rect">
+            <a:avLst/>
+          </a:prstGeom>
+          <a:noFill/>
+        </p:spPr>
+        <p:txBody>
+          <a:bodyPr wrap="square" anchor="t" lIns="50800" rIns="50800" tIns="25400" bIns="25400">
+            <a:spAutoFit/>
+          </a:bodyPr>
+          <a:lstStyle/>
+          <a:p>
+            <a:pPr algn="ctr"/>
+            <a:r>
+              <a:rPr sz="900" b="0" i="0">
+                <a:solidFill>
+                  <a:srgbClr val="6B7280"/>
+                </a:solidFill>
+                <a:latin typeface="Segoe UI"/>
+              </a:rPr>
+              <a:t>Sep</a:t>
+            </a:r>
+          </a:p>
+        </p:txBody>
+      </p:sp>
+      <p:sp>
+        <p:nvSpPr>
+          <p:cNvPr id="15" name="Rectangle 14"/>
+          <p:cNvSpPr/>
+          <p:nvPr/>
+        </p:nvSpPr>
+        <p:spPr>
+          <a:xfrm>
+            <a:off x="9582912" y="1188720"/>
+            <a:ext cx="12700" cy="1234440"/>
+          </a:xfrm>
+          <a:prstGeom prst="rect">
+            <a:avLst/>
+          </a:prstGeom>
+          <a:solidFill>
+            <a:srgbClr val="DDE3EA"/>
+          </a:solidFill>
+          <a:ln>
+            <a:noFill/>
+          </a:ln>
+          <a:effectLst/>
+        </p:spPr>
+        <p:style>
+          <a:lnRef idx="1">
+            <a:schemeClr val="accent1"/>
+          </a:lnRef>
+          <a:fillRef idx="3">
+            <a:schemeClr val="accent1"/>
+          </a:fillRef>
+          <a:effectRef idx="2">
+            <a:schemeClr val="accent1"/>
+          </a:effectRef>
+          <a:fontRef idx="minor">
+            <a:schemeClr val="lt1"/>
+          </a:fontRef>
+        </p:style>
+        <p:txBody>
+          <a:bodyPr rtlCol="0" anchor="ctr"/>
+          <a:lstStyle/>
+          <a:p>
+            <a:pPr algn="ctr"/>
+          </a:p>
+        </p:txBody>
+      </p:sp>
+      <p:sp>
+        <p:nvSpPr>
+          <p:cNvPr id="16" name="TextBox 15"/>
+          <p:cNvSpPr txBox="1"/>
+          <p:nvPr/>
+        </p:nvSpPr>
+        <p:spPr>
+          <a:xfrm>
+            <a:off x="9308592" y="2441448"/>
+            <a:ext cx="548640" cy="228600"/>
+          </a:xfrm>
+          <a:prstGeom prst="rect">
+            <a:avLst/>
+          </a:prstGeom>
+          <a:noFill/>
+        </p:spPr>
+        <p:txBody>
+          <a:bodyPr wrap="square" anchor="t" lIns="50800" rIns="50800" tIns="25400" bIns="25400">
+            <a:spAutoFit/>
+          </a:bodyPr>
+          <a:lstStyle/>
+          <a:p>
+            <a:pPr algn="ctr"/>
+            <a:r>
+              <a:rPr sz="900" b="0" i="0">
+                <a:solidFill>
+                  <a:srgbClr val="6B7280"/>
+                </a:solidFill>
+                <a:latin typeface="Segoe UI"/>
+              </a:rPr>
+              <a:t>Oct</a:t>
+            </a:r>
+          </a:p>
+        </p:txBody>
+      </p:sp>
+      <p:sp>
+        <p:nvSpPr>
+          <p:cNvPr id="17" name="Rectangle 16"/>
+          <p:cNvSpPr/>
+          <p:nvPr/>
+        </p:nvSpPr>
+        <p:spPr>
+          <a:xfrm>
+            <a:off x="11521440" y="1188720"/>
+            <a:ext cx="12700" cy="1234440"/>
+          </a:xfrm>
+          <a:prstGeom prst="rect">
+            <a:avLst/>
+          </a:prstGeom>
+          <a:solidFill>
+            <a:srgbClr val="DDE3EA"/>
+          </a:solidFill>
+          <a:ln>
+            <a:noFill/>
+          </a:ln>
+          <a:effectLst/>
+        </p:spPr>
+        <p:style>
+          <a:lnRef idx="1">
+            <a:schemeClr val="accent1"/>
+          </a:lnRef>
+          <a:fillRef idx="3">
+            <a:schemeClr val="accent1"/>
+          </a:fillRef>
+          <a:effectRef idx="2">
+            <a:schemeClr val="accent1"/>
+          </a:effectRef>
+          <a:fontRef idx="minor">
+            <a:schemeClr val="lt1"/>
+          </a:fontRef>
+        </p:style>
+        <p:txBody>
+          <a:bodyPr rtlCol="0" anchor="ctr"/>
+          <a:lstStyle/>
+          <a:p>
+            <a:pPr algn="ctr"/>
+          </a:p>
+        </p:txBody>
+      </p:sp>
+      <p:sp>
+        <p:nvSpPr>
+          <p:cNvPr id="18" name="TextBox 17"/>
+          <p:cNvSpPr txBox="1"/>
+          <p:nvPr/>
+        </p:nvSpPr>
+        <p:spPr>
+          <a:xfrm>
+            <a:off x="11247120" y="2441448"/>
+            <a:ext cx="548640" cy="228600"/>
+          </a:xfrm>
+          <a:prstGeom prst="rect">
+            <a:avLst/>
+          </a:prstGeom>
+          <a:noFill/>
+        </p:spPr>
+        <p:txBody>
+          <a:bodyPr wrap="square" anchor="t" lIns="50800" rIns="50800" tIns="25400" bIns="25400">
+            <a:spAutoFit/>
+          </a:bodyPr>
+          <a:lstStyle/>
+          <a:p>
+            <a:pPr algn="ctr"/>
+            <a:r>
+              <a:rPr sz="900" b="0" i="0">
+                <a:solidFill>
+                  <a:srgbClr val="6B7280"/>
+                </a:solidFill>
+                <a:latin typeface="Segoe UI"/>
+              </a:rPr>
+              <a:t>Nov</a:t>
+            </a:r>
+          </a:p>
+        </p:txBody>
+      </p:sp>
+      <p:sp>
+        <p:nvSpPr>
+          <p:cNvPr id="19" name="TextBox 18"/>
+          <p:cNvSpPr txBox="1"/>
+          <p:nvPr/>
+        </p:nvSpPr>
+        <p:spPr>
+          <a:xfrm>
+            <a:off x="502920" y="1188720"/>
+            <a:ext cx="1280160" cy="1234440"/>
+          </a:xfrm>
+          <a:prstGeom prst="rect">
+            <a:avLst/>
+          </a:prstGeom>
+          <a:noFill/>
+        </p:spPr>
+        <p:txBody>
           <a:bodyPr wrap="square" anchor="ctr" lIns="50800" rIns="50800" tIns="25400" bIns="25400">
             <a:spAutoFit/>
           </a:bodyPr>
@@ -6875,17 +6177,849 @@
           <a:p>
             <a:pPr algn="l"/>
             <a:r>
-              <a:rPr sz="1000" b="0" i="0">
+              <a:rPr sz="900" b="1" i="0">
                 <a:solidFill>
-                  <a:srgbClr val="1E5A38"/>
+                  <a:srgbClr val="6B7280"/>
                 </a:solidFill>
                 <a:latin typeface="Segoe UI"/>
               </a:rPr>
-              <a:t>The hard 90% coverage targets get real PI-3 runway (Sep 30 / Oct 30) instead of a single 6/30 cliff.  Foundation work (Governance, precedence) is dated Jul 31 - it lands in PI-2 Iter 2.5/2.6, so it needs to be substantially done by early PI-2 end, not 'sometime in July.'</a:t>
-            </a:r>
-          </a:p>
-        </p:txBody>
-      </p:sp>
+              <a:t>Windows</a:t>
+            </a:r>
+          </a:p>
+        </p:txBody>
+      </p:sp>
+      <p:sp>
+        <p:nvSpPr>
+          <p:cNvPr id="20" name="Rectangle 19"/>
+          <p:cNvSpPr/>
+          <p:nvPr/>
+        </p:nvSpPr>
+        <p:spPr>
+          <a:xfrm>
+            <a:off x="3767328" y="1243584"/>
+            <a:ext cx="7628107" cy="292608"/>
+          </a:xfrm>
+          <a:prstGeom prst="rect">
+            <a:avLst/>
+          </a:prstGeom>
+          <a:solidFill>
+            <a:srgbClr val="2E6DB4"/>
+          </a:solidFill>
+          <a:ln>
+            <a:noFill/>
+          </a:ln>
+          <a:effectLst/>
+        </p:spPr>
+        <p:style>
+          <a:lnRef idx="1">
+            <a:schemeClr val="accent1"/>
+          </a:lnRef>
+          <a:fillRef idx="3">
+            <a:schemeClr val="accent1"/>
+          </a:fillRef>
+          <a:effectRef idx="2">
+            <a:schemeClr val="accent1"/>
+          </a:effectRef>
+          <a:fontRef idx="minor">
+            <a:schemeClr val="lt1"/>
+          </a:fontRef>
+        </p:style>
+        <p:txBody>
+          <a:bodyPr rtlCol="0" anchor="ctr"/>
+          <a:lstStyle/>
+          <a:p>
+            <a:pPr algn="ctr"/>
+          </a:p>
+        </p:txBody>
+      </p:sp>
+      <p:sp>
+        <p:nvSpPr>
+          <p:cNvPr id="21" name="TextBox 20"/>
+          <p:cNvSpPr txBox="1"/>
+          <p:nvPr/>
+        </p:nvSpPr>
+        <p:spPr>
+          <a:xfrm>
+            <a:off x="3840480" y="1243584"/>
+            <a:ext cx="7518379" cy="292608"/>
+          </a:xfrm>
+          <a:prstGeom prst="rect">
+            <a:avLst/>
+          </a:prstGeom>
+          <a:noFill/>
+        </p:spPr>
+        <p:txBody>
+          <a:bodyPr wrap="square" anchor="ctr" lIns="50800" rIns="50800" tIns="25400" bIns="25400">
+            <a:spAutoFit/>
+          </a:bodyPr>
+          <a:lstStyle/>
+          <a:p>
+            <a:pPr algn="l"/>
+            <a:r>
+              <a:rPr sz="950" b="1" i="0">
+                <a:solidFill>
+                  <a:srgbClr val="FFFFFF"/>
+                </a:solidFill>
+                <a:latin typeface="Segoe UI"/>
+              </a:rPr>
+              <a:t>Delivery window   Jul 1 - Oct 30</a:t>
+            </a:r>
+          </a:p>
+        </p:txBody>
+      </p:sp>
+      <p:sp>
+        <p:nvSpPr>
+          <p:cNvPr id="22" name="Rectangle 21"/>
+          <p:cNvSpPr/>
+          <p:nvPr/>
+        </p:nvSpPr>
+        <p:spPr>
+          <a:xfrm>
+            <a:off x="1828800" y="1613916"/>
+            <a:ext cx="4065093" cy="292608"/>
+          </a:xfrm>
+          <a:prstGeom prst="rect">
+            <a:avLst/>
+          </a:prstGeom>
+          <a:solidFill>
+            <a:srgbClr val="6E88AE"/>
+          </a:solidFill>
+          <a:ln>
+            <a:noFill/>
+          </a:ln>
+          <a:effectLst/>
+        </p:spPr>
+        <p:style>
+          <a:lnRef idx="1">
+            <a:schemeClr val="accent1"/>
+          </a:lnRef>
+          <a:fillRef idx="3">
+            <a:schemeClr val="accent1"/>
+          </a:fillRef>
+          <a:effectRef idx="2">
+            <a:schemeClr val="accent1"/>
+          </a:effectRef>
+          <a:fontRef idx="minor">
+            <a:schemeClr val="lt1"/>
+          </a:fontRef>
+        </p:style>
+        <p:txBody>
+          <a:bodyPr rtlCol="0" anchor="ctr"/>
+          <a:lstStyle/>
+          <a:p>
+            <a:pPr algn="ctr"/>
+          </a:p>
+        </p:txBody>
+      </p:sp>
+      <p:sp>
+        <p:nvSpPr>
+          <p:cNvPr id="23" name="TextBox 22"/>
+          <p:cNvSpPr txBox="1"/>
+          <p:nvPr/>
+        </p:nvSpPr>
+        <p:spPr>
+          <a:xfrm>
+            <a:off x="1901952" y="1613916"/>
+            <a:ext cx="3955365" cy="292608"/>
+          </a:xfrm>
+          <a:prstGeom prst="rect">
+            <a:avLst/>
+          </a:prstGeom>
+          <a:noFill/>
+        </p:spPr>
+        <p:txBody>
+          <a:bodyPr wrap="square" anchor="ctr" lIns="50800" rIns="50800" tIns="25400" bIns="25400">
+            <a:spAutoFit/>
+          </a:bodyPr>
+          <a:lstStyle/>
+          <a:p>
+            <a:pPr algn="l"/>
+            <a:r>
+              <a:rPr sz="950" b="1" i="0">
+                <a:solidFill>
+                  <a:srgbClr val="FFFFFF"/>
+                </a:solidFill>
+                <a:latin typeface="Segoe UI"/>
+              </a:rPr>
+              <a:t>PI-2  (-&gt; Aug 4)</a:t>
+            </a:r>
+          </a:p>
+        </p:txBody>
+      </p:sp>
+      <p:sp>
+        <p:nvSpPr>
+          <p:cNvPr id="24" name="Rectangle 23"/>
+          <p:cNvSpPr/>
+          <p:nvPr/>
+        </p:nvSpPr>
+        <p:spPr>
+          <a:xfrm>
+            <a:off x="5955926" y="1984248"/>
+            <a:ext cx="5253410" cy="292608"/>
+          </a:xfrm>
+          <a:prstGeom prst="rect">
+            <a:avLst/>
+          </a:prstGeom>
+          <a:solidFill>
+            <a:srgbClr val="2E8B57"/>
+          </a:solidFill>
+          <a:ln>
+            <a:noFill/>
+          </a:ln>
+          <a:effectLst/>
+        </p:spPr>
+        <p:style>
+          <a:lnRef idx="1">
+            <a:schemeClr val="accent1"/>
+          </a:lnRef>
+          <a:fillRef idx="3">
+            <a:schemeClr val="accent1"/>
+          </a:fillRef>
+          <a:effectRef idx="2">
+            <a:schemeClr val="accent1"/>
+          </a:effectRef>
+          <a:fontRef idx="minor">
+            <a:schemeClr val="lt1"/>
+          </a:fontRef>
+        </p:style>
+        <p:txBody>
+          <a:bodyPr rtlCol="0" anchor="ctr"/>
+          <a:lstStyle/>
+          <a:p>
+            <a:pPr algn="ctr"/>
+          </a:p>
+        </p:txBody>
+      </p:sp>
+      <p:sp>
+        <p:nvSpPr>
+          <p:cNvPr id="25" name="TextBox 24"/>
+          <p:cNvSpPr txBox="1"/>
+          <p:nvPr/>
+        </p:nvSpPr>
+        <p:spPr>
+          <a:xfrm>
+            <a:off x="6029078" y="1984248"/>
+            <a:ext cx="5143682" cy="292608"/>
+          </a:xfrm>
+          <a:prstGeom prst="rect">
+            <a:avLst/>
+          </a:prstGeom>
+          <a:noFill/>
+        </p:spPr>
+        <p:txBody>
+          <a:bodyPr wrap="square" anchor="ctr" lIns="50800" rIns="50800" tIns="25400" bIns="25400">
+            <a:spAutoFit/>
+          </a:bodyPr>
+          <a:lstStyle/>
+          <a:p>
+            <a:pPr algn="l"/>
+            <a:r>
+              <a:rPr sz="950" b="1" i="0">
+                <a:solidFill>
+                  <a:srgbClr val="FFFFFF"/>
+                </a:solidFill>
+                <a:latin typeface="Segoe UI"/>
+              </a:rPr>
+              <a:t>PI-3  Aug 5 - Oct 27</a:t>
+            </a:r>
+          </a:p>
+        </p:txBody>
+      </p:sp>
+      <p:graphicFrame>
+        <p:nvGraphicFramePr>
+          <p:cNvPr id="26" name="Table 25"/>
+          <p:cNvGraphicFramePr>
+            <a:graphicFrameLocks noGrp="1"/>
+          </p:cNvGraphicFramePr>
+          <p:nvPr/>
+        </p:nvGraphicFramePr>
+        <p:xfrm>
+          <a:off x="502920" y="3063240"/>
+          <a:ext cx="11155680" cy="2834640"/>
+        </p:xfrm>
+        <a:graphic>
+          <a:graphicData uri="http://schemas.openxmlformats.org/drawingml/2006/table">
+            <a:tbl>
+              <a:tblPr firstRow="1" bandRow="1">
+                <a:tableStyleId>{5C22544A-7EE6-4342-B048-85BDC9FD1C3A}</a:tableStyleId>
+              </a:tblPr>
+              <a:tblGrid>
+                <a:gridCol w="1371600"/>
+                <a:gridCol w="7223760"/>
+                <a:gridCol w="2560320"/>
+              </a:tblGrid>
+              <a:tr h="354330">
+                <a:tc>
+                  <a:txBody>
+                    <a:bodyPr wrap="square"/>
+                    <a:lstStyle/>
+                    <a:p>
+                      <a:pPr algn="ctr"/>
+                      <a:r>
+                        <a:rPr sz="1100" b="1" i="0">
+                          <a:solidFill>
+                            <a:srgbClr val="FFFFFF"/>
+                          </a:solidFill>
+                          <a:latin typeface="Segoe UI"/>
+                        </a:rPr>
+                        <a:t>When</a:t>
+                      </a:r>
+                    </a:p>
+                  </a:txBody>
+                  <a:tcPr>
+                    <a:solidFill>
+                      <a:srgbClr val="1F3A5F"/>
+                    </a:solidFill>
+                  </a:tcPr>
+                </a:tc>
+                <a:tc>
+                  <a:txBody>
+                    <a:bodyPr wrap="square"/>
+                    <a:lstStyle/>
+                    <a:p>
+                      <a:pPr algn="l"/>
+                      <a:r>
+                        <a:rPr sz="1100" b="1" i="0">
+                          <a:solidFill>
+                            <a:srgbClr val="FFFFFF"/>
+                          </a:solidFill>
+                          <a:latin typeface="Segoe UI"/>
+                        </a:rPr>
+                        <a:t>What's due</a:t>
+                      </a:r>
+                    </a:p>
+                  </a:txBody>
+                  <a:tcPr>
+                    <a:solidFill>
+                      <a:srgbClr val="1F3A5F"/>
+                    </a:solidFill>
+                  </a:tcPr>
+                </a:tc>
+                <a:tc>
+                  <a:txBody>
+                    <a:bodyPr wrap="square"/>
+                    <a:lstStyle/>
+                    <a:p>
+                      <a:pPr algn="ctr"/>
+                      <a:r>
+                        <a:rPr sz="1100" b="1" i="0">
+                          <a:solidFill>
+                            <a:srgbClr val="FFFFFF"/>
+                          </a:solidFill>
+                          <a:latin typeface="Segoe UI"/>
+                        </a:rPr>
+                        <a:t>Lands in</a:t>
+                      </a:r>
+                    </a:p>
+                  </a:txBody>
+                  <a:tcPr>
+                    <a:solidFill>
+                      <a:srgbClr val="1F3A5F"/>
+                    </a:solidFill>
+                  </a:tcPr>
+                </a:tc>
+              </a:tr>
+              <a:tr h="354330">
+                <a:tc>
+                  <a:txBody>
+                    <a:bodyPr wrap="square"/>
+                    <a:lstStyle/>
+                    <a:p>
+                      <a:pPr algn="ctr"/>
+                      <a:r>
+                        <a:rPr sz="1050" b="1" i="0">
+                          <a:solidFill>
+                            <a:srgbClr val="1F3A5F"/>
+                          </a:solidFill>
+                          <a:latin typeface="Segoe UI"/>
+                        </a:rPr>
+                        <a:t>Jul 31</a:t>
+                      </a:r>
+                    </a:p>
+                  </a:txBody>
+                  <a:tcPr>
+                    <a:solidFill>
+                      <a:srgbClr val="F4F6F9"/>
+                    </a:solidFill>
+                  </a:tcPr>
+                </a:tc>
+                <a:tc>
+                  <a:txBody>
+                    <a:bodyPr wrap="square"/>
+                    <a:lstStyle/>
+                    <a:p>
+                      <a:pPr algn="l"/>
+                      <a:r>
+                        <a:rPr sz="900" b="0" i="0">
+                          <a:solidFill>
+                            <a:srgbClr val="2D2D2D"/>
+                          </a:solidFill>
+                          <a:latin typeface="Segoe UI"/>
+                        </a:rPr>
+                        <a:t>CMDB Governance (data dictionary incl. Databases; Data Cert all CI classes; ESS-02; SOX)  ·  CI Coverage foundation (Computers &amp; Servers precedence)</a:t>
+                      </a:r>
+                    </a:p>
+                  </a:txBody>
+                  <a:tcPr>
+                    <a:solidFill>
+                      <a:srgbClr val="F4F6F9"/>
+                    </a:solidFill>
+                  </a:tcPr>
+                </a:tc>
+                <a:tc>
+                  <a:txBody>
+                    <a:bodyPr wrap="square"/>
+                    <a:lstStyle/>
+                    <a:p>
+                      <a:pPr algn="ctr"/>
+                      <a:r>
+                        <a:rPr sz="950" b="1" i="0">
+                          <a:solidFill>
+                            <a:srgbClr val="2E6DB4"/>
+                          </a:solidFill>
+                          <a:latin typeface="Segoe UI"/>
+                        </a:rPr>
+                        <a:t>PI-2 Iter 2.5 / 2.6 (IP)</a:t>
+                      </a:r>
+                    </a:p>
+                  </a:txBody>
+                  <a:tcPr>
+                    <a:solidFill>
+                      <a:srgbClr val="F4F6F9"/>
+                    </a:solidFill>
+                  </a:tcPr>
+                </a:tc>
+              </a:tr>
+              <a:tr h="354330">
+                <a:tc>
+                  <a:txBody>
+                    <a:bodyPr wrap="square"/>
+                    <a:lstStyle/>
+                    <a:p>
+                      <a:pPr algn="ctr"/>
+                      <a:r>
+                        <a:rPr sz="1050" b="1" i="0">
+                          <a:solidFill>
+                            <a:srgbClr val="1F3A5F"/>
+                          </a:solidFill>
+                          <a:latin typeface="Segoe UI"/>
+                        </a:rPr>
+                        <a:t>Aug 31</a:t>
+                      </a:r>
+                    </a:p>
+                  </a:txBody>
+                  <a:tcPr>
+                    <a:solidFill>
+                      <a:srgbClr val="FFFFFF"/>
+                    </a:solidFill>
+                  </a:tcPr>
+                </a:tc>
+                <a:tc>
+                  <a:txBody>
+                    <a:bodyPr wrap="square"/>
+                    <a:lstStyle/>
+                    <a:p>
+                      <a:pPr algn="l"/>
+                      <a:r>
+                        <a:rPr sz="900" b="0" i="0">
+                          <a:solidFill>
+                            <a:srgbClr val="2D2D2D"/>
+                          </a:solidFill>
+                          <a:latin typeface="Segoe UI"/>
+                        </a:rPr>
+                        <a:t>Network Gear (creds &amp; schedules)  ·  Service Mapping (initial maps)  ·  Legacy Platform (analysis) - staged</a:t>
+                      </a:r>
+                    </a:p>
+                  </a:txBody>
+                  <a:tcPr>
+                    <a:solidFill>
+                      <a:srgbClr val="FFFFFF"/>
+                    </a:solidFill>
+                  </a:tcPr>
+                </a:tc>
+                <a:tc>
+                  <a:txBody>
+                    <a:bodyPr wrap="square"/>
+                    <a:lstStyle/>
+                    <a:p>
+                      <a:pPr algn="ctr"/>
+                      <a:r>
+                        <a:rPr sz="950" b="1" i="0">
+                          <a:solidFill>
+                            <a:srgbClr val="2E6DB4"/>
+                          </a:solidFill>
+                          <a:latin typeface="Segoe UI"/>
+                        </a:rPr>
+                        <a:t>PI-3</a:t>
+                      </a:r>
+                    </a:p>
+                  </a:txBody>
+                  <a:tcPr>
+                    <a:solidFill>
+                      <a:srgbClr val="FFFFFF"/>
+                    </a:solidFill>
+                  </a:tcPr>
+                </a:tc>
+              </a:tr>
+              <a:tr h="354330">
+                <a:tc>
+                  <a:txBody>
+                    <a:bodyPr wrap="square"/>
+                    <a:lstStyle/>
+                    <a:p>
+                      <a:pPr algn="ctr"/>
+                      <a:r>
+                        <a:rPr sz="1050" b="1" i="0">
+                          <a:solidFill>
+                            <a:srgbClr val="1F3A5F"/>
+                          </a:solidFill>
+                          <a:latin typeface="Segoe UI"/>
+                        </a:rPr>
+                        <a:t>Sep 30</a:t>
+                      </a:r>
+                    </a:p>
+                  </a:txBody>
+                  <a:tcPr>
+                    <a:solidFill>
+                      <a:srgbClr val="F4F6F9"/>
+                    </a:solidFill>
+                  </a:tcPr>
+                </a:tc>
+                <a:tc>
+                  <a:txBody>
+                    <a:bodyPr wrap="square"/>
+                    <a:lstStyle/>
+                    <a:p>
+                      <a:pPr algn="l"/>
+                      <a:r>
+                        <a:rPr sz="900" b="0" i="0">
+                          <a:solidFill>
+                            <a:srgbClr val="2D2D2D"/>
+                          </a:solidFill>
+                          <a:latin typeface="Segoe UI"/>
+                        </a:rPr>
+                        <a:t>CI Coverage - Computers 90% managed  ·  Network Gear mandatory attributes</a:t>
+                      </a:r>
+                    </a:p>
+                  </a:txBody>
+                  <a:tcPr>
+                    <a:solidFill>
+                      <a:srgbClr val="F4F6F9"/>
+                    </a:solidFill>
+                  </a:tcPr>
+                </a:tc>
+                <a:tc>
+                  <a:txBody>
+                    <a:bodyPr wrap="square"/>
+                    <a:lstStyle/>
+                    <a:p>
+                      <a:pPr algn="ctr"/>
+                      <a:r>
+                        <a:rPr sz="950" b="1" i="0">
+                          <a:solidFill>
+                            <a:srgbClr val="2E6DB4"/>
+                          </a:solidFill>
+                          <a:latin typeface="Segoe UI"/>
+                        </a:rPr>
+                        <a:t>PI-3</a:t>
+                      </a:r>
+                    </a:p>
+                  </a:txBody>
+                  <a:tcPr>
+                    <a:solidFill>
+                      <a:srgbClr val="F4F6F9"/>
+                    </a:solidFill>
+                  </a:tcPr>
+                </a:tc>
+              </a:tr>
+              <a:tr h="354330">
+                <a:tc>
+                  <a:txBody>
+                    <a:bodyPr wrap="square"/>
+                    <a:lstStyle/>
+                    <a:p>
+                      <a:pPr algn="ctr"/>
+                      <a:r>
+                        <a:rPr sz="1050" b="1" i="0">
+                          <a:solidFill>
+                            <a:srgbClr val="1F3A5F"/>
+                          </a:solidFill>
+                          <a:latin typeface="Segoe UI"/>
+                        </a:rPr>
+                        <a:t>Oct 27</a:t>
+                      </a:r>
+                    </a:p>
+                  </a:txBody>
+                  <a:tcPr>
+                    <a:solidFill>
+                      <a:srgbClr val="FFFFFF"/>
+                    </a:solidFill>
+                  </a:tcPr>
+                </a:tc>
+                <a:tc>
+                  <a:txBody>
+                    <a:bodyPr wrap="square"/>
+                    <a:lstStyle/>
+                    <a:p>
+                      <a:pPr algn="l"/>
+                      <a:r>
+                        <a:rPr sz="900" b="0" i="0">
+                          <a:solidFill>
+                            <a:srgbClr val="2D2D2D"/>
+                          </a:solidFill>
+                          <a:latin typeface="Segoe UI"/>
+                        </a:rPr>
+                        <a:t>Qualys -&gt; ServiceNow live in PROD</a:t>
+                      </a:r>
+                    </a:p>
+                  </a:txBody>
+                  <a:tcPr>
+                    <a:solidFill>
+                      <a:srgbClr val="FFFFFF"/>
+                    </a:solidFill>
+                  </a:tcPr>
+                </a:tc>
+                <a:tc>
+                  <a:txBody>
+                    <a:bodyPr wrap="square"/>
+                    <a:lstStyle/>
+                    <a:p>
+                      <a:pPr algn="ctr"/>
+                      <a:r>
+                        <a:rPr sz="950" b="1" i="0">
+                          <a:solidFill>
+                            <a:srgbClr val="2E6DB4"/>
+                          </a:solidFill>
+                          <a:latin typeface="Segoe UI"/>
+                        </a:rPr>
+                        <a:t>PI-3</a:t>
+                      </a:r>
+                    </a:p>
+                  </a:txBody>
+                  <a:tcPr>
+                    <a:solidFill>
+                      <a:srgbClr val="FFFFFF"/>
+                    </a:solidFill>
+                  </a:tcPr>
+                </a:tc>
+              </a:tr>
+              <a:tr h="354330">
+                <a:tc>
+                  <a:txBody>
+                    <a:bodyPr wrap="square"/>
+                    <a:lstStyle/>
+                    <a:p>
+                      <a:pPr algn="ctr"/>
+                      <a:r>
+                        <a:rPr sz="1050" b="1" i="0">
+                          <a:solidFill>
+                            <a:srgbClr val="1F3A5F"/>
+                          </a:solidFill>
+                          <a:latin typeface="Segoe UI"/>
+                        </a:rPr>
+                        <a:t>Oct 30</a:t>
+                      </a:r>
+                    </a:p>
+                  </a:txBody>
+                  <a:tcPr>
+                    <a:solidFill>
+                      <a:srgbClr val="F4F6F9"/>
+                    </a:solidFill>
+                  </a:tcPr>
+                </a:tc>
+                <a:tc>
+                  <a:txBody>
+                    <a:bodyPr wrap="square"/>
+                    <a:lstStyle/>
+                    <a:p>
+                      <a:pPr algn="l"/>
+                      <a:r>
+                        <a:rPr sz="900" b="0" i="0">
+                          <a:solidFill>
+                            <a:srgbClr val="2D2D2D"/>
+                          </a:solidFill>
+                          <a:latin typeface="Segoe UI"/>
+                        </a:rPr>
+                        <a:t>CI Coverage - Servers 90%  ·  Network Gear 90%  ·  Service Mapping (10 apps)  ·  Legacy Platform (migration plan)</a:t>
+                      </a:r>
+                    </a:p>
+                  </a:txBody>
+                  <a:tcPr>
+                    <a:solidFill>
+                      <a:srgbClr val="F4F6F9"/>
+                    </a:solidFill>
+                  </a:tcPr>
+                </a:tc>
+                <a:tc>
+                  <a:txBody>
+                    <a:bodyPr wrap="square"/>
+                    <a:lstStyle/>
+                    <a:p>
+                      <a:pPr algn="ctr"/>
+                      <a:r>
+                        <a:rPr sz="950" b="1" i="0">
+                          <a:solidFill>
+                            <a:srgbClr val="2E6DB4"/>
+                          </a:solidFill>
+                          <a:latin typeface="Segoe UI"/>
+                        </a:rPr>
+                        <a:t>PI-3</a:t>
+                      </a:r>
+                    </a:p>
+                  </a:txBody>
+                  <a:tcPr>
+                    <a:solidFill>
+                      <a:srgbClr val="F4F6F9"/>
+                    </a:solidFill>
+                  </a:tcPr>
+                </a:tc>
+              </a:tr>
+              <a:tr h="354330">
+                <a:tc>
+                  <a:txBody>
+                    <a:bodyPr wrap="square"/>
+                    <a:lstStyle/>
+                    <a:p>
+                      <a:pPr algn="ctr"/>
+                      <a:r>
+                        <a:rPr sz="1050" b="1" i="0">
+                          <a:solidFill>
+                            <a:srgbClr val="1F3A5F"/>
+                          </a:solidFill>
+                          <a:latin typeface="Segoe UI"/>
+                        </a:rPr>
+                        <a:t>Oct 31</a:t>
+                      </a:r>
+                    </a:p>
+                  </a:txBody>
+                  <a:tcPr>
+                    <a:solidFill>
+                      <a:srgbClr val="FFFFFF"/>
+                    </a:solidFill>
+                  </a:tcPr>
+                </a:tc>
+                <a:tc>
+                  <a:txBody>
+                    <a:bodyPr wrap="square"/>
+                    <a:lstStyle/>
+                    <a:p>
+                      <a:pPr algn="l"/>
+                      <a:r>
+                        <a:rPr sz="900" b="0" i="0">
+                          <a:solidFill>
+                            <a:srgbClr val="2D2D2D"/>
+                          </a:solidFill>
+                          <a:latin typeface="Segoe UI"/>
+                        </a:rPr>
+                        <a:t>ATF Strategy (rollout plan)</a:t>
+                      </a:r>
+                    </a:p>
+                  </a:txBody>
+                  <a:tcPr>
+                    <a:solidFill>
+                      <a:srgbClr val="FFFFFF"/>
+                    </a:solidFill>
+                  </a:tcPr>
+                </a:tc>
+                <a:tc>
+                  <a:txBody>
+                    <a:bodyPr wrap="square"/>
+                    <a:lstStyle/>
+                    <a:p>
+                      <a:pPr algn="ctr"/>
+                      <a:r>
+                        <a:rPr sz="950" b="1" i="0">
+                          <a:solidFill>
+                            <a:srgbClr val="2E6DB4"/>
+                          </a:solidFill>
+                          <a:latin typeface="Segoe UI"/>
+                        </a:rPr>
+                        <a:t>PI-3</a:t>
+                      </a:r>
+                    </a:p>
+                  </a:txBody>
+                  <a:tcPr>
+                    <a:solidFill>
+                      <a:srgbClr val="FFFFFF"/>
+                    </a:solidFill>
+                  </a:tcPr>
+                </a:tc>
+              </a:tr>
+              <a:tr h="354330">
+                <a:tc>
+                  <a:txBody>
+                    <a:bodyPr wrap="square"/>
+                    <a:lstStyle/>
+                    <a:p>
+                      <a:pPr algn="ctr"/>
+                      <a:r>
+                        <a:rPr sz="1050" b="1" i="0">
+                          <a:solidFill>
+                            <a:srgbClr val="1F3A5F"/>
+                          </a:solidFill>
+                          <a:latin typeface="Segoe UI"/>
+                        </a:rPr>
+                        <a:t>Ongoing</a:t>
+                      </a:r>
+                    </a:p>
+                  </a:txBody>
+                  <a:tcPr>
+                    <a:solidFill>
+                      <a:srgbClr val="F4F6F9"/>
+                    </a:solidFill>
+                  </a:tcPr>
+                </a:tc>
+                <a:tc>
+                  <a:txBody>
+                    <a:bodyPr wrap="square"/>
+                    <a:lstStyle/>
+                    <a:p>
+                      <a:pPr algn="l"/>
+                      <a:r>
+                        <a:rPr sz="900" b="0" i="0">
+                          <a:solidFill>
+                            <a:srgbClr val="2D2D2D"/>
+                          </a:solidFill>
+                          <a:latin typeface="Segoe UI"/>
+                        </a:rPr>
+                        <a:t>ITSM Product Management &amp; Platform Support - monthly</a:t>
+                      </a:r>
+                    </a:p>
+                  </a:txBody>
+                  <a:tcPr>
+                    <a:solidFill>
+                      <a:srgbClr val="F4F6F9"/>
+                    </a:solidFill>
+                  </a:tcPr>
+                </a:tc>
+                <a:tc>
+                  <a:txBody>
+                    <a:bodyPr wrap="square"/>
+                    <a:lstStyle/>
+                    <a:p>
+                      <a:pPr algn="ctr"/>
+                      <a:r>
+                        <a:rPr sz="950" b="1" i="0">
+                          <a:solidFill>
+                            <a:srgbClr val="2E6DB4"/>
+                          </a:solidFill>
+                          <a:latin typeface="Segoe UI"/>
+                        </a:rPr>
+                        <a:t>PI-2 tail -&gt; PI-3</a:t>
+                      </a:r>
+                    </a:p>
+                  </a:txBody>
+                  <a:tcPr>
+                    <a:solidFill>
+                      <a:srgbClr val="F4F6F9"/>
+                    </a:solidFill>
+                  </a:tcPr>
+                </a:tc>
+              </a:tr>
+            </a:tbl>
+          </a:graphicData>
+        </a:graphic>
+      </p:graphicFrame>
     </p:spTree>
   </p:cSld>
   <p:clrMapOvr>
@@ -7022,7 +7156,7 @@
                 </a:solidFill>
                 <a:latin typeface="Segoe UI"/>
               </a:rPr>
-              <a:t>CO6 Timeline - Where It Lands</a:t>
+              <a:t>Where to Focus</a:t>
             </a:r>
           </a:p>
         </p:txBody>
@@ -7057,7 +7191,7 @@
                 </a:solidFill>
                 <a:latin typeface="Segoe UI"/>
               </a:rPr>
-              <a:t>Spans the tail of PI-2 + all of PI-3  ·  staged monthly acceptance</a:t>
+              <a:t>Priorities for Development + supporting roles</a:t>
             </a:r>
           </a:p>
         </p:txBody>
@@ -7092,7 +7226,7 @@
                 </a:solidFill>
                 <a:latin typeface="Segoe UI"/>
               </a:rPr>
-              <a:t>PPL CMDB-CSDM  |  CO6 Deliverables (DRAFT)  |  Team FYI  -  Jul 10, 2026</a:t>
+              <a:t>PPL CMDB-CSDM  |  CO6 Deliverables  |  Team Focus  -  Jul 10, 2026</a:t>
             </a:r>
           </a:p>
         </p:txBody>
@@ -7105,14 +7239,14 @@
         </p:nvSpPr>
         <p:spPr>
           <a:xfrm>
-            <a:off x="1828800" y="1188720"/>
-            <a:ext cx="12700" cy="1417320"/>
+            <a:off x="502920" y="1316736"/>
+            <a:ext cx="109728" cy="566928"/>
           </a:xfrm>
           <a:prstGeom prst="rect">
             <a:avLst/>
           </a:prstGeom>
           <a:solidFill>
-            <a:srgbClr val="DDE3EA"/>
+            <a:srgbClr val="2E6DB4"/>
           </a:solidFill>
           <a:ln>
             <a:noFill/>
@@ -7149,8 +7283,8 @@
         </p:nvSpPr>
         <p:spPr>
           <a:xfrm>
-            <a:off x="1554480" y="2624328"/>
-            <a:ext cx="548640" cy="228600"/>
+            <a:off x="749808" y="1280160"/>
+            <a:ext cx="10881360" cy="292608"/>
           </a:xfrm>
           <a:prstGeom prst="rect">
             <a:avLst/>
@@ -7163,35 +7297,70 @@
           </a:bodyPr>
           <a:lstStyle/>
           <a:p>
-            <a:pPr algn="ctr"/>
-            <a:r>
-              <a:rPr sz="900" b="0" i="0">
+            <a:pPr algn="l"/>
+            <a:r>
+              <a:rPr sz="1350" b="1" i="0">
                 <a:solidFill>
-                  <a:srgbClr val="6B7280"/>
+                  <a:srgbClr val="1F3A5F"/>
                 </a:solidFill>
                 <a:latin typeface="Segoe UI"/>
               </a:rPr>
-              <a:t>Jun</a:t>
-            </a:r>
-          </a:p>
-        </p:txBody>
-      </p:sp>
-      <p:sp>
-        <p:nvSpPr>
-          <p:cNvPr id="9" name="Rectangle 8"/>
+              <a:t>Focus first: the Jul 31 items.</a:t>
+            </a:r>
+          </a:p>
+        </p:txBody>
+      </p:sp>
+      <p:sp>
+        <p:nvSpPr>
+          <p:cNvPr id="9" name="TextBox 8"/>
+          <p:cNvSpPr txBox="1"/>
+          <p:nvPr/>
+        </p:nvSpPr>
+        <p:spPr>
+          <a:xfrm>
+            <a:off x="749808" y="1591056"/>
+            <a:ext cx="10881360" cy="457200"/>
+          </a:xfrm>
+          <a:prstGeom prst="rect">
+            <a:avLst/>
+          </a:prstGeom>
+          <a:noFill/>
+        </p:spPr>
+        <p:txBody>
+          <a:bodyPr wrap="square" anchor="t" lIns="50800" rIns="50800" tIns="25400" bIns="25400">
+            <a:spAutoFit/>
+          </a:bodyPr>
+          <a:lstStyle/>
+          <a:p>
+            <a:pPr algn="l"/>
+            <a:r>
+              <a:rPr sz="1100" b="0" i="0">
+                <a:solidFill>
+                  <a:srgbClr val="2D2D2D"/>
+                </a:solidFill>
+                <a:latin typeface="Segoe UI"/>
+              </a:rPr>
+              <a:t>CMDB Governance and CI Coverage foundation (Computers &amp; Servers precedence) are due first and land in PI-2 - keep these moving now.</a:t>
+            </a:r>
+          </a:p>
+        </p:txBody>
+      </p:sp>
+      <p:sp>
+        <p:nvSpPr>
+          <p:cNvPr id="10" name="Rectangle 9"/>
           <p:cNvSpPr/>
           <p:nvPr/>
         </p:nvSpPr>
         <p:spPr>
           <a:xfrm>
-            <a:off x="3767328" y="1188720"/>
-            <a:ext cx="12700" cy="1417320"/>
+            <a:off x="502920" y="2157984"/>
+            <a:ext cx="109728" cy="566928"/>
           </a:xfrm>
           <a:prstGeom prst="rect">
             <a:avLst/>
           </a:prstGeom>
           <a:solidFill>
-            <a:srgbClr val="DDE3EA"/>
+            <a:srgbClr val="2E6DB4"/>
           </a:solidFill>
           <a:ln>
             <a:noFill/>
@@ -7222,14 +7391,14 @@
       </p:sp>
       <p:sp>
         <p:nvSpPr>
-          <p:cNvPr id="10" name="TextBox 9"/>
+          <p:cNvPr id="11" name="TextBox 10"/>
           <p:cNvSpPr txBox="1"/>
           <p:nvPr/>
         </p:nvSpPr>
         <p:spPr>
           <a:xfrm>
-            <a:off x="3493008" y="2624328"/>
-            <a:ext cx="548640" cy="228600"/>
+            <a:off x="749808" y="2121408"/>
+            <a:ext cx="10881360" cy="292608"/>
           </a:xfrm>
           <a:prstGeom prst="rect">
             <a:avLst/>
@@ -7242,35 +7411,70 @@
           </a:bodyPr>
           <a:lstStyle/>
           <a:p>
-            <a:pPr algn="ctr"/>
-            <a:r>
-              <a:rPr sz="900" b="0" i="0">
+            <a:pPr algn="l"/>
+            <a:r>
+              <a:rPr sz="1350" b="1" i="0">
                 <a:solidFill>
-                  <a:srgbClr val="6B7280"/>
+                  <a:srgbClr val="1F3A5F"/>
                 </a:solidFill>
                 <a:latin typeface="Segoe UI"/>
               </a:rPr>
-              <a:t>Jul</a:t>
-            </a:r>
-          </a:p>
-        </p:txBody>
-      </p:sp>
-      <p:sp>
-        <p:nvSpPr>
-          <p:cNvPr id="11" name="Rectangle 10"/>
+              <a:t>Biggest PI-3 build: Discovery + Mapping.</a:t>
+            </a:r>
+          </a:p>
+        </p:txBody>
+      </p:sp>
+      <p:sp>
+        <p:nvSpPr>
+          <p:cNvPr id="12" name="TextBox 11"/>
+          <p:cNvSpPr txBox="1"/>
+          <p:nvPr/>
+        </p:nvSpPr>
+        <p:spPr>
+          <a:xfrm>
+            <a:off x="749808" y="2432303"/>
+            <a:ext cx="10881360" cy="457200"/>
+          </a:xfrm>
+          <a:prstGeom prst="rect">
+            <a:avLst/>
+          </a:prstGeom>
+          <a:noFill/>
+        </p:spPr>
+        <p:txBody>
+          <a:bodyPr wrap="square" anchor="t" lIns="50800" rIns="50800" tIns="25400" bIns="25400">
+            <a:spAutoFit/>
+          </a:bodyPr>
+          <a:lstStyle/>
+          <a:p>
+            <a:pPr algn="l"/>
+            <a:r>
+              <a:rPr sz="1100" b="0" i="0">
+                <a:solidFill>
+                  <a:srgbClr val="2D2D2D"/>
+                </a:solidFill>
+                <a:latin typeface="Segoe UI"/>
+              </a:rPr>
+              <a:t>Network Gear, Service Mapping and the 90% coverage targets (Sep 30 / Oct 30) are the bulk of the work - discovery, credentials, and app-owner validation.</a:t>
+            </a:r>
+          </a:p>
+        </p:txBody>
+      </p:sp>
+      <p:sp>
+        <p:nvSpPr>
+          <p:cNvPr id="13" name="Rectangle 12"/>
           <p:cNvSpPr/>
           <p:nvPr/>
         </p:nvSpPr>
         <p:spPr>
           <a:xfrm>
-            <a:off x="5705856" y="1188720"/>
-            <a:ext cx="12700" cy="1417320"/>
+            <a:off x="502920" y="2999232"/>
+            <a:ext cx="109728" cy="566928"/>
           </a:xfrm>
           <a:prstGeom prst="rect">
             <a:avLst/>
           </a:prstGeom>
           <a:solidFill>
-            <a:srgbClr val="DDE3EA"/>
+            <a:srgbClr val="2E6DB4"/>
           </a:solidFill>
           <a:ln>
             <a:noFill/>
@@ -7301,14 +7505,14 @@
       </p:sp>
       <p:sp>
         <p:nvSpPr>
-          <p:cNvPr id="12" name="TextBox 11"/>
+          <p:cNvPr id="14" name="TextBox 13"/>
           <p:cNvSpPr txBox="1"/>
           <p:nvPr/>
         </p:nvSpPr>
         <p:spPr>
           <a:xfrm>
-            <a:off x="5431536" y="2624328"/>
-            <a:ext cx="548640" cy="228600"/>
+            <a:off x="749808" y="2962656"/>
+            <a:ext cx="10881360" cy="292608"/>
           </a:xfrm>
           <a:prstGeom prst="rect">
             <a:avLst/>
@@ -7321,35 +7525,70 @@
           </a:bodyPr>
           <a:lstStyle/>
           <a:p>
-            <a:pPr algn="ctr"/>
-            <a:r>
-              <a:rPr sz="900" b="0" i="0">
+            <a:pPr algn="l"/>
+            <a:r>
+              <a:rPr sz="1350" b="1" i="0">
                 <a:solidFill>
-                  <a:srgbClr val="6B7280"/>
+                  <a:srgbClr val="1F3A5F"/>
                 </a:solidFill>
                 <a:latin typeface="Segoe UI"/>
               </a:rPr>
-              <a:t>Aug</a:t>
-            </a:r>
-          </a:p>
-        </p:txBody>
-      </p:sp>
-      <p:sp>
-        <p:nvSpPr>
-          <p:cNvPr id="13" name="Rectangle 12"/>
+              <a:t>Unblock Qualys early.</a:t>
+            </a:r>
+          </a:p>
+        </p:txBody>
+      </p:sp>
+      <p:sp>
+        <p:nvSpPr>
+          <p:cNvPr id="15" name="TextBox 14"/>
+          <p:cNvSpPr txBox="1"/>
+          <p:nvPr/>
+        </p:nvSpPr>
+        <p:spPr>
+          <a:xfrm>
+            <a:off x="749808" y="3273551"/>
+            <a:ext cx="10881360" cy="457200"/>
+          </a:xfrm>
+          <a:prstGeom prst="rect">
+            <a:avLst/>
+          </a:prstGeom>
+          <a:noFill/>
+        </p:spPr>
+        <p:txBody>
+          <a:bodyPr wrap="square" anchor="t" lIns="50800" rIns="50800" tIns="25400" bIns="25400">
+            <a:spAutoFit/>
+          </a:bodyPr>
+          <a:lstStyle/>
+          <a:p>
+            <a:pPr algn="l"/>
+            <a:r>
+              <a:rPr sz="1100" b="0" i="0">
+                <a:solidFill>
+                  <a:srgbClr val="2D2D2D"/>
+                </a:solidFill>
+                <a:latin typeface="Segoe UI"/>
+              </a:rPr>
+              <a:t>One-way feed to PROD by Oct 27 - the plugin blocker needs clearing before the build can finish.</a:t>
+            </a:r>
+          </a:p>
+        </p:txBody>
+      </p:sp>
+      <p:sp>
+        <p:nvSpPr>
+          <p:cNvPr id="16" name="Rectangle 15"/>
           <p:cNvSpPr/>
           <p:nvPr/>
         </p:nvSpPr>
         <p:spPr>
           <a:xfrm>
-            <a:off x="7644383" y="1188720"/>
-            <a:ext cx="12700" cy="1417320"/>
+            <a:off x="502920" y="3840480"/>
+            <a:ext cx="109728" cy="566928"/>
           </a:xfrm>
           <a:prstGeom prst="rect">
             <a:avLst/>
           </a:prstGeom>
           <a:solidFill>
-            <a:srgbClr val="DDE3EA"/>
+            <a:srgbClr val="2E6DB4"/>
           </a:solidFill>
           <a:ln>
             <a:noFill/>
@@ -7380,14 +7619,14 @@
       </p:sp>
       <p:sp>
         <p:nvSpPr>
-          <p:cNvPr id="14" name="TextBox 13"/>
+          <p:cNvPr id="17" name="TextBox 16"/>
           <p:cNvSpPr txBox="1"/>
           <p:nvPr/>
         </p:nvSpPr>
         <p:spPr>
           <a:xfrm>
-            <a:off x="7370063" y="2624328"/>
-            <a:ext cx="548640" cy="228600"/>
+            <a:off x="749808" y="3803904"/>
+            <a:ext cx="10881360" cy="292608"/>
           </a:xfrm>
           <a:prstGeom prst="rect">
             <a:avLst/>
@@ -7400,35 +7639,70 @@
           </a:bodyPr>
           <a:lstStyle/>
           <a:p>
-            <a:pPr algn="ctr"/>
-            <a:r>
-              <a:rPr sz="900" b="0" i="0">
+            <a:pPr algn="l"/>
+            <a:r>
+              <a:rPr sz="1350" b="1" i="0">
                 <a:solidFill>
-                  <a:srgbClr val="6B7280"/>
+                  <a:srgbClr val="1F3A5F"/>
                 </a:solidFill>
                 <a:latin typeface="Segoe UI"/>
               </a:rPr>
-              <a:t>Sep</a:t>
-            </a:r>
-          </a:p>
-        </p:txBody>
-      </p:sp>
-      <p:sp>
-        <p:nvSpPr>
-          <p:cNvPr id="15" name="Rectangle 14"/>
+              <a:t>New to plan at PI-3 planning.</a:t>
+            </a:r>
+          </a:p>
+        </p:txBody>
+      </p:sp>
+      <p:sp>
+        <p:nvSpPr>
+          <p:cNvPr id="18" name="TextBox 17"/>
+          <p:cNvSpPr txBox="1"/>
+          <p:nvPr/>
+        </p:nvSpPr>
+        <p:spPr>
+          <a:xfrm>
+            <a:off x="749808" y="4114800"/>
+            <a:ext cx="10881360" cy="457200"/>
+          </a:xfrm>
+          <a:prstGeom prst="rect">
+            <a:avLst/>
+          </a:prstGeom>
+          <a:noFill/>
+        </p:spPr>
+        <p:txBody>
+          <a:bodyPr wrap="square" anchor="t" lIns="50800" rIns="50800" tIns="25400" bIns="25400">
+            <a:spAutoFit/>
+          </a:bodyPr>
+          <a:lstStyle/>
+          <a:p>
+            <a:pPr algn="l"/>
+            <a:r>
+              <a:rPr sz="1100" b="0" i="0">
+                <a:solidFill>
+                  <a:srgbClr val="2D2D2D"/>
+                </a:solidFill>
+                <a:latin typeface="Segoe UI"/>
+              </a:rPr>
+              <a:t>Legacy Platform Rationalization and ATF Strategy are greenfield - no stories yet; we scope and staff these at planning.</a:t>
+            </a:r>
+          </a:p>
+        </p:txBody>
+      </p:sp>
+      <p:sp>
+        <p:nvSpPr>
+          <p:cNvPr id="19" name="Rectangle 18"/>
           <p:cNvSpPr/>
           <p:nvPr/>
         </p:nvSpPr>
         <p:spPr>
           <a:xfrm>
-            <a:off x="9582912" y="1188720"/>
-            <a:ext cx="12700" cy="1417320"/>
+            <a:off x="502920" y="4681728"/>
+            <a:ext cx="109728" cy="566928"/>
           </a:xfrm>
           <a:prstGeom prst="rect">
             <a:avLst/>
           </a:prstGeom>
           <a:solidFill>
-            <a:srgbClr val="DDE3EA"/>
+            <a:srgbClr val="2E6DB4"/>
           </a:solidFill>
           <a:ln>
             <a:noFill/>
@@ -7459,14 +7733,14 @@
       </p:sp>
       <p:sp>
         <p:nvSpPr>
-          <p:cNvPr id="16" name="TextBox 15"/>
+          <p:cNvPr id="20" name="TextBox 19"/>
           <p:cNvSpPr txBox="1"/>
           <p:nvPr/>
         </p:nvSpPr>
         <p:spPr>
           <a:xfrm>
-            <a:off x="9308592" y="2624328"/>
-            <a:ext cx="548640" cy="228600"/>
+            <a:off x="749808" y="4645152"/>
+            <a:ext cx="10881360" cy="292608"/>
           </a:xfrm>
           <a:prstGeom prst="rect">
             <a:avLst/>
@@ -7479,35 +7753,70 @@
           </a:bodyPr>
           <a:lstStyle/>
           <a:p>
-            <a:pPr algn="ctr"/>
-            <a:r>
-              <a:rPr sz="900" b="0" i="0">
+            <a:pPr algn="l"/>
+            <a:r>
+              <a:rPr sz="1350" b="1" i="0">
                 <a:solidFill>
-                  <a:srgbClr val="6B7280"/>
+                  <a:srgbClr val="1F3A5F"/>
                 </a:solidFill>
                 <a:latin typeface="Segoe UI"/>
               </a:rPr>
-              <a:t>Oct</a:t>
-            </a:r>
-          </a:p>
-        </p:txBody>
-      </p:sp>
-      <p:sp>
-        <p:nvSpPr>
-          <p:cNvPr id="17" name="Rectangle 16"/>
+              <a:t>Supporting lanes stand up separately.</a:t>
+            </a:r>
+          </a:p>
+        </p:txBody>
+      </p:sp>
+      <p:sp>
+        <p:nvSpPr>
+          <p:cNvPr id="21" name="TextBox 20"/>
+          <p:cNvSpPr txBox="1"/>
+          <p:nvPr/>
+        </p:nvSpPr>
+        <p:spPr>
+          <a:xfrm>
+            <a:off x="749808" y="4956048"/>
+            <a:ext cx="10881360" cy="457200"/>
+          </a:xfrm>
+          <a:prstGeom prst="rect">
+            <a:avLst/>
+          </a:prstGeom>
+          <a:noFill/>
+        </p:spPr>
+        <p:txBody>
+          <a:bodyPr wrap="square" anchor="t" lIns="50800" rIns="50800" tIns="25400" bIns="25400">
+            <a:spAutoFit/>
+          </a:bodyPr>
+          <a:lstStyle/>
+          <a:p>
+            <a:pPr algn="l"/>
+            <a:r>
+              <a:rPr sz="1100" b="0" i="0">
+                <a:solidFill>
+                  <a:srgbClr val="2D2D2D"/>
+                </a:solidFill>
+                <a:latin typeface="Segoe UI"/>
+              </a:rPr>
+              <a:t>ITSM Product Management and Platform Support are PO / BAU capacity, not core CMDB dev - flagged so they're on the radar.</a:t>
+            </a:r>
+          </a:p>
+        </p:txBody>
+      </p:sp>
+      <p:sp>
+        <p:nvSpPr>
+          <p:cNvPr id="22" name="Rectangle 21"/>
           <p:cNvSpPr/>
           <p:nvPr/>
         </p:nvSpPr>
         <p:spPr>
           <a:xfrm>
-            <a:off x="11521440" y="1188720"/>
-            <a:ext cx="12700" cy="1417320"/>
+            <a:off x="502920" y="5522976"/>
+            <a:ext cx="109728" cy="566928"/>
           </a:xfrm>
           <a:prstGeom prst="rect">
             <a:avLst/>
           </a:prstGeom>
           <a:solidFill>
-            <a:srgbClr val="DDE3EA"/>
+            <a:srgbClr val="2E6DB4"/>
           </a:solidFill>
           <a:ln>
             <a:noFill/>
@@ -7538,1824 +7847,6 @@
       </p:sp>
       <p:sp>
         <p:nvSpPr>
-          <p:cNvPr id="18" name="TextBox 17"/>
-          <p:cNvSpPr txBox="1"/>
-          <p:nvPr/>
-        </p:nvSpPr>
-        <p:spPr>
-          <a:xfrm>
-            <a:off x="11247120" y="2624328"/>
-            <a:ext cx="548640" cy="228600"/>
-          </a:xfrm>
-          <a:prstGeom prst="rect">
-            <a:avLst/>
-          </a:prstGeom>
-          <a:noFill/>
-        </p:spPr>
-        <p:txBody>
-          <a:bodyPr wrap="square" anchor="t" lIns="50800" rIns="50800" tIns="25400" bIns="25400">
-            <a:spAutoFit/>
-          </a:bodyPr>
-          <a:lstStyle/>
-          <a:p>
-            <a:pPr algn="ctr"/>
-            <a:r>
-              <a:rPr sz="900" b="0" i="0">
-                <a:solidFill>
-                  <a:srgbClr val="6B7280"/>
-                </a:solidFill>
-                <a:latin typeface="Segoe UI"/>
-              </a:rPr>
-              <a:t>Nov</a:t>
-            </a:r>
-          </a:p>
-        </p:txBody>
-      </p:sp>
-      <p:sp>
-        <p:nvSpPr>
-          <p:cNvPr id="19" name="TextBox 18"/>
-          <p:cNvSpPr txBox="1"/>
-          <p:nvPr/>
-        </p:nvSpPr>
-        <p:spPr>
-          <a:xfrm>
-            <a:off x="502920" y="1188720"/>
-            <a:ext cx="1280160" cy="1417320"/>
-          </a:xfrm>
-          <a:prstGeom prst="rect">
-            <a:avLst/>
-          </a:prstGeom>
-          <a:noFill/>
-        </p:spPr>
-        <p:txBody>
-          <a:bodyPr wrap="square" anchor="ctr" lIns="50800" rIns="50800" tIns="25400" bIns="25400">
-            <a:spAutoFit/>
-          </a:bodyPr>
-          <a:lstStyle/>
-          <a:p>
-            <a:pPr algn="l"/>
-            <a:r>
-              <a:rPr sz="900" b="1" i="0">
-                <a:solidFill>
-                  <a:srgbClr val="6B7280"/>
-                </a:solidFill>
-                <a:latin typeface="Segoe UI"/>
-              </a:rPr>
-              <a:t>Contract /</a:t>
-            </a:r>
-          </a:p>
-          <a:p>
-            <a:pPr algn="l"/>
-            <a:r>
-              <a:rPr sz="900" b="1" i="0">
-                <a:solidFill>
-                  <a:srgbClr val="6B7280"/>
-                </a:solidFill>
-                <a:latin typeface="Segoe UI"/>
-              </a:rPr>
-              <a:t>PI window</a:t>
-            </a:r>
-          </a:p>
-        </p:txBody>
-      </p:sp>
-      <p:sp>
-        <p:nvSpPr>
-          <p:cNvPr id="20" name="Rectangle 19"/>
-          <p:cNvSpPr/>
-          <p:nvPr/>
-        </p:nvSpPr>
-        <p:spPr>
-          <a:xfrm>
-            <a:off x="1828800" y="1243584"/>
-            <a:ext cx="1874556" cy="274320"/>
-          </a:xfrm>
-          <a:prstGeom prst="rect">
-            <a:avLst/>
-          </a:prstGeom>
-          <a:solidFill>
-            <a:srgbClr val="8A929E"/>
-          </a:solidFill>
-          <a:ln>
-            <a:noFill/>
-          </a:ln>
-          <a:effectLst/>
-        </p:spPr>
-        <p:style>
-          <a:lnRef idx="1">
-            <a:schemeClr val="accent1"/>
-          </a:lnRef>
-          <a:fillRef idx="3">
-            <a:schemeClr val="accent1"/>
-          </a:fillRef>
-          <a:effectRef idx="2">
-            <a:schemeClr val="accent1"/>
-          </a:effectRef>
-          <a:fontRef idx="minor">
-            <a:schemeClr val="lt1"/>
-          </a:fontRef>
-        </p:style>
-        <p:txBody>
-          <a:bodyPr rtlCol="0" anchor="ctr"/>
-          <a:lstStyle/>
-          <a:p>
-            <a:pPr algn="ctr"/>
-          </a:p>
-        </p:txBody>
-      </p:sp>
-      <p:sp>
-        <p:nvSpPr>
-          <p:cNvPr id="21" name="TextBox 20"/>
-          <p:cNvSpPr txBox="1"/>
-          <p:nvPr/>
-        </p:nvSpPr>
-        <p:spPr>
-          <a:xfrm>
-            <a:off x="1901952" y="1243584"/>
-            <a:ext cx="1764828" cy="274320"/>
-          </a:xfrm>
-          <a:prstGeom prst="rect">
-            <a:avLst/>
-          </a:prstGeom>
-          <a:noFill/>
-        </p:spPr>
-        <p:txBody>
-          <a:bodyPr wrap="square" anchor="ctr" lIns="50800" rIns="50800" tIns="25400" bIns="25400">
-            <a:spAutoFit/>
-          </a:bodyPr>
-          <a:lstStyle/>
-          <a:p>
-            <a:pPr algn="l"/>
-            <a:r>
-              <a:rPr sz="950" b="1" i="0">
-                <a:solidFill>
-                  <a:srgbClr val="FFFFFF"/>
-                </a:solidFill>
-                <a:latin typeface="Segoe UI"/>
-              </a:rPr>
-              <a:t>CO5 (ends Jun 30)</a:t>
-            </a:r>
-          </a:p>
-        </p:txBody>
-      </p:sp>
-      <p:sp>
-        <p:nvSpPr>
-          <p:cNvPr id="22" name="Rectangle 21"/>
-          <p:cNvSpPr/>
-          <p:nvPr/>
-        </p:nvSpPr>
-        <p:spPr>
-          <a:xfrm>
-            <a:off x="3767328" y="1586484"/>
-            <a:ext cx="7628107" cy="274320"/>
-          </a:xfrm>
-          <a:prstGeom prst="rect">
-            <a:avLst/>
-          </a:prstGeom>
-          <a:solidFill>
-            <a:srgbClr val="2E6DB4"/>
-          </a:solidFill>
-          <a:ln>
-            <a:noFill/>
-          </a:ln>
-          <a:effectLst/>
-        </p:spPr>
-        <p:style>
-          <a:lnRef idx="1">
-            <a:schemeClr val="accent1"/>
-          </a:lnRef>
-          <a:fillRef idx="3">
-            <a:schemeClr val="accent1"/>
-          </a:fillRef>
-          <a:effectRef idx="2">
-            <a:schemeClr val="accent1"/>
-          </a:effectRef>
-          <a:fontRef idx="minor">
-            <a:schemeClr val="lt1"/>
-          </a:fontRef>
-        </p:style>
-        <p:txBody>
-          <a:bodyPr rtlCol="0" anchor="ctr"/>
-          <a:lstStyle/>
-          <a:p>
-            <a:pPr algn="ctr"/>
-          </a:p>
-        </p:txBody>
-      </p:sp>
-      <p:sp>
-        <p:nvSpPr>
-          <p:cNvPr id="23" name="TextBox 22"/>
-          <p:cNvSpPr txBox="1"/>
-          <p:nvPr/>
-        </p:nvSpPr>
-        <p:spPr>
-          <a:xfrm>
-            <a:off x="3840480" y="1586484"/>
-            <a:ext cx="7518379" cy="274320"/>
-          </a:xfrm>
-          <a:prstGeom prst="rect">
-            <a:avLst/>
-          </a:prstGeom>
-          <a:noFill/>
-        </p:spPr>
-        <p:txBody>
-          <a:bodyPr wrap="square" anchor="ctr" lIns="50800" rIns="50800" tIns="25400" bIns="25400">
-            <a:spAutoFit/>
-          </a:bodyPr>
-          <a:lstStyle/>
-          <a:p>
-            <a:pPr algn="l"/>
-            <a:r>
-              <a:rPr sz="950" b="1" i="0">
-                <a:solidFill>
-                  <a:srgbClr val="FFFFFF"/>
-                </a:solidFill>
-                <a:latin typeface="Segoe UI"/>
-              </a:rPr>
-              <a:t>CO6   Jul 1 - Oct 30</a:t>
-            </a:r>
-          </a:p>
-        </p:txBody>
-      </p:sp>
-      <p:sp>
-        <p:nvSpPr>
-          <p:cNvPr id="24" name="Rectangle 23"/>
-          <p:cNvSpPr/>
-          <p:nvPr/>
-        </p:nvSpPr>
-        <p:spPr>
-          <a:xfrm>
-            <a:off x="1828800" y="1929384"/>
-            <a:ext cx="4065093" cy="274320"/>
-          </a:xfrm>
-          <a:prstGeom prst="rect">
-            <a:avLst/>
-          </a:prstGeom>
-          <a:solidFill>
-            <a:srgbClr val="6E88AE"/>
-          </a:solidFill>
-          <a:ln>
-            <a:noFill/>
-          </a:ln>
-          <a:effectLst/>
-        </p:spPr>
-        <p:style>
-          <a:lnRef idx="1">
-            <a:schemeClr val="accent1"/>
-          </a:lnRef>
-          <a:fillRef idx="3">
-            <a:schemeClr val="accent1"/>
-          </a:fillRef>
-          <a:effectRef idx="2">
-            <a:schemeClr val="accent1"/>
-          </a:effectRef>
-          <a:fontRef idx="minor">
-            <a:schemeClr val="lt1"/>
-          </a:fontRef>
-        </p:style>
-        <p:txBody>
-          <a:bodyPr rtlCol="0" anchor="ctr"/>
-          <a:lstStyle/>
-          <a:p>
-            <a:pPr algn="ctr"/>
-          </a:p>
-        </p:txBody>
-      </p:sp>
-      <p:sp>
-        <p:nvSpPr>
-          <p:cNvPr id="25" name="TextBox 24"/>
-          <p:cNvSpPr txBox="1"/>
-          <p:nvPr/>
-        </p:nvSpPr>
-        <p:spPr>
-          <a:xfrm>
-            <a:off x="1901952" y="1929384"/>
-            <a:ext cx="3955365" cy="274320"/>
-          </a:xfrm>
-          <a:prstGeom prst="rect">
-            <a:avLst/>
-          </a:prstGeom>
-          <a:noFill/>
-        </p:spPr>
-        <p:txBody>
-          <a:bodyPr wrap="square" anchor="ctr" lIns="50800" rIns="50800" tIns="25400" bIns="25400">
-            <a:spAutoFit/>
-          </a:bodyPr>
-          <a:lstStyle/>
-          <a:p>
-            <a:pPr algn="l"/>
-            <a:r>
-              <a:rPr sz="950" b="1" i="0">
-                <a:solidFill>
-                  <a:srgbClr val="FFFFFF"/>
-                </a:solidFill>
-                <a:latin typeface="Segoe UI"/>
-              </a:rPr>
-              <a:t>PI-2  (-&gt; Aug 4)</a:t>
-            </a:r>
-          </a:p>
-        </p:txBody>
-      </p:sp>
-      <p:sp>
-        <p:nvSpPr>
-          <p:cNvPr id="26" name="Rectangle 25"/>
-          <p:cNvSpPr/>
-          <p:nvPr/>
-        </p:nvSpPr>
-        <p:spPr>
-          <a:xfrm>
-            <a:off x="5955926" y="2272284"/>
-            <a:ext cx="5253410" cy="274320"/>
-          </a:xfrm>
-          <a:prstGeom prst="rect">
-            <a:avLst/>
-          </a:prstGeom>
-          <a:solidFill>
-            <a:srgbClr val="2E8B57"/>
-          </a:solidFill>
-          <a:ln>
-            <a:noFill/>
-          </a:ln>
-          <a:effectLst/>
-        </p:spPr>
-        <p:style>
-          <a:lnRef idx="1">
-            <a:schemeClr val="accent1"/>
-          </a:lnRef>
-          <a:fillRef idx="3">
-            <a:schemeClr val="accent1"/>
-          </a:fillRef>
-          <a:effectRef idx="2">
-            <a:schemeClr val="accent1"/>
-          </a:effectRef>
-          <a:fontRef idx="minor">
-            <a:schemeClr val="lt1"/>
-          </a:fontRef>
-        </p:style>
-        <p:txBody>
-          <a:bodyPr rtlCol="0" anchor="ctr"/>
-          <a:lstStyle/>
-          <a:p>
-            <a:pPr algn="ctr"/>
-          </a:p>
-        </p:txBody>
-      </p:sp>
-      <p:sp>
-        <p:nvSpPr>
-          <p:cNvPr id="27" name="TextBox 26"/>
-          <p:cNvSpPr txBox="1"/>
-          <p:nvPr/>
-        </p:nvSpPr>
-        <p:spPr>
-          <a:xfrm>
-            <a:off x="6029078" y="2272284"/>
-            <a:ext cx="5143682" cy="274320"/>
-          </a:xfrm>
-          <a:prstGeom prst="rect">
-            <a:avLst/>
-          </a:prstGeom>
-          <a:noFill/>
-        </p:spPr>
-        <p:txBody>
-          <a:bodyPr wrap="square" anchor="ctr" lIns="50800" rIns="50800" tIns="25400" bIns="25400">
-            <a:spAutoFit/>
-          </a:bodyPr>
-          <a:lstStyle/>
-          <a:p>
-            <a:pPr algn="l"/>
-            <a:r>
-              <a:rPr sz="950" b="1" i="0">
-                <a:solidFill>
-                  <a:srgbClr val="FFFFFF"/>
-                </a:solidFill>
-                <a:latin typeface="Segoe UI"/>
-              </a:rPr>
-              <a:t>PI-3  Aug 5 - Oct 27</a:t>
-            </a:r>
-          </a:p>
-        </p:txBody>
-      </p:sp>
-      <p:graphicFrame>
-        <p:nvGraphicFramePr>
-          <p:cNvPr id="28" name="Table 27"/>
-          <p:cNvGraphicFramePr>
-            <a:graphicFrameLocks noGrp="1"/>
-          </p:cNvGraphicFramePr>
-          <p:nvPr/>
-        </p:nvGraphicFramePr>
-        <p:xfrm>
-          <a:off x="502920" y="3154680"/>
-          <a:ext cx="11155680" cy="2743200"/>
-        </p:xfrm>
-        <a:graphic>
-          <a:graphicData uri="http://schemas.openxmlformats.org/drawingml/2006/table">
-            <a:tbl>
-              <a:tblPr firstRow="1" bandRow="1">
-                <a:tableStyleId>{5C22544A-7EE6-4342-B048-85BDC9FD1C3A}</a:tableStyleId>
-              </a:tblPr>
-              <a:tblGrid>
-                <a:gridCol w="1371600"/>
-                <a:gridCol w="7223760"/>
-                <a:gridCol w="2560320"/>
-              </a:tblGrid>
-              <a:tr h="342900">
-                <a:tc>
-                  <a:txBody>
-                    <a:bodyPr wrap="square"/>
-                    <a:lstStyle/>
-                    <a:p>
-                      <a:pPr algn="ctr"/>
-                      <a:r>
-                        <a:rPr sz="1100" b="1" i="0">
-                          <a:solidFill>
-                            <a:srgbClr val="FFFFFF"/>
-                          </a:solidFill>
-                          <a:latin typeface="Segoe UI"/>
-                        </a:rPr>
-                        <a:t>When</a:t>
-                      </a:r>
-                    </a:p>
-                  </a:txBody>
-                  <a:tcPr>
-                    <a:solidFill>
-                      <a:srgbClr val="1F3A5F"/>
-                    </a:solidFill>
-                  </a:tcPr>
-                </a:tc>
-                <a:tc>
-                  <a:txBody>
-                    <a:bodyPr wrap="square"/>
-                    <a:lstStyle/>
-                    <a:p>
-                      <a:pPr algn="l"/>
-                      <a:r>
-                        <a:rPr sz="1100" b="1" i="0">
-                          <a:solidFill>
-                            <a:srgbClr val="FFFFFF"/>
-                          </a:solidFill>
-                          <a:latin typeface="Segoe UI"/>
-                        </a:rPr>
-                        <a:t>What's due</a:t>
-                      </a:r>
-                    </a:p>
-                  </a:txBody>
-                  <a:tcPr>
-                    <a:solidFill>
-                      <a:srgbClr val="1F3A5F"/>
-                    </a:solidFill>
-                  </a:tcPr>
-                </a:tc>
-                <a:tc>
-                  <a:txBody>
-                    <a:bodyPr wrap="square"/>
-                    <a:lstStyle/>
-                    <a:p>
-                      <a:pPr algn="ctr"/>
-                      <a:r>
-                        <a:rPr sz="1100" b="1" i="0">
-                          <a:solidFill>
-                            <a:srgbClr val="FFFFFF"/>
-                          </a:solidFill>
-                          <a:latin typeface="Segoe UI"/>
-                        </a:rPr>
-                        <a:t>Lands in</a:t>
-                      </a:r>
-                    </a:p>
-                  </a:txBody>
-                  <a:tcPr>
-                    <a:solidFill>
-                      <a:srgbClr val="1F3A5F"/>
-                    </a:solidFill>
-                  </a:tcPr>
-                </a:tc>
-              </a:tr>
-              <a:tr h="342900">
-                <a:tc>
-                  <a:txBody>
-                    <a:bodyPr wrap="square"/>
-                    <a:lstStyle/>
-                    <a:p>
-                      <a:pPr algn="ctr"/>
-                      <a:r>
-                        <a:rPr sz="1050" b="1" i="0">
-                          <a:solidFill>
-                            <a:srgbClr val="1F3A5F"/>
-                          </a:solidFill>
-                          <a:latin typeface="Segoe UI"/>
-                        </a:rPr>
-                        <a:t>Jul 31</a:t>
-                      </a:r>
-                    </a:p>
-                  </a:txBody>
-                  <a:tcPr>
-                    <a:solidFill>
-                      <a:srgbClr val="F4F6F9"/>
-                    </a:solidFill>
-                  </a:tcPr>
-                </a:tc>
-                <a:tc>
-                  <a:txBody>
-                    <a:bodyPr wrap="square"/>
-                    <a:lstStyle/>
-                    <a:p>
-                      <a:pPr algn="l"/>
-                      <a:r>
-                        <a:rPr sz="900" b="0" i="0">
-                          <a:solidFill>
-                            <a:srgbClr val="2D2D2D"/>
-                          </a:solidFill>
-                          <a:latin typeface="Segoe UI"/>
-                        </a:rPr>
-                        <a:t>CMDB Governance (data dictionary incl. Databases; Data Cert all CI classes; ESS-02; SOX)  ·  CI Coverage foundation (Computers &amp; Servers precedence)</a:t>
-                      </a:r>
-                    </a:p>
-                  </a:txBody>
-                  <a:tcPr>
-                    <a:solidFill>
-                      <a:srgbClr val="F4F6F9"/>
-                    </a:solidFill>
-                  </a:tcPr>
-                </a:tc>
-                <a:tc>
-                  <a:txBody>
-                    <a:bodyPr wrap="square"/>
-                    <a:lstStyle/>
-                    <a:p>
-                      <a:pPr algn="ctr"/>
-                      <a:r>
-                        <a:rPr sz="950" b="1" i="0">
-                          <a:solidFill>
-                            <a:srgbClr val="2E6DB4"/>
-                          </a:solidFill>
-                          <a:latin typeface="Segoe UI"/>
-                        </a:rPr>
-                        <a:t>PI-2 Iter 2.5 / 2.6 (IP)</a:t>
-                      </a:r>
-                    </a:p>
-                  </a:txBody>
-                  <a:tcPr>
-                    <a:solidFill>
-                      <a:srgbClr val="F4F6F9"/>
-                    </a:solidFill>
-                  </a:tcPr>
-                </a:tc>
-              </a:tr>
-              <a:tr h="342900">
-                <a:tc>
-                  <a:txBody>
-                    <a:bodyPr wrap="square"/>
-                    <a:lstStyle/>
-                    <a:p>
-                      <a:pPr algn="ctr"/>
-                      <a:r>
-                        <a:rPr sz="1050" b="1" i="0">
-                          <a:solidFill>
-                            <a:srgbClr val="1F3A5F"/>
-                          </a:solidFill>
-                          <a:latin typeface="Segoe UI"/>
-                        </a:rPr>
-                        <a:t>Aug 31</a:t>
-                      </a:r>
-                    </a:p>
-                  </a:txBody>
-                  <a:tcPr>
-                    <a:solidFill>
-                      <a:srgbClr val="FFFFFF"/>
-                    </a:solidFill>
-                  </a:tcPr>
-                </a:tc>
-                <a:tc>
-                  <a:txBody>
-                    <a:bodyPr wrap="square"/>
-                    <a:lstStyle/>
-                    <a:p>
-                      <a:pPr algn="l"/>
-                      <a:r>
-                        <a:rPr sz="900" b="0" i="0">
-                          <a:solidFill>
-                            <a:srgbClr val="2D2D2D"/>
-                          </a:solidFill>
-                          <a:latin typeface="Segoe UI"/>
-                        </a:rPr>
-                        <a:t>Network Gear (creds &amp; schedules)  ·  Service Mapping (initial maps)  ·  Legacy Platform (analysis) - staged</a:t>
-                      </a:r>
-                    </a:p>
-                  </a:txBody>
-                  <a:tcPr>
-                    <a:solidFill>
-                      <a:srgbClr val="FFFFFF"/>
-                    </a:solidFill>
-                  </a:tcPr>
-                </a:tc>
-                <a:tc>
-                  <a:txBody>
-                    <a:bodyPr wrap="square"/>
-                    <a:lstStyle/>
-                    <a:p>
-                      <a:pPr algn="ctr"/>
-                      <a:r>
-                        <a:rPr sz="950" b="1" i="0">
-                          <a:solidFill>
-                            <a:srgbClr val="2E6DB4"/>
-                          </a:solidFill>
-                          <a:latin typeface="Segoe UI"/>
-                        </a:rPr>
-                        <a:t>PI-3</a:t>
-                      </a:r>
-                    </a:p>
-                  </a:txBody>
-                  <a:tcPr>
-                    <a:solidFill>
-                      <a:srgbClr val="FFFFFF"/>
-                    </a:solidFill>
-                  </a:tcPr>
-                </a:tc>
-              </a:tr>
-              <a:tr h="342900">
-                <a:tc>
-                  <a:txBody>
-                    <a:bodyPr wrap="square"/>
-                    <a:lstStyle/>
-                    <a:p>
-                      <a:pPr algn="ctr"/>
-                      <a:r>
-                        <a:rPr sz="1050" b="1" i="0">
-                          <a:solidFill>
-                            <a:srgbClr val="1F3A5F"/>
-                          </a:solidFill>
-                          <a:latin typeface="Segoe UI"/>
-                        </a:rPr>
-                        <a:t>Sep 30</a:t>
-                      </a:r>
-                    </a:p>
-                  </a:txBody>
-                  <a:tcPr>
-                    <a:solidFill>
-                      <a:srgbClr val="F4F6F9"/>
-                    </a:solidFill>
-                  </a:tcPr>
-                </a:tc>
-                <a:tc>
-                  <a:txBody>
-                    <a:bodyPr wrap="square"/>
-                    <a:lstStyle/>
-                    <a:p>
-                      <a:pPr algn="l"/>
-                      <a:r>
-                        <a:rPr sz="900" b="0" i="0">
-                          <a:solidFill>
-                            <a:srgbClr val="2D2D2D"/>
-                          </a:solidFill>
-                          <a:latin typeface="Segoe UI"/>
-                        </a:rPr>
-                        <a:t>CI Coverage - Computers 90% managed  ·  Network Gear mandatory attributes</a:t>
-                      </a:r>
-                    </a:p>
-                  </a:txBody>
-                  <a:tcPr>
-                    <a:solidFill>
-                      <a:srgbClr val="F4F6F9"/>
-                    </a:solidFill>
-                  </a:tcPr>
-                </a:tc>
-                <a:tc>
-                  <a:txBody>
-                    <a:bodyPr wrap="square"/>
-                    <a:lstStyle/>
-                    <a:p>
-                      <a:pPr algn="ctr"/>
-                      <a:r>
-                        <a:rPr sz="950" b="1" i="0">
-                          <a:solidFill>
-                            <a:srgbClr val="2E6DB4"/>
-                          </a:solidFill>
-                          <a:latin typeface="Segoe UI"/>
-                        </a:rPr>
-                        <a:t>PI-3</a:t>
-                      </a:r>
-                    </a:p>
-                  </a:txBody>
-                  <a:tcPr>
-                    <a:solidFill>
-                      <a:srgbClr val="F4F6F9"/>
-                    </a:solidFill>
-                  </a:tcPr>
-                </a:tc>
-              </a:tr>
-              <a:tr h="342900">
-                <a:tc>
-                  <a:txBody>
-                    <a:bodyPr wrap="square"/>
-                    <a:lstStyle/>
-                    <a:p>
-                      <a:pPr algn="ctr"/>
-                      <a:r>
-                        <a:rPr sz="1050" b="1" i="0">
-                          <a:solidFill>
-                            <a:srgbClr val="1F3A5F"/>
-                          </a:solidFill>
-                          <a:latin typeface="Segoe UI"/>
-                        </a:rPr>
-                        <a:t>Oct 27</a:t>
-                      </a:r>
-                    </a:p>
-                  </a:txBody>
-                  <a:tcPr>
-                    <a:solidFill>
-                      <a:srgbClr val="FFFFFF"/>
-                    </a:solidFill>
-                  </a:tcPr>
-                </a:tc>
-                <a:tc>
-                  <a:txBody>
-                    <a:bodyPr wrap="square"/>
-                    <a:lstStyle/>
-                    <a:p>
-                      <a:pPr algn="l"/>
-                      <a:r>
-                        <a:rPr sz="900" b="0" i="0">
-                          <a:solidFill>
-                            <a:srgbClr val="2D2D2D"/>
-                          </a:solidFill>
-                          <a:latin typeface="Segoe UI"/>
-                        </a:rPr>
-                        <a:t>Qualys -&gt; ServiceNow live in PROD</a:t>
-                      </a:r>
-                    </a:p>
-                  </a:txBody>
-                  <a:tcPr>
-                    <a:solidFill>
-                      <a:srgbClr val="FFFFFF"/>
-                    </a:solidFill>
-                  </a:tcPr>
-                </a:tc>
-                <a:tc>
-                  <a:txBody>
-                    <a:bodyPr wrap="square"/>
-                    <a:lstStyle/>
-                    <a:p>
-                      <a:pPr algn="ctr"/>
-                      <a:r>
-                        <a:rPr sz="950" b="1" i="0">
-                          <a:solidFill>
-                            <a:srgbClr val="2E6DB4"/>
-                          </a:solidFill>
-                          <a:latin typeface="Segoe UI"/>
-                        </a:rPr>
-                        <a:t>PI-3</a:t>
-                      </a:r>
-                    </a:p>
-                  </a:txBody>
-                  <a:tcPr>
-                    <a:solidFill>
-                      <a:srgbClr val="FFFFFF"/>
-                    </a:solidFill>
-                  </a:tcPr>
-                </a:tc>
-              </a:tr>
-              <a:tr h="342900">
-                <a:tc>
-                  <a:txBody>
-                    <a:bodyPr wrap="square"/>
-                    <a:lstStyle/>
-                    <a:p>
-                      <a:pPr algn="ctr"/>
-                      <a:r>
-                        <a:rPr sz="1050" b="1" i="0">
-                          <a:solidFill>
-                            <a:srgbClr val="1F3A5F"/>
-                          </a:solidFill>
-                          <a:latin typeface="Segoe UI"/>
-                        </a:rPr>
-                        <a:t>Oct 30</a:t>
-                      </a:r>
-                    </a:p>
-                  </a:txBody>
-                  <a:tcPr>
-                    <a:solidFill>
-                      <a:srgbClr val="F4F6F9"/>
-                    </a:solidFill>
-                  </a:tcPr>
-                </a:tc>
-                <a:tc>
-                  <a:txBody>
-                    <a:bodyPr wrap="square"/>
-                    <a:lstStyle/>
-                    <a:p>
-                      <a:pPr algn="l"/>
-                      <a:r>
-                        <a:rPr sz="900" b="0" i="0">
-                          <a:solidFill>
-                            <a:srgbClr val="2D2D2D"/>
-                          </a:solidFill>
-                          <a:latin typeface="Segoe UI"/>
-                        </a:rPr>
-                        <a:t>CI Coverage - Servers 90%  ·  Network Gear 90%  ·  Service Mapping (10 apps)  ·  Legacy Platform (migration plan)</a:t>
-                      </a:r>
-                    </a:p>
-                  </a:txBody>
-                  <a:tcPr>
-                    <a:solidFill>
-                      <a:srgbClr val="F4F6F9"/>
-                    </a:solidFill>
-                  </a:tcPr>
-                </a:tc>
-                <a:tc>
-                  <a:txBody>
-                    <a:bodyPr wrap="square"/>
-                    <a:lstStyle/>
-                    <a:p>
-                      <a:pPr algn="ctr"/>
-                      <a:r>
-                        <a:rPr sz="950" b="1" i="0">
-                          <a:solidFill>
-                            <a:srgbClr val="2E6DB4"/>
-                          </a:solidFill>
-                          <a:latin typeface="Segoe UI"/>
-                        </a:rPr>
-                        <a:t>PI-3</a:t>
-                      </a:r>
-                    </a:p>
-                  </a:txBody>
-                  <a:tcPr>
-                    <a:solidFill>
-                      <a:srgbClr val="F4F6F9"/>
-                    </a:solidFill>
-                  </a:tcPr>
-                </a:tc>
-              </a:tr>
-              <a:tr h="342900">
-                <a:tc>
-                  <a:txBody>
-                    <a:bodyPr wrap="square"/>
-                    <a:lstStyle/>
-                    <a:p>
-                      <a:pPr algn="ctr"/>
-                      <a:r>
-                        <a:rPr sz="1050" b="1" i="0">
-                          <a:solidFill>
-                            <a:srgbClr val="1F3A5F"/>
-                          </a:solidFill>
-                          <a:latin typeface="Segoe UI"/>
-                        </a:rPr>
-                        <a:t>Oct 31</a:t>
-                      </a:r>
-                    </a:p>
-                  </a:txBody>
-                  <a:tcPr>
-                    <a:solidFill>
-                      <a:srgbClr val="FFFFFF"/>
-                    </a:solidFill>
-                  </a:tcPr>
-                </a:tc>
-                <a:tc>
-                  <a:txBody>
-                    <a:bodyPr wrap="square"/>
-                    <a:lstStyle/>
-                    <a:p>
-                      <a:pPr algn="l"/>
-                      <a:r>
-                        <a:rPr sz="900" b="0" i="0">
-                          <a:solidFill>
-                            <a:srgbClr val="2D2D2D"/>
-                          </a:solidFill>
-                          <a:latin typeface="Segoe UI"/>
-                        </a:rPr>
-                        <a:t>ATF Strategy (rollout plan)</a:t>
-                      </a:r>
-                    </a:p>
-                  </a:txBody>
-                  <a:tcPr>
-                    <a:solidFill>
-                      <a:srgbClr val="FFFFFF"/>
-                    </a:solidFill>
-                  </a:tcPr>
-                </a:tc>
-                <a:tc>
-                  <a:txBody>
-                    <a:bodyPr wrap="square"/>
-                    <a:lstStyle/>
-                    <a:p>
-                      <a:pPr algn="ctr"/>
-                      <a:r>
-                        <a:rPr sz="950" b="1" i="0">
-                          <a:solidFill>
-                            <a:srgbClr val="2E6DB4"/>
-                          </a:solidFill>
-                          <a:latin typeface="Segoe UI"/>
-                        </a:rPr>
-                        <a:t>PI-3</a:t>
-                      </a:r>
-                    </a:p>
-                  </a:txBody>
-                  <a:tcPr>
-                    <a:solidFill>
-                      <a:srgbClr val="FFFFFF"/>
-                    </a:solidFill>
-                  </a:tcPr>
-                </a:tc>
-              </a:tr>
-              <a:tr h="342900">
-                <a:tc>
-                  <a:txBody>
-                    <a:bodyPr wrap="square"/>
-                    <a:lstStyle/>
-                    <a:p>
-                      <a:pPr algn="ctr"/>
-                      <a:r>
-                        <a:rPr sz="1050" b="1" i="0">
-                          <a:solidFill>
-                            <a:srgbClr val="1F3A5F"/>
-                          </a:solidFill>
-                          <a:latin typeface="Segoe UI"/>
-                        </a:rPr>
-                        <a:t>Ongoing</a:t>
-                      </a:r>
-                    </a:p>
-                  </a:txBody>
-                  <a:tcPr>
-                    <a:solidFill>
-                      <a:srgbClr val="F4F6F9"/>
-                    </a:solidFill>
-                  </a:tcPr>
-                </a:tc>
-                <a:tc>
-                  <a:txBody>
-                    <a:bodyPr wrap="square"/>
-                    <a:lstStyle/>
-                    <a:p>
-                      <a:pPr algn="l"/>
-                      <a:r>
-                        <a:rPr sz="900" b="0" i="0">
-                          <a:solidFill>
-                            <a:srgbClr val="2D2D2D"/>
-                          </a:solidFill>
-                          <a:latin typeface="Segoe UI"/>
-                        </a:rPr>
-                        <a:t>ITSM Product Management &amp; Platform Support - monthly acceptance</a:t>
-                      </a:r>
-                    </a:p>
-                  </a:txBody>
-                  <a:tcPr>
-                    <a:solidFill>
-                      <a:srgbClr val="F4F6F9"/>
-                    </a:solidFill>
-                  </a:tcPr>
-                </a:tc>
-                <a:tc>
-                  <a:txBody>
-                    <a:bodyPr wrap="square"/>
-                    <a:lstStyle/>
-                    <a:p>
-                      <a:pPr algn="ctr"/>
-                      <a:r>
-                        <a:rPr sz="950" b="1" i="0">
-                          <a:solidFill>
-                            <a:srgbClr val="2E6DB4"/>
-                          </a:solidFill>
-                          <a:latin typeface="Segoe UI"/>
-                        </a:rPr>
-                        <a:t>PI-2 tail -&gt; PI-3</a:t>
-                      </a:r>
-                    </a:p>
-                  </a:txBody>
-                  <a:tcPr>
-                    <a:solidFill>
-                      <a:srgbClr val="F4F6F9"/>
-                    </a:solidFill>
-                  </a:tcPr>
-                </a:tc>
-              </a:tr>
-            </a:tbl>
-          </a:graphicData>
-        </a:graphic>
-      </p:graphicFrame>
-    </p:spTree>
-  </p:cSld>
-  <p:clrMapOvr>
-    <a:masterClrMapping/>
-  </p:clrMapOvr>
-</p:sld>
-</file>
-
-<file path=ppt/slides/slide6.xml><?xml version="1.0" encoding="utf-8"?>
-<p:sld xmlns:a="http://schemas.openxmlformats.org/drawingml/2006/main" xmlns:p="http://schemas.openxmlformats.org/presentationml/2006/main" xmlns:r="http://schemas.openxmlformats.org/officeDocument/2006/relationships">
-  <p:cSld>
-    <p:spTree>
-      <p:nvGrpSpPr>
-        <p:cNvPr id="1" name=""/>
-        <p:cNvGrpSpPr/>
-        <p:nvPr/>
-      </p:nvGrpSpPr>
-      <p:grpSpPr/>
-      <p:sp>
-        <p:nvSpPr>
-          <p:cNvPr id="2" name="Rectangle 1"/>
-          <p:cNvSpPr/>
-          <p:nvPr/>
-        </p:nvSpPr>
-        <p:spPr>
-          <a:xfrm>
-            <a:off x="0" y="0"/>
-            <a:ext cx="12191695" cy="960120"/>
-          </a:xfrm>
-          <a:prstGeom prst="rect">
-            <a:avLst/>
-          </a:prstGeom>
-          <a:solidFill>
-            <a:srgbClr val="1F3A5F"/>
-          </a:solidFill>
-          <a:ln>
-            <a:noFill/>
-          </a:ln>
-          <a:effectLst/>
-        </p:spPr>
-        <p:style>
-          <a:lnRef idx="1">
-            <a:schemeClr val="accent1"/>
-          </a:lnRef>
-          <a:fillRef idx="3">
-            <a:schemeClr val="accent1"/>
-          </a:fillRef>
-          <a:effectRef idx="2">
-            <a:schemeClr val="accent1"/>
-          </a:effectRef>
-          <a:fontRef idx="minor">
-            <a:schemeClr val="lt1"/>
-          </a:fontRef>
-        </p:style>
-        <p:txBody>
-          <a:bodyPr rtlCol="0" anchor="ctr"/>
-          <a:lstStyle/>
-          <a:p>
-            <a:pPr algn="ctr"/>
-          </a:p>
-        </p:txBody>
-      </p:sp>
-      <p:sp>
-        <p:nvSpPr>
-          <p:cNvPr id="3" name="Rectangle 2"/>
-          <p:cNvSpPr/>
-          <p:nvPr/>
-        </p:nvSpPr>
-        <p:spPr>
-          <a:xfrm>
-            <a:off x="0" y="960120"/>
-            <a:ext cx="12191695" cy="54864"/>
-          </a:xfrm>
-          <a:prstGeom prst="rect">
-            <a:avLst/>
-          </a:prstGeom>
-          <a:solidFill>
-            <a:srgbClr val="2E6DB4"/>
-          </a:solidFill>
-          <a:ln>
-            <a:noFill/>
-          </a:ln>
-          <a:effectLst/>
-        </p:spPr>
-        <p:style>
-          <a:lnRef idx="1">
-            <a:schemeClr val="accent1"/>
-          </a:lnRef>
-          <a:fillRef idx="3">
-            <a:schemeClr val="accent1"/>
-          </a:fillRef>
-          <a:effectRef idx="2">
-            <a:schemeClr val="accent1"/>
-          </a:effectRef>
-          <a:fontRef idx="minor">
-            <a:schemeClr val="lt1"/>
-          </a:fontRef>
-        </p:style>
-        <p:txBody>
-          <a:bodyPr rtlCol="0" anchor="ctr"/>
-          <a:lstStyle/>
-          <a:p>
-            <a:pPr algn="ctr"/>
-          </a:p>
-        </p:txBody>
-      </p:sp>
-      <p:sp>
-        <p:nvSpPr>
-          <p:cNvPr id="4" name="TextBox 3"/>
-          <p:cNvSpPr txBox="1"/>
-          <p:nvPr/>
-        </p:nvSpPr>
-        <p:spPr>
-          <a:xfrm>
-            <a:off x="502920" y="164592"/>
-            <a:ext cx="11155680" cy="502920"/>
-          </a:xfrm>
-          <a:prstGeom prst="rect">
-            <a:avLst/>
-          </a:prstGeom>
-          <a:noFill/>
-        </p:spPr>
-        <p:txBody>
-          <a:bodyPr wrap="square" anchor="ctr" lIns="50800" rIns="50800" tIns="25400" bIns="25400">
-            <a:spAutoFit/>
-          </a:bodyPr>
-          <a:lstStyle/>
-          <a:p>
-            <a:pPr algn="l"/>
-            <a:r>
-              <a:rPr sz="2600" b="1" i="0">
-                <a:solidFill>
-                  <a:srgbClr val="FFFFFF"/>
-                </a:solidFill>
-                <a:latin typeface="Segoe UI"/>
-              </a:rPr>
-              <a:t>What This Means for Us</a:t>
-            </a:r>
-          </a:p>
-        </p:txBody>
-      </p:sp>
-      <p:sp>
-        <p:nvSpPr>
-          <p:cNvPr id="5" name="TextBox 4"/>
-          <p:cNvSpPr txBox="1"/>
-          <p:nvPr/>
-        </p:nvSpPr>
-        <p:spPr>
-          <a:xfrm>
-            <a:off x="521207" y="603504"/>
-            <a:ext cx="11155680" cy="292608"/>
-          </a:xfrm>
-          <a:prstGeom prst="rect">
-            <a:avLst/>
-          </a:prstGeom>
-          <a:noFill/>
-        </p:spPr>
-        <p:txBody>
-          <a:bodyPr wrap="square" anchor="ctr" lIns="50800" rIns="50800" tIns="25400" bIns="25400">
-            <a:spAutoFit/>
-          </a:bodyPr>
-          <a:lstStyle/>
-          <a:p>
-            <a:pPr algn="l"/>
-            <a:r>
-              <a:rPr sz="1200" b="0" i="0">
-                <a:solidFill>
-                  <a:srgbClr val="C9D6E6"/>
-                </a:solidFill>
-                <a:latin typeface="Segoe UI"/>
-              </a:rPr>
-              <a:t>FYI - nothing here is committed until CO6 is signed</a:t>
-            </a:r>
-          </a:p>
-        </p:txBody>
-      </p:sp>
-      <p:sp>
-        <p:nvSpPr>
-          <p:cNvPr id="6" name="TextBox 5"/>
-          <p:cNvSpPr txBox="1"/>
-          <p:nvPr/>
-        </p:nvSpPr>
-        <p:spPr>
-          <a:xfrm>
-            <a:off x="502920" y="6473952"/>
-            <a:ext cx="9144000" cy="292608"/>
-          </a:xfrm>
-          <a:prstGeom prst="rect">
-            <a:avLst/>
-          </a:prstGeom>
-          <a:noFill/>
-        </p:spPr>
-        <p:txBody>
-          <a:bodyPr wrap="square" anchor="t" lIns="50800" rIns="50800" tIns="25400" bIns="25400">
-            <a:spAutoFit/>
-          </a:bodyPr>
-          <a:lstStyle/>
-          <a:p>
-            <a:pPr algn="l"/>
-            <a:r>
-              <a:rPr sz="900" b="0" i="0">
-                <a:solidFill>
-                  <a:srgbClr val="6B7280"/>
-                </a:solidFill>
-                <a:latin typeface="Segoe UI"/>
-              </a:rPr>
-              <a:t>PPL CMDB-CSDM  |  CO6 Deliverables (DRAFT)  |  Team FYI  -  Jul 10, 2026</a:t>
-            </a:r>
-          </a:p>
-        </p:txBody>
-      </p:sp>
-      <p:sp>
-        <p:nvSpPr>
-          <p:cNvPr id="7" name="Rectangle 6"/>
-          <p:cNvSpPr/>
-          <p:nvPr/>
-        </p:nvSpPr>
-        <p:spPr>
-          <a:xfrm>
-            <a:off x="502920" y="1316736"/>
-            <a:ext cx="109728" cy="566928"/>
-          </a:xfrm>
-          <a:prstGeom prst="rect">
-            <a:avLst/>
-          </a:prstGeom>
-          <a:solidFill>
-            <a:srgbClr val="2E6DB4"/>
-          </a:solidFill>
-          <a:ln>
-            <a:noFill/>
-          </a:ln>
-          <a:effectLst/>
-        </p:spPr>
-        <p:style>
-          <a:lnRef idx="1">
-            <a:schemeClr val="accent1"/>
-          </a:lnRef>
-          <a:fillRef idx="3">
-            <a:schemeClr val="accent1"/>
-          </a:fillRef>
-          <a:effectRef idx="2">
-            <a:schemeClr val="accent1"/>
-          </a:effectRef>
-          <a:fontRef idx="minor">
-            <a:schemeClr val="lt1"/>
-          </a:fontRef>
-        </p:style>
-        <p:txBody>
-          <a:bodyPr rtlCol="0" anchor="ctr"/>
-          <a:lstStyle/>
-          <a:p>
-            <a:pPr algn="ctr"/>
-          </a:p>
-        </p:txBody>
-      </p:sp>
-      <p:sp>
-        <p:nvSpPr>
-          <p:cNvPr id="8" name="TextBox 7"/>
-          <p:cNvSpPr txBox="1"/>
-          <p:nvPr/>
-        </p:nvSpPr>
-        <p:spPr>
-          <a:xfrm>
-            <a:off x="749808" y="1280160"/>
-            <a:ext cx="10881360" cy="292608"/>
-          </a:xfrm>
-          <a:prstGeom prst="rect">
-            <a:avLst/>
-          </a:prstGeom>
-          <a:noFill/>
-        </p:spPr>
-        <p:txBody>
-          <a:bodyPr wrap="square" anchor="t" lIns="50800" rIns="50800" tIns="25400" bIns="25400">
-            <a:spAutoFit/>
-          </a:bodyPr>
-          <a:lstStyle/>
-          <a:p>
-            <a:pPr algn="l"/>
-            <a:r>
-              <a:rPr sz="1350" b="1" i="0">
-                <a:solidFill>
-                  <a:srgbClr val="1F3A5F"/>
-                </a:solidFill>
-                <a:latin typeface="Segoe UI"/>
-              </a:rPr>
-              <a:t>Draft only - nothing committed yet.</a:t>
-            </a:r>
-          </a:p>
-        </p:txBody>
-      </p:sp>
-      <p:sp>
-        <p:nvSpPr>
-          <p:cNvPr id="9" name="TextBox 8"/>
-          <p:cNvSpPr txBox="1"/>
-          <p:nvPr/>
-        </p:nvSpPr>
-        <p:spPr>
-          <a:xfrm>
-            <a:off x="749808" y="1591056"/>
-            <a:ext cx="10881360" cy="457200"/>
-          </a:xfrm>
-          <a:prstGeom prst="rect">
-            <a:avLst/>
-          </a:prstGeom>
-          <a:noFill/>
-        </p:spPr>
-        <p:txBody>
-          <a:bodyPr wrap="square" anchor="t" lIns="50800" rIns="50800" tIns="25400" bIns="25400">
-            <a:spAutoFit/>
-          </a:bodyPr>
-          <a:lstStyle/>
-          <a:p>
-            <a:pPr algn="l"/>
-            <a:r>
-              <a:rPr sz="1100" b="0" i="0">
-                <a:solidFill>
-                  <a:srgbClr val="2D2D2D"/>
-                </a:solidFill>
-                <a:latin typeface="Segoe UI"/>
-              </a:rPr>
-              <a:t>CO6 is unsigned (3/27 draft). Treat scope and dates as tentative; our current commitments don't change until it's executed.</a:t>
-            </a:r>
-          </a:p>
-        </p:txBody>
-      </p:sp>
-      <p:sp>
-        <p:nvSpPr>
-          <p:cNvPr id="10" name="Rectangle 9"/>
-          <p:cNvSpPr/>
-          <p:nvPr/>
-        </p:nvSpPr>
-        <p:spPr>
-          <a:xfrm>
-            <a:off x="502920" y="2157984"/>
-            <a:ext cx="109728" cy="566928"/>
-          </a:xfrm>
-          <a:prstGeom prst="rect">
-            <a:avLst/>
-          </a:prstGeom>
-          <a:solidFill>
-            <a:srgbClr val="2E6DB4"/>
-          </a:solidFill>
-          <a:ln>
-            <a:noFill/>
-          </a:ln>
-          <a:effectLst/>
-        </p:spPr>
-        <p:style>
-          <a:lnRef idx="1">
-            <a:schemeClr val="accent1"/>
-          </a:lnRef>
-          <a:fillRef idx="3">
-            <a:schemeClr val="accent1"/>
-          </a:fillRef>
-          <a:effectRef idx="2">
-            <a:schemeClr val="accent1"/>
-          </a:effectRef>
-          <a:fontRef idx="minor">
-            <a:schemeClr val="lt1"/>
-          </a:fontRef>
-        </p:style>
-        <p:txBody>
-          <a:bodyPr rtlCol="0" anchor="ctr"/>
-          <a:lstStyle/>
-          <a:p>
-            <a:pPr algn="ctr"/>
-          </a:p>
-        </p:txBody>
-      </p:sp>
-      <p:sp>
-        <p:nvSpPr>
-          <p:cNvPr id="11" name="TextBox 10"/>
-          <p:cNvSpPr txBox="1"/>
-          <p:nvPr/>
-        </p:nvSpPr>
-        <p:spPr>
-          <a:xfrm>
-            <a:off x="749808" y="2121408"/>
-            <a:ext cx="10881360" cy="292608"/>
-          </a:xfrm>
-          <a:prstGeom prst="rect">
-            <a:avLst/>
-          </a:prstGeom>
-          <a:noFill/>
-        </p:spPr>
-        <p:txBody>
-          <a:bodyPr wrap="square" anchor="t" lIns="50800" rIns="50800" tIns="25400" bIns="25400">
-            <a:spAutoFit/>
-          </a:bodyPr>
-          <a:lstStyle/>
-          <a:p>
-            <a:pPr algn="l"/>
-            <a:r>
-              <a:rPr sz="1350" b="1" i="0">
-                <a:solidFill>
-                  <a:srgbClr val="1F3A5F"/>
-                </a:solidFill>
-                <a:latin typeface="Segoe UI"/>
-              </a:rPr>
-              <a:t>Most of it is work we're already doing.</a:t>
-            </a:r>
-          </a:p>
-        </p:txBody>
-      </p:sp>
-      <p:sp>
-        <p:nvSpPr>
-          <p:cNvPr id="12" name="TextBox 11"/>
-          <p:cNvSpPr txBox="1"/>
-          <p:nvPr/>
-        </p:nvSpPr>
-        <p:spPr>
-          <a:xfrm>
-            <a:off x="749808" y="2432303"/>
-            <a:ext cx="10881360" cy="457200"/>
-          </a:xfrm>
-          <a:prstGeom prst="rect">
-            <a:avLst/>
-          </a:prstGeom>
-          <a:noFill/>
-        </p:spPr>
-        <p:txBody>
-          <a:bodyPr wrap="square" anchor="t" lIns="50800" rIns="50800" tIns="25400" bIns="25400">
-            <a:spAutoFit/>
-          </a:bodyPr>
-          <a:lstStyle/>
-          <a:p>
-            <a:pPr algn="l"/>
-            <a:r>
-              <a:rPr sz="1100" b="0" i="0">
-                <a:solidFill>
-                  <a:srgbClr val="2D2D2D"/>
-                </a:solidFill>
-                <a:latin typeface="Segoe UI"/>
-              </a:rPr>
-              <a:t>Governance, CI Coverage (Computers/Servers), Service Mapping and Network Gear are the same threads you're on now - CO6 just formalizes them with dates.</a:t>
-            </a:r>
-          </a:p>
-        </p:txBody>
-      </p:sp>
-      <p:sp>
-        <p:nvSpPr>
-          <p:cNvPr id="13" name="Rectangle 12"/>
-          <p:cNvSpPr/>
-          <p:nvPr/>
-        </p:nvSpPr>
-        <p:spPr>
-          <a:xfrm>
-            <a:off x="502920" y="2999232"/>
-            <a:ext cx="109728" cy="566928"/>
-          </a:xfrm>
-          <a:prstGeom prst="rect">
-            <a:avLst/>
-          </a:prstGeom>
-          <a:solidFill>
-            <a:srgbClr val="2E6DB4"/>
-          </a:solidFill>
-          <a:ln>
-            <a:noFill/>
-          </a:ln>
-          <a:effectLst/>
-        </p:spPr>
-        <p:style>
-          <a:lnRef idx="1">
-            <a:schemeClr val="accent1"/>
-          </a:lnRef>
-          <a:fillRef idx="3">
-            <a:schemeClr val="accent1"/>
-          </a:fillRef>
-          <a:effectRef idx="2">
-            <a:schemeClr val="accent1"/>
-          </a:effectRef>
-          <a:fontRef idx="minor">
-            <a:schemeClr val="lt1"/>
-          </a:fontRef>
-        </p:style>
-        <p:txBody>
-          <a:bodyPr rtlCol="0" anchor="ctr"/>
-          <a:lstStyle/>
-          <a:p>
-            <a:pPr algn="ctr"/>
-          </a:p>
-        </p:txBody>
-      </p:sp>
-      <p:sp>
-        <p:nvSpPr>
-          <p:cNvPr id="14" name="TextBox 13"/>
-          <p:cNvSpPr txBox="1"/>
-          <p:nvPr/>
-        </p:nvSpPr>
-        <p:spPr>
-          <a:xfrm>
-            <a:off x="749808" y="2962656"/>
-            <a:ext cx="10881360" cy="292608"/>
-          </a:xfrm>
-          <a:prstGeom prst="rect">
-            <a:avLst/>
-          </a:prstGeom>
-          <a:noFill/>
-        </p:spPr>
-        <p:txBody>
-          <a:bodyPr wrap="square" anchor="t" lIns="50800" rIns="50800" tIns="25400" bIns="25400">
-            <a:spAutoFit/>
-          </a:bodyPr>
-          <a:lstStyle/>
-          <a:p>
-            <a:pPr algn="l"/>
-            <a:r>
-              <a:rPr sz="1350" b="1" i="0">
-                <a:solidFill>
-                  <a:srgbClr val="1F3A5F"/>
-                </a:solidFill>
-                <a:latin typeface="Segoe UI"/>
-              </a:rPr>
-              <a:t>Four things are brand new for PI-3 planning.</a:t>
-            </a:r>
-          </a:p>
-        </p:txBody>
-      </p:sp>
-      <p:sp>
-        <p:nvSpPr>
-          <p:cNvPr id="15" name="TextBox 14"/>
-          <p:cNvSpPr txBox="1"/>
-          <p:nvPr/>
-        </p:nvSpPr>
-        <p:spPr>
-          <a:xfrm>
-            <a:off x="749808" y="3273551"/>
-            <a:ext cx="10881360" cy="457200"/>
-          </a:xfrm>
-          <a:prstGeom prst="rect">
-            <a:avLst/>
-          </a:prstGeom>
-          <a:noFill/>
-        </p:spPr>
-        <p:txBody>
-          <a:bodyPr wrap="square" anchor="t" lIns="50800" rIns="50800" tIns="25400" bIns="25400">
-            <a:spAutoFit/>
-          </a:bodyPr>
-          <a:lstStyle/>
-          <a:p>
-            <a:pPr algn="l"/>
-            <a:r>
-              <a:rPr sz="1100" b="0" i="0">
-                <a:solidFill>
-                  <a:srgbClr val="2D2D2D"/>
-                </a:solidFill>
-                <a:latin typeface="Segoe UI"/>
-              </a:rPr>
-              <a:t>Legacy Platform Rationalization, ITSM Product Management, ATF Strategy and Platform Support - we'll story-out and staff these at PI-3 planning.</a:t>
-            </a:r>
-          </a:p>
-        </p:txBody>
-      </p:sp>
-      <p:sp>
-        <p:nvSpPr>
-          <p:cNvPr id="16" name="Rectangle 15"/>
-          <p:cNvSpPr/>
-          <p:nvPr/>
-        </p:nvSpPr>
-        <p:spPr>
-          <a:xfrm>
-            <a:off x="502920" y="3840480"/>
-            <a:ext cx="109728" cy="566928"/>
-          </a:xfrm>
-          <a:prstGeom prst="rect">
-            <a:avLst/>
-          </a:prstGeom>
-          <a:solidFill>
-            <a:srgbClr val="2E6DB4"/>
-          </a:solidFill>
-          <a:ln>
-            <a:noFill/>
-          </a:ln>
-          <a:effectLst/>
-        </p:spPr>
-        <p:style>
-          <a:lnRef idx="1">
-            <a:schemeClr val="accent1"/>
-          </a:lnRef>
-          <a:fillRef idx="3">
-            <a:schemeClr val="accent1"/>
-          </a:fillRef>
-          <a:effectRef idx="2">
-            <a:schemeClr val="accent1"/>
-          </a:effectRef>
-          <a:fontRef idx="minor">
-            <a:schemeClr val="lt1"/>
-          </a:fontRef>
-        </p:style>
-        <p:txBody>
-          <a:bodyPr rtlCol="0" anchor="ctr"/>
-          <a:lstStyle/>
-          <a:p>
-            <a:pPr algn="ctr"/>
-          </a:p>
-        </p:txBody>
-      </p:sp>
-      <p:sp>
-        <p:nvSpPr>
-          <p:cNvPr id="17" name="TextBox 16"/>
-          <p:cNvSpPr txBox="1"/>
-          <p:nvPr/>
-        </p:nvSpPr>
-        <p:spPr>
-          <a:xfrm>
-            <a:off x="749808" y="3803904"/>
-            <a:ext cx="10881360" cy="292608"/>
-          </a:xfrm>
-          <a:prstGeom prst="rect">
-            <a:avLst/>
-          </a:prstGeom>
-          <a:noFill/>
-        </p:spPr>
-        <p:txBody>
-          <a:bodyPr wrap="square" anchor="t" lIns="50800" rIns="50800" tIns="25400" bIns="25400">
-            <a:spAutoFit/>
-          </a:bodyPr>
-          <a:lstStyle/>
-          <a:p>
-            <a:pPr algn="l"/>
-            <a:r>
-              <a:rPr sz="1350" b="1" i="0">
-                <a:solidFill>
-                  <a:srgbClr val="1F3A5F"/>
-                </a:solidFill>
-                <a:latin typeface="Segoe UI"/>
-              </a:rPr>
-              <a:t>Two are standing commitments, not projects.</a:t>
-            </a:r>
-          </a:p>
-        </p:txBody>
-      </p:sp>
-      <p:sp>
-        <p:nvSpPr>
-          <p:cNvPr id="18" name="TextBox 17"/>
-          <p:cNvSpPr txBox="1"/>
-          <p:nvPr/>
-        </p:nvSpPr>
-        <p:spPr>
-          <a:xfrm>
-            <a:off x="749808" y="4114800"/>
-            <a:ext cx="10881360" cy="457200"/>
-          </a:xfrm>
-          <a:prstGeom prst="rect">
-            <a:avLst/>
-          </a:prstGeom>
-          <a:noFill/>
-        </p:spPr>
-        <p:txBody>
-          <a:bodyPr wrap="square" anchor="t" lIns="50800" rIns="50800" tIns="25400" bIns="25400">
-            <a:spAutoFit/>
-          </a:bodyPr>
-          <a:lstStyle/>
-          <a:p>
-            <a:pPr algn="l"/>
-            <a:r>
-              <a:rPr sz="1100" b="0" i="0">
-                <a:solidFill>
-                  <a:srgbClr val="2D2D2D"/>
-                </a:solidFill>
-                <a:latin typeface="Segoe UI"/>
-              </a:rPr>
-              <a:t>ITSM PM and Platform Support (BAU) are ongoing capacity (~40 hrs/wk per person) - they need people assigned, not just a backlog.</a:t>
-            </a:r>
-          </a:p>
-        </p:txBody>
-      </p:sp>
-      <p:sp>
-        <p:nvSpPr>
-          <p:cNvPr id="19" name="Rectangle 18"/>
-          <p:cNvSpPr/>
-          <p:nvPr/>
-        </p:nvSpPr>
-        <p:spPr>
-          <a:xfrm>
-            <a:off x="502920" y="4681728"/>
-            <a:ext cx="109728" cy="566928"/>
-          </a:xfrm>
-          <a:prstGeom prst="rect">
-            <a:avLst/>
-          </a:prstGeom>
-          <a:solidFill>
-            <a:srgbClr val="2E6DB4"/>
-          </a:solidFill>
-          <a:ln>
-            <a:noFill/>
-          </a:ln>
-          <a:effectLst/>
-        </p:spPr>
-        <p:style>
-          <a:lnRef idx="1">
-            <a:schemeClr val="accent1"/>
-          </a:lnRef>
-          <a:fillRef idx="3">
-            <a:schemeClr val="accent1"/>
-          </a:fillRef>
-          <a:effectRef idx="2">
-            <a:schemeClr val="accent1"/>
-          </a:effectRef>
-          <a:fontRef idx="minor">
-            <a:schemeClr val="lt1"/>
-          </a:fontRef>
-        </p:style>
-        <p:txBody>
-          <a:bodyPr rtlCol="0" anchor="ctr"/>
-          <a:lstStyle/>
-          <a:p>
-            <a:pPr algn="ctr"/>
-          </a:p>
-        </p:txBody>
-      </p:sp>
-      <p:sp>
-        <p:nvSpPr>
-          <p:cNvPr id="20" name="TextBox 19"/>
-          <p:cNvSpPr txBox="1"/>
-          <p:nvPr/>
-        </p:nvSpPr>
-        <p:spPr>
-          <a:xfrm>
-            <a:off x="749808" y="4645152"/>
-            <a:ext cx="10881360" cy="292608"/>
-          </a:xfrm>
-          <a:prstGeom prst="rect">
-            <a:avLst/>
-          </a:prstGeom>
-          <a:noFill/>
-        </p:spPr>
-        <p:txBody>
-          <a:bodyPr wrap="square" anchor="t" lIns="50800" rIns="50800" tIns="25400" bIns="25400">
-            <a:spAutoFit/>
-          </a:bodyPr>
-          <a:lstStyle/>
-          <a:p>
-            <a:pPr algn="l"/>
-            <a:r>
-              <a:rPr sz="1350" b="1" i="0">
-                <a:solidFill>
-                  <a:srgbClr val="1F3A5F"/>
-                </a:solidFill>
-                <a:latin typeface="Segoe UI"/>
-              </a:rPr>
-              <a:t>The hard coverage targets get real runway.</a:t>
-            </a:r>
-          </a:p>
-        </p:txBody>
-      </p:sp>
-      <p:sp>
-        <p:nvSpPr>
-          <p:cNvPr id="21" name="TextBox 20"/>
-          <p:cNvSpPr txBox="1"/>
-          <p:nvPr/>
-        </p:nvSpPr>
-        <p:spPr>
-          <a:xfrm>
-            <a:off x="749808" y="4956048"/>
-            <a:ext cx="10881360" cy="457200"/>
-          </a:xfrm>
-          <a:prstGeom prst="rect">
-            <a:avLst/>
-          </a:prstGeom>
-          <a:noFill/>
-        </p:spPr>
-        <p:txBody>
-          <a:bodyPr wrap="square" anchor="t" lIns="50800" rIns="50800" tIns="25400" bIns="25400">
-            <a:spAutoFit/>
-          </a:bodyPr>
-          <a:lstStyle/>
-          <a:p>
-            <a:pPr algn="l"/>
-            <a:r>
-              <a:rPr sz="1100" b="0" i="0">
-                <a:solidFill>
-                  <a:srgbClr val="2D2D2D"/>
-                </a:solidFill>
-                <a:latin typeface="Segoe UI"/>
-              </a:rPr>
-              <a:t>90% coverage moves to Sep 30 / Oct 30 in PI-3 - no single 6/30 cliff.</a:t>
-            </a:r>
-          </a:p>
-        </p:txBody>
-      </p:sp>
-      <p:sp>
-        <p:nvSpPr>
-          <p:cNvPr id="22" name="Rectangle 21"/>
-          <p:cNvSpPr/>
-          <p:nvPr/>
-        </p:nvSpPr>
-        <p:spPr>
-          <a:xfrm>
-            <a:off x="502920" y="5522976"/>
-            <a:ext cx="109728" cy="566928"/>
-          </a:xfrm>
-          <a:prstGeom prst="rect">
-            <a:avLst/>
-          </a:prstGeom>
-          <a:solidFill>
-            <a:srgbClr val="2E6DB4"/>
-          </a:solidFill>
-          <a:ln>
-            <a:noFill/>
-          </a:ln>
-          <a:effectLst/>
-        </p:spPr>
-        <p:style>
-          <a:lnRef idx="1">
-            <a:schemeClr val="accent1"/>
-          </a:lnRef>
-          <a:fillRef idx="3">
-            <a:schemeClr val="accent1"/>
-          </a:fillRef>
-          <a:effectRef idx="2">
-            <a:schemeClr val="accent1"/>
-          </a:effectRef>
-          <a:fontRef idx="minor">
-            <a:schemeClr val="lt1"/>
-          </a:fontRef>
-        </p:style>
-        <p:txBody>
-          <a:bodyPr rtlCol="0" anchor="ctr"/>
-          <a:lstStyle/>
-          <a:p>
-            <a:pPr algn="ctr"/>
-          </a:p>
-        </p:txBody>
-      </p:sp>
-      <p:sp>
-        <p:nvSpPr>
           <p:cNvPr id="23" name="TextBox 22"/>
           <p:cNvSpPr txBox="1"/>
           <p:nvPr/>
@@ -9419,7 +7910,7 @@
                 </a:solidFill>
                 <a:latin typeface="Segoe UI"/>
               </a:rPr>
-              <a:t>Source is the 3/27 draft. Jordan Yung is the CO6 SME; Joe Dames owns governance scope. Flag anything unclear to Manny.</a:t>
+              <a:t>Jordan Yung is the CO6 SME; Joe Dames owns governance scope. Flag anything unclear to Manny.</a:t>
             </a:r>
           </a:p>
         </p:txBody>

--- a/Workspaces/Work/Projects/PPL CMDB-CSDM/Contract/CO6-Deliverables-2026-07-10.pptx
+++ b/Workspaces/Work/Projects/PPL CMDB-CSDM/Contract/CO6-Deliverables-2026-07-10.pptx
@@ -10,6 +10,14 @@
     <p:sldId id="258" r:id="rId9"/>
     <p:sldId id="259" r:id="rId10"/>
     <p:sldId id="260" r:id="rId11"/>
+    <p:sldId id="261" r:id="rId12"/>
+    <p:sldId id="262" r:id="rId13"/>
+    <p:sldId id="263" r:id="rId14"/>
+    <p:sldId id="264" r:id="rId15"/>
+    <p:sldId id="265" r:id="rId16"/>
+    <p:sldId id="266" r:id="rId17"/>
+    <p:sldId id="267" r:id="rId18"/>
+    <p:sldId id="268" r:id="rId19"/>
   </p:sldIdLst>
   <p:sldSz cx="12191695" cy="6858000" type="screen4x3"/>
   <p:notesSz cx="6858000" cy="9144000"/>
@@ -3340,6 +3348,3809 @@
                 <a:latin typeface="Segoe UI"/>
               </a:rPr>
               <a:t>Planning view - dates &amp; scope firm up at PI-3 planning.</a:t>
+            </a:r>
+          </a:p>
+        </p:txBody>
+      </p:sp>
+    </p:spTree>
+  </p:cSld>
+  <p:clrMapOvr>
+    <a:masterClrMapping/>
+  </p:clrMapOvr>
+</p:sld>
+</file>
+
+<file path=ppt/slides/slide10.xml><?xml version="1.0" encoding="utf-8"?>
+<p:sld xmlns:a="http://schemas.openxmlformats.org/drawingml/2006/main" xmlns:p="http://schemas.openxmlformats.org/presentationml/2006/main" xmlns:r="http://schemas.openxmlformats.org/officeDocument/2006/relationships">
+  <p:cSld>
+    <p:spTree>
+      <p:nvGrpSpPr>
+        <p:cNvPr id="1" name=""/>
+        <p:cNvGrpSpPr/>
+        <p:nvPr/>
+      </p:nvGrpSpPr>
+      <p:grpSpPr/>
+      <p:sp>
+        <p:nvSpPr>
+          <p:cNvPr id="2" name="Rectangle 1"/>
+          <p:cNvSpPr/>
+          <p:nvPr/>
+        </p:nvSpPr>
+        <p:spPr>
+          <a:xfrm>
+            <a:off x="0" y="0"/>
+            <a:ext cx="12191695" cy="960120"/>
+          </a:xfrm>
+          <a:prstGeom prst="rect">
+            <a:avLst/>
+          </a:prstGeom>
+          <a:solidFill>
+            <a:srgbClr val="1F3A5F"/>
+          </a:solidFill>
+          <a:ln>
+            <a:noFill/>
+          </a:ln>
+          <a:effectLst/>
+        </p:spPr>
+        <p:style>
+          <a:lnRef idx="1">
+            <a:schemeClr val="accent1"/>
+          </a:lnRef>
+          <a:fillRef idx="3">
+            <a:schemeClr val="accent1"/>
+          </a:fillRef>
+          <a:effectRef idx="2">
+            <a:schemeClr val="accent1"/>
+          </a:effectRef>
+          <a:fontRef idx="minor">
+            <a:schemeClr val="lt1"/>
+          </a:fontRef>
+        </p:style>
+        <p:txBody>
+          <a:bodyPr rtlCol="0" anchor="ctr"/>
+          <a:lstStyle/>
+          <a:p>
+            <a:pPr algn="ctr"/>
+          </a:p>
+        </p:txBody>
+      </p:sp>
+      <p:sp>
+        <p:nvSpPr>
+          <p:cNvPr id="3" name="Rectangle 2"/>
+          <p:cNvSpPr/>
+          <p:nvPr/>
+        </p:nvSpPr>
+        <p:spPr>
+          <a:xfrm>
+            <a:off x="0" y="960120"/>
+            <a:ext cx="12191695" cy="54864"/>
+          </a:xfrm>
+          <a:prstGeom prst="rect">
+            <a:avLst/>
+          </a:prstGeom>
+          <a:solidFill>
+            <a:srgbClr val="2E6DB4"/>
+          </a:solidFill>
+          <a:ln>
+            <a:noFill/>
+          </a:ln>
+          <a:effectLst/>
+        </p:spPr>
+        <p:style>
+          <a:lnRef idx="1">
+            <a:schemeClr val="accent1"/>
+          </a:lnRef>
+          <a:fillRef idx="3">
+            <a:schemeClr val="accent1"/>
+          </a:fillRef>
+          <a:effectRef idx="2">
+            <a:schemeClr val="accent1"/>
+          </a:effectRef>
+          <a:fontRef idx="minor">
+            <a:schemeClr val="lt1"/>
+          </a:fontRef>
+        </p:style>
+        <p:txBody>
+          <a:bodyPr rtlCol="0" anchor="ctr"/>
+          <a:lstStyle/>
+          <a:p>
+            <a:pPr algn="ctr"/>
+          </a:p>
+        </p:txBody>
+      </p:sp>
+      <p:sp>
+        <p:nvSpPr>
+          <p:cNvPr id="4" name="TextBox 3"/>
+          <p:cNvSpPr txBox="1"/>
+          <p:nvPr/>
+        </p:nvSpPr>
+        <p:spPr>
+          <a:xfrm>
+            <a:off x="502920" y="164592"/>
+            <a:ext cx="11155680" cy="502920"/>
+          </a:xfrm>
+          <a:prstGeom prst="rect">
+            <a:avLst/>
+          </a:prstGeom>
+          <a:noFill/>
+        </p:spPr>
+        <p:txBody>
+          <a:bodyPr wrap="square" anchor="ctr" lIns="50800" rIns="50800" tIns="25400" bIns="25400">
+            <a:spAutoFit/>
+          </a:bodyPr>
+          <a:lstStyle/>
+          <a:p>
+            <a:pPr algn="l"/>
+            <a:r>
+              <a:rPr sz="2600" b="1" i="0">
+                <a:solidFill>
+                  <a:srgbClr val="FFFFFF"/>
+                </a:solidFill>
+                <a:latin typeface="Segoe UI"/>
+              </a:rPr>
+              <a:t>ATF Strategy</a:t>
+            </a:r>
+          </a:p>
+        </p:txBody>
+      </p:sp>
+      <p:sp>
+        <p:nvSpPr>
+          <p:cNvPr id="5" name="TextBox 4"/>
+          <p:cNvSpPr txBox="1"/>
+          <p:nvPr/>
+        </p:nvSpPr>
+        <p:spPr>
+          <a:xfrm>
+            <a:off x="521207" y="603504"/>
+            <a:ext cx="11155680" cy="292608"/>
+          </a:xfrm>
+          <a:prstGeom prst="rect">
+            <a:avLst/>
+          </a:prstGeom>
+          <a:noFill/>
+        </p:spPr>
+        <p:txBody>
+          <a:bodyPr wrap="square" anchor="ctr" lIns="50800" rIns="50800" tIns="25400" bIns="25400">
+            <a:spAutoFit/>
+          </a:bodyPr>
+          <a:lstStyle/>
+          <a:p>
+            <a:pPr algn="l"/>
+            <a:r>
+              <a:rPr sz="1200" b="0" i="0">
+                <a:solidFill>
+                  <a:srgbClr val="C9D6E6"/>
+                </a:solidFill>
+                <a:latin typeface="Segoe UI"/>
+              </a:rPr>
+              <a:t>Due Oct 31   ·   PI-3</a:t>
+            </a:r>
+          </a:p>
+        </p:txBody>
+      </p:sp>
+      <p:sp>
+        <p:nvSpPr>
+          <p:cNvPr id="6" name="TextBox 5"/>
+          <p:cNvSpPr txBox="1"/>
+          <p:nvPr/>
+        </p:nvSpPr>
+        <p:spPr>
+          <a:xfrm>
+            <a:off x="502920" y="6473952"/>
+            <a:ext cx="9144000" cy="292608"/>
+          </a:xfrm>
+          <a:prstGeom prst="rect">
+            <a:avLst/>
+          </a:prstGeom>
+          <a:noFill/>
+        </p:spPr>
+        <p:txBody>
+          <a:bodyPr wrap="square" anchor="t" lIns="50800" rIns="50800" tIns="25400" bIns="25400">
+            <a:spAutoFit/>
+          </a:bodyPr>
+          <a:lstStyle/>
+          <a:p>
+            <a:pPr algn="l"/>
+            <a:r>
+              <a:rPr sz="900" b="0" i="0">
+                <a:solidFill>
+                  <a:srgbClr val="6B7280"/>
+                </a:solidFill>
+                <a:latin typeface="Segoe UI"/>
+              </a:rPr>
+              <a:t>PPL CMDB-CSDM  |  CO6 Deliverables  |  Team Focus  -  Jul 10, 2026</a:t>
+            </a:r>
+          </a:p>
+        </p:txBody>
+      </p:sp>
+      <p:sp>
+        <p:nvSpPr>
+          <p:cNvPr id="7" name="Rectangle 6"/>
+          <p:cNvSpPr/>
+          <p:nvPr/>
+        </p:nvSpPr>
+        <p:spPr>
+          <a:xfrm>
+            <a:off x="502920" y="1115568"/>
+            <a:ext cx="11155680" cy="457200"/>
+          </a:xfrm>
+          <a:prstGeom prst="rect">
+            <a:avLst/>
+          </a:prstGeom>
+          <a:solidFill>
+            <a:srgbClr val="E9F0F8"/>
+          </a:solidFill>
+          <a:ln w="9525">
+            <a:solidFill>
+              <a:srgbClr val="2E6DB4"/>
+            </a:solidFill>
+          </a:ln>
+          <a:effectLst/>
+        </p:spPr>
+        <p:style>
+          <a:lnRef idx="1">
+            <a:schemeClr val="accent1"/>
+          </a:lnRef>
+          <a:fillRef idx="3">
+            <a:schemeClr val="accent1"/>
+          </a:fillRef>
+          <a:effectRef idx="2">
+            <a:schemeClr val="accent1"/>
+          </a:effectRef>
+          <a:fontRef idx="minor">
+            <a:schemeClr val="lt1"/>
+          </a:fontRef>
+        </p:style>
+        <p:txBody>
+          <a:bodyPr rtlCol="0" anchor="ctr"/>
+          <a:lstStyle/>
+          <a:p>
+            <a:pPr algn="ctr"/>
+          </a:p>
+        </p:txBody>
+      </p:sp>
+      <p:sp>
+        <p:nvSpPr>
+          <p:cNvPr id="8" name="TextBox 7"/>
+          <p:cNvSpPr txBox="1"/>
+          <p:nvPr/>
+        </p:nvSpPr>
+        <p:spPr>
+          <a:xfrm>
+            <a:off x="658368" y="1133856"/>
+            <a:ext cx="10881360" cy="420624"/>
+          </a:xfrm>
+          <a:prstGeom prst="rect">
+            <a:avLst/>
+          </a:prstGeom>
+          <a:noFill/>
+        </p:spPr>
+        <p:txBody>
+          <a:bodyPr wrap="square" anchor="ctr" lIns="50800" rIns="50800" tIns="25400" bIns="25400">
+            <a:spAutoFit/>
+          </a:bodyPr>
+          <a:lstStyle/>
+          <a:p>
+            <a:pPr algn="l"/>
+            <a:r>
+              <a:rPr sz="1100" b="0" i="0">
+                <a:solidFill>
+                  <a:srgbClr val="1F3A5F"/>
+                </a:solidFill>
+                <a:latin typeface="Segoe UI"/>
+              </a:rPr>
+              <a:t>A plan for rolling out the Automated Test Framework across in-prod ServiceNow capabilities.</a:t>
+            </a:r>
+          </a:p>
+        </p:txBody>
+      </p:sp>
+      <p:sp>
+        <p:nvSpPr>
+          <p:cNvPr id="9" name="TextBox 8"/>
+          <p:cNvSpPr txBox="1"/>
+          <p:nvPr/>
+        </p:nvSpPr>
+        <p:spPr>
+          <a:xfrm>
+            <a:off x="502920" y="1755648"/>
+            <a:ext cx="5486400" cy="2286000"/>
+          </a:xfrm>
+          <a:prstGeom prst="rect">
+            <a:avLst/>
+          </a:prstGeom>
+          <a:noFill/>
+        </p:spPr>
+        <p:txBody>
+          <a:bodyPr wrap="square" anchor="t" lIns="50800" rIns="50800" tIns="25400" bIns="25400">
+            <a:spAutoFit/>
+          </a:bodyPr>
+          <a:lstStyle/>
+          <a:p>
+            <a:pPr algn="l"/>
+            <a:r>
+              <a:rPr sz="1200" b="1" i="0">
+                <a:solidFill>
+                  <a:srgbClr val="1F3A5F"/>
+                </a:solidFill>
+                <a:latin typeface="Segoe UI"/>
+              </a:rPr>
+              <a:t>Done when (acceptance)</a:t>
+            </a:r>
+          </a:p>
+          <a:p>
+            <a:pPr algn="l"/>
+            <a:r>
+              <a:rPr sz="1000" b="0" i="0">
+                <a:solidFill>
+                  <a:srgbClr val="2D2D2D"/>
+                </a:solidFill>
+                <a:latin typeface="Segoe UI"/>
+              </a:rPr>
+              <a:t>•  Rollout plan delivered: selection criteria, timeline, and approach</a:t>
+            </a:r>
+          </a:p>
+        </p:txBody>
+      </p:sp>
+      <p:sp>
+        <p:nvSpPr>
+          <p:cNvPr id="10" name="TextBox 9"/>
+          <p:cNvSpPr txBox="1"/>
+          <p:nvPr/>
+        </p:nvSpPr>
+        <p:spPr>
+          <a:xfrm>
+            <a:off x="6172200" y="1755648"/>
+            <a:ext cx="5486400" cy="2286000"/>
+          </a:xfrm>
+          <a:prstGeom prst="rect">
+            <a:avLst/>
+          </a:prstGeom>
+          <a:noFill/>
+        </p:spPr>
+        <p:txBody>
+          <a:bodyPr wrap="square" anchor="t" lIns="50800" rIns="50800" tIns="25400" bIns="25400">
+            <a:spAutoFit/>
+          </a:bodyPr>
+          <a:lstStyle/>
+          <a:p>
+            <a:pPr algn="l"/>
+            <a:r>
+              <a:rPr sz="1200" b="1" i="0">
+                <a:solidFill>
+                  <a:srgbClr val="1F3A5F"/>
+                </a:solidFill>
+                <a:latin typeface="Segoe UI"/>
+              </a:rPr>
+              <a:t>Scope</a:t>
+            </a:r>
+          </a:p>
+          <a:p>
+            <a:pPr algn="l"/>
+            <a:r>
+              <a:rPr sz="1050" b="1" i="0">
+                <a:solidFill>
+                  <a:srgbClr val="2E8B57"/>
+                </a:solidFill>
+                <a:latin typeface="Segoe UI"/>
+              </a:rPr>
+              <a:t>In scope</a:t>
+            </a:r>
+          </a:p>
+          <a:p>
+            <a:pPr algn="l"/>
+            <a:r>
+              <a:rPr sz="950" b="0" i="0">
+                <a:solidFill>
+                  <a:srgbClr val="2D2D2D"/>
+                </a:solidFill>
+                <a:latin typeface="Segoe UI"/>
+              </a:rPr>
+              <a:t>•  Strategy / plan for ATF rollout (an analysis deliverable)</a:t>
+            </a:r>
+          </a:p>
+          <a:p>
+            <a:pPr algn="l"/>
+            <a:r>
+              <a:rPr sz="1050" b="1" i="0">
+                <a:solidFill>
+                  <a:srgbClr val="C0392B"/>
+                </a:solidFill>
+                <a:latin typeface="Segoe UI"/>
+              </a:rPr>
+              <a:t>Out of scope</a:t>
+            </a:r>
+          </a:p>
+          <a:p>
+            <a:pPr algn="l"/>
+            <a:r>
+              <a:rPr sz="950" b="0" i="0">
+                <a:solidFill>
+                  <a:srgbClr val="2D2D2D"/>
+                </a:solidFill>
+                <a:latin typeface="Segoe UI"/>
+              </a:rPr>
+              <a:t>•  Building / implementing ATF (this is the plan, not the rollout)</a:t>
+            </a:r>
+          </a:p>
+        </p:txBody>
+      </p:sp>
+      <p:sp>
+        <p:nvSpPr>
+          <p:cNvPr id="11" name="Rectangle 10"/>
+          <p:cNvSpPr/>
+          <p:nvPr/>
+        </p:nvSpPr>
+        <p:spPr>
+          <a:xfrm>
+            <a:off x="502920" y="4114800"/>
+            <a:ext cx="11155680" cy="1234440"/>
+          </a:xfrm>
+          <a:prstGeom prst="rect">
+            <a:avLst/>
+          </a:prstGeom>
+          <a:solidFill>
+            <a:srgbClr val="F4F6F9"/>
+          </a:solidFill>
+          <a:ln>
+            <a:noFill/>
+          </a:ln>
+          <a:effectLst/>
+        </p:spPr>
+        <p:style>
+          <a:lnRef idx="1">
+            <a:schemeClr val="accent1"/>
+          </a:lnRef>
+          <a:fillRef idx="3">
+            <a:schemeClr val="accent1"/>
+          </a:fillRef>
+          <a:effectRef idx="2">
+            <a:schemeClr val="accent1"/>
+          </a:effectRef>
+          <a:fontRef idx="minor">
+            <a:schemeClr val="lt1"/>
+          </a:fontRef>
+        </p:style>
+        <p:txBody>
+          <a:bodyPr rtlCol="0" anchor="ctr"/>
+          <a:lstStyle/>
+          <a:p>
+            <a:pPr algn="ctr"/>
+          </a:p>
+        </p:txBody>
+      </p:sp>
+      <p:sp>
+        <p:nvSpPr>
+          <p:cNvPr id="12" name="TextBox 11"/>
+          <p:cNvSpPr txBox="1"/>
+          <p:nvPr/>
+        </p:nvSpPr>
+        <p:spPr>
+          <a:xfrm>
+            <a:off x="658368" y="4160520"/>
+            <a:ext cx="10881360" cy="1161288"/>
+          </a:xfrm>
+          <a:prstGeom prst="rect">
+            <a:avLst/>
+          </a:prstGeom>
+          <a:noFill/>
+        </p:spPr>
+        <p:txBody>
+          <a:bodyPr wrap="square" anchor="t" lIns="50800" rIns="50800" tIns="25400" bIns="25400">
+            <a:spAutoFit/>
+          </a:bodyPr>
+          <a:lstStyle/>
+          <a:p>
+            <a:pPr algn="l"/>
+            <a:r>
+              <a:rPr sz="1150" b="1" i="0">
+                <a:solidFill>
+                  <a:srgbClr val="1F3A5F"/>
+                </a:solidFill>
+                <a:latin typeface="Segoe UI"/>
+              </a:rPr>
+              <a:t>Current stories</a:t>
+            </a:r>
+          </a:p>
+          <a:p>
+            <a:pPr algn="l"/>
+            <a:r>
+              <a:rPr sz="950" b="0" i="0">
+                <a:solidFill>
+                  <a:srgbClr val="2D2D2D"/>
+                </a:solidFill>
+                <a:latin typeface="Segoe UI"/>
+              </a:rPr>
+              <a:t>•  None - greenfield</a:t>
+            </a:r>
+          </a:p>
+        </p:txBody>
+      </p:sp>
+      <p:sp>
+        <p:nvSpPr>
+          <p:cNvPr id="13" name="Rectangle 12"/>
+          <p:cNvSpPr/>
+          <p:nvPr/>
+        </p:nvSpPr>
+        <p:spPr>
+          <a:xfrm>
+            <a:off x="502920" y="5413248"/>
+            <a:ext cx="11155680" cy="896112"/>
+          </a:xfrm>
+          <a:prstGeom prst="rect">
+            <a:avLst/>
+          </a:prstGeom>
+          <a:solidFill>
+            <a:srgbClr val="FBEEDB"/>
+          </a:solidFill>
+          <a:ln w="9525">
+            <a:solidFill>
+              <a:srgbClr val="E08A00"/>
+            </a:solidFill>
+          </a:ln>
+          <a:effectLst/>
+        </p:spPr>
+        <p:style>
+          <a:lnRef idx="1">
+            <a:schemeClr val="accent1"/>
+          </a:lnRef>
+          <a:fillRef idx="3">
+            <a:schemeClr val="accent1"/>
+          </a:fillRef>
+          <a:effectRef idx="2">
+            <a:schemeClr val="accent1"/>
+          </a:effectRef>
+          <a:fontRef idx="minor">
+            <a:schemeClr val="lt1"/>
+          </a:fontRef>
+        </p:style>
+        <p:txBody>
+          <a:bodyPr rtlCol="0" anchor="ctr"/>
+          <a:lstStyle/>
+          <a:p>
+            <a:pPr algn="ctr"/>
+          </a:p>
+        </p:txBody>
+      </p:sp>
+      <p:sp>
+        <p:nvSpPr>
+          <p:cNvPr id="14" name="TextBox 13"/>
+          <p:cNvSpPr txBox="1"/>
+          <p:nvPr/>
+        </p:nvSpPr>
+        <p:spPr>
+          <a:xfrm>
+            <a:off x="658368" y="5449824"/>
+            <a:ext cx="10881360" cy="822960"/>
+          </a:xfrm>
+          <a:prstGeom prst="rect">
+            <a:avLst/>
+          </a:prstGeom>
+          <a:noFill/>
+        </p:spPr>
+        <p:txBody>
+          <a:bodyPr wrap="square" anchor="t" lIns="50800" rIns="50800" tIns="25400" bIns="25400">
+            <a:spAutoFit/>
+          </a:bodyPr>
+          <a:lstStyle/>
+          <a:p>
+            <a:pPr algn="l"/>
+            <a:r>
+              <a:rPr sz="1100" b="1" i="0">
+                <a:solidFill>
+                  <a:srgbClr val="7A4F10"/>
+                </a:solidFill>
+                <a:latin typeface="Segoe UI"/>
+              </a:rPr>
+              <a:t>Watch-outs / dependencies</a:t>
+            </a:r>
+          </a:p>
+          <a:p>
+            <a:pPr algn="l"/>
+            <a:r>
+              <a:rPr sz="950" b="0" i="0">
+                <a:solidFill>
+                  <a:srgbClr val="5A4A2A"/>
+                </a:solidFill>
+                <a:latin typeface="Segoe UI"/>
+              </a:rPr>
+              <a:t>•  No stories yet - scope at PI-3 planning</a:t>
+            </a:r>
+          </a:p>
+          <a:p>
+            <a:pPr algn="l"/>
+            <a:r>
+              <a:rPr sz="950" b="0" i="0">
+                <a:solidFill>
+                  <a:srgbClr val="5A4A2A"/>
+                </a:solidFill>
+                <a:latin typeface="Segoe UI"/>
+              </a:rPr>
+              <a:t>•  Deliverable is a plan, not an implementation</a:t>
+            </a:r>
+          </a:p>
+          <a:p>
+            <a:pPr algn="l"/>
+            <a:r>
+              <a:rPr sz="950" b="0" i="0">
+                <a:solidFill>
+                  <a:srgbClr val="5A4A2A"/>
+                </a:solidFill>
+                <a:latin typeface="Segoe UI"/>
+              </a:rPr>
+              <a:t>•  Owner TBD</a:t>
+            </a:r>
+          </a:p>
+        </p:txBody>
+      </p:sp>
+    </p:spTree>
+  </p:cSld>
+  <p:clrMapOvr>
+    <a:masterClrMapping/>
+  </p:clrMapOvr>
+</p:sld>
+</file>
+
+<file path=ppt/slides/slide11.xml><?xml version="1.0" encoding="utf-8"?>
+<p:sld xmlns:a="http://schemas.openxmlformats.org/drawingml/2006/main" xmlns:p="http://schemas.openxmlformats.org/presentationml/2006/main" xmlns:r="http://schemas.openxmlformats.org/officeDocument/2006/relationships">
+  <p:cSld>
+    <p:spTree>
+      <p:nvGrpSpPr>
+        <p:cNvPr id="1" name=""/>
+        <p:cNvGrpSpPr/>
+        <p:nvPr/>
+      </p:nvGrpSpPr>
+      <p:grpSpPr/>
+      <p:sp>
+        <p:nvSpPr>
+          <p:cNvPr id="2" name="Rectangle 1"/>
+          <p:cNvSpPr/>
+          <p:nvPr/>
+        </p:nvSpPr>
+        <p:spPr>
+          <a:xfrm>
+            <a:off x="0" y="0"/>
+            <a:ext cx="12191695" cy="960120"/>
+          </a:xfrm>
+          <a:prstGeom prst="rect">
+            <a:avLst/>
+          </a:prstGeom>
+          <a:solidFill>
+            <a:srgbClr val="1F3A5F"/>
+          </a:solidFill>
+          <a:ln>
+            <a:noFill/>
+          </a:ln>
+          <a:effectLst/>
+        </p:spPr>
+        <p:style>
+          <a:lnRef idx="1">
+            <a:schemeClr val="accent1"/>
+          </a:lnRef>
+          <a:fillRef idx="3">
+            <a:schemeClr val="accent1"/>
+          </a:fillRef>
+          <a:effectRef idx="2">
+            <a:schemeClr val="accent1"/>
+          </a:effectRef>
+          <a:fontRef idx="minor">
+            <a:schemeClr val="lt1"/>
+          </a:fontRef>
+        </p:style>
+        <p:txBody>
+          <a:bodyPr rtlCol="0" anchor="ctr"/>
+          <a:lstStyle/>
+          <a:p>
+            <a:pPr algn="ctr"/>
+          </a:p>
+        </p:txBody>
+      </p:sp>
+      <p:sp>
+        <p:nvSpPr>
+          <p:cNvPr id="3" name="Rectangle 2"/>
+          <p:cNvSpPr/>
+          <p:nvPr/>
+        </p:nvSpPr>
+        <p:spPr>
+          <a:xfrm>
+            <a:off x="0" y="960120"/>
+            <a:ext cx="12191695" cy="54864"/>
+          </a:xfrm>
+          <a:prstGeom prst="rect">
+            <a:avLst/>
+          </a:prstGeom>
+          <a:solidFill>
+            <a:srgbClr val="2E6DB4"/>
+          </a:solidFill>
+          <a:ln>
+            <a:noFill/>
+          </a:ln>
+          <a:effectLst/>
+        </p:spPr>
+        <p:style>
+          <a:lnRef idx="1">
+            <a:schemeClr val="accent1"/>
+          </a:lnRef>
+          <a:fillRef idx="3">
+            <a:schemeClr val="accent1"/>
+          </a:fillRef>
+          <a:effectRef idx="2">
+            <a:schemeClr val="accent1"/>
+          </a:effectRef>
+          <a:fontRef idx="minor">
+            <a:schemeClr val="lt1"/>
+          </a:fontRef>
+        </p:style>
+        <p:txBody>
+          <a:bodyPr rtlCol="0" anchor="ctr"/>
+          <a:lstStyle/>
+          <a:p>
+            <a:pPr algn="ctr"/>
+          </a:p>
+        </p:txBody>
+      </p:sp>
+      <p:sp>
+        <p:nvSpPr>
+          <p:cNvPr id="4" name="TextBox 3"/>
+          <p:cNvSpPr txBox="1"/>
+          <p:nvPr/>
+        </p:nvSpPr>
+        <p:spPr>
+          <a:xfrm>
+            <a:off x="502920" y="164592"/>
+            <a:ext cx="11155680" cy="502920"/>
+          </a:xfrm>
+          <a:prstGeom prst="rect">
+            <a:avLst/>
+          </a:prstGeom>
+          <a:noFill/>
+        </p:spPr>
+        <p:txBody>
+          <a:bodyPr wrap="square" anchor="ctr" lIns="50800" rIns="50800" tIns="25400" bIns="25400">
+            <a:spAutoFit/>
+          </a:bodyPr>
+          <a:lstStyle/>
+          <a:p>
+            <a:pPr algn="l"/>
+            <a:r>
+              <a:rPr sz="2600" b="1" i="0">
+                <a:solidFill>
+                  <a:srgbClr val="FFFFFF"/>
+                </a:solidFill>
+                <a:latin typeface="Segoe UI"/>
+              </a:rPr>
+              <a:t>Supporting Lanes</a:t>
+            </a:r>
+          </a:p>
+        </p:txBody>
+      </p:sp>
+      <p:sp>
+        <p:nvSpPr>
+          <p:cNvPr id="5" name="TextBox 4"/>
+          <p:cNvSpPr txBox="1"/>
+          <p:nvPr/>
+        </p:nvSpPr>
+        <p:spPr>
+          <a:xfrm>
+            <a:off x="521207" y="603504"/>
+            <a:ext cx="11155680" cy="292608"/>
+          </a:xfrm>
+          <a:prstGeom prst="rect">
+            <a:avLst/>
+          </a:prstGeom>
+          <a:noFill/>
+        </p:spPr>
+        <p:txBody>
+          <a:bodyPr wrap="square" anchor="ctr" lIns="50800" rIns="50800" tIns="25400" bIns="25400">
+            <a:spAutoFit/>
+          </a:bodyPr>
+          <a:lstStyle/>
+          <a:p>
+            <a:pPr algn="l"/>
+            <a:r>
+              <a:rPr sz="1200" b="0" i="0">
+                <a:solidFill>
+                  <a:srgbClr val="C9D6E6"/>
+                </a:solidFill>
+                <a:latin typeface="Segoe UI"/>
+              </a:rPr>
+              <a:t>PO / BAU capacity - separate from core CMDB delivery</a:t>
+            </a:r>
+          </a:p>
+        </p:txBody>
+      </p:sp>
+      <p:sp>
+        <p:nvSpPr>
+          <p:cNvPr id="6" name="TextBox 5"/>
+          <p:cNvSpPr txBox="1"/>
+          <p:nvPr/>
+        </p:nvSpPr>
+        <p:spPr>
+          <a:xfrm>
+            <a:off x="502920" y="6473952"/>
+            <a:ext cx="9144000" cy="292608"/>
+          </a:xfrm>
+          <a:prstGeom prst="rect">
+            <a:avLst/>
+          </a:prstGeom>
+          <a:noFill/>
+        </p:spPr>
+        <p:txBody>
+          <a:bodyPr wrap="square" anchor="t" lIns="50800" rIns="50800" tIns="25400" bIns="25400">
+            <a:spAutoFit/>
+          </a:bodyPr>
+          <a:lstStyle/>
+          <a:p>
+            <a:pPr algn="l"/>
+            <a:r>
+              <a:rPr sz="900" b="0" i="0">
+                <a:solidFill>
+                  <a:srgbClr val="6B7280"/>
+                </a:solidFill>
+                <a:latin typeface="Segoe UI"/>
+              </a:rPr>
+              <a:t>PPL CMDB-CSDM  |  CO6 Deliverables  |  Team Focus  -  Jul 10, 2026</a:t>
+            </a:r>
+          </a:p>
+        </p:txBody>
+      </p:sp>
+      <p:sp>
+        <p:nvSpPr>
+          <p:cNvPr id="7" name="Rectangle 6"/>
+          <p:cNvSpPr/>
+          <p:nvPr/>
+        </p:nvSpPr>
+        <p:spPr>
+          <a:xfrm>
+            <a:off x="502920" y="1371600"/>
+            <a:ext cx="5486400" cy="658368"/>
+          </a:xfrm>
+          <a:prstGeom prst="rect">
+            <a:avLst/>
+          </a:prstGeom>
+          <a:solidFill>
+            <a:srgbClr val="1F3A5F"/>
+          </a:solidFill>
+          <a:ln>
+            <a:noFill/>
+          </a:ln>
+          <a:effectLst/>
+        </p:spPr>
+        <p:style>
+          <a:lnRef idx="1">
+            <a:schemeClr val="accent1"/>
+          </a:lnRef>
+          <a:fillRef idx="3">
+            <a:schemeClr val="accent1"/>
+          </a:fillRef>
+          <a:effectRef idx="2">
+            <a:schemeClr val="accent1"/>
+          </a:effectRef>
+          <a:fontRef idx="minor">
+            <a:schemeClr val="lt1"/>
+          </a:fontRef>
+        </p:style>
+        <p:txBody>
+          <a:bodyPr rtlCol="0" anchor="ctr"/>
+          <a:lstStyle/>
+          <a:p>
+            <a:pPr algn="ctr"/>
+          </a:p>
+        </p:txBody>
+      </p:sp>
+      <p:sp>
+        <p:nvSpPr>
+          <p:cNvPr id="8" name="TextBox 7"/>
+          <p:cNvSpPr txBox="1"/>
+          <p:nvPr/>
+        </p:nvSpPr>
+        <p:spPr>
+          <a:xfrm>
+            <a:off x="667512" y="1417320"/>
+            <a:ext cx="5120640" cy="310896"/>
+          </a:xfrm>
+          <a:prstGeom prst="rect">
+            <a:avLst/>
+          </a:prstGeom>
+          <a:noFill/>
+        </p:spPr>
+        <p:txBody>
+          <a:bodyPr wrap="square" anchor="t" lIns="50800" rIns="50800" tIns="25400" bIns="25400">
+            <a:spAutoFit/>
+          </a:bodyPr>
+          <a:lstStyle/>
+          <a:p>
+            <a:pPr algn="l"/>
+            <a:r>
+              <a:rPr sz="1500" b="1" i="0">
+                <a:solidFill>
+                  <a:srgbClr val="FFFFFF"/>
+                </a:solidFill>
+                <a:latin typeface="Segoe UI"/>
+              </a:rPr>
+              <a:t>ITSM Product Management</a:t>
+            </a:r>
+          </a:p>
+        </p:txBody>
+      </p:sp>
+      <p:sp>
+        <p:nvSpPr>
+          <p:cNvPr id="9" name="TextBox 8"/>
+          <p:cNvSpPr txBox="1"/>
+          <p:nvPr/>
+        </p:nvSpPr>
+        <p:spPr>
+          <a:xfrm>
+            <a:off x="667512" y="1719072"/>
+            <a:ext cx="5120640" cy="256032"/>
+          </a:xfrm>
+          <a:prstGeom prst="rect">
+            <a:avLst/>
+          </a:prstGeom>
+          <a:noFill/>
+        </p:spPr>
+        <p:txBody>
+          <a:bodyPr wrap="square" anchor="t" lIns="50800" rIns="50800" tIns="25400" bIns="25400">
+            <a:spAutoFit/>
+          </a:bodyPr>
+          <a:lstStyle/>
+          <a:p>
+            <a:pPr algn="l"/>
+            <a:r>
+              <a:rPr sz="1100" b="0" i="0">
+                <a:solidFill>
+                  <a:srgbClr val="C9D6E6"/>
+                </a:solidFill>
+                <a:latin typeface="Segoe UI"/>
+              </a:rPr>
+              <a:t>Monthly  ·  PI-2 / PI-3</a:t>
+            </a:r>
+          </a:p>
+        </p:txBody>
+      </p:sp>
+      <p:sp>
+        <p:nvSpPr>
+          <p:cNvPr id="10" name="Rectangle 9"/>
+          <p:cNvSpPr/>
+          <p:nvPr/>
+        </p:nvSpPr>
+        <p:spPr>
+          <a:xfrm>
+            <a:off x="502920" y="2029968"/>
+            <a:ext cx="5486400" cy="2743200"/>
+          </a:xfrm>
+          <a:prstGeom prst="rect">
+            <a:avLst/>
+          </a:prstGeom>
+          <a:solidFill>
+            <a:srgbClr val="F4F6F9"/>
+          </a:solidFill>
+          <a:ln>
+            <a:noFill/>
+          </a:ln>
+          <a:effectLst/>
+        </p:spPr>
+        <p:style>
+          <a:lnRef idx="1">
+            <a:schemeClr val="accent1"/>
+          </a:lnRef>
+          <a:fillRef idx="3">
+            <a:schemeClr val="accent1"/>
+          </a:fillRef>
+          <a:effectRef idx="2">
+            <a:schemeClr val="accent1"/>
+          </a:effectRef>
+          <a:fontRef idx="minor">
+            <a:schemeClr val="lt1"/>
+          </a:fontRef>
+        </p:style>
+        <p:txBody>
+          <a:bodyPr rtlCol="0" anchor="ctr"/>
+          <a:lstStyle/>
+          <a:p>
+            <a:pPr algn="ctr"/>
+          </a:p>
+        </p:txBody>
+      </p:sp>
+      <p:sp>
+        <p:nvSpPr>
+          <p:cNvPr id="11" name="TextBox 10"/>
+          <p:cNvSpPr txBox="1"/>
+          <p:nvPr/>
+        </p:nvSpPr>
+        <p:spPr>
+          <a:xfrm>
+            <a:off x="667512" y="2148840"/>
+            <a:ext cx="5120640" cy="2560320"/>
+          </a:xfrm>
+          <a:prstGeom prst="rect">
+            <a:avLst/>
+          </a:prstGeom>
+          <a:noFill/>
+        </p:spPr>
+        <p:txBody>
+          <a:bodyPr wrap="square" anchor="t" lIns="50800" rIns="50800" tIns="25400" bIns="25400">
+            <a:spAutoFit/>
+          </a:bodyPr>
+          <a:lstStyle/>
+          <a:p>
+            <a:pPr algn="l"/>
+            <a:r>
+              <a:rPr sz="1100" b="0" i="0">
+                <a:solidFill>
+                  <a:srgbClr val="2D2D2D"/>
+                </a:solidFill>
+                <a:latin typeface="Segoe UI"/>
+              </a:rPr>
+              <a:t>•  ITSM Product Owner role: stakeholder management, backlog prioritization, agile ceremonies, governance</a:t>
+            </a:r>
+          </a:p>
+          <a:p>
+            <a:pPr algn="l"/>
+            <a:r>
+              <a:rPr sz="1100" b="0" i="0">
+                <a:solidFill>
+                  <a:srgbClr val="2D2D2D"/>
+                </a:solidFill>
+                <a:latin typeface="Segoe UI"/>
+              </a:rPr>
+              <a:t>•  Separate ITSM lane - outside core CMDB delivery</a:t>
+            </a:r>
+          </a:p>
+          <a:p>
+            <a:pPr algn="l"/>
+            <a:r>
+              <a:rPr sz="1100" b="0" i="0">
+                <a:solidFill>
+                  <a:srgbClr val="2D2D2D"/>
+                </a:solidFill>
+                <a:latin typeface="Segoe UI"/>
+              </a:rPr>
+              <a:t>•  No stories; owner TBD</a:t>
+            </a:r>
+          </a:p>
+        </p:txBody>
+      </p:sp>
+      <p:sp>
+        <p:nvSpPr>
+          <p:cNvPr id="12" name="Rectangle 11"/>
+          <p:cNvSpPr/>
+          <p:nvPr/>
+        </p:nvSpPr>
+        <p:spPr>
+          <a:xfrm>
+            <a:off x="6309359" y="1371600"/>
+            <a:ext cx="5486400" cy="658368"/>
+          </a:xfrm>
+          <a:prstGeom prst="rect">
+            <a:avLst/>
+          </a:prstGeom>
+          <a:solidFill>
+            <a:srgbClr val="1F3A5F"/>
+          </a:solidFill>
+          <a:ln>
+            <a:noFill/>
+          </a:ln>
+          <a:effectLst/>
+        </p:spPr>
+        <p:style>
+          <a:lnRef idx="1">
+            <a:schemeClr val="accent1"/>
+          </a:lnRef>
+          <a:fillRef idx="3">
+            <a:schemeClr val="accent1"/>
+          </a:fillRef>
+          <a:effectRef idx="2">
+            <a:schemeClr val="accent1"/>
+          </a:effectRef>
+          <a:fontRef idx="minor">
+            <a:schemeClr val="lt1"/>
+          </a:fontRef>
+        </p:style>
+        <p:txBody>
+          <a:bodyPr rtlCol="0" anchor="ctr"/>
+          <a:lstStyle/>
+          <a:p>
+            <a:pPr algn="ctr"/>
+          </a:p>
+        </p:txBody>
+      </p:sp>
+      <p:sp>
+        <p:nvSpPr>
+          <p:cNvPr id="13" name="TextBox 12"/>
+          <p:cNvSpPr txBox="1"/>
+          <p:nvPr/>
+        </p:nvSpPr>
+        <p:spPr>
+          <a:xfrm>
+            <a:off x="6473951" y="1417320"/>
+            <a:ext cx="5120640" cy="310896"/>
+          </a:xfrm>
+          <a:prstGeom prst="rect">
+            <a:avLst/>
+          </a:prstGeom>
+          <a:noFill/>
+        </p:spPr>
+        <p:txBody>
+          <a:bodyPr wrap="square" anchor="t" lIns="50800" rIns="50800" tIns="25400" bIns="25400">
+            <a:spAutoFit/>
+          </a:bodyPr>
+          <a:lstStyle/>
+          <a:p>
+            <a:pPr algn="l"/>
+            <a:r>
+              <a:rPr sz="1500" b="1" i="0">
+                <a:solidFill>
+                  <a:srgbClr val="FFFFFF"/>
+                </a:solidFill>
+                <a:latin typeface="Segoe UI"/>
+              </a:rPr>
+              <a:t>Platform Support</a:t>
+            </a:r>
+          </a:p>
+        </p:txBody>
+      </p:sp>
+      <p:sp>
+        <p:nvSpPr>
+          <p:cNvPr id="14" name="TextBox 13"/>
+          <p:cNvSpPr txBox="1"/>
+          <p:nvPr/>
+        </p:nvSpPr>
+        <p:spPr>
+          <a:xfrm>
+            <a:off x="6473951" y="1719072"/>
+            <a:ext cx="5120640" cy="256032"/>
+          </a:xfrm>
+          <a:prstGeom prst="rect">
+            <a:avLst/>
+          </a:prstGeom>
+          <a:noFill/>
+        </p:spPr>
+        <p:txBody>
+          <a:bodyPr wrap="square" anchor="t" lIns="50800" rIns="50800" tIns="25400" bIns="25400">
+            <a:spAutoFit/>
+          </a:bodyPr>
+          <a:lstStyle/>
+          <a:p>
+            <a:pPr algn="l"/>
+            <a:r>
+              <a:rPr sz="1100" b="0" i="0">
+                <a:solidFill>
+                  <a:srgbClr val="C9D6E6"/>
+                </a:solidFill>
+                <a:latin typeface="Segoe UI"/>
+              </a:rPr>
+              <a:t>Monthly  ·  PI-3</a:t>
+            </a:r>
+          </a:p>
+        </p:txBody>
+      </p:sp>
+      <p:sp>
+        <p:nvSpPr>
+          <p:cNvPr id="15" name="Rectangle 14"/>
+          <p:cNvSpPr/>
+          <p:nvPr/>
+        </p:nvSpPr>
+        <p:spPr>
+          <a:xfrm>
+            <a:off x="6309359" y="2029968"/>
+            <a:ext cx="5486400" cy="2743200"/>
+          </a:xfrm>
+          <a:prstGeom prst="rect">
+            <a:avLst/>
+          </a:prstGeom>
+          <a:solidFill>
+            <a:srgbClr val="F4F6F9"/>
+          </a:solidFill>
+          <a:ln>
+            <a:noFill/>
+          </a:ln>
+          <a:effectLst/>
+        </p:spPr>
+        <p:style>
+          <a:lnRef idx="1">
+            <a:schemeClr val="accent1"/>
+          </a:lnRef>
+          <a:fillRef idx="3">
+            <a:schemeClr val="accent1"/>
+          </a:fillRef>
+          <a:effectRef idx="2">
+            <a:schemeClr val="accent1"/>
+          </a:effectRef>
+          <a:fontRef idx="minor">
+            <a:schemeClr val="lt1"/>
+          </a:fontRef>
+        </p:style>
+        <p:txBody>
+          <a:bodyPr rtlCol="0" anchor="ctr"/>
+          <a:lstStyle/>
+          <a:p>
+            <a:pPr algn="ctr"/>
+          </a:p>
+        </p:txBody>
+      </p:sp>
+      <p:sp>
+        <p:nvSpPr>
+          <p:cNvPr id="16" name="TextBox 15"/>
+          <p:cNvSpPr txBox="1"/>
+          <p:nvPr/>
+        </p:nvSpPr>
+        <p:spPr>
+          <a:xfrm>
+            <a:off x="6473951" y="2148840"/>
+            <a:ext cx="5120640" cy="2560320"/>
+          </a:xfrm>
+          <a:prstGeom prst="rect">
+            <a:avLst/>
+          </a:prstGeom>
+          <a:noFill/>
+        </p:spPr>
+        <p:txBody>
+          <a:bodyPr wrap="square" anchor="t" lIns="50800" rIns="50800" tIns="25400" bIns="25400">
+            <a:spAutoFit/>
+          </a:bodyPr>
+          <a:lstStyle/>
+          <a:p>
+            <a:pPr algn="l"/>
+            <a:r>
+              <a:rPr sz="1100" b="0" i="0">
+                <a:solidFill>
+                  <a:srgbClr val="2D2D2D"/>
+                </a:solidFill>
+                <a:latin typeface="Segoe UI"/>
+              </a:rPr>
+              <a:t>•  Dedicated BAU / DevOps team; ~40 hrs of stories per week per member; per-sprint time tracking</a:t>
+            </a:r>
+          </a:p>
+          <a:p>
+            <a:pPr algn="l"/>
+            <a:r>
+              <a:rPr sz="1100" b="0" i="0">
+                <a:solidFill>
+                  <a:srgbClr val="2D2D2D"/>
+                </a:solidFill>
+                <a:latin typeface="Segoe UI"/>
+              </a:rPr>
+              <a:t>•  Ongoing capacity, not a finite deliverable</a:t>
+            </a:r>
+          </a:p>
+          <a:p>
+            <a:pPr algn="l"/>
+            <a:r>
+              <a:rPr sz="1100" b="0" i="0">
+                <a:solidFill>
+                  <a:srgbClr val="2D2D2D"/>
+                </a:solidFill>
+                <a:latin typeface="Segoe UI"/>
+              </a:rPr>
+              <a:t>•  Team size TBD</a:t>
+            </a:r>
+          </a:p>
+        </p:txBody>
+      </p:sp>
+      <p:sp>
+        <p:nvSpPr>
+          <p:cNvPr id="17" name="Rectangle 16"/>
+          <p:cNvSpPr/>
+          <p:nvPr/>
+        </p:nvSpPr>
+        <p:spPr>
+          <a:xfrm>
+            <a:off x="502920" y="5029200"/>
+            <a:ext cx="11155680" cy="640080"/>
+          </a:xfrm>
+          <a:prstGeom prst="rect">
+            <a:avLst/>
+          </a:prstGeom>
+          <a:solidFill>
+            <a:srgbClr val="FBEEDB"/>
+          </a:solidFill>
+          <a:ln w="9525">
+            <a:solidFill>
+              <a:srgbClr val="E08A00"/>
+            </a:solidFill>
+          </a:ln>
+          <a:effectLst/>
+        </p:spPr>
+        <p:style>
+          <a:lnRef idx="1">
+            <a:schemeClr val="accent1"/>
+          </a:lnRef>
+          <a:fillRef idx="3">
+            <a:schemeClr val="accent1"/>
+          </a:fillRef>
+          <a:effectRef idx="2">
+            <a:schemeClr val="accent1"/>
+          </a:effectRef>
+          <a:fontRef idx="minor">
+            <a:schemeClr val="lt1"/>
+          </a:fontRef>
+        </p:style>
+        <p:txBody>
+          <a:bodyPr rtlCol="0" anchor="ctr"/>
+          <a:lstStyle/>
+          <a:p>
+            <a:pPr algn="ctr"/>
+          </a:p>
+        </p:txBody>
+      </p:sp>
+      <p:sp>
+        <p:nvSpPr>
+          <p:cNvPr id="18" name="TextBox 17"/>
+          <p:cNvSpPr txBox="1"/>
+          <p:nvPr/>
+        </p:nvSpPr>
+        <p:spPr>
+          <a:xfrm>
+            <a:off x="658368" y="5065776"/>
+            <a:ext cx="10881360" cy="566928"/>
+          </a:xfrm>
+          <a:prstGeom prst="rect">
+            <a:avLst/>
+          </a:prstGeom>
+          <a:noFill/>
+        </p:spPr>
+        <p:txBody>
+          <a:bodyPr wrap="square" anchor="ctr" lIns="50800" rIns="50800" tIns="25400" bIns="25400">
+            <a:spAutoFit/>
+          </a:bodyPr>
+          <a:lstStyle/>
+          <a:p>
+            <a:pPr algn="l"/>
+            <a:r>
+              <a:rPr sz="1100" b="0" i="0">
+                <a:solidFill>
+                  <a:srgbClr val="5A4A2A"/>
+                </a:solidFill>
+                <a:latin typeface="Segoe UI"/>
+              </a:rPr>
+              <a:t>These are staffing / capacity decisions, not backlog - flagged so they stay on the radar.</a:t>
+            </a:r>
+          </a:p>
+        </p:txBody>
+      </p:sp>
+    </p:spTree>
+  </p:cSld>
+  <p:clrMapOvr>
+    <a:masterClrMapping/>
+  </p:clrMapOvr>
+</p:sld>
+</file>
+
+<file path=ppt/slides/slide12.xml><?xml version="1.0" encoding="utf-8"?>
+<p:sld xmlns:a="http://schemas.openxmlformats.org/drawingml/2006/main" xmlns:p="http://schemas.openxmlformats.org/presentationml/2006/main" xmlns:r="http://schemas.openxmlformats.org/officeDocument/2006/relationships">
+  <p:cSld>
+    <p:spTree>
+      <p:nvGrpSpPr>
+        <p:cNvPr id="1" name=""/>
+        <p:cNvGrpSpPr/>
+        <p:nvPr/>
+      </p:nvGrpSpPr>
+      <p:grpSpPr/>
+      <p:sp>
+        <p:nvSpPr>
+          <p:cNvPr id="2" name="Rectangle 1"/>
+          <p:cNvSpPr/>
+          <p:nvPr/>
+        </p:nvSpPr>
+        <p:spPr>
+          <a:xfrm>
+            <a:off x="0" y="0"/>
+            <a:ext cx="12191695" cy="960120"/>
+          </a:xfrm>
+          <a:prstGeom prst="rect">
+            <a:avLst/>
+          </a:prstGeom>
+          <a:solidFill>
+            <a:srgbClr val="1F3A5F"/>
+          </a:solidFill>
+          <a:ln>
+            <a:noFill/>
+          </a:ln>
+          <a:effectLst/>
+        </p:spPr>
+        <p:style>
+          <a:lnRef idx="1">
+            <a:schemeClr val="accent1"/>
+          </a:lnRef>
+          <a:fillRef idx="3">
+            <a:schemeClr val="accent1"/>
+          </a:fillRef>
+          <a:effectRef idx="2">
+            <a:schemeClr val="accent1"/>
+          </a:effectRef>
+          <a:fontRef idx="minor">
+            <a:schemeClr val="lt1"/>
+          </a:fontRef>
+        </p:style>
+        <p:txBody>
+          <a:bodyPr rtlCol="0" anchor="ctr"/>
+          <a:lstStyle/>
+          <a:p>
+            <a:pPr algn="ctr"/>
+          </a:p>
+        </p:txBody>
+      </p:sp>
+      <p:sp>
+        <p:nvSpPr>
+          <p:cNvPr id="3" name="Rectangle 2"/>
+          <p:cNvSpPr/>
+          <p:nvPr/>
+        </p:nvSpPr>
+        <p:spPr>
+          <a:xfrm>
+            <a:off x="0" y="960120"/>
+            <a:ext cx="12191695" cy="54864"/>
+          </a:xfrm>
+          <a:prstGeom prst="rect">
+            <a:avLst/>
+          </a:prstGeom>
+          <a:solidFill>
+            <a:srgbClr val="2E6DB4"/>
+          </a:solidFill>
+          <a:ln>
+            <a:noFill/>
+          </a:ln>
+          <a:effectLst/>
+        </p:spPr>
+        <p:style>
+          <a:lnRef idx="1">
+            <a:schemeClr val="accent1"/>
+          </a:lnRef>
+          <a:fillRef idx="3">
+            <a:schemeClr val="accent1"/>
+          </a:fillRef>
+          <a:effectRef idx="2">
+            <a:schemeClr val="accent1"/>
+          </a:effectRef>
+          <a:fontRef idx="minor">
+            <a:schemeClr val="lt1"/>
+          </a:fontRef>
+        </p:style>
+        <p:txBody>
+          <a:bodyPr rtlCol="0" anchor="ctr"/>
+          <a:lstStyle/>
+          <a:p>
+            <a:pPr algn="ctr"/>
+          </a:p>
+        </p:txBody>
+      </p:sp>
+      <p:sp>
+        <p:nvSpPr>
+          <p:cNvPr id="4" name="TextBox 3"/>
+          <p:cNvSpPr txBox="1"/>
+          <p:nvPr/>
+        </p:nvSpPr>
+        <p:spPr>
+          <a:xfrm>
+            <a:off x="502920" y="164592"/>
+            <a:ext cx="11155680" cy="502920"/>
+          </a:xfrm>
+          <a:prstGeom prst="rect">
+            <a:avLst/>
+          </a:prstGeom>
+          <a:noFill/>
+        </p:spPr>
+        <p:txBody>
+          <a:bodyPr wrap="square" anchor="ctr" lIns="50800" rIns="50800" tIns="25400" bIns="25400">
+            <a:spAutoFit/>
+          </a:bodyPr>
+          <a:lstStyle/>
+          <a:p>
+            <a:pPr algn="l"/>
+            <a:r>
+              <a:rPr sz="2600" b="1" i="0">
+                <a:solidFill>
+                  <a:srgbClr val="FFFFFF"/>
+                </a:solidFill>
+                <a:latin typeface="Segoe UI"/>
+              </a:rPr>
+              <a:t>Timeline - Where It Lands</a:t>
+            </a:r>
+          </a:p>
+        </p:txBody>
+      </p:sp>
+      <p:sp>
+        <p:nvSpPr>
+          <p:cNvPr id="5" name="TextBox 4"/>
+          <p:cNvSpPr txBox="1"/>
+          <p:nvPr/>
+        </p:nvSpPr>
+        <p:spPr>
+          <a:xfrm>
+            <a:off x="521207" y="603504"/>
+            <a:ext cx="11155680" cy="292608"/>
+          </a:xfrm>
+          <a:prstGeom prst="rect">
+            <a:avLst/>
+          </a:prstGeom>
+          <a:noFill/>
+        </p:spPr>
+        <p:txBody>
+          <a:bodyPr wrap="square" anchor="ctr" lIns="50800" rIns="50800" tIns="25400" bIns="25400">
+            <a:spAutoFit/>
+          </a:bodyPr>
+          <a:lstStyle/>
+          <a:p>
+            <a:pPr algn="l"/>
+            <a:r>
+              <a:rPr sz="1200" b="0" i="0">
+                <a:solidFill>
+                  <a:srgbClr val="C9D6E6"/>
+                </a:solidFill>
+                <a:latin typeface="Segoe UI"/>
+              </a:rPr>
+              <a:t>Tail of PI-2 + all of PI-3  ·  staged monthly acceptance</a:t>
+            </a:r>
+          </a:p>
+        </p:txBody>
+      </p:sp>
+      <p:sp>
+        <p:nvSpPr>
+          <p:cNvPr id="6" name="TextBox 5"/>
+          <p:cNvSpPr txBox="1"/>
+          <p:nvPr/>
+        </p:nvSpPr>
+        <p:spPr>
+          <a:xfrm>
+            <a:off x="502920" y="6473952"/>
+            <a:ext cx="9144000" cy="292608"/>
+          </a:xfrm>
+          <a:prstGeom prst="rect">
+            <a:avLst/>
+          </a:prstGeom>
+          <a:noFill/>
+        </p:spPr>
+        <p:txBody>
+          <a:bodyPr wrap="square" anchor="t" lIns="50800" rIns="50800" tIns="25400" bIns="25400">
+            <a:spAutoFit/>
+          </a:bodyPr>
+          <a:lstStyle/>
+          <a:p>
+            <a:pPr algn="l"/>
+            <a:r>
+              <a:rPr sz="900" b="0" i="0">
+                <a:solidFill>
+                  <a:srgbClr val="6B7280"/>
+                </a:solidFill>
+                <a:latin typeface="Segoe UI"/>
+              </a:rPr>
+              <a:t>PPL CMDB-CSDM  |  CO6 Deliverables  |  Team Focus  -  Jul 10, 2026</a:t>
+            </a:r>
+          </a:p>
+        </p:txBody>
+      </p:sp>
+      <p:sp>
+        <p:nvSpPr>
+          <p:cNvPr id="7" name="Rectangle 6"/>
+          <p:cNvSpPr/>
+          <p:nvPr/>
+        </p:nvSpPr>
+        <p:spPr>
+          <a:xfrm>
+            <a:off x="1828800" y="1188720"/>
+            <a:ext cx="12700" cy="1234440"/>
+          </a:xfrm>
+          <a:prstGeom prst="rect">
+            <a:avLst/>
+          </a:prstGeom>
+          <a:solidFill>
+            <a:srgbClr val="DDE3EA"/>
+          </a:solidFill>
+          <a:ln>
+            <a:noFill/>
+          </a:ln>
+          <a:effectLst/>
+        </p:spPr>
+        <p:style>
+          <a:lnRef idx="1">
+            <a:schemeClr val="accent1"/>
+          </a:lnRef>
+          <a:fillRef idx="3">
+            <a:schemeClr val="accent1"/>
+          </a:fillRef>
+          <a:effectRef idx="2">
+            <a:schemeClr val="accent1"/>
+          </a:effectRef>
+          <a:fontRef idx="minor">
+            <a:schemeClr val="lt1"/>
+          </a:fontRef>
+        </p:style>
+        <p:txBody>
+          <a:bodyPr rtlCol="0" anchor="ctr"/>
+          <a:lstStyle/>
+          <a:p>
+            <a:pPr algn="ctr"/>
+          </a:p>
+        </p:txBody>
+      </p:sp>
+      <p:sp>
+        <p:nvSpPr>
+          <p:cNvPr id="8" name="TextBox 7"/>
+          <p:cNvSpPr txBox="1"/>
+          <p:nvPr/>
+        </p:nvSpPr>
+        <p:spPr>
+          <a:xfrm>
+            <a:off x="1554480" y="2441448"/>
+            <a:ext cx="548640" cy="228600"/>
+          </a:xfrm>
+          <a:prstGeom prst="rect">
+            <a:avLst/>
+          </a:prstGeom>
+          <a:noFill/>
+        </p:spPr>
+        <p:txBody>
+          <a:bodyPr wrap="square" anchor="t" lIns="50800" rIns="50800" tIns="25400" bIns="25400">
+            <a:spAutoFit/>
+          </a:bodyPr>
+          <a:lstStyle/>
+          <a:p>
+            <a:pPr algn="ctr"/>
+            <a:r>
+              <a:rPr sz="900" b="0" i="0">
+                <a:solidFill>
+                  <a:srgbClr val="6B7280"/>
+                </a:solidFill>
+                <a:latin typeface="Segoe UI"/>
+              </a:rPr>
+              <a:t>Jun</a:t>
+            </a:r>
+          </a:p>
+        </p:txBody>
+      </p:sp>
+      <p:sp>
+        <p:nvSpPr>
+          <p:cNvPr id="9" name="Rectangle 8"/>
+          <p:cNvSpPr/>
+          <p:nvPr/>
+        </p:nvSpPr>
+        <p:spPr>
+          <a:xfrm>
+            <a:off x="3767328" y="1188720"/>
+            <a:ext cx="12700" cy="1234440"/>
+          </a:xfrm>
+          <a:prstGeom prst="rect">
+            <a:avLst/>
+          </a:prstGeom>
+          <a:solidFill>
+            <a:srgbClr val="DDE3EA"/>
+          </a:solidFill>
+          <a:ln>
+            <a:noFill/>
+          </a:ln>
+          <a:effectLst/>
+        </p:spPr>
+        <p:style>
+          <a:lnRef idx="1">
+            <a:schemeClr val="accent1"/>
+          </a:lnRef>
+          <a:fillRef idx="3">
+            <a:schemeClr val="accent1"/>
+          </a:fillRef>
+          <a:effectRef idx="2">
+            <a:schemeClr val="accent1"/>
+          </a:effectRef>
+          <a:fontRef idx="minor">
+            <a:schemeClr val="lt1"/>
+          </a:fontRef>
+        </p:style>
+        <p:txBody>
+          <a:bodyPr rtlCol="0" anchor="ctr"/>
+          <a:lstStyle/>
+          <a:p>
+            <a:pPr algn="ctr"/>
+          </a:p>
+        </p:txBody>
+      </p:sp>
+      <p:sp>
+        <p:nvSpPr>
+          <p:cNvPr id="10" name="TextBox 9"/>
+          <p:cNvSpPr txBox="1"/>
+          <p:nvPr/>
+        </p:nvSpPr>
+        <p:spPr>
+          <a:xfrm>
+            <a:off x="3493008" y="2441448"/>
+            <a:ext cx="548640" cy="228600"/>
+          </a:xfrm>
+          <a:prstGeom prst="rect">
+            <a:avLst/>
+          </a:prstGeom>
+          <a:noFill/>
+        </p:spPr>
+        <p:txBody>
+          <a:bodyPr wrap="square" anchor="t" lIns="50800" rIns="50800" tIns="25400" bIns="25400">
+            <a:spAutoFit/>
+          </a:bodyPr>
+          <a:lstStyle/>
+          <a:p>
+            <a:pPr algn="ctr"/>
+            <a:r>
+              <a:rPr sz="900" b="0" i="0">
+                <a:solidFill>
+                  <a:srgbClr val="6B7280"/>
+                </a:solidFill>
+                <a:latin typeface="Segoe UI"/>
+              </a:rPr>
+              <a:t>Jul</a:t>
+            </a:r>
+          </a:p>
+        </p:txBody>
+      </p:sp>
+      <p:sp>
+        <p:nvSpPr>
+          <p:cNvPr id="11" name="Rectangle 10"/>
+          <p:cNvSpPr/>
+          <p:nvPr/>
+        </p:nvSpPr>
+        <p:spPr>
+          <a:xfrm>
+            <a:off x="5705856" y="1188720"/>
+            <a:ext cx="12700" cy="1234440"/>
+          </a:xfrm>
+          <a:prstGeom prst="rect">
+            <a:avLst/>
+          </a:prstGeom>
+          <a:solidFill>
+            <a:srgbClr val="DDE3EA"/>
+          </a:solidFill>
+          <a:ln>
+            <a:noFill/>
+          </a:ln>
+          <a:effectLst/>
+        </p:spPr>
+        <p:style>
+          <a:lnRef idx="1">
+            <a:schemeClr val="accent1"/>
+          </a:lnRef>
+          <a:fillRef idx="3">
+            <a:schemeClr val="accent1"/>
+          </a:fillRef>
+          <a:effectRef idx="2">
+            <a:schemeClr val="accent1"/>
+          </a:effectRef>
+          <a:fontRef idx="minor">
+            <a:schemeClr val="lt1"/>
+          </a:fontRef>
+        </p:style>
+        <p:txBody>
+          <a:bodyPr rtlCol="0" anchor="ctr"/>
+          <a:lstStyle/>
+          <a:p>
+            <a:pPr algn="ctr"/>
+          </a:p>
+        </p:txBody>
+      </p:sp>
+      <p:sp>
+        <p:nvSpPr>
+          <p:cNvPr id="12" name="TextBox 11"/>
+          <p:cNvSpPr txBox="1"/>
+          <p:nvPr/>
+        </p:nvSpPr>
+        <p:spPr>
+          <a:xfrm>
+            <a:off x="5431536" y="2441448"/>
+            <a:ext cx="548640" cy="228600"/>
+          </a:xfrm>
+          <a:prstGeom prst="rect">
+            <a:avLst/>
+          </a:prstGeom>
+          <a:noFill/>
+        </p:spPr>
+        <p:txBody>
+          <a:bodyPr wrap="square" anchor="t" lIns="50800" rIns="50800" tIns="25400" bIns="25400">
+            <a:spAutoFit/>
+          </a:bodyPr>
+          <a:lstStyle/>
+          <a:p>
+            <a:pPr algn="ctr"/>
+            <a:r>
+              <a:rPr sz="900" b="0" i="0">
+                <a:solidFill>
+                  <a:srgbClr val="6B7280"/>
+                </a:solidFill>
+                <a:latin typeface="Segoe UI"/>
+              </a:rPr>
+              <a:t>Aug</a:t>
+            </a:r>
+          </a:p>
+        </p:txBody>
+      </p:sp>
+      <p:sp>
+        <p:nvSpPr>
+          <p:cNvPr id="13" name="Rectangle 12"/>
+          <p:cNvSpPr/>
+          <p:nvPr/>
+        </p:nvSpPr>
+        <p:spPr>
+          <a:xfrm>
+            <a:off x="7644383" y="1188720"/>
+            <a:ext cx="12700" cy="1234440"/>
+          </a:xfrm>
+          <a:prstGeom prst="rect">
+            <a:avLst/>
+          </a:prstGeom>
+          <a:solidFill>
+            <a:srgbClr val="DDE3EA"/>
+          </a:solidFill>
+          <a:ln>
+            <a:noFill/>
+          </a:ln>
+          <a:effectLst/>
+        </p:spPr>
+        <p:style>
+          <a:lnRef idx="1">
+            <a:schemeClr val="accent1"/>
+          </a:lnRef>
+          <a:fillRef idx="3">
+            <a:schemeClr val="accent1"/>
+          </a:fillRef>
+          <a:effectRef idx="2">
+            <a:schemeClr val="accent1"/>
+          </a:effectRef>
+          <a:fontRef idx="minor">
+            <a:schemeClr val="lt1"/>
+          </a:fontRef>
+        </p:style>
+        <p:txBody>
+          <a:bodyPr rtlCol="0" anchor="ctr"/>
+          <a:lstStyle/>
+          <a:p>
+            <a:pPr algn="ctr"/>
+          </a:p>
+        </p:txBody>
+      </p:sp>
+      <p:sp>
+        <p:nvSpPr>
+          <p:cNvPr id="14" name="TextBox 13"/>
+          <p:cNvSpPr txBox="1"/>
+          <p:nvPr/>
+        </p:nvSpPr>
+        <p:spPr>
+          <a:xfrm>
+            <a:off x="7370063" y="2441448"/>
+            <a:ext cx="548640" cy="228600"/>
+          </a:xfrm>
+          <a:prstGeom prst="rect">
+            <a:avLst/>
+          </a:prstGeom>
+          <a:noFill/>
+        </p:spPr>
+        <p:txBody>
+          <a:bodyPr wrap="square" anchor="t" lIns="50800" rIns="50800" tIns="25400" bIns="25400">
+            <a:spAutoFit/>
+          </a:bodyPr>
+          <a:lstStyle/>
+          <a:p>
+            <a:pPr algn="ctr"/>
+            <a:r>
+              <a:rPr sz="900" b="0" i="0">
+                <a:solidFill>
+                  <a:srgbClr val="6B7280"/>
+                </a:solidFill>
+                <a:latin typeface="Segoe UI"/>
+              </a:rPr>
+              <a:t>Sep</a:t>
+            </a:r>
+          </a:p>
+        </p:txBody>
+      </p:sp>
+      <p:sp>
+        <p:nvSpPr>
+          <p:cNvPr id="15" name="Rectangle 14"/>
+          <p:cNvSpPr/>
+          <p:nvPr/>
+        </p:nvSpPr>
+        <p:spPr>
+          <a:xfrm>
+            <a:off x="9582912" y="1188720"/>
+            <a:ext cx="12700" cy="1234440"/>
+          </a:xfrm>
+          <a:prstGeom prst="rect">
+            <a:avLst/>
+          </a:prstGeom>
+          <a:solidFill>
+            <a:srgbClr val="DDE3EA"/>
+          </a:solidFill>
+          <a:ln>
+            <a:noFill/>
+          </a:ln>
+          <a:effectLst/>
+        </p:spPr>
+        <p:style>
+          <a:lnRef idx="1">
+            <a:schemeClr val="accent1"/>
+          </a:lnRef>
+          <a:fillRef idx="3">
+            <a:schemeClr val="accent1"/>
+          </a:fillRef>
+          <a:effectRef idx="2">
+            <a:schemeClr val="accent1"/>
+          </a:effectRef>
+          <a:fontRef idx="minor">
+            <a:schemeClr val="lt1"/>
+          </a:fontRef>
+        </p:style>
+        <p:txBody>
+          <a:bodyPr rtlCol="0" anchor="ctr"/>
+          <a:lstStyle/>
+          <a:p>
+            <a:pPr algn="ctr"/>
+          </a:p>
+        </p:txBody>
+      </p:sp>
+      <p:sp>
+        <p:nvSpPr>
+          <p:cNvPr id="16" name="TextBox 15"/>
+          <p:cNvSpPr txBox="1"/>
+          <p:nvPr/>
+        </p:nvSpPr>
+        <p:spPr>
+          <a:xfrm>
+            <a:off x="9308592" y="2441448"/>
+            <a:ext cx="548640" cy="228600"/>
+          </a:xfrm>
+          <a:prstGeom prst="rect">
+            <a:avLst/>
+          </a:prstGeom>
+          <a:noFill/>
+        </p:spPr>
+        <p:txBody>
+          <a:bodyPr wrap="square" anchor="t" lIns="50800" rIns="50800" tIns="25400" bIns="25400">
+            <a:spAutoFit/>
+          </a:bodyPr>
+          <a:lstStyle/>
+          <a:p>
+            <a:pPr algn="ctr"/>
+            <a:r>
+              <a:rPr sz="900" b="0" i="0">
+                <a:solidFill>
+                  <a:srgbClr val="6B7280"/>
+                </a:solidFill>
+                <a:latin typeface="Segoe UI"/>
+              </a:rPr>
+              <a:t>Oct</a:t>
+            </a:r>
+          </a:p>
+        </p:txBody>
+      </p:sp>
+      <p:sp>
+        <p:nvSpPr>
+          <p:cNvPr id="17" name="Rectangle 16"/>
+          <p:cNvSpPr/>
+          <p:nvPr/>
+        </p:nvSpPr>
+        <p:spPr>
+          <a:xfrm>
+            <a:off x="11521440" y="1188720"/>
+            <a:ext cx="12700" cy="1234440"/>
+          </a:xfrm>
+          <a:prstGeom prst="rect">
+            <a:avLst/>
+          </a:prstGeom>
+          <a:solidFill>
+            <a:srgbClr val="DDE3EA"/>
+          </a:solidFill>
+          <a:ln>
+            <a:noFill/>
+          </a:ln>
+          <a:effectLst/>
+        </p:spPr>
+        <p:style>
+          <a:lnRef idx="1">
+            <a:schemeClr val="accent1"/>
+          </a:lnRef>
+          <a:fillRef idx="3">
+            <a:schemeClr val="accent1"/>
+          </a:fillRef>
+          <a:effectRef idx="2">
+            <a:schemeClr val="accent1"/>
+          </a:effectRef>
+          <a:fontRef idx="minor">
+            <a:schemeClr val="lt1"/>
+          </a:fontRef>
+        </p:style>
+        <p:txBody>
+          <a:bodyPr rtlCol="0" anchor="ctr"/>
+          <a:lstStyle/>
+          <a:p>
+            <a:pPr algn="ctr"/>
+          </a:p>
+        </p:txBody>
+      </p:sp>
+      <p:sp>
+        <p:nvSpPr>
+          <p:cNvPr id="18" name="TextBox 17"/>
+          <p:cNvSpPr txBox="1"/>
+          <p:nvPr/>
+        </p:nvSpPr>
+        <p:spPr>
+          <a:xfrm>
+            <a:off x="11247120" y="2441448"/>
+            <a:ext cx="548640" cy="228600"/>
+          </a:xfrm>
+          <a:prstGeom prst="rect">
+            <a:avLst/>
+          </a:prstGeom>
+          <a:noFill/>
+        </p:spPr>
+        <p:txBody>
+          <a:bodyPr wrap="square" anchor="t" lIns="50800" rIns="50800" tIns="25400" bIns="25400">
+            <a:spAutoFit/>
+          </a:bodyPr>
+          <a:lstStyle/>
+          <a:p>
+            <a:pPr algn="ctr"/>
+            <a:r>
+              <a:rPr sz="900" b="0" i="0">
+                <a:solidFill>
+                  <a:srgbClr val="6B7280"/>
+                </a:solidFill>
+                <a:latin typeface="Segoe UI"/>
+              </a:rPr>
+              <a:t>Nov</a:t>
+            </a:r>
+          </a:p>
+        </p:txBody>
+      </p:sp>
+      <p:sp>
+        <p:nvSpPr>
+          <p:cNvPr id="19" name="TextBox 18"/>
+          <p:cNvSpPr txBox="1"/>
+          <p:nvPr/>
+        </p:nvSpPr>
+        <p:spPr>
+          <a:xfrm>
+            <a:off x="502920" y="1188720"/>
+            <a:ext cx="1280160" cy="1234440"/>
+          </a:xfrm>
+          <a:prstGeom prst="rect">
+            <a:avLst/>
+          </a:prstGeom>
+          <a:noFill/>
+        </p:spPr>
+        <p:txBody>
+          <a:bodyPr wrap="square" anchor="ctr" lIns="50800" rIns="50800" tIns="25400" bIns="25400">
+            <a:spAutoFit/>
+          </a:bodyPr>
+          <a:lstStyle/>
+          <a:p>
+            <a:pPr algn="l"/>
+            <a:r>
+              <a:rPr sz="900" b="1" i="0">
+                <a:solidFill>
+                  <a:srgbClr val="6B7280"/>
+                </a:solidFill>
+                <a:latin typeface="Segoe UI"/>
+              </a:rPr>
+              <a:t>Windows</a:t>
+            </a:r>
+          </a:p>
+        </p:txBody>
+      </p:sp>
+      <p:sp>
+        <p:nvSpPr>
+          <p:cNvPr id="20" name="Rectangle 19"/>
+          <p:cNvSpPr/>
+          <p:nvPr/>
+        </p:nvSpPr>
+        <p:spPr>
+          <a:xfrm>
+            <a:off x="3767328" y="1243584"/>
+            <a:ext cx="7628107" cy="292608"/>
+          </a:xfrm>
+          <a:prstGeom prst="rect">
+            <a:avLst/>
+          </a:prstGeom>
+          <a:solidFill>
+            <a:srgbClr val="2E6DB4"/>
+          </a:solidFill>
+          <a:ln>
+            <a:noFill/>
+          </a:ln>
+          <a:effectLst/>
+        </p:spPr>
+        <p:style>
+          <a:lnRef idx="1">
+            <a:schemeClr val="accent1"/>
+          </a:lnRef>
+          <a:fillRef idx="3">
+            <a:schemeClr val="accent1"/>
+          </a:fillRef>
+          <a:effectRef idx="2">
+            <a:schemeClr val="accent1"/>
+          </a:effectRef>
+          <a:fontRef idx="minor">
+            <a:schemeClr val="lt1"/>
+          </a:fontRef>
+        </p:style>
+        <p:txBody>
+          <a:bodyPr rtlCol="0" anchor="ctr"/>
+          <a:lstStyle/>
+          <a:p>
+            <a:pPr algn="ctr"/>
+          </a:p>
+        </p:txBody>
+      </p:sp>
+      <p:sp>
+        <p:nvSpPr>
+          <p:cNvPr id="21" name="TextBox 20"/>
+          <p:cNvSpPr txBox="1"/>
+          <p:nvPr/>
+        </p:nvSpPr>
+        <p:spPr>
+          <a:xfrm>
+            <a:off x="3840480" y="1243584"/>
+            <a:ext cx="7518379" cy="292608"/>
+          </a:xfrm>
+          <a:prstGeom prst="rect">
+            <a:avLst/>
+          </a:prstGeom>
+          <a:noFill/>
+        </p:spPr>
+        <p:txBody>
+          <a:bodyPr wrap="square" anchor="ctr" lIns="50800" rIns="50800" tIns="25400" bIns="25400">
+            <a:spAutoFit/>
+          </a:bodyPr>
+          <a:lstStyle/>
+          <a:p>
+            <a:pPr algn="l"/>
+            <a:r>
+              <a:rPr sz="950" b="1" i="0">
+                <a:solidFill>
+                  <a:srgbClr val="FFFFFF"/>
+                </a:solidFill>
+                <a:latin typeface="Segoe UI"/>
+              </a:rPr>
+              <a:t>Delivery window   Jul 1 - Oct 30</a:t>
+            </a:r>
+          </a:p>
+        </p:txBody>
+      </p:sp>
+      <p:sp>
+        <p:nvSpPr>
+          <p:cNvPr id="22" name="Rectangle 21"/>
+          <p:cNvSpPr/>
+          <p:nvPr/>
+        </p:nvSpPr>
+        <p:spPr>
+          <a:xfrm>
+            <a:off x="1828800" y="1613916"/>
+            <a:ext cx="4065093" cy="292608"/>
+          </a:xfrm>
+          <a:prstGeom prst="rect">
+            <a:avLst/>
+          </a:prstGeom>
+          <a:solidFill>
+            <a:srgbClr val="6E88AE"/>
+          </a:solidFill>
+          <a:ln>
+            <a:noFill/>
+          </a:ln>
+          <a:effectLst/>
+        </p:spPr>
+        <p:style>
+          <a:lnRef idx="1">
+            <a:schemeClr val="accent1"/>
+          </a:lnRef>
+          <a:fillRef idx="3">
+            <a:schemeClr val="accent1"/>
+          </a:fillRef>
+          <a:effectRef idx="2">
+            <a:schemeClr val="accent1"/>
+          </a:effectRef>
+          <a:fontRef idx="minor">
+            <a:schemeClr val="lt1"/>
+          </a:fontRef>
+        </p:style>
+        <p:txBody>
+          <a:bodyPr rtlCol="0" anchor="ctr"/>
+          <a:lstStyle/>
+          <a:p>
+            <a:pPr algn="ctr"/>
+          </a:p>
+        </p:txBody>
+      </p:sp>
+      <p:sp>
+        <p:nvSpPr>
+          <p:cNvPr id="23" name="TextBox 22"/>
+          <p:cNvSpPr txBox="1"/>
+          <p:nvPr/>
+        </p:nvSpPr>
+        <p:spPr>
+          <a:xfrm>
+            <a:off x="1901952" y="1613916"/>
+            <a:ext cx="3955365" cy="292608"/>
+          </a:xfrm>
+          <a:prstGeom prst="rect">
+            <a:avLst/>
+          </a:prstGeom>
+          <a:noFill/>
+        </p:spPr>
+        <p:txBody>
+          <a:bodyPr wrap="square" anchor="ctr" lIns="50800" rIns="50800" tIns="25400" bIns="25400">
+            <a:spAutoFit/>
+          </a:bodyPr>
+          <a:lstStyle/>
+          <a:p>
+            <a:pPr algn="l"/>
+            <a:r>
+              <a:rPr sz="950" b="1" i="0">
+                <a:solidFill>
+                  <a:srgbClr val="FFFFFF"/>
+                </a:solidFill>
+                <a:latin typeface="Segoe UI"/>
+              </a:rPr>
+              <a:t>PI-2  (-&gt; Aug 4)</a:t>
+            </a:r>
+          </a:p>
+        </p:txBody>
+      </p:sp>
+      <p:sp>
+        <p:nvSpPr>
+          <p:cNvPr id="24" name="Rectangle 23"/>
+          <p:cNvSpPr/>
+          <p:nvPr/>
+        </p:nvSpPr>
+        <p:spPr>
+          <a:xfrm>
+            <a:off x="5955926" y="1984248"/>
+            <a:ext cx="5253410" cy="292608"/>
+          </a:xfrm>
+          <a:prstGeom prst="rect">
+            <a:avLst/>
+          </a:prstGeom>
+          <a:solidFill>
+            <a:srgbClr val="2E8B57"/>
+          </a:solidFill>
+          <a:ln>
+            <a:noFill/>
+          </a:ln>
+          <a:effectLst/>
+        </p:spPr>
+        <p:style>
+          <a:lnRef idx="1">
+            <a:schemeClr val="accent1"/>
+          </a:lnRef>
+          <a:fillRef idx="3">
+            <a:schemeClr val="accent1"/>
+          </a:fillRef>
+          <a:effectRef idx="2">
+            <a:schemeClr val="accent1"/>
+          </a:effectRef>
+          <a:fontRef idx="minor">
+            <a:schemeClr val="lt1"/>
+          </a:fontRef>
+        </p:style>
+        <p:txBody>
+          <a:bodyPr rtlCol="0" anchor="ctr"/>
+          <a:lstStyle/>
+          <a:p>
+            <a:pPr algn="ctr"/>
+          </a:p>
+        </p:txBody>
+      </p:sp>
+      <p:sp>
+        <p:nvSpPr>
+          <p:cNvPr id="25" name="TextBox 24"/>
+          <p:cNvSpPr txBox="1"/>
+          <p:nvPr/>
+        </p:nvSpPr>
+        <p:spPr>
+          <a:xfrm>
+            <a:off x="6029078" y="1984248"/>
+            <a:ext cx="5143682" cy="292608"/>
+          </a:xfrm>
+          <a:prstGeom prst="rect">
+            <a:avLst/>
+          </a:prstGeom>
+          <a:noFill/>
+        </p:spPr>
+        <p:txBody>
+          <a:bodyPr wrap="square" anchor="ctr" lIns="50800" rIns="50800" tIns="25400" bIns="25400">
+            <a:spAutoFit/>
+          </a:bodyPr>
+          <a:lstStyle/>
+          <a:p>
+            <a:pPr algn="l"/>
+            <a:r>
+              <a:rPr sz="950" b="1" i="0">
+                <a:solidFill>
+                  <a:srgbClr val="FFFFFF"/>
+                </a:solidFill>
+                <a:latin typeface="Segoe UI"/>
+              </a:rPr>
+              <a:t>PI-3  Aug 5 - Oct 27</a:t>
+            </a:r>
+          </a:p>
+        </p:txBody>
+      </p:sp>
+      <p:graphicFrame>
+        <p:nvGraphicFramePr>
+          <p:cNvPr id="26" name="Table 25"/>
+          <p:cNvGraphicFramePr>
+            <a:graphicFrameLocks noGrp="1"/>
+          </p:cNvGraphicFramePr>
+          <p:nvPr/>
+        </p:nvGraphicFramePr>
+        <p:xfrm>
+          <a:off x="502920" y="3063240"/>
+          <a:ext cx="11155680" cy="2834640"/>
+        </p:xfrm>
+        <a:graphic>
+          <a:graphicData uri="http://schemas.openxmlformats.org/drawingml/2006/table">
+            <a:tbl>
+              <a:tblPr firstRow="1" bandRow="1">
+                <a:tableStyleId>{5C22544A-7EE6-4342-B048-85BDC9FD1C3A}</a:tableStyleId>
+              </a:tblPr>
+              <a:tblGrid>
+                <a:gridCol w="1371600"/>
+                <a:gridCol w="7223760"/>
+                <a:gridCol w="2560320"/>
+              </a:tblGrid>
+              <a:tr h="354330">
+                <a:tc>
+                  <a:txBody>
+                    <a:bodyPr wrap="square"/>
+                    <a:lstStyle/>
+                    <a:p>
+                      <a:pPr algn="ctr"/>
+                      <a:r>
+                        <a:rPr sz="1100" b="1" i="0">
+                          <a:solidFill>
+                            <a:srgbClr val="FFFFFF"/>
+                          </a:solidFill>
+                          <a:latin typeface="Segoe UI"/>
+                        </a:rPr>
+                        <a:t>When</a:t>
+                      </a:r>
+                    </a:p>
+                  </a:txBody>
+                  <a:tcPr>
+                    <a:solidFill>
+                      <a:srgbClr val="1F3A5F"/>
+                    </a:solidFill>
+                  </a:tcPr>
+                </a:tc>
+                <a:tc>
+                  <a:txBody>
+                    <a:bodyPr wrap="square"/>
+                    <a:lstStyle/>
+                    <a:p>
+                      <a:pPr algn="l"/>
+                      <a:r>
+                        <a:rPr sz="1100" b="1" i="0">
+                          <a:solidFill>
+                            <a:srgbClr val="FFFFFF"/>
+                          </a:solidFill>
+                          <a:latin typeface="Segoe UI"/>
+                        </a:rPr>
+                        <a:t>What's due</a:t>
+                      </a:r>
+                    </a:p>
+                  </a:txBody>
+                  <a:tcPr>
+                    <a:solidFill>
+                      <a:srgbClr val="1F3A5F"/>
+                    </a:solidFill>
+                  </a:tcPr>
+                </a:tc>
+                <a:tc>
+                  <a:txBody>
+                    <a:bodyPr wrap="square"/>
+                    <a:lstStyle/>
+                    <a:p>
+                      <a:pPr algn="ctr"/>
+                      <a:r>
+                        <a:rPr sz="1100" b="1" i="0">
+                          <a:solidFill>
+                            <a:srgbClr val="FFFFFF"/>
+                          </a:solidFill>
+                          <a:latin typeface="Segoe UI"/>
+                        </a:rPr>
+                        <a:t>Lands in</a:t>
+                      </a:r>
+                    </a:p>
+                  </a:txBody>
+                  <a:tcPr>
+                    <a:solidFill>
+                      <a:srgbClr val="1F3A5F"/>
+                    </a:solidFill>
+                  </a:tcPr>
+                </a:tc>
+              </a:tr>
+              <a:tr h="354330">
+                <a:tc>
+                  <a:txBody>
+                    <a:bodyPr wrap="square"/>
+                    <a:lstStyle/>
+                    <a:p>
+                      <a:pPr algn="ctr"/>
+                      <a:r>
+                        <a:rPr sz="1050" b="1" i="0">
+                          <a:solidFill>
+                            <a:srgbClr val="1F3A5F"/>
+                          </a:solidFill>
+                          <a:latin typeface="Segoe UI"/>
+                        </a:rPr>
+                        <a:t>Jul 31</a:t>
+                      </a:r>
+                    </a:p>
+                  </a:txBody>
+                  <a:tcPr>
+                    <a:solidFill>
+                      <a:srgbClr val="F4F6F9"/>
+                    </a:solidFill>
+                  </a:tcPr>
+                </a:tc>
+                <a:tc>
+                  <a:txBody>
+                    <a:bodyPr wrap="square"/>
+                    <a:lstStyle/>
+                    <a:p>
+                      <a:pPr algn="l"/>
+                      <a:r>
+                        <a:rPr sz="900" b="0" i="0">
+                          <a:solidFill>
+                            <a:srgbClr val="2D2D2D"/>
+                          </a:solidFill>
+                          <a:latin typeface="Segoe UI"/>
+                        </a:rPr>
+                        <a:t>CMDB Governance (data dictionary incl. Databases; Data Cert all CI classes; ESS-02; SOX)  ·  CI Coverage foundation (Computers &amp; Servers precedence)</a:t>
+                      </a:r>
+                    </a:p>
+                  </a:txBody>
+                  <a:tcPr>
+                    <a:solidFill>
+                      <a:srgbClr val="F4F6F9"/>
+                    </a:solidFill>
+                  </a:tcPr>
+                </a:tc>
+                <a:tc>
+                  <a:txBody>
+                    <a:bodyPr wrap="square"/>
+                    <a:lstStyle/>
+                    <a:p>
+                      <a:pPr algn="ctr"/>
+                      <a:r>
+                        <a:rPr sz="950" b="1" i="0">
+                          <a:solidFill>
+                            <a:srgbClr val="2E6DB4"/>
+                          </a:solidFill>
+                          <a:latin typeface="Segoe UI"/>
+                        </a:rPr>
+                        <a:t>PI-2 Iter 2.5 / 2.6 (IP)</a:t>
+                      </a:r>
+                    </a:p>
+                  </a:txBody>
+                  <a:tcPr>
+                    <a:solidFill>
+                      <a:srgbClr val="F4F6F9"/>
+                    </a:solidFill>
+                  </a:tcPr>
+                </a:tc>
+              </a:tr>
+              <a:tr h="354330">
+                <a:tc>
+                  <a:txBody>
+                    <a:bodyPr wrap="square"/>
+                    <a:lstStyle/>
+                    <a:p>
+                      <a:pPr algn="ctr"/>
+                      <a:r>
+                        <a:rPr sz="1050" b="1" i="0">
+                          <a:solidFill>
+                            <a:srgbClr val="1F3A5F"/>
+                          </a:solidFill>
+                          <a:latin typeface="Segoe UI"/>
+                        </a:rPr>
+                        <a:t>Aug 31</a:t>
+                      </a:r>
+                    </a:p>
+                  </a:txBody>
+                  <a:tcPr>
+                    <a:solidFill>
+                      <a:srgbClr val="FFFFFF"/>
+                    </a:solidFill>
+                  </a:tcPr>
+                </a:tc>
+                <a:tc>
+                  <a:txBody>
+                    <a:bodyPr wrap="square"/>
+                    <a:lstStyle/>
+                    <a:p>
+                      <a:pPr algn="l"/>
+                      <a:r>
+                        <a:rPr sz="900" b="0" i="0">
+                          <a:solidFill>
+                            <a:srgbClr val="2D2D2D"/>
+                          </a:solidFill>
+                          <a:latin typeface="Segoe UI"/>
+                        </a:rPr>
+                        <a:t>Network Gear (creds &amp; schedules)  ·  Service Mapping (initial maps)  ·  Legacy Platform (analysis) - staged</a:t>
+                      </a:r>
+                    </a:p>
+                  </a:txBody>
+                  <a:tcPr>
+                    <a:solidFill>
+                      <a:srgbClr val="FFFFFF"/>
+                    </a:solidFill>
+                  </a:tcPr>
+                </a:tc>
+                <a:tc>
+                  <a:txBody>
+                    <a:bodyPr wrap="square"/>
+                    <a:lstStyle/>
+                    <a:p>
+                      <a:pPr algn="ctr"/>
+                      <a:r>
+                        <a:rPr sz="950" b="1" i="0">
+                          <a:solidFill>
+                            <a:srgbClr val="2E6DB4"/>
+                          </a:solidFill>
+                          <a:latin typeface="Segoe UI"/>
+                        </a:rPr>
+                        <a:t>PI-3</a:t>
+                      </a:r>
+                    </a:p>
+                  </a:txBody>
+                  <a:tcPr>
+                    <a:solidFill>
+                      <a:srgbClr val="FFFFFF"/>
+                    </a:solidFill>
+                  </a:tcPr>
+                </a:tc>
+              </a:tr>
+              <a:tr h="354330">
+                <a:tc>
+                  <a:txBody>
+                    <a:bodyPr wrap="square"/>
+                    <a:lstStyle/>
+                    <a:p>
+                      <a:pPr algn="ctr"/>
+                      <a:r>
+                        <a:rPr sz="1050" b="1" i="0">
+                          <a:solidFill>
+                            <a:srgbClr val="1F3A5F"/>
+                          </a:solidFill>
+                          <a:latin typeface="Segoe UI"/>
+                        </a:rPr>
+                        <a:t>Sep 30</a:t>
+                      </a:r>
+                    </a:p>
+                  </a:txBody>
+                  <a:tcPr>
+                    <a:solidFill>
+                      <a:srgbClr val="F4F6F9"/>
+                    </a:solidFill>
+                  </a:tcPr>
+                </a:tc>
+                <a:tc>
+                  <a:txBody>
+                    <a:bodyPr wrap="square"/>
+                    <a:lstStyle/>
+                    <a:p>
+                      <a:pPr algn="l"/>
+                      <a:r>
+                        <a:rPr sz="900" b="0" i="0">
+                          <a:solidFill>
+                            <a:srgbClr val="2D2D2D"/>
+                          </a:solidFill>
+                          <a:latin typeface="Segoe UI"/>
+                        </a:rPr>
+                        <a:t>CI Coverage - Computers 90% managed  ·  Network Gear mandatory attributes</a:t>
+                      </a:r>
+                    </a:p>
+                  </a:txBody>
+                  <a:tcPr>
+                    <a:solidFill>
+                      <a:srgbClr val="F4F6F9"/>
+                    </a:solidFill>
+                  </a:tcPr>
+                </a:tc>
+                <a:tc>
+                  <a:txBody>
+                    <a:bodyPr wrap="square"/>
+                    <a:lstStyle/>
+                    <a:p>
+                      <a:pPr algn="ctr"/>
+                      <a:r>
+                        <a:rPr sz="950" b="1" i="0">
+                          <a:solidFill>
+                            <a:srgbClr val="2E6DB4"/>
+                          </a:solidFill>
+                          <a:latin typeface="Segoe UI"/>
+                        </a:rPr>
+                        <a:t>PI-3</a:t>
+                      </a:r>
+                    </a:p>
+                  </a:txBody>
+                  <a:tcPr>
+                    <a:solidFill>
+                      <a:srgbClr val="F4F6F9"/>
+                    </a:solidFill>
+                  </a:tcPr>
+                </a:tc>
+              </a:tr>
+              <a:tr h="354330">
+                <a:tc>
+                  <a:txBody>
+                    <a:bodyPr wrap="square"/>
+                    <a:lstStyle/>
+                    <a:p>
+                      <a:pPr algn="ctr"/>
+                      <a:r>
+                        <a:rPr sz="1050" b="1" i="0">
+                          <a:solidFill>
+                            <a:srgbClr val="1F3A5F"/>
+                          </a:solidFill>
+                          <a:latin typeface="Segoe UI"/>
+                        </a:rPr>
+                        <a:t>Oct 27</a:t>
+                      </a:r>
+                    </a:p>
+                  </a:txBody>
+                  <a:tcPr>
+                    <a:solidFill>
+                      <a:srgbClr val="FFFFFF"/>
+                    </a:solidFill>
+                  </a:tcPr>
+                </a:tc>
+                <a:tc>
+                  <a:txBody>
+                    <a:bodyPr wrap="square"/>
+                    <a:lstStyle/>
+                    <a:p>
+                      <a:pPr algn="l"/>
+                      <a:r>
+                        <a:rPr sz="900" b="0" i="0">
+                          <a:solidFill>
+                            <a:srgbClr val="2D2D2D"/>
+                          </a:solidFill>
+                          <a:latin typeface="Segoe UI"/>
+                        </a:rPr>
+                        <a:t>Qualys -&gt; ServiceNow live in PROD</a:t>
+                      </a:r>
+                    </a:p>
+                  </a:txBody>
+                  <a:tcPr>
+                    <a:solidFill>
+                      <a:srgbClr val="FFFFFF"/>
+                    </a:solidFill>
+                  </a:tcPr>
+                </a:tc>
+                <a:tc>
+                  <a:txBody>
+                    <a:bodyPr wrap="square"/>
+                    <a:lstStyle/>
+                    <a:p>
+                      <a:pPr algn="ctr"/>
+                      <a:r>
+                        <a:rPr sz="950" b="1" i="0">
+                          <a:solidFill>
+                            <a:srgbClr val="2E6DB4"/>
+                          </a:solidFill>
+                          <a:latin typeface="Segoe UI"/>
+                        </a:rPr>
+                        <a:t>PI-3</a:t>
+                      </a:r>
+                    </a:p>
+                  </a:txBody>
+                  <a:tcPr>
+                    <a:solidFill>
+                      <a:srgbClr val="FFFFFF"/>
+                    </a:solidFill>
+                  </a:tcPr>
+                </a:tc>
+              </a:tr>
+              <a:tr h="354330">
+                <a:tc>
+                  <a:txBody>
+                    <a:bodyPr wrap="square"/>
+                    <a:lstStyle/>
+                    <a:p>
+                      <a:pPr algn="ctr"/>
+                      <a:r>
+                        <a:rPr sz="1050" b="1" i="0">
+                          <a:solidFill>
+                            <a:srgbClr val="1F3A5F"/>
+                          </a:solidFill>
+                          <a:latin typeface="Segoe UI"/>
+                        </a:rPr>
+                        <a:t>Oct 30</a:t>
+                      </a:r>
+                    </a:p>
+                  </a:txBody>
+                  <a:tcPr>
+                    <a:solidFill>
+                      <a:srgbClr val="F4F6F9"/>
+                    </a:solidFill>
+                  </a:tcPr>
+                </a:tc>
+                <a:tc>
+                  <a:txBody>
+                    <a:bodyPr wrap="square"/>
+                    <a:lstStyle/>
+                    <a:p>
+                      <a:pPr algn="l"/>
+                      <a:r>
+                        <a:rPr sz="900" b="0" i="0">
+                          <a:solidFill>
+                            <a:srgbClr val="2D2D2D"/>
+                          </a:solidFill>
+                          <a:latin typeface="Segoe UI"/>
+                        </a:rPr>
+                        <a:t>CI Coverage - Servers 90%  ·  Network Gear 90%  ·  Service Mapping (10 apps)  ·  Legacy Platform (migration plan)</a:t>
+                      </a:r>
+                    </a:p>
+                  </a:txBody>
+                  <a:tcPr>
+                    <a:solidFill>
+                      <a:srgbClr val="F4F6F9"/>
+                    </a:solidFill>
+                  </a:tcPr>
+                </a:tc>
+                <a:tc>
+                  <a:txBody>
+                    <a:bodyPr wrap="square"/>
+                    <a:lstStyle/>
+                    <a:p>
+                      <a:pPr algn="ctr"/>
+                      <a:r>
+                        <a:rPr sz="950" b="1" i="0">
+                          <a:solidFill>
+                            <a:srgbClr val="2E6DB4"/>
+                          </a:solidFill>
+                          <a:latin typeface="Segoe UI"/>
+                        </a:rPr>
+                        <a:t>PI-3</a:t>
+                      </a:r>
+                    </a:p>
+                  </a:txBody>
+                  <a:tcPr>
+                    <a:solidFill>
+                      <a:srgbClr val="F4F6F9"/>
+                    </a:solidFill>
+                  </a:tcPr>
+                </a:tc>
+              </a:tr>
+              <a:tr h="354330">
+                <a:tc>
+                  <a:txBody>
+                    <a:bodyPr wrap="square"/>
+                    <a:lstStyle/>
+                    <a:p>
+                      <a:pPr algn="ctr"/>
+                      <a:r>
+                        <a:rPr sz="1050" b="1" i="0">
+                          <a:solidFill>
+                            <a:srgbClr val="1F3A5F"/>
+                          </a:solidFill>
+                          <a:latin typeface="Segoe UI"/>
+                        </a:rPr>
+                        <a:t>Oct 31</a:t>
+                      </a:r>
+                    </a:p>
+                  </a:txBody>
+                  <a:tcPr>
+                    <a:solidFill>
+                      <a:srgbClr val="FFFFFF"/>
+                    </a:solidFill>
+                  </a:tcPr>
+                </a:tc>
+                <a:tc>
+                  <a:txBody>
+                    <a:bodyPr wrap="square"/>
+                    <a:lstStyle/>
+                    <a:p>
+                      <a:pPr algn="l"/>
+                      <a:r>
+                        <a:rPr sz="900" b="0" i="0">
+                          <a:solidFill>
+                            <a:srgbClr val="2D2D2D"/>
+                          </a:solidFill>
+                          <a:latin typeface="Segoe UI"/>
+                        </a:rPr>
+                        <a:t>ATF Strategy (rollout plan)</a:t>
+                      </a:r>
+                    </a:p>
+                  </a:txBody>
+                  <a:tcPr>
+                    <a:solidFill>
+                      <a:srgbClr val="FFFFFF"/>
+                    </a:solidFill>
+                  </a:tcPr>
+                </a:tc>
+                <a:tc>
+                  <a:txBody>
+                    <a:bodyPr wrap="square"/>
+                    <a:lstStyle/>
+                    <a:p>
+                      <a:pPr algn="ctr"/>
+                      <a:r>
+                        <a:rPr sz="950" b="1" i="0">
+                          <a:solidFill>
+                            <a:srgbClr val="2E6DB4"/>
+                          </a:solidFill>
+                          <a:latin typeface="Segoe UI"/>
+                        </a:rPr>
+                        <a:t>PI-3</a:t>
+                      </a:r>
+                    </a:p>
+                  </a:txBody>
+                  <a:tcPr>
+                    <a:solidFill>
+                      <a:srgbClr val="FFFFFF"/>
+                    </a:solidFill>
+                  </a:tcPr>
+                </a:tc>
+              </a:tr>
+              <a:tr h="354330">
+                <a:tc>
+                  <a:txBody>
+                    <a:bodyPr wrap="square"/>
+                    <a:lstStyle/>
+                    <a:p>
+                      <a:pPr algn="ctr"/>
+                      <a:r>
+                        <a:rPr sz="1050" b="1" i="0">
+                          <a:solidFill>
+                            <a:srgbClr val="1F3A5F"/>
+                          </a:solidFill>
+                          <a:latin typeface="Segoe UI"/>
+                        </a:rPr>
+                        <a:t>Ongoing</a:t>
+                      </a:r>
+                    </a:p>
+                  </a:txBody>
+                  <a:tcPr>
+                    <a:solidFill>
+                      <a:srgbClr val="F4F6F9"/>
+                    </a:solidFill>
+                  </a:tcPr>
+                </a:tc>
+                <a:tc>
+                  <a:txBody>
+                    <a:bodyPr wrap="square"/>
+                    <a:lstStyle/>
+                    <a:p>
+                      <a:pPr algn="l"/>
+                      <a:r>
+                        <a:rPr sz="900" b="0" i="0">
+                          <a:solidFill>
+                            <a:srgbClr val="2D2D2D"/>
+                          </a:solidFill>
+                          <a:latin typeface="Segoe UI"/>
+                        </a:rPr>
+                        <a:t>ITSM Product Management &amp; Platform Support - monthly</a:t>
+                      </a:r>
+                    </a:p>
+                  </a:txBody>
+                  <a:tcPr>
+                    <a:solidFill>
+                      <a:srgbClr val="F4F6F9"/>
+                    </a:solidFill>
+                  </a:tcPr>
+                </a:tc>
+                <a:tc>
+                  <a:txBody>
+                    <a:bodyPr wrap="square"/>
+                    <a:lstStyle/>
+                    <a:p>
+                      <a:pPr algn="ctr"/>
+                      <a:r>
+                        <a:rPr sz="950" b="1" i="0">
+                          <a:solidFill>
+                            <a:srgbClr val="2E6DB4"/>
+                          </a:solidFill>
+                          <a:latin typeface="Segoe UI"/>
+                        </a:rPr>
+                        <a:t>PI-2 tail -&gt; PI-3</a:t>
+                      </a:r>
+                    </a:p>
+                  </a:txBody>
+                  <a:tcPr>
+                    <a:solidFill>
+                      <a:srgbClr val="F4F6F9"/>
+                    </a:solidFill>
+                  </a:tcPr>
+                </a:tc>
+              </a:tr>
+            </a:tbl>
+          </a:graphicData>
+        </a:graphic>
+      </p:graphicFrame>
+    </p:spTree>
+  </p:cSld>
+  <p:clrMapOvr>
+    <a:masterClrMapping/>
+  </p:clrMapOvr>
+</p:sld>
+</file>
+
+<file path=ppt/slides/slide13.xml><?xml version="1.0" encoding="utf-8"?>
+<p:sld xmlns:a="http://schemas.openxmlformats.org/drawingml/2006/main" xmlns:p="http://schemas.openxmlformats.org/presentationml/2006/main" xmlns:r="http://schemas.openxmlformats.org/officeDocument/2006/relationships">
+  <p:cSld>
+    <p:spTree>
+      <p:nvGrpSpPr>
+        <p:cNvPr id="1" name=""/>
+        <p:cNvGrpSpPr/>
+        <p:nvPr/>
+      </p:nvGrpSpPr>
+      <p:grpSpPr/>
+      <p:sp>
+        <p:nvSpPr>
+          <p:cNvPr id="2" name="Rectangle 1"/>
+          <p:cNvSpPr/>
+          <p:nvPr/>
+        </p:nvSpPr>
+        <p:spPr>
+          <a:xfrm>
+            <a:off x="0" y="0"/>
+            <a:ext cx="12191695" cy="960120"/>
+          </a:xfrm>
+          <a:prstGeom prst="rect">
+            <a:avLst/>
+          </a:prstGeom>
+          <a:solidFill>
+            <a:srgbClr val="1F3A5F"/>
+          </a:solidFill>
+          <a:ln>
+            <a:noFill/>
+          </a:ln>
+          <a:effectLst/>
+        </p:spPr>
+        <p:style>
+          <a:lnRef idx="1">
+            <a:schemeClr val="accent1"/>
+          </a:lnRef>
+          <a:fillRef idx="3">
+            <a:schemeClr val="accent1"/>
+          </a:fillRef>
+          <a:effectRef idx="2">
+            <a:schemeClr val="accent1"/>
+          </a:effectRef>
+          <a:fontRef idx="minor">
+            <a:schemeClr val="lt1"/>
+          </a:fontRef>
+        </p:style>
+        <p:txBody>
+          <a:bodyPr rtlCol="0" anchor="ctr"/>
+          <a:lstStyle/>
+          <a:p>
+            <a:pPr algn="ctr"/>
+          </a:p>
+        </p:txBody>
+      </p:sp>
+      <p:sp>
+        <p:nvSpPr>
+          <p:cNvPr id="3" name="Rectangle 2"/>
+          <p:cNvSpPr/>
+          <p:nvPr/>
+        </p:nvSpPr>
+        <p:spPr>
+          <a:xfrm>
+            <a:off x="0" y="960120"/>
+            <a:ext cx="12191695" cy="54864"/>
+          </a:xfrm>
+          <a:prstGeom prst="rect">
+            <a:avLst/>
+          </a:prstGeom>
+          <a:solidFill>
+            <a:srgbClr val="2E6DB4"/>
+          </a:solidFill>
+          <a:ln>
+            <a:noFill/>
+          </a:ln>
+          <a:effectLst/>
+        </p:spPr>
+        <p:style>
+          <a:lnRef idx="1">
+            <a:schemeClr val="accent1"/>
+          </a:lnRef>
+          <a:fillRef idx="3">
+            <a:schemeClr val="accent1"/>
+          </a:fillRef>
+          <a:effectRef idx="2">
+            <a:schemeClr val="accent1"/>
+          </a:effectRef>
+          <a:fontRef idx="minor">
+            <a:schemeClr val="lt1"/>
+          </a:fontRef>
+        </p:style>
+        <p:txBody>
+          <a:bodyPr rtlCol="0" anchor="ctr"/>
+          <a:lstStyle/>
+          <a:p>
+            <a:pPr algn="ctr"/>
+          </a:p>
+        </p:txBody>
+      </p:sp>
+      <p:sp>
+        <p:nvSpPr>
+          <p:cNvPr id="4" name="TextBox 3"/>
+          <p:cNvSpPr txBox="1"/>
+          <p:nvPr/>
+        </p:nvSpPr>
+        <p:spPr>
+          <a:xfrm>
+            <a:off x="502920" y="164592"/>
+            <a:ext cx="11155680" cy="502920"/>
+          </a:xfrm>
+          <a:prstGeom prst="rect">
+            <a:avLst/>
+          </a:prstGeom>
+          <a:noFill/>
+        </p:spPr>
+        <p:txBody>
+          <a:bodyPr wrap="square" anchor="ctr" lIns="50800" rIns="50800" tIns="25400" bIns="25400">
+            <a:spAutoFit/>
+          </a:bodyPr>
+          <a:lstStyle/>
+          <a:p>
+            <a:pPr algn="l"/>
+            <a:r>
+              <a:rPr sz="2600" b="1" i="0">
+                <a:solidFill>
+                  <a:srgbClr val="FFFFFF"/>
+                </a:solidFill>
+                <a:latin typeface="Segoe UI"/>
+              </a:rPr>
+              <a:t>Where to Focus</a:t>
+            </a:r>
+          </a:p>
+        </p:txBody>
+      </p:sp>
+      <p:sp>
+        <p:nvSpPr>
+          <p:cNvPr id="5" name="TextBox 4"/>
+          <p:cNvSpPr txBox="1"/>
+          <p:nvPr/>
+        </p:nvSpPr>
+        <p:spPr>
+          <a:xfrm>
+            <a:off x="521207" y="603504"/>
+            <a:ext cx="11155680" cy="292608"/>
+          </a:xfrm>
+          <a:prstGeom prst="rect">
+            <a:avLst/>
+          </a:prstGeom>
+          <a:noFill/>
+        </p:spPr>
+        <p:txBody>
+          <a:bodyPr wrap="square" anchor="ctr" lIns="50800" rIns="50800" tIns="25400" bIns="25400">
+            <a:spAutoFit/>
+          </a:bodyPr>
+          <a:lstStyle/>
+          <a:p>
+            <a:pPr algn="l"/>
+            <a:r>
+              <a:rPr sz="1200" b="0" i="0">
+                <a:solidFill>
+                  <a:srgbClr val="C9D6E6"/>
+                </a:solidFill>
+                <a:latin typeface="Segoe UI"/>
+              </a:rPr>
+              <a:t>Priorities for Development + supporting roles</a:t>
+            </a:r>
+          </a:p>
+        </p:txBody>
+      </p:sp>
+      <p:sp>
+        <p:nvSpPr>
+          <p:cNvPr id="6" name="TextBox 5"/>
+          <p:cNvSpPr txBox="1"/>
+          <p:nvPr/>
+        </p:nvSpPr>
+        <p:spPr>
+          <a:xfrm>
+            <a:off x="502920" y="6473952"/>
+            <a:ext cx="9144000" cy="292608"/>
+          </a:xfrm>
+          <a:prstGeom prst="rect">
+            <a:avLst/>
+          </a:prstGeom>
+          <a:noFill/>
+        </p:spPr>
+        <p:txBody>
+          <a:bodyPr wrap="square" anchor="t" lIns="50800" rIns="50800" tIns="25400" bIns="25400">
+            <a:spAutoFit/>
+          </a:bodyPr>
+          <a:lstStyle/>
+          <a:p>
+            <a:pPr algn="l"/>
+            <a:r>
+              <a:rPr sz="900" b="0" i="0">
+                <a:solidFill>
+                  <a:srgbClr val="6B7280"/>
+                </a:solidFill>
+                <a:latin typeface="Segoe UI"/>
+              </a:rPr>
+              <a:t>PPL CMDB-CSDM  |  CO6 Deliverables  |  Team Focus  -  Jul 10, 2026</a:t>
+            </a:r>
+          </a:p>
+        </p:txBody>
+      </p:sp>
+      <p:sp>
+        <p:nvSpPr>
+          <p:cNvPr id="7" name="Rectangle 6"/>
+          <p:cNvSpPr/>
+          <p:nvPr/>
+        </p:nvSpPr>
+        <p:spPr>
+          <a:xfrm>
+            <a:off x="502920" y="1316736"/>
+            <a:ext cx="109728" cy="566928"/>
+          </a:xfrm>
+          <a:prstGeom prst="rect">
+            <a:avLst/>
+          </a:prstGeom>
+          <a:solidFill>
+            <a:srgbClr val="2E6DB4"/>
+          </a:solidFill>
+          <a:ln>
+            <a:noFill/>
+          </a:ln>
+          <a:effectLst/>
+        </p:spPr>
+        <p:style>
+          <a:lnRef idx="1">
+            <a:schemeClr val="accent1"/>
+          </a:lnRef>
+          <a:fillRef idx="3">
+            <a:schemeClr val="accent1"/>
+          </a:fillRef>
+          <a:effectRef idx="2">
+            <a:schemeClr val="accent1"/>
+          </a:effectRef>
+          <a:fontRef idx="minor">
+            <a:schemeClr val="lt1"/>
+          </a:fontRef>
+        </p:style>
+        <p:txBody>
+          <a:bodyPr rtlCol="0" anchor="ctr"/>
+          <a:lstStyle/>
+          <a:p>
+            <a:pPr algn="ctr"/>
+          </a:p>
+        </p:txBody>
+      </p:sp>
+      <p:sp>
+        <p:nvSpPr>
+          <p:cNvPr id="8" name="TextBox 7"/>
+          <p:cNvSpPr txBox="1"/>
+          <p:nvPr/>
+        </p:nvSpPr>
+        <p:spPr>
+          <a:xfrm>
+            <a:off x="749808" y="1280160"/>
+            <a:ext cx="10881360" cy="292608"/>
+          </a:xfrm>
+          <a:prstGeom prst="rect">
+            <a:avLst/>
+          </a:prstGeom>
+          <a:noFill/>
+        </p:spPr>
+        <p:txBody>
+          <a:bodyPr wrap="square" anchor="t" lIns="50800" rIns="50800" tIns="25400" bIns="25400">
+            <a:spAutoFit/>
+          </a:bodyPr>
+          <a:lstStyle/>
+          <a:p>
+            <a:pPr algn="l"/>
+            <a:r>
+              <a:rPr sz="1350" b="1" i="0">
+                <a:solidFill>
+                  <a:srgbClr val="1F3A5F"/>
+                </a:solidFill>
+                <a:latin typeface="Segoe UI"/>
+              </a:rPr>
+              <a:t>Focus first: the Jul 31 items.</a:t>
+            </a:r>
+          </a:p>
+        </p:txBody>
+      </p:sp>
+      <p:sp>
+        <p:nvSpPr>
+          <p:cNvPr id="9" name="TextBox 8"/>
+          <p:cNvSpPr txBox="1"/>
+          <p:nvPr/>
+        </p:nvSpPr>
+        <p:spPr>
+          <a:xfrm>
+            <a:off x="749808" y="1591056"/>
+            <a:ext cx="10881360" cy="457200"/>
+          </a:xfrm>
+          <a:prstGeom prst="rect">
+            <a:avLst/>
+          </a:prstGeom>
+          <a:noFill/>
+        </p:spPr>
+        <p:txBody>
+          <a:bodyPr wrap="square" anchor="t" lIns="50800" rIns="50800" tIns="25400" bIns="25400">
+            <a:spAutoFit/>
+          </a:bodyPr>
+          <a:lstStyle/>
+          <a:p>
+            <a:pPr algn="l"/>
+            <a:r>
+              <a:rPr sz="1100" b="0" i="0">
+                <a:solidFill>
+                  <a:srgbClr val="2D2D2D"/>
+                </a:solidFill>
+                <a:latin typeface="Segoe UI"/>
+              </a:rPr>
+              <a:t>CMDB Governance and CI Coverage foundation (Computers &amp; Servers precedence) are due first and land in PI-2 - keep these moving now.</a:t>
+            </a:r>
+          </a:p>
+        </p:txBody>
+      </p:sp>
+      <p:sp>
+        <p:nvSpPr>
+          <p:cNvPr id="10" name="Rectangle 9"/>
+          <p:cNvSpPr/>
+          <p:nvPr/>
+        </p:nvSpPr>
+        <p:spPr>
+          <a:xfrm>
+            <a:off x="502920" y="2157984"/>
+            <a:ext cx="109728" cy="566928"/>
+          </a:xfrm>
+          <a:prstGeom prst="rect">
+            <a:avLst/>
+          </a:prstGeom>
+          <a:solidFill>
+            <a:srgbClr val="2E6DB4"/>
+          </a:solidFill>
+          <a:ln>
+            <a:noFill/>
+          </a:ln>
+          <a:effectLst/>
+        </p:spPr>
+        <p:style>
+          <a:lnRef idx="1">
+            <a:schemeClr val="accent1"/>
+          </a:lnRef>
+          <a:fillRef idx="3">
+            <a:schemeClr val="accent1"/>
+          </a:fillRef>
+          <a:effectRef idx="2">
+            <a:schemeClr val="accent1"/>
+          </a:effectRef>
+          <a:fontRef idx="minor">
+            <a:schemeClr val="lt1"/>
+          </a:fontRef>
+        </p:style>
+        <p:txBody>
+          <a:bodyPr rtlCol="0" anchor="ctr"/>
+          <a:lstStyle/>
+          <a:p>
+            <a:pPr algn="ctr"/>
+          </a:p>
+        </p:txBody>
+      </p:sp>
+      <p:sp>
+        <p:nvSpPr>
+          <p:cNvPr id="11" name="TextBox 10"/>
+          <p:cNvSpPr txBox="1"/>
+          <p:nvPr/>
+        </p:nvSpPr>
+        <p:spPr>
+          <a:xfrm>
+            <a:off x="749808" y="2121408"/>
+            <a:ext cx="10881360" cy="292608"/>
+          </a:xfrm>
+          <a:prstGeom prst="rect">
+            <a:avLst/>
+          </a:prstGeom>
+          <a:noFill/>
+        </p:spPr>
+        <p:txBody>
+          <a:bodyPr wrap="square" anchor="t" lIns="50800" rIns="50800" tIns="25400" bIns="25400">
+            <a:spAutoFit/>
+          </a:bodyPr>
+          <a:lstStyle/>
+          <a:p>
+            <a:pPr algn="l"/>
+            <a:r>
+              <a:rPr sz="1350" b="1" i="0">
+                <a:solidFill>
+                  <a:srgbClr val="1F3A5F"/>
+                </a:solidFill>
+                <a:latin typeface="Segoe UI"/>
+              </a:rPr>
+              <a:t>Biggest PI-3 build: Discovery + Mapping.</a:t>
+            </a:r>
+          </a:p>
+        </p:txBody>
+      </p:sp>
+      <p:sp>
+        <p:nvSpPr>
+          <p:cNvPr id="12" name="TextBox 11"/>
+          <p:cNvSpPr txBox="1"/>
+          <p:nvPr/>
+        </p:nvSpPr>
+        <p:spPr>
+          <a:xfrm>
+            <a:off x="749808" y="2432303"/>
+            <a:ext cx="10881360" cy="457200"/>
+          </a:xfrm>
+          <a:prstGeom prst="rect">
+            <a:avLst/>
+          </a:prstGeom>
+          <a:noFill/>
+        </p:spPr>
+        <p:txBody>
+          <a:bodyPr wrap="square" anchor="t" lIns="50800" rIns="50800" tIns="25400" bIns="25400">
+            <a:spAutoFit/>
+          </a:bodyPr>
+          <a:lstStyle/>
+          <a:p>
+            <a:pPr algn="l"/>
+            <a:r>
+              <a:rPr sz="1100" b="0" i="0">
+                <a:solidFill>
+                  <a:srgbClr val="2D2D2D"/>
+                </a:solidFill>
+                <a:latin typeface="Segoe UI"/>
+              </a:rPr>
+              <a:t>Network Gear, Service Mapping and the 90% coverage targets (Sep 30 / Oct 30) are the bulk of the work - discovery, credentials, and app-owner validation.</a:t>
+            </a:r>
+          </a:p>
+        </p:txBody>
+      </p:sp>
+      <p:sp>
+        <p:nvSpPr>
+          <p:cNvPr id="13" name="Rectangle 12"/>
+          <p:cNvSpPr/>
+          <p:nvPr/>
+        </p:nvSpPr>
+        <p:spPr>
+          <a:xfrm>
+            <a:off x="502920" y="2999232"/>
+            <a:ext cx="109728" cy="566928"/>
+          </a:xfrm>
+          <a:prstGeom prst="rect">
+            <a:avLst/>
+          </a:prstGeom>
+          <a:solidFill>
+            <a:srgbClr val="2E6DB4"/>
+          </a:solidFill>
+          <a:ln>
+            <a:noFill/>
+          </a:ln>
+          <a:effectLst/>
+        </p:spPr>
+        <p:style>
+          <a:lnRef idx="1">
+            <a:schemeClr val="accent1"/>
+          </a:lnRef>
+          <a:fillRef idx="3">
+            <a:schemeClr val="accent1"/>
+          </a:fillRef>
+          <a:effectRef idx="2">
+            <a:schemeClr val="accent1"/>
+          </a:effectRef>
+          <a:fontRef idx="minor">
+            <a:schemeClr val="lt1"/>
+          </a:fontRef>
+        </p:style>
+        <p:txBody>
+          <a:bodyPr rtlCol="0" anchor="ctr"/>
+          <a:lstStyle/>
+          <a:p>
+            <a:pPr algn="ctr"/>
+          </a:p>
+        </p:txBody>
+      </p:sp>
+      <p:sp>
+        <p:nvSpPr>
+          <p:cNvPr id="14" name="TextBox 13"/>
+          <p:cNvSpPr txBox="1"/>
+          <p:nvPr/>
+        </p:nvSpPr>
+        <p:spPr>
+          <a:xfrm>
+            <a:off x="749808" y="2962656"/>
+            <a:ext cx="10881360" cy="292608"/>
+          </a:xfrm>
+          <a:prstGeom prst="rect">
+            <a:avLst/>
+          </a:prstGeom>
+          <a:noFill/>
+        </p:spPr>
+        <p:txBody>
+          <a:bodyPr wrap="square" anchor="t" lIns="50800" rIns="50800" tIns="25400" bIns="25400">
+            <a:spAutoFit/>
+          </a:bodyPr>
+          <a:lstStyle/>
+          <a:p>
+            <a:pPr algn="l"/>
+            <a:r>
+              <a:rPr sz="1350" b="1" i="0">
+                <a:solidFill>
+                  <a:srgbClr val="1F3A5F"/>
+                </a:solidFill>
+                <a:latin typeface="Segoe UI"/>
+              </a:rPr>
+              <a:t>Unblock Qualys early.</a:t>
+            </a:r>
+          </a:p>
+        </p:txBody>
+      </p:sp>
+      <p:sp>
+        <p:nvSpPr>
+          <p:cNvPr id="15" name="TextBox 14"/>
+          <p:cNvSpPr txBox="1"/>
+          <p:nvPr/>
+        </p:nvSpPr>
+        <p:spPr>
+          <a:xfrm>
+            <a:off x="749808" y="3273551"/>
+            <a:ext cx="10881360" cy="457200"/>
+          </a:xfrm>
+          <a:prstGeom prst="rect">
+            <a:avLst/>
+          </a:prstGeom>
+          <a:noFill/>
+        </p:spPr>
+        <p:txBody>
+          <a:bodyPr wrap="square" anchor="t" lIns="50800" rIns="50800" tIns="25400" bIns="25400">
+            <a:spAutoFit/>
+          </a:bodyPr>
+          <a:lstStyle/>
+          <a:p>
+            <a:pPr algn="l"/>
+            <a:r>
+              <a:rPr sz="1100" b="0" i="0">
+                <a:solidFill>
+                  <a:srgbClr val="2D2D2D"/>
+                </a:solidFill>
+                <a:latin typeface="Segoe UI"/>
+              </a:rPr>
+              <a:t>One-way feed to PROD by Oct 27 - the plugin blocker needs clearing before the build can finish.</a:t>
+            </a:r>
+          </a:p>
+        </p:txBody>
+      </p:sp>
+      <p:sp>
+        <p:nvSpPr>
+          <p:cNvPr id="16" name="Rectangle 15"/>
+          <p:cNvSpPr/>
+          <p:nvPr/>
+        </p:nvSpPr>
+        <p:spPr>
+          <a:xfrm>
+            <a:off x="502920" y="3840480"/>
+            <a:ext cx="109728" cy="566928"/>
+          </a:xfrm>
+          <a:prstGeom prst="rect">
+            <a:avLst/>
+          </a:prstGeom>
+          <a:solidFill>
+            <a:srgbClr val="2E6DB4"/>
+          </a:solidFill>
+          <a:ln>
+            <a:noFill/>
+          </a:ln>
+          <a:effectLst/>
+        </p:spPr>
+        <p:style>
+          <a:lnRef idx="1">
+            <a:schemeClr val="accent1"/>
+          </a:lnRef>
+          <a:fillRef idx="3">
+            <a:schemeClr val="accent1"/>
+          </a:fillRef>
+          <a:effectRef idx="2">
+            <a:schemeClr val="accent1"/>
+          </a:effectRef>
+          <a:fontRef idx="minor">
+            <a:schemeClr val="lt1"/>
+          </a:fontRef>
+        </p:style>
+        <p:txBody>
+          <a:bodyPr rtlCol="0" anchor="ctr"/>
+          <a:lstStyle/>
+          <a:p>
+            <a:pPr algn="ctr"/>
+          </a:p>
+        </p:txBody>
+      </p:sp>
+      <p:sp>
+        <p:nvSpPr>
+          <p:cNvPr id="17" name="TextBox 16"/>
+          <p:cNvSpPr txBox="1"/>
+          <p:nvPr/>
+        </p:nvSpPr>
+        <p:spPr>
+          <a:xfrm>
+            <a:off x="749808" y="3803904"/>
+            <a:ext cx="10881360" cy="292608"/>
+          </a:xfrm>
+          <a:prstGeom prst="rect">
+            <a:avLst/>
+          </a:prstGeom>
+          <a:noFill/>
+        </p:spPr>
+        <p:txBody>
+          <a:bodyPr wrap="square" anchor="t" lIns="50800" rIns="50800" tIns="25400" bIns="25400">
+            <a:spAutoFit/>
+          </a:bodyPr>
+          <a:lstStyle/>
+          <a:p>
+            <a:pPr algn="l"/>
+            <a:r>
+              <a:rPr sz="1350" b="1" i="0">
+                <a:solidFill>
+                  <a:srgbClr val="1F3A5F"/>
+                </a:solidFill>
+                <a:latin typeface="Segoe UI"/>
+              </a:rPr>
+              <a:t>New to plan at PI-3 planning.</a:t>
+            </a:r>
+          </a:p>
+        </p:txBody>
+      </p:sp>
+      <p:sp>
+        <p:nvSpPr>
+          <p:cNvPr id="18" name="TextBox 17"/>
+          <p:cNvSpPr txBox="1"/>
+          <p:nvPr/>
+        </p:nvSpPr>
+        <p:spPr>
+          <a:xfrm>
+            <a:off x="749808" y="4114800"/>
+            <a:ext cx="10881360" cy="457200"/>
+          </a:xfrm>
+          <a:prstGeom prst="rect">
+            <a:avLst/>
+          </a:prstGeom>
+          <a:noFill/>
+        </p:spPr>
+        <p:txBody>
+          <a:bodyPr wrap="square" anchor="t" lIns="50800" rIns="50800" tIns="25400" bIns="25400">
+            <a:spAutoFit/>
+          </a:bodyPr>
+          <a:lstStyle/>
+          <a:p>
+            <a:pPr algn="l"/>
+            <a:r>
+              <a:rPr sz="1100" b="0" i="0">
+                <a:solidFill>
+                  <a:srgbClr val="2D2D2D"/>
+                </a:solidFill>
+                <a:latin typeface="Segoe UI"/>
+              </a:rPr>
+              <a:t>Legacy Platform Rationalization and ATF Strategy are greenfield - no stories yet; we scope and staff these at planning.</a:t>
+            </a:r>
+          </a:p>
+        </p:txBody>
+      </p:sp>
+      <p:sp>
+        <p:nvSpPr>
+          <p:cNvPr id="19" name="Rectangle 18"/>
+          <p:cNvSpPr/>
+          <p:nvPr/>
+        </p:nvSpPr>
+        <p:spPr>
+          <a:xfrm>
+            <a:off x="502920" y="4681728"/>
+            <a:ext cx="109728" cy="566928"/>
+          </a:xfrm>
+          <a:prstGeom prst="rect">
+            <a:avLst/>
+          </a:prstGeom>
+          <a:solidFill>
+            <a:srgbClr val="2E6DB4"/>
+          </a:solidFill>
+          <a:ln>
+            <a:noFill/>
+          </a:ln>
+          <a:effectLst/>
+        </p:spPr>
+        <p:style>
+          <a:lnRef idx="1">
+            <a:schemeClr val="accent1"/>
+          </a:lnRef>
+          <a:fillRef idx="3">
+            <a:schemeClr val="accent1"/>
+          </a:fillRef>
+          <a:effectRef idx="2">
+            <a:schemeClr val="accent1"/>
+          </a:effectRef>
+          <a:fontRef idx="minor">
+            <a:schemeClr val="lt1"/>
+          </a:fontRef>
+        </p:style>
+        <p:txBody>
+          <a:bodyPr rtlCol="0" anchor="ctr"/>
+          <a:lstStyle/>
+          <a:p>
+            <a:pPr algn="ctr"/>
+          </a:p>
+        </p:txBody>
+      </p:sp>
+      <p:sp>
+        <p:nvSpPr>
+          <p:cNvPr id="20" name="TextBox 19"/>
+          <p:cNvSpPr txBox="1"/>
+          <p:nvPr/>
+        </p:nvSpPr>
+        <p:spPr>
+          <a:xfrm>
+            <a:off x="749808" y="4645152"/>
+            <a:ext cx="10881360" cy="292608"/>
+          </a:xfrm>
+          <a:prstGeom prst="rect">
+            <a:avLst/>
+          </a:prstGeom>
+          <a:noFill/>
+        </p:spPr>
+        <p:txBody>
+          <a:bodyPr wrap="square" anchor="t" lIns="50800" rIns="50800" tIns="25400" bIns="25400">
+            <a:spAutoFit/>
+          </a:bodyPr>
+          <a:lstStyle/>
+          <a:p>
+            <a:pPr algn="l"/>
+            <a:r>
+              <a:rPr sz="1350" b="1" i="0">
+                <a:solidFill>
+                  <a:srgbClr val="1F3A5F"/>
+                </a:solidFill>
+                <a:latin typeface="Segoe UI"/>
+              </a:rPr>
+              <a:t>Supporting lanes stand up separately.</a:t>
+            </a:r>
+          </a:p>
+        </p:txBody>
+      </p:sp>
+      <p:sp>
+        <p:nvSpPr>
+          <p:cNvPr id="21" name="TextBox 20"/>
+          <p:cNvSpPr txBox="1"/>
+          <p:nvPr/>
+        </p:nvSpPr>
+        <p:spPr>
+          <a:xfrm>
+            <a:off x="749808" y="4956048"/>
+            <a:ext cx="10881360" cy="457200"/>
+          </a:xfrm>
+          <a:prstGeom prst="rect">
+            <a:avLst/>
+          </a:prstGeom>
+          <a:noFill/>
+        </p:spPr>
+        <p:txBody>
+          <a:bodyPr wrap="square" anchor="t" lIns="50800" rIns="50800" tIns="25400" bIns="25400">
+            <a:spAutoFit/>
+          </a:bodyPr>
+          <a:lstStyle/>
+          <a:p>
+            <a:pPr algn="l"/>
+            <a:r>
+              <a:rPr sz="1100" b="0" i="0">
+                <a:solidFill>
+                  <a:srgbClr val="2D2D2D"/>
+                </a:solidFill>
+                <a:latin typeface="Segoe UI"/>
+              </a:rPr>
+              <a:t>ITSM Product Management and Platform Support are PO / BAU capacity, not core CMDB dev - flagged so they're on the radar.</a:t>
+            </a:r>
+          </a:p>
+        </p:txBody>
+      </p:sp>
+      <p:sp>
+        <p:nvSpPr>
+          <p:cNvPr id="22" name="Rectangle 21"/>
+          <p:cNvSpPr/>
+          <p:nvPr/>
+        </p:nvSpPr>
+        <p:spPr>
+          <a:xfrm>
+            <a:off x="502920" y="5522976"/>
+            <a:ext cx="109728" cy="566928"/>
+          </a:xfrm>
+          <a:prstGeom prst="rect">
+            <a:avLst/>
+          </a:prstGeom>
+          <a:solidFill>
+            <a:srgbClr val="2E6DB4"/>
+          </a:solidFill>
+          <a:ln>
+            <a:noFill/>
+          </a:ln>
+          <a:effectLst/>
+        </p:spPr>
+        <p:style>
+          <a:lnRef idx="1">
+            <a:schemeClr val="accent1"/>
+          </a:lnRef>
+          <a:fillRef idx="3">
+            <a:schemeClr val="accent1"/>
+          </a:fillRef>
+          <a:effectRef idx="2">
+            <a:schemeClr val="accent1"/>
+          </a:effectRef>
+          <a:fontRef idx="minor">
+            <a:schemeClr val="lt1"/>
+          </a:fontRef>
+        </p:style>
+        <p:txBody>
+          <a:bodyPr rtlCol="0" anchor="ctr"/>
+          <a:lstStyle/>
+          <a:p>
+            <a:pPr algn="ctr"/>
+          </a:p>
+        </p:txBody>
+      </p:sp>
+      <p:sp>
+        <p:nvSpPr>
+          <p:cNvPr id="23" name="TextBox 22"/>
+          <p:cNvSpPr txBox="1"/>
+          <p:nvPr/>
+        </p:nvSpPr>
+        <p:spPr>
+          <a:xfrm>
+            <a:off x="749808" y="5486400"/>
+            <a:ext cx="10881360" cy="292608"/>
+          </a:xfrm>
+          <a:prstGeom prst="rect">
+            <a:avLst/>
+          </a:prstGeom>
+          <a:noFill/>
+        </p:spPr>
+        <p:txBody>
+          <a:bodyPr wrap="square" anchor="t" lIns="50800" rIns="50800" tIns="25400" bIns="25400">
+            <a:spAutoFit/>
+          </a:bodyPr>
+          <a:lstStyle/>
+          <a:p>
+            <a:pPr algn="l"/>
+            <a:r>
+              <a:rPr sz="1350" b="1" i="0">
+                <a:solidFill>
+                  <a:srgbClr val="1F3A5F"/>
+                </a:solidFill>
+                <a:latin typeface="Segoe UI"/>
+              </a:rPr>
+              <a:t>Questions?</a:t>
+            </a:r>
+          </a:p>
+        </p:txBody>
+      </p:sp>
+      <p:sp>
+        <p:nvSpPr>
+          <p:cNvPr id="24" name="TextBox 23"/>
+          <p:cNvSpPr txBox="1"/>
+          <p:nvPr/>
+        </p:nvSpPr>
+        <p:spPr>
+          <a:xfrm>
+            <a:off x="749808" y="5797296"/>
+            <a:ext cx="10881360" cy="457200"/>
+          </a:xfrm>
+          <a:prstGeom prst="rect">
+            <a:avLst/>
+          </a:prstGeom>
+          <a:noFill/>
+        </p:spPr>
+        <p:txBody>
+          <a:bodyPr wrap="square" anchor="t" lIns="50800" rIns="50800" tIns="25400" bIns="25400">
+            <a:spAutoFit/>
+          </a:bodyPr>
+          <a:lstStyle/>
+          <a:p>
+            <a:pPr algn="l"/>
+            <a:r>
+              <a:rPr sz="1100" b="0" i="0">
+                <a:solidFill>
+                  <a:srgbClr val="2D2D2D"/>
+                </a:solidFill>
+                <a:latin typeface="Segoe UI"/>
+              </a:rPr>
+              <a:t>Jordan Yung is the CO6 SME; Joe Dames owns governance scope. Flag anything unclear to Manny.</a:t>
             </a:r>
           </a:p>
         </p:txBody>
@@ -4788,7 +8599,7 @@
                 </a:solidFill>
                 <a:latin typeface="Segoe UI"/>
               </a:rPr>
-              <a:t>In-Flight Now - Current Work &amp; Stories</a:t>
+              <a:t>CMDB Governance</a:t>
             </a:r>
           </a:p>
         </p:txBody>
@@ -4823,7 +8634,7 @@
                 </a:solidFill>
                 <a:latin typeface="Segoe UI"/>
               </a:rPr>
-              <a:t>The threads already in motion - what to do next, and the ADO items</a:t>
+              <a:t>Due Jul 31   ·   PI-2</a:t>
             </a:r>
           </a:p>
         </p:txBody>
@@ -4863,540 +8674,16 @@
           </a:p>
         </p:txBody>
       </p:sp>
-      <p:graphicFrame>
-        <p:nvGraphicFramePr>
-          <p:cNvPr id="7" name="Table 6"/>
-          <p:cNvGraphicFramePr>
-            <a:graphicFrameLocks noGrp="1"/>
-          </p:cNvGraphicFramePr>
-          <p:nvPr/>
-        </p:nvGraphicFramePr>
-        <p:xfrm>
-          <a:off x="502920" y="1280160"/>
-          <a:ext cx="11155680" cy="3931920"/>
-        </p:xfrm>
-        <a:graphic>
-          <a:graphicData uri="http://schemas.openxmlformats.org/drawingml/2006/table">
-            <a:tbl>
-              <a:tblPr firstRow="1" bandRow="1">
-                <a:tableStyleId>{5C22544A-7EE6-4342-B048-85BDC9FD1C3A}</a:tableStyleId>
-              </a:tblPr>
-              <a:tblGrid>
-                <a:gridCol w="2743200"/>
-                <a:gridCol w="5029200"/>
-                <a:gridCol w="3383280"/>
-              </a:tblGrid>
-              <a:tr h="561702">
-                <a:tc>
-                  <a:txBody>
-                    <a:bodyPr wrap="square"/>
-                    <a:lstStyle/>
-                    <a:p>
-                      <a:pPr algn="l"/>
-                      <a:r>
-                        <a:rPr sz="1150" b="1" i="0">
-                          <a:solidFill>
-                            <a:srgbClr val="FFFFFF"/>
-                          </a:solidFill>
-                          <a:latin typeface="Segoe UI"/>
-                        </a:rPr>
-                        <a:t>Focus area</a:t>
-                      </a:r>
-                    </a:p>
-                  </a:txBody>
-                  <a:tcPr>
-                    <a:solidFill>
-                      <a:srgbClr val="1F3A5F"/>
-                    </a:solidFill>
-                  </a:tcPr>
-                </a:tc>
-                <a:tc>
-                  <a:txBody>
-                    <a:bodyPr wrap="square"/>
-                    <a:lstStyle/>
-                    <a:p>
-                      <a:pPr algn="l"/>
-                      <a:r>
-                        <a:rPr sz="1150" b="1" i="0">
-                          <a:solidFill>
-                            <a:srgbClr val="FFFFFF"/>
-                          </a:solidFill>
-                          <a:latin typeface="Segoe UI"/>
-                        </a:rPr>
-                        <a:t>What to do next</a:t>
-                      </a:r>
-                    </a:p>
-                  </a:txBody>
-                  <a:tcPr>
-                    <a:solidFill>
-                      <a:srgbClr val="1F3A5F"/>
-                    </a:solidFill>
-                  </a:tcPr>
-                </a:tc>
-                <a:tc>
-                  <a:txBody>
-                    <a:bodyPr wrap="square"/>
-                    <a:lstStyle/>
-                    <a:p>
-                      <a:pPr algn="l"/>
-                      <a:r>
-                        <a:rPr sz="1150" b="1" i="0">
-                          <a:solidFill>
-                            <a:srgbClr val="FFFFFF"/>
-                          </a:solidFill>
-                          <a:latin typeface="Segoe UI"/>
-                        </a:rPr>
-                        <a:t>Current stories</a:t>
-                      </a:r>
-                    </a:p>
-                  </a:txBody>
-                  <a:tcPr>
-                    <a:solidFill>
-                      <a:srgbClr val="1F3A5F"/>
-                    </a:solidFill>
-                  </a:tcPr>
-                </a:tc>
-              </a:tr>
-              <a:tr h="561702">
-                <a:tc>
-                  <a:txBody>
-                    <a:bodyPr wrap="square"/>
-                    <a:lstStyle/>
-                    <a:p>
-                      <a:pPr algn="l"/>
-                      <a:r>
-                        <a:rPr sz="1050" b="1" i="0">
-                          <a:solidFill>
-                            <a:srgbClr val="1F3A5F"/>
-                          </a:solidFill>
-                          <a:latin typeface="Segoe UI"/>
-                        </a:rPr>
-                        <a:t>CMDB Governance</a:t>
-                      </a:r>
-                    </a:p>
-                  </a:txBody>
-                  <a:tcPr>
-                    <a:solidFill>
-                      <a:srgbClr val="F4F6F9"/>
-                    </a:solidFill>
-                  </a:tcPr>
-                </a:tc>
-                <a:tc>
-                  <a:txBody>
-                    <a:bodyPr wrap="square"/>
-                    <a:lstStyle/>
-                    <a:p>
-                      <a:pPr algn="l"/>
-                      <a:r>
-                        <a:rPr sz="950" b="0" i="0">
-                          <a:solidFill>
-                            <a:srgbClr val="2D2D2D"/>
-                          </a:solidFill>
-                          <a:latin typeface="Segoe UI"/>
-                        </a:rPr>
-                        <a:t>Roll Data Certification out to all CI classes + KB; close data dictionary incl. Databases; ESS-02; SOX BA review</a:t>
-                      </a:r>
-                    </a:p>
-                  </a:txBody>
-                  <a:tcPr>
-                    <a:solidFill>
-                      <a:srgbClr val="F4F6F9"/>
-                    </a:solidFill>
-                  </a:tcPr>
-                </a:tc>
-                <a:tc>
-                  <a:txBody>
-                    <a:bodyPr wrap="square"/>
-                    <a:lstStyle/>
-                    <a:p>
-                      <a:pPr algn="l"/>
-                      <a:r>
-                        <a:rPr sz="900" b="0" i="0">
-                          <a:solidFill>
-                            <a:srgbClr val="2D2D2D"/>
-                          </a:solidFill>
-                          <a:latin typeface="Segoe UI"/>
-                        </a:rPr>
-                        <a:t>Data Cert 1247179 / 1402727 / 1402958  ·  ESS-02 spike 1420244  ·  SOX 1438967 / 1455827</a:t>
-                      </a:r>
-                    </a:p>
-                  </a:txBody>
-                  <a:tcPr>
-                    <a:solidFill>
-                      <a:srgbClr val="F4F6F9"/>
-                    </a:solidFill>
-                  </a:tcPr>
-                </a:tc>
-              </a:tr>
-              <a:tr h="561702">
-                <a:tc>
-                  <a:txBody>
-                    <a:bodyPr wrap="square"/>
-                    <a:lstStyle/>
-                    <a:p>
-                      <a:pPr algn="l"/>
-                      <a:r>
-                        <a:rPr sz="1050" b="1" i="0">
-                          <a:solidFill>
-                            <a:srgbClr val="1F3A5F"/>
-                          </a:solidFill>
-                          <a:latin typeface="Segoe UI"/>
-                        </a:rPr>
-                        <a:t>CI Coverage - Computers</a:t>
-                      </a:r>
-                    </a:p>
-                  </a:txBody>
-                  <a:tcPr>
-                    <a:solidFill>
-                      <a:srgbClr val="FFFFFF"/>
-                    </a:solidFill>
-                  </a:tcPr>
-                </a:tc>
-                <a:tc>
-                  <a:txBody>
-                    <a:bodyPr wrap="square"/>
-                    <a:lstStyle/>
-                    <a:p>
-                      <a:pPr algn="l"/>
-                      <a:r>
-                        <a:rPr sz="950" b="0" i="0">
-                          <a:solidFill>
-                            <a:srgbClr val="2D2D2D"/>
-                          </a:solidFill>
-                          <a:latin typeface="Segoe UI"/>
-                        </a:rPr>
-                        <a:t>Land SCCM/Discovery precedence + bulk life-cycle; stand up the 90% coverage measurement</a:t>
-                      </a:r>
-                    </a:p>
-                  </a:txBody>
-                  <a:tcPr>
-                    <a:solidFill>
-                      <a:srgbClr val="FFFFFF"/>
-                    </a:solidFill>
-                  </a:tcPr>
-                </a:tc>
-                <a:tc>
-                  <a:txBody>
-                    <a:bodyPr wrap="square"/>
-                    <a:lstStyle/>
-                    <a:p>
-                      <a:pPr algn="l"/>
-                      <a:r>
-                        <a:rPr sz="900" b="0" i="0">
-                          <a:solidFill>
-                            <a:srgbClr val="2D2D2D"/>
-                          </a:solidFill>
-                          <a:latin typeface="Segoe UI"/>
-                        </a:rPr>
-                        <a:t>SCCM Computer 1348712 / 16 / 17 / 15  ·  Computer Class 1354794</a:t>
-                      </a:r>
-                    </a:p>
-                  </a:txBody>
-                  <a:tcPr>
-                    <a:solidFill>
-                      <a:srgbClr val="FFFFFF"/>
-                    </a:solidFill>
-                  </a:tcPr>
-                </a:tc>
-              </a:tr>
-              <a:tr h="561702">
-                <a:tc>
-                  <a:txBody>
-                    <a:bodyPr wrap="square"/>
-                    <a:lstStyle/>
-                    <a:p>
-                      <a:pPr algn="l"/>
-                      <a:r>
-                        <a:rPr sz="1050" b="1" i="0">
-                          <a:solidFill>
-                            <a:srgbClr val="1F3A5F"/>
-                          </a:solidFill>
-                          <a:latin typeface="Segoe UI"/>
-                        </a:rPr>
-                        <a:t>CI Coverage - Servers</a:t>
-                      </a:r>
-                    </a:p>
-                  </a:txBody>
-                  <a:tcPr>
-                    <a:solidFill>
-                      <a:srgbClr val="F4F6F9"/>
-                    </a:solidFill>
-                  </a:tcPr>
-                </a:tc>
-                <a:tc>
-                  <a:txBody>
-                    <a:bodyPr wrap="square"/>
-                    <a:lstStyle/>
-                    <a:p>
-                      <a:pPr algn="l"/>
-                      <a:r>
-                        <a:rPr sz="950" b="0" i="0">
-                          <a:solidFill>
-                            <a:srgbClr val="2D2D2D"/>
-                          </a:solidFill>
-                          <a:latin typeface="Segoe UI"/>
-                        </a:rPr>
-                        <a:t>Land server precedence; enhanced DB Discovery (MS-SQL / Oracle); stand up 90% measurement</a:t>
-                      </a:r>
-                    </a:p>
-                  </a:txBody>
-                  <a:tcPr>
-                    <a:solidFill>
-                      <a:srgbClr val="F4F6F9"/>
-                    </a:solidFill>
-                  </a:tcPr>
-                </a:tc>
-                <a:tc>
-                  <a:txBody>
-                    <a:bodyPr wrap="square"/>
-                    <a:lstStyle/>
-                    <a:p>
-                      <a:pPr algn="l"/>
-                      <a:r>
-                        <a:rPr sz="900" b="0" i="0">
-                          <a:solidFill>
-                            <a:srgbClr val="2D2D2D"/>
-                          </a:solidFill>
-                          <a:latin typeface="Segoe UI"/>
-                        </a:rPr>
-                        <a:t>SCCM Server 1356826 (1403759 / 60 / 62 / 63)  ·  creds 1444864</a:t>
-                      </a:r>
-                    </a:p>
-                  </a:txBody>
-                  <a:tcPr>
-                    <a:solidFill>
-                      <a:srgbClr val="F4F6F9"/>
-                    </a:solidFill>
-                  </a:tcPr>
-                </a:tc>
-              </a:tr>
-              <a:tr h="561702">
-                <a:tc>
-                  <a:txBody>
-                    <a:bodyPr wrap="square"/>
-                    <a:lstStyle/>
-                    <a:p>
-                      <a:pPr algn="l"/>
-                      <a:r>
-                        <a:rPr sz="1050" b="1" i="0">
-                          <a:solidFill>
-                            <a:srgbClr val="1F3A5F"/>
-                          </a:solidFill>
-                          <a:latin typeface="Segoe UI"/>
-                        </a:rPr>
-                        <a:t>Service Mapping</a:t>
-                      </a:r>
-                    </a:p>
-                  </a:txBody>
-                  <a:tcPr>
-                    <a:solidFill>
-                      <a:srgbClr val="FFFFFF"/>
-                    </a:solidFill>
-                  </a:tcPr>
-                </a:tc>
-                <a:tc>
-                  <a:txBody>
-                    <a:bodyPr wrap="square"/>
-                    <a:lstStyle/>
-                    <a:p>
-                      <a:pPr algn="l"/>
-                      <a:r>
-                        <a:rPr sz="950" b="0" i="0">
-                          <a:solidFill>
-                            <a:srgbClr val="2D2D2D"/>
-                          </a:solidFill>
-                          <a:latin typeface="Segoe UI"/>
-                        </a:rPr>
-                        <a:t>Build maps for the 10 priority apps; get app-owner validation; make consumable in SNOW</a:t>
-                      </a:r>
-                    </a:p>
-                  </a:txBody>
-                  <a:tcPr>
-                    <a:solidFill>
-                      <a:srgbClr val="FFFFFF"/>
-                    </a:solidFill>
-                  </a:tcPr>
-                </a:tc>
-                <a:tc>
-                  <a:txBody>
-                    <a:bodyPr wrap="square"/>
-                    <a:lstStyle/>
-                    <a:p>
-                      <a:pPr algn="l"/>
-                      <a:r>
-                        <a:rPr sz="900" b="0" i="0">
-                          <a:solidFill>
-                            <a:srgbClr val="2D2D2D"/>
-                          </a:solidFill>
-                          <a:latin typeface="Segoe UI"/>
-                        </a:rPr>
-                        <a:t>Wave 1355866 / 68 / 71  ·  per-app: WATT, Oceana, SolarWinds PoC 1431652</a:t>
-                      </a:r>
-                    </a:p>
-                  </a:txBody>
-                  <a:tcPr>
-                    <a:solidFill>
-                      <a:srgbClr val="FFFFFF"/>
-                    </a:solidFill>
-                  </a:tcPr>
-                </a:tc>
-              </a:tr>
-              <a:tr h="561702">
-                <a:tc>
-                  <a:txBody>
-                    <a:bodyPr wrap="square"/>
-                    <a:lstStyle/>
-                    <a:p>
-                      <a:pPr algn="l"/>
-                      <a:r>
-                        <a:rPr sz="1050" b="1" i="0">
-                          <a:solidFill>
-                            <a:srgbClr val="1F3A5F"/>
-                          </a:solidFill>
-                          <a:latin typeface="Segoe UI"/>
-                        </a:rPr>
-                        <a:t>Network Gear Discovery</a:t>
-                      </a:r>
-                    </a:p>
-                  </a:txBody>
-                  <a:tcPr>
-                    <a:solidFill>
-                      <a:srgbClr val="F4F6F9"/>
-                    </a:solidFill>
-                  </a:tcPr>
-                </a:tc>
-                <a:tc>
-                  <a:txBody>
-                    <a:bodyPr wrap="square"/>
-                    <a:lstStyle/>
-                    <a:p>
-                      <a:pPr algn="l"/>
-                      <a:r>
-                        <a:rPr sz="950" b="0" i="0">
-                          <a:solidFill>
-                            <a:srgbClr val="2D2D2D"/>
-                          </a:solidFill>
-                          <a:latin typeface="Segoe UI"/>
-                        </a:rPr>
-                        <a:t>Fix creds / SNMP (excl. OT); activate discovery schedules; populate mandatory attributes</a:t>
-                      </a:r>
-                    </a:p>
-                  </a:txBody>
-                  <a:tcPr>
-                    <a:solidFill>
-                      <a:srgbClr val="F4F6F9"/>
-                    </a:solidFill>
-                  </a:tcPr>
-                </a:tc>
-                <a:tc>
-                  <a:txBody>
-                    <a:bodyPr wrap="square"/>
-                    <a:lstStyle/>
-                    <a:p>
-                      <a:pPr algn="l"/>
-                      <a:r>
-                        <a:rPr sz="900" b="0" i="0">
-                          <a:solidFill>
-                            <a:srgbClr val="2D2D2D"/>
-                          </a:solidFill>
-                          <a:latin typeface="Segoe UI"/>
-                        </a:rPr>
-                        <a:t>1356646  ·  1402572 / 574 / 575  ·  creds 1444864 / 1459721  ·  dep 1383487</a:t>
-                      </a:r>
-                    </a:p>
-                  </a:txBody>
-                  <a:tcPr>
-                    <a:solidFill>
-                      <a:srgbClr val="F4F6F9"/>
-                    </a:solidFill>
-                  </a:tcPr>
-                </a:tc>
-              </a:tr>
-              <a:tr h="561708">
-                <a:tc>
-                  <a:txBody>
-                    <a:bodyPr wrap="square"/>
-                    <a:lstStyle/>
-                    <a:p>
-                      <a:pPr algn="l"/>
-                      <a:r>
-                        <a:rPr sz="1050" b="1" i="0">
-                          <a:solidFill>
-                            <a:srgbClr val="1F3A5F"/>
-                          </a:solidFill>
-                          <a:latin typeface="Segoe UI"/>
-                        </a:rPr>
-                        <a:t>Qualys Integration</a:t>
-                      </a:r>
-                    </a:p>
-                  </a:txBody>
-                  <a:tcPr>
-                    <a:solidFill>
-                      <a:srgbClr val="FFFFFF"/>
-                    </a:solidFill>
-                  </a:tcPr>
-                </a:tc>
-                <a:tc>
-                  <a:txBody>
-                    <a:bodyPr wrap="square"/>
-                    <a:lstStyle/>
-                    <a:p>
-                      <a:pPr algn="l"/>
-                      <a:r>
-                        <a:rPr sz="950" b="0" i="0">
-                          <a:solidFill>
-                            <a:srgbClr val="2D2D2D"/>
-                          </a:solidFill>
-                          <a:latin typeface="Segoe UI"/>
-                        </a:rPr>
-                        <a:t>Clear the plugin blocker; configure + test the one-way feed; deploy to PROD</a:t>
-                      </a:r>
-                    </a:p>
-                  </a:txBody>
-                  <a:tcPr>
-                    <a:solidFill>
-                      <a:srgbClr val="FFFFFF"/>
-                    </a:solidFill>
-                  </a:tcPr>
-                </a:tc>
-                <a:tc>
-                  <a:txBody>
-                    <a:bodyPr wrap="square"/>
-                    <a:lstStyle/>
-                    <a:p>
-                      <a:pPr algn="l"/>
-                      <a:r>
-                        <a:rPr sz="900" b="0" i="0">
-                          <a:solidFill>
-                            <a:srgbClr val="2D2D2D"/>
-                          </a:solidFill>
-                          <a:latin typeface="Segoe UI"/>
-                        </a:rPr>
-                        <a:t>1428703 / 1428704 (blocked)  ·  data-scope spike 1234585</a:t>
-                      </a:r>
-                    </a:p>
-                  </a:txBody>
-                  <a:tcPr>
-                    <a:solidFill>
-                      <a:srgbClr val="FFFFFF"/>
-                    </a:solidFill>
-                  </a:tcPr>
-                </a:tc>
-              </a:tr>
-            </a:tbl>
-          </a:graphicData>
-        </a:graphic>
-      </p:graphicFrame>
-      <p:sp>
-        <p:nvSpPr>
-          <p:cNvPr id="8" name="Rectangle 7"/>
+      <p:sp>
+        <p:nvSpPr>
+          <p:cNvPr id="7" name="Rectangle 6"/>
           <p:cNvSpPr/>
           <p:nvPr/>
         </p:nvSpPr>
         <p:spPr>
           <a:xfrm>
-            <a:off x="502920" y="5394960"/>
-            <a:ext cx="11155680" cy="777240"/>
+            <a:off x="502920" y="1115568"/>
+            <a:ext cx="11155680" cy="457200"/>
           </a:xfrm>
           <a:prstGeom prst="rect">
             <a:avLst/>
@@ -5435,14 +8722,14 @@
       </p:sp>
       <p:sp>
         <p:nvSpPr>
-          <p:cNvPr id="9" name="TextBox 8"/>
+          <p:cNvPr id="8" name="TextBox 7"/>
           <p:cNvSpPr txBox="1"/>
           <p:nvPr/>
         </p:nvSpPr>
         <p:spPr>
           <a:xfrm>
-            <a:off x="658368" y="5449824"/>
-            <a:ext cx="10881360" cy="694944"/>
+            <a:off x="658368" y="1133856"/>
+            <a:ext cx="10881360" cy="420624"/>
           </a:xfrm>
           <a:prstGeom prst="rect">
             <a:avLst/>
@@ -5457,13 +8744,447 @@
           <a:p>
             <a:pPr algn="l"/>
             <a:r>
+              <a:rPr sz="1100" b="0" i="0">
+                <a:solidFill>
+                  <a:srgbClr val="1F3A5F"/>
+                </a:solidFill>
+                <a:latin typeface="Segoe UI"/>
+              </a:rPr>
+              <a:t>Governance foundation: data dictionary, data certification, ESS-02, and SOX Business App review.</a:t>
+            </a:r>
+          </a:p>
+        </p:txBody>
+      </p:sp>
+      <p:sp>
+        <p:nvSpPr>
+          <p:cNvPr id="9" name="TextBox 8"/>
+          <p:cNvSpPr txBox="1"/>
+          <p:nvPr/>
+        </p:nvSpPr>
+        <p:spPr>
+          <a:xfrm>
+            <a:off x="502920" y="1755648"/>
+            <a:ext cx="5486400" cy="2286000"/>
+          </a:xfrm>
+          <a:prstGeom prst="rect">
+            <a:avLst/>
+          </a:prstGeom>
+          <a:noFill/>
+        </p:spPr>
+        <p:txBody>
+          <a:bodyPr wrap="square" anchor="t" lIns="50800" rIns="50800" tIns="25400" bIns="25400">
+            <a:spAutoFit/>
+          </a:bodyPr>
+          <a:lstStyle/>
+          <a:p>
+            <a:pPr algn="l"/>
+            <a:r>
+              <a:rPr sz="1200" b="1" i="0">
+                <a:solidFill>
+                  <a:srgbClr val="1F3A5F"/>
+                </a:solidFill>
+                <a:latin typeface="Segoe UI"/>
+              </a:rPr>
+              <a:t>Done when (acceptance)</a:t>
+            </a:r>
+          </a:p>
+          <a:p>
+            <a:pPr algn="l"/>
+            <a:r>
               <a:rPr sz="1000" b="0" i="0">
                 <a:solidFill>
+                  <a:srgbClr val="2D2D2D"/>
+                </a:solidFill>
+                <a:latin typeface="Segoe UI"/>
+              </a:rPr>
+              <a:t>•  Class attributes / data dictionary defined for all in-scope CI classes, incl. Databases</a:t>
+            </a:r>
+          </a:p>
+          <a:p>
+            <a:pPr algn="l"/>
+            <a:r>
+              <a:rPr sz="1000" b="0" i="0">
+                <a:solidFill>
+                  <a:srgbClr val="2D2D2D"/>
+                </a:solidFill>
+                <a:latin typeface="Segoe UI"/>
+              </a:rPr>
+              <a:t>•  Data Certification live for ALL CI classes (not just Business Apps), with KB articles</a:t>
+            </a:r>
+          </a:p>
+          <a:p>
+            <a:pPr algn="l"/>
+            <a:r>
+              <a:rPr sz="1000" b="0" i="0">
+                <a:solidFill>
+                  <a:srgbClr val="2D2D2D"/>
+                </a:solidFill>
+                <a:latin typeface="Segoe UI"/>
+              </a:rPr>
+              <a:t>•  ESS-02 alignment with Cyber Security &amp; Compliance addressed</a:t>
+            </a:r>
+          </a:p>
+          <a:p>
+            <a:pPr algn="l"/>
+            <a:r>
+              <a:rPr sz="1000" b="0" i="0">
+                <a:solidFill>
+                  <a:srgbClr val="2D2D2D"/>
+                </a:solidFill>
+                <a:latin typeface="Segoe UI"/>
+              </a:rPr>
+              <a:t>•  SOX Business Apps correctly identified with update-rights controls</a:t>
+            </a:r>
+          </a:p>
+        </p:txBody>
+      </p:sp>
+      <p:sp>
+        <p:nvSpPr>
+          <p:cNvPr id="10" name="TextBox 9"/>
+          <p:cNvSpPr txBox="1"/>
+          <p:nvPr/>
+        </p:nvSpPr>
+        <p:spPr>
+          <a:xfrm>
+            <a:off x="6172200" y="1755648"/>
+            <a:ext cx="5486400" cy="2286000"/>
+          </a:xfrm>
+          <a:prstGeom prst="rect">
+            <a:avLst/>
+          </a:prstGeom>
+          <a:noFill/>
+        </p:spPr>
+        <p:txBody>
+          <a:bodyPr wrap="square" anchor="t" lIns="50800" rIns="50800" tIns="25400" bIns="25400">
+            <a:spAutoFit/>
+          </a:bodyPr>
+          <a:lstStyle/>
+          <a:p>
+            <a:pPr algn="l"/>
+            <a:r>
+              <a:rPr sz="1200" b="1" i="0">
+                <a:solidFill>
                   <a:srgbClr val="1F3A5F"/>
                 </a:solidFill>
                 <a:latin typeface="Segoe UI"/>
               </a:rPr>
-              <a:t>These are the threads already in motion - the same work you're on now.  Legacy Platform Rationalization and ATF Strategy are greenfield (no stories yet) - scoped at PI-3 planning.</a:t>
+              <a:t>Scope</a:t>
+            </a:r>
+          </a:p>
+          <a:p>
+            <a:pPr algn="l"/>
+            <a:r>
+              <a:rPr sz="1050" b="1" i="0">
+                <a:solidFill>
+                  <a:srgbClr val="2E8B57"/>
+                </a:solidFill>
+                <a:latin typeface="Segoe UI"/>
+              </a:rPr>
+              <a:t>In scope</a:t>
+            </a:r>
+          </a:p>
+          <a:p>
+            <a:pPr algn="l"/>
+            <a:r>
+              <a:rPr sz="950" b="0" i="0">
+                <a:solidFill>
+                  <a:srgbClr val="2D2D2D"/>
+                </a:solidFill>
+                <a:latin typeface="Segoe UI"/>
+              </a:rPr>
+              <a:t>•  Servers, Computers, Business Apps, Databases data dictionary</a:t>
+            </a:r>
+          </a:p>
+          <a:p>
+            <a:pPr algn="l"/>
+            <a:r>
+              <a:rPr sz="950" b="0" i="0">
+                <a:solidFill>
+                  <a:srgbClr val="2D2D2D"/>
+                </a:solidFill>
+                <a:latin typeface="Segoe UI"/>
+              </a:rPr>
+              <a:t>•  Data Cert: process, intake, pilot, KB articles</a:t>
+            </a:r>
+          </a:p>
+          <a:p>
+            <a:pPr algn="l"/>
+            <a:r>
+              <a:rPr sz="950" b="0" i="0">
+                <a:solidFill>
+                  <a:srgbClr val="2D2D2D"/>
+                </a:solidFill>
+                <a:latin typeface="Segoe UI"/>
+              </a:rPr>
+              <a:t>•  ESS-02 policy / CMDB alignment; SOX BA identification + access governance</a:t>
+            </a:r>
+          </a:p>
+          <a:p>
+            <a:pPr algn="l"/>
+            <a:r>
+              <a:rPr sz="1050" b="1" i="0">
+                <a:solidFill>
+                  <a:srgbClr val="C0392B"/>
+                </a:solidFill>
+                <a:latin typeface="Segoe UI"/>
+              </a:rPr>
+              <a:t>Out of scope</a:t>
+            </a:r>
+          </a:p>
+          <a:p>
+            <a:pPr algn="l"/>
+            <a:r>
+              <a:rPr sz="950" b="0" i="0">
+                <a:solidFill>
+                  <a:srgbClr val="2D2D2D"/>
+                </a:solidFill>
+                <a:latin typeface="Segoe UI"/>
+              </a:rPr>
+              <a:t>•  NERC / CIP compliance indicators (separate stream)</a:t>
+            </a:r>
+          </a:p>
+        </p:txBody>
+      </p:sp>
+      <p:sp>
+        <p:nvSpPr>
+          <p:cNvPr id="11" name="Rectangle 10"/>
+          <p:cNvSpPr/>
+          <p:nvPr/>
+        </p:nvSpPr>
+        <p:spPr>
+          <a:xfrm>
+            <a:off x="502920" y="4114800"/>
+            <a:ext cx="11155680" cy="1234440"/>
+          </a:xfrm>
+          <a:prstGeom prst="rect">
+            <a:avLst/>
+          </a:prstGeom>
+          <a:solidFill>
+            <a:srgbClr val="F4F6F9"/>
+          </a:solidFill>
+          <a:ln>
+            <a:noFill/>
+          </a:ln>
+          <a:effectLst/>
+        </p:spPr>
+        <p:style>
+          <a:lnRef idx="1">
+            <a:schemeClr val="accent1"/>
+          </a:lnRef>
+          <a:fillRef idx="3">
+            <a:schemeClr val="accent1"/>
+          </a:fillRef>
+          <a:effectRef idx="2">
+            <a:schemeClr val="accent1"/>
+          </a:effectRef>
+          <a:fontRef idx="minor">
+            <a:schemeClr val="lt1"/>
+          </a:fontRef>
+        </p:style>
+        <p:txBody>
+          <a:bodyPr rtlCol="0" anchor="ctr"/>
+          <a:lstStyle/>
+          <a:p>
+            <a:pPr algn="ctr"/>
+          </a:p>
+        </p:txBody>
+      </p:sp>
+      <p:sp>
+        <p:nvSpPr>
+          <p:cNvPr id="12" name="TextBox 11"/>
+          <p:cNvSpPr txBox="1"/>
+          <p:nvPr/>
+        </p:nvSpPr>
+        <p:spPr>
+          <a:xfrm>
+            <a:off x="658368" y="4160520"/>
+            <a:ext cx="10881360" cy="1161288"/>
+          </a:xfrm>
+          <a:prstGeom prst="rect">
+            <a:avLst/>
+          </a:prstGeom>
+          <a:noFill/>
+        </p:spPr>
+        <p:txBody>
+          <a:bodyPr wrap="square" anchor="t" lIns="50800" rIns="50800" tIns="25400" bIns="25400">
+            <a:spAutoFit/>
+          </a:bodyPr>
+          <a:lstStyle/>
+          <a:p>
+            <a:pPr algn="l"/>
+            <a:r>
+              <a:rPr sz="1150" b="1" i="0">
+                <a:solidFill>
+                  <a:srgbClr val="1F3A5F"/>
+                </a:solidFill>
+                <a:latin typeface="Segoe UI"/>
+              </a:rPr>
+              <a:t>Current stories</a:t>
+            </a:r>
+          </a:p>
+          <a:p>
+            <a:pPr algn="l"/>
+            <a:r>
+              <a:rPr sz="950" b="0" i="0">
+                <a:solidFill>
+                  <a:srgbClr val="2D2D2D"/>
+                </a:solidFill>
+                <a:latin typeface="Segoe UI"/>
+              </a:rPr>
+              <a:t>•  Data Cert: 1247179 pilot  ·  1402727 dashboard (PROD)  ·  1402958 planning  ·  1435307 pilot changes</a:t>
+            </a:r>
+          </a:p>
+          <a:p>
+            <a:pPr algn="l"/>
+            <a:r>
+              <a:rPr sz="950" b="0" i="0">
+                <a:solidFill>
+                  <a:srgbClr val="2D2D2D"/>
+                </a:solidFill>
+                <a:latin typeface="Segoe UI"/>
+              </a:rPr>
+              <a:t>•  ESS-02: spike 1420244 (analysis)</a:t>
+            </a:r>
+          </a:p>
+          <a:p>
+            <a:pPr algn="l"/>
+            <a:r>
+              <a:rPr sz="950" b="0" i="0">
+                <a:solidFill>
+                  <a:srgbClr val="2D2D2D"/>
+                </a:solidFill>
+                <a:latin typeface="Segoe UI"/>
+              </a:rPr>
+              <a:t>•  SOX: 1438967 (closed)  ·  1455827 ownership-change notify</a:t>
+            </a:r>
+          </a:p>
+          <a:p>
+            <a:pPr algn="l"/>
+            <a:r>
+              <a:rPr sz="950" b="0" i="0">
+                <a:solidFill>
+                  <a:srgbClr val="2D2D2D"/>
+                </a:solidFill>
+                <a:latin typeface="Segoe UI"/>
+              </a:rPr>
+              <a:t>•  Databases data dictionary - no story yet</a:t>
+            </a:r>
+          </a:p>
+        </p:txBody>
+      </p:sp>
+      <p:sp>
+        <p:nvSpPr>
+          <p:cNvPr id="13" name="Rectangle 12"/>
+          <p:cNvSpPr/>
+          <p:nvPr/>
+        </p:nvSpPr>
+        <p:spPr>
+          <a:xfrm>
+            <a:off x="502920" y="5413248"/>
+            <a:ext cx="11155680" cy="896112"/>
+          </a:xfrm>
+          <a:prstGeom prst="rect">
+            <a:avLst/>
+          </a:prstGeom>
+          <a:solidFill>
+            <a:srgbClr val="FBEEDB"/>
+          </a:solidFill>
+          <a:ln w="9525">
+            <a:solidFill>
+              <a:srgbClr val="E08A00"/>
+            </a:solidFill>
+          </a:ln>
+          <a:effectLst/>
+        </p:spPr>
+        <p:style>
+          <a:lnRef idx="1">
+            <a:schemeClr val="accent1"/>
+          </a:lnRef>
+          <a:fillRef idx="3">
+            <a:schemeClr val="accent1"/>
+          </a:fillRef>
+          <a:effectRef idx="2">
+            <a:schemeClr val="accent1"/>
+          </a:effectRef>
+          <a:fontRef idx="minor">
+            <a:schemeClr val="lt1"/>
+          </a:fontRef>
+        </p:style>
+        <p:txBody>
+          <a:bodyPr rtlCol="0" anchor="ctr"/>
+          <a:lstStyle/>
+          <a:p>
+            <a:pPr algn="ctr"/>
+          </a:p>
+        </p:txBody>
+      </p:sp>
+      <p:sp>
+        <p:nvSpPr>
+          <p:cNvPr id="14" name="TextBox 13"/>
+          <p:cNvSpPr txBox="1"/>
+          <p:nvPr/>
+        </p:nvSpPr>
+        <p:spPr>
+          <a:xfrm>
+            <a:off x="658368" y="5449824"/>
+            <a:ext cx="10881360" cy="822960"/>
+          </a:xfrm>
+          <a:prstGeom prst="rect">
+            <a:avLst/>
+          </a:prstGeom>
+          <a:noFill/>
+        </p:spPr>
+        <p:txBody>
+          <a:bodyPr wrap="square" anchor="t" lIns="50800" rIns="50800" tIns="25400" bIns="25400">
+            <a:spAutoFit/>
+          </a:bodyPr>
+          <a:lstStyle/>
+          <a:p>
+            <a:pPr algn="l"/>
+            <a:r>
+              <a:rPr sz="1100" b="1" i="0">
+                <a:solidFill>
+                  <a:srgbClr val="7A4F10"/>
+                </a:solidFill>
+                <a:latin typeface="Segoe UI"/>
+              </a:rPr>
+              <a:t>Watch-outs / dependencies</a:t>
+            </a:r>
+          </a:p>
+          <a:p>
+            <a:pPr algn="l"/>
+            <a:r>
+              <a:rPr sz="950" b="0" i="0">
+                <a:solidFill>
+                  <a:srgbClr val="5A4A2A"/>
+                </a:solidFill>
+                <a:latin typeface="Segoe UI"/>
+              </a:rPr>
+              <a:t>•  Databases class has no data-dictionary story yet - needs creating</a:t>
+            </a:r>
+          </a:p>
+          <a:p>
+            <a:pPr algn="l"/>
+            <a:r>
+              <a:rPr sz="950" b="0" i="0">
+                <a:solidFill>
+                  <a:srgbClr val="5A4A2A"/>
+                </a:solidFill>
+                <a:latin typeface="Segoe UI"/>
+              </a:rPr>
+              <a:t>•  KB / user-doc articles have no owner - confirm before sign-off</a:t>
+            </a:r>
+          </a:p>
+          <a:p>
+            <a:pPr algn="l"/>
+            <a:r>
+              <a:rPr sz="950" b="0" i="0">
+                <a:solidFill>
+                  <a:srgbClr val="5A4A2A"/>
+                </a:solidFill>
+                <a:latin typeface="Segoe UI"/>
+              </a:rPr>
+              <a:t>•  SOX only - NERC / CIP explicitly excluded</a:t>
             </a:r>
           </a:p>
         </p:txBody>
@@ -5604,7 +9325,7 @@
                 </a:solidFill>
                 <a:latin typeface="Segoe UI"/>
               </a:rPr>
-              <a:t>Timeline - Where It Lands</a:t>
+              <a:t>CI Coverage - Computers</a:t>
             </a:r>
           </a:p>
         </p:txBody>
@@ -5639,7 +9360,7 @@
                 </a:solidFill>
                 <a:latin typeface="Segoe UI"/>
               </a:rPr>
-              <a:t>Tail of PI-2 + all of PI-3  ·  staged monthly acceptance</a:t>
+              <a:t>Due Jul 31 -&gt; Sep 30   ·   PI-2 / PI-3</a:t>
             </a:r>
           </a:p>
         </p:txBody>
@@ -5687,14 +9408,261 @@
         </p:nvSpPr>
         <p:spPr>
           <a:xfrm>
-            <a:off x="1828800" y="1188720"/>
-            <a:ext cx="12700" cy="1234440"/>
+            <a:off x="502920" y="1115568"/>
+            <a:ext cx="11155680" cy="457200"/>
           </a:xfrm>
           <a:prstGeom prst="rect">
             <a:avLst/>
           </a:prstGeom>
           <a:solidFill>
-            <a:srgbClr val="DDE3EA"/>
+            <a:srgbClr val="E9F0F8"/>
+          </a:solidFill>
+          <a:ln w="9525">
+            <a:solidFill>
+              <a:srgbClr val="2E6DB4"/>
+            </a:solidFill>
+          </a:ln>
+          <a:effectLst/>
+        </p:spPr>
+        <p:style>
+          <a:lnRef idx="1">
+            <a:schemeClr val="accent1"/>
+          </a:lnRef>
+          <a:fillRef idx="3">
+            <a:schemeClr val="accent1"/>
+          </a:fillRef>
+          <a:effectRef idx="2">
+            <a:schemeClr val="accent1"/>
+          </a:effectRef>
+          <a:fontRef idx="minor">
+            <a:schemeClr val="lt1"/>
+          </a:fontRef>
+        </p:style>
+        <p:txBody>
+          <a:bodyPr rtlCol="0" anchor="ctr"/>
+          <a:lstStyle/>
+          <a:p>
+            <a:pPr algn="ctr"/>
+          </a:p>
+        </p:txBody>
+      </p:sp>
+      <p:sp>
+        <p:nvSpPr>
+          <p:cNvPr id="8" name="TextBox 7"/>
+          <p:cNvSpPr txBox="1"/>
+          <p:nvPr/>
+        </p:nvSpPr>
+        <p:spPr>
+          <a:xfrm>
+            <a:off x="658368" y="1133856"/>
+            <a:ext cx="10881360" cy="420624"/>
+          </a:xfrm>
+          <a:prstGeom prst="rect">
+            <a:avLst/>
+          </a:prstGeom>
+          <a:noFill/>
+        </p:spPr>
+        <p:txBody>
+          <a:bodyPr wrap="square" anchor="ctr" lIns="50800" rIns="50800" tIns="25400" bIns="25400">
+            <a:spAutoFit/>
+          </a:bodyPr>
+          <a:lstStyle/>
+          <a:p>
+            <a:pPr algn="l"/>
+            <a:r>
+              <a:rPr sz="1100" b="0" i="0">
+                <a:solidFill>
+                  <a:srgbClr val="1F3A5F"/>
+                </a:solidFill>
+                <a:latin typeface="Segoe UI"/>
+              </a:rPr>
+              <a:t>SCCM/Discovery precedence, bulk life-cycle, and 90% of computers managed.</a:t>
+            </a:r>
+          </a:p>
+        </p:txBody>
+      </p:sp>
+      <p:sp>
+        <p:nvSpPr>
+          <p:cNvPr id="9" name="TextBox 8"/>
+          <p:cNvSpPr txBox="1"/>
+          <p:nvPr/>
+        </p:nvSpPr>
+        <p:spPr>
+          <a:xfrm>
+            <a:off x="502920" y="1755648"/>
+            <a:ext cx="5486400" cy="2286000"/>
+          </a:xfrm>
+          <a:prstGeom prst="rect">
+            <a:avLst/>
+          </a:prstGeom>
+          <a:noFill/>
+        </p:spPr>
+        <p:txBody>
+          <a:bodyPr wrap="square" anchor="t" lIns="50800" rIns="50800" tIns="25400" bIns="25400">
+            <a:spAutoFit/>
+          </a:bodyPr>
+          <a:lstStyle/>
+          <a:p>
+            <a:pPr algn="l"/>
+            <a:r>
+              <a:rPr sz="1200" b="1" i="0">
+                <a:solidFill>
+                  <a:srgbClr val="1F3A5F"/>
+                </a:solidFill>
+                <a:latin typeface="Segoe UI"/>
+              </a:rPr>
+              <a:t>Done when (acceptance)</a:t>
+            </a:r>
+          </a:p>
+          <a:p>
+            <a:pPr algn="l"/>
+            <a:r>
+              <a:rPr sz="1000" b="0" i="0">
+                <a:solidFill>
+                  <a:srgbClr val="2D2D2D"/>
+                </a:solidFill>
+                <a:latin typeface="Segoe UI"/>
+              </a:rPr>
+              <a:t>•  SCCM/Discovery data precedence reconciled and applied</a:t>
+            </a:r>
+          </a:p>
+          <a:p>
+            <a:pPr algn="l"/>
+            <a:r>
+              <a:rPr sz="1000" b="0" i="0">
+                <a:solidFill>
+                  <a:srgbClr val="2D2D2D"/>
+                </a:solidFill>
+                <a:latin typeface="Segoe UI"/>
+              </a:rPr>
+              <a:t>•  Bulk Life Cycle Stage &amp; Status updates applied</a:t>
+            </a:r>
+          </a:p>
+          <a:p>
+            <a:pPr algn="l"/>
+            <a:r>
+              <a:rPr sz="1000" b="0" i="0">
+                <a:solidFill>
+                  <a:srgbClr val="2D2D2D"/>
+                </a:solidFill>
+                <a:latin typeface="Segoe UI"/>
+              </a:rPr>
+              <a:t>•  90% of computer devices managed (coverage validated)</a:t>
+            </a:r>
+          </a:p>
+        </p:txBody>
+      </p:sp>
+      <p:sp>
+        <p:nvSpPr>
+          <p:cNvPr id="10" name="TextBox 9"/>
+          <p:cNvSpPr txBox="1"/>
+          <p:nvPr/>
+        </p:nvSpPr>
+        <p:spPr>
+          <a:xfrm>
+            <a:off x="6172200" y="1755648"/>
+            <a:ext cx="5486400" cy="2286000"/>
+          </a:xfrm>
+          <a:prstGeom prst="rect">
+            <a:avLst/>
+          </a:prstGeom>
+          <a:noFill/>
+        </p:spPr>
+        <p:txBody>
+          <a:bodyPr wrap="square" anchor="t" lIns="50800" rIns="50800" tIns="25400" bIns="25400">
+            <a:spAutoFit/>
+          </a:bodyPr>
+          <a:lstStyle/>
+          <a:p>
+            <a:pPr algn="l"/>
+            <a:r>
+              <a:rPr sz="1200" b="1" i="0">
+                <a:solidFill>
+                  <a:srgbClr val="1F3A5F"/>
+                </a:solidFill>
+                <a:latin typeface="Segoe UI"/>
+              </a:rPr>
+              <a:t>Scope</a:t>
+            </a:r>
+          </a:p>
+          <a:p>
+            <a:pPr algn="l"/>
+            <a:r>
+              <a:rPr sz="1050" b="1" i="0">
+                <a:solidFill>
+                  <a:srgbClr val="2E8B57"/>
+                </a:solidFill>
+                <a:latin typeface="Segoe UI"/>
+              </a:rPr>
+              <a:t>In scope</a:t>
+            </a:r>
+          </a:p>
+          <a:p>
+            <a:pPr algn="l"/>
+            <a:r>
+              <a:rPr sz="950" b="0" i="0">
+                <a:solidFill>
+                  <a:srgbClr val="2D2D2D"/>
+                </a:solidFill>
+                <a:latin typeface="Segoe UI"/>
+              </a:rPr>
+              <a:t>•  Physical + virtual computers</a:t>
+            </a:r>
+          </a:p>
+          <a:p>
+            <a:pPr algn="l"/>
+            <a:r>
+              <a:rPr sz="950" b="0" i="0">
+                <a:solidFill>
+                  <a:srgbClr val="2D2D2D"/>
+                </a:solidFill>
+                <a:latin typeface="Segoe UI"/>
+              </a:rPr>
+              <a:t>•  Precedence reconciliation; bulk life-cycle; coverage measurement</a:t>
+            </a:r>
+          </a:p>
+          <a:p>
+            <a:pPr algn="l"/>
+            <a:r>
+              <a:rPr sz="1050" b="1" i="0">
+                <a:solidFill>
+                  <a:srgbClr val="C0392B"/>
+                </a:solidFill>
+                <a:latin typeface="Segoe UI"/>
+              </a:rPr>
+              <a:t>Out of scope</a:t>
+            </a:r>
+          </a:p>
+          <a:p>
+            <a:pPr algn="l"/>
+            <a:r>
+              <a:rPr sz="950" b="0" i="0">
+                <a:solidFill>
+                  <a:srgbClr val="2D2D2D"/>
+                </a:solidFill>
+                <a:latin typeface="Segoe UI"/>
+              </a:rPr>
+              <a:t>•  Life-cycle process definition (owned by Asset Management)</a:t>
+            </a:r>
+          </a:p>
+        </p:txBody>
+      </p:sp>
+      <p:sp>
+        <p:nvSpPr>
+          <p:cNvPr id="11" name="Rectangle 10"/>
+          <p:cNvSpPr/>
+          <p:nvPr/>
+        </p:nvSpPr>
+        <p:spPr>
+          <a:xfrm>
+            <a:off x="502920" y="4114800"/>
+            <a:ext cx="11155680" cy="1234440"/>
+          </a:xfrm>
+          <a:prstGeom prst="rect">
+            <a:avLst/>
+          </a:prstGeom>
+          <a:solidFill>
+            <a:srgbClr val="F4F6F9"/>
           </a:solidFill>
           <a:ln>
             <a:noFill/>
@@ -5725,14 +9693,14 @@
       </p:sp>
       <p:sp>
         <p:nvSpPr>
-          <p:cNvPr id="8" name="TextBox 7"/>
+          <p:cNvPr id="12" name="TextBox 11"/>
           <p:cNvSpPr txBox="1"/>
           <p:nvPr/>
         </p:nvSpPr>
         <p:spPr>
           <a:xfrm>
-            <a:off x="1554480" y="2441448"/>
-            <a:ext cx="548640" cy="228600"/>
+            <a:off x="658368" y="4160520"/>
+            <a:ext cx="10881360" cy="1161288"/>
           </a:xfrm>
           <a:prstGeom prst="rect">
             <a:avLst/>
@@ -5745,38 +9713,76 @@
           </a:bodyPr>
           <a:lstStyle/>
           <a:p>
-            <a:pPr algn="ctr"/>
-            <a:r>
-              <a:rPr sz="900" b="0" i="0">
-                <a:solidFill>
-                  <a:srgbClr val="6B7280"/>
-                </a:solidFill>
-                <a:latin typeface="Segoe UI"/>
-              </a:rPr>
-              <a:t>Jun</a:t>
-            </a:r>
-          </a:p>
-        </p:txBody>
-      </p:sp>
-      <p:sp>
-        <p:nvSpPr>
-          <p:cNvPr id="9" name="Rectangle 8"/>
+            <a:pPr algn="l"/>
+            <a:r>
+              <a:rPr sz="1150" b="1" i="0">
+                <a:solidFill>
+                  <a:srgbClr val="1F3A5F"/>
+                </a:solidFill>
+                <a:latin typeface="Segoe UI"/>
+              </a:rPr>
+              <a:t>Current stories</a:t>
+            </a:r>
+          </a:p>
+          <a:p>
+            <a:pPr algn="l"/>
+            <a:r>
+              <a:rPr sz="950" b="0" i="0">
+                <a:solidFill>
+                  <a:srgbClr val="2D2D2D"/>
+                </a:solidFill>
+                <a:latin typeface="Segoe UI"/>
+              </a:rPr>
+              <a:t>•  SCCM Computer: 1348712 / 16 / 17 (resolved)  ·  1348715 last-seen (validation)</a:t>
+            </a:r>
+          </a:p>
+          <a:p>
+            <a:pPr algn="l"/>
+            <a:r>
+              <a:rPr sz="950" b="0" i="0">
+                <a:solidFill>
+                  <a:srgbClr val="2D2D2D"/>
+                </a:solidFill>
+                <a:latin typeface="Segoe UI"/>
+              </a:rPr>
+              <a:t>•  Computer Class 1354794  ·  1402790 retired lifecycle (closed)</a:t>
+            </a:r>
+          </a:p>
+          <a:p>
+            <a:pPr algn="l"/>
+            <a:r>
+              <a:rPr sz="950" b="0" i="0">
+                <a:solidFill>
+                  <a:srgbClr val="2D2D2D"/>
+                </a:solidFill>
+                <a:latin typeface="Segoe UI"/>
+              </a:rPr>
+              <a:t>•  90% coverage measurement - no story yet</a:t>
+            </a:r>
+          </a:p>
+        </p:txBody>
+      </p:sp>
+      <p:sp>
+        <p:nvSpPr>
+          <p:cNvPr id="13" name="Rectangle 12"/>
           <p:cNvSpPr/>
           <p:nvPr/>
         </p:nvSpPr>
         <p:spPr>
           <a:xfrm>
-            <a:off x="3767328" y="1188720"/>
-            <a:ext cx="12700" cy="1234440"/>
+            <a:off x="502920" y="5413248"/>
+            <a:ext cx="11155680" cy="896112"/>
           </a:xfrm>
           <a:prstGeom prst="rect">
             <a:avLst/>
           </a:prstGeom>
           <a:solidFill>
-            <a:srgbClr val="DDE3EA"/>
+            <a:srgbClr val="FBEEDB"/>
           </a:solidFill>
-          <a:ln>
-            <a:noFill/>
+          <a:ln w="9525">
+            <a:solidFill>
+              <a:srgbClr val="E08A00"/>
+            </a:solidFill>
           </a:ln>
           <a:effectLst/>
         </p:spPr>
@@ -5804,14 +9810,14 @@
       </p:sp>
       <p:sp>
         <p:nvSpPr>
-          <p:cNvPr id="10" name="TextBox 9"/>
+          <p:cNvPr id="14" name="TextBox 13"/>
           <p:cNvSpPr txBox="1"/>
           <p:nvPr/>
         </p:nvSpPr>
         <p:spPr>
           <a:xfrm>
-            <a:off x="3493008" y="2441448"/>
-            <a:ext cx="548640" cy="228600"/>
+            <a:off x="658368" y="5449824"/>
+            <a:ext cx="10881360" cy="822960"/>
           </a:xfrm>
           <a:prstGeom prst="rect">
             <a:avLst/>
@@ -5824,1202 +9830,55 @@
           </a:bodyPr>
           <a:lstStyle/>
           <a:p>
-            <a:pPr algn="ctr"/>
-            <a:r>
-              <a:rPr sz="900" b="0" i="0">
-                <a:solidFill>
-                  <a:srgbClr val="6B7280"/>
-                </a:solidFill>
-                <a:latin typeface="Segoe UI"/>
-              </a:rPr>
-              <a:t>Jul</a:t>
-            </a:r>
-          </a:p>
-        </p:txBody>
-      </p:sp>
-      <p:sp>
-        <p:nvSpPr>
-          <p:cNvPr id="11" name="Rectangle 10"/>
-          <p:cNvSpPr/>
-          <p:nvPr/>
-        </p:nvSpPr>
-        <p:spPr>
-          <a:xfrm>
-            <a:off x="5705856" y="1188720"/>
-            <a:ext cx="12700" cy="1234440"/>
-          </a:xfrm>
-          <a:prstGeom prst="rect">
-            <a:avLst/>
-          </a:prstGeom>
-          <a:solidFill>
-            <a:srgbClr val="DDE3EA"/>
-          </a:solidFill>
-          <a:ln>
-            <a:noFill/>
-          </a:ln>
-          <a:effectLst/>
-        </p:spPr>
-        <p:style>
-          <a:lnRef idx="1">
-            <a:schemeClr val="accent1"/>
-          </a:lnRef>
-          <a:fillRef idx="3">
-            <a:schemeClr val="accent1"/>
-          </a:fillRef>
-          <a:effectRef idx="2">
-            <a:schemeClr val="accent1"/>
-          </a:effectRef>
-          <a:fontRef idx="minor">
-            <a:schemeClr val="lt1"/>
-          </a:fontRef>
-        </p:style>
-        <p:txBody>
-          <a:bodyPr rtlCol="0" anchor="ctr"/>
-          <a:lstStyle/>
-          <a:p>
-            <a:pPr algn="ctr"/>
-          </a:p>
-        </p:txBody>
-      </p:sp>
-      <p:sp>
-        <p:nvSpPr>
-          <p:cNvPr id="12" name="TextBox 11"/>
-          <p:cNvSpPr txBox="1"/>
-          <p:nvPr/>
-        </p:nvSpPr>
-        <p:spPr>
-          <a:xfrm>
-            <a:off x="5431536" y="2441448"/>
-            <a:ext cx="548640" cy="228600"/>
-          </a:xfrm>
-          <a:prstGeom prst="rect">
-            <a:avLst/>
-          </a:prstGeom>
-          <a:noFill/>
-        </p:spPr>
-        <p:txBody>
-          <a:bodyPr wrap="square" anchor="t" lIns="50800" rIns="50800" tIns="25400" bIns="25400">
-            <a:spAutoFit/>
-          </a:bodyPr>
-          <a:lstStyle/>
-          <a:p>
-            <a:pPr algn="ctr"/>
-            <a:r>
-              <a:rPr sz="900" b="0" i="0">
-                <a:solidFill>
-                  <a:srgbClr val="6B7280"/>
-                </a:solidFill>
-                <a:latin typeface="Segoe UI"/>
-              </a:rPr>
-              <a:t>Aug</a:t>
-            </a:r>
-          </a:p>
-        </p:txBody>
-      </p:sp>
-      <p:sp>
-        <p:nvSpPr>
-          <p:cNvPr id="13" name="Rectangle 12"/>
-          <p:cNvSpPr/>
-          <p:nvPr/>
-        </p:nvSpPr>
-        <p:spPr>
-          <a:xfrm>
-            <a:off x="7644383" y="1188720"/>
-            <a:ext cx="12700" cy="1234440"/>
-          </a:xfrm>
-          <a:prstGeom prst="rect">
-            <a:avLst/>
-          </a:prstGeom>
-          <a:solidFill>
-            <a:srgbClr val="DDE3EA"/>
-          </a:solidFill>
-          <a:ln>
-            <a:noFill/>
-          </a:ln>
-          <a:effectLst/>
-        </p:spPr>
-        <p:style>
-          <a:lnRef idx="1">
-            <a:schemeClr val="accent1"/>
-          </a:lnRef>
-          <a:fillRef idx="3">
-            <a:schemeClr val="accent1"/>
-          </a:fillRef>
-          <a:effectRef idx="2">
-            <a:schemeClr val="accent1"/>
-          </a:effectRef>
-          <a:fontRef idx="minor">
-            <a:schemeClr val="lt1"/>
-          </a:fontRef>
-        </p:style>
-        <p:txBody>
-          <a:bodyPr rtlCol="0" anchor="ctr"/>
-          <a:lstStyle/>
-          <a:p>
-            <a:pPr algn="ctr"/>
-          </a:p>
-        </p:txBody>
-      </p:sp>
-      <p:sp>
-        <p:nvSpPr>
-          <p:cNvPr id="14" name="TextBox 13"/>
-          <p:cNvSpPr txBox="1"/>
-          <p:nvPr/>
-        </p:nvSpPr>
-        <p:spPr>
-          <a:xfrm>
-            <a:off x="7370063" y="2441448"/>
-            <a:ext cx="548640" cy="228600"/>
-          </a:xfrm>
-          <a:prstGeom prst="rect">
-            <a:avLst/>
-          </a:prstGeom>
-          <a:noFill/>
-        </p:spPr>
-        <p:txBody>
-          <a:bodyPr wrap="square" anchor="t" lIns="50800" rIns="50800" tIns="25400" bIns="25400">
-            <a:spAutoFit/>
-          </a:bodyPr>
-          <a:lstStyle/>
-          <a:p>
-            <a:pPr algn="ctr"/>
-            <a:r>
-              <a:rPr sz="900" b="0" i="0">
-                <a:solidFill>
-                  <a:srgbClr val="6B7280"/>
-                </a:solidFill>
-                <a:latin typeface="Segoe UI"/>
-              </a:rPr>
-              <a:t>Sep</a:t>
-            </a:r>
-          </a:p>
-        </p:txBody>
-      </p:sp>
-      <p:sp>
-        <p:nvSpPr>
-          <p:cNvPr id="15" name="Rectangle 14"/>
-          <p:cNvSpPr/>
-          <p:nvPr/>
-        </p:nvSpPr>
-        <p:spPr>
-          <a:xfrm>
-            <a:off x="9582912" y="1188720"/>
-            <a:ext cx="12700" cy="1234440"/>
-          </a:xfrm>
-          <a:prstGeom prst="rect">
-            <a:avLst/>
-          </a:prstGeom>
-          <a:solidFill>
-            <a:srgbClr val="DDE3EA"/>
-          </a:solidFill>
-          <a:ln>
-            <a:noFill/>
-          </a:ln>
-          <a:effectLst/>
-        </p:spPr>
-        <p:style>
-          <a:lnRef idx="1">
-            <a:schemeClr val="accent1"/>
-          </a:lnRef>
-          <a:fillRef idx="3">
-            <a:schemeClr val="accent1"/>
-          </a:fillRef>
-          <a:effectRef idx="2">
-            <a:schemeClr val="accent1"/>
-          </a:effectRef>
-          <a:fontRef idx="minor">
-            <a:schemeClr val="lt1"/>
-          </a:fontRef>
-        </p:style>
-        <p:txBody>
-          <a:bodyPr rtlCol="0" anchor="ctr"/>
-          <a:lstStyle/>
-          <a:p>
-            <a:pPr algn="ctr"/>
-          </a:p>
-        </p:txBody>
-      </p:sp>
-      <p:sp>
-        <p:nvSpPr>
-          <p:cNvPr id="16" name="TextBox 15"/>
-          <p:cNvSpPr txBox="1"/>
-          <p:nvPr/>
-        </p:nvSpPr>
-        <p:spPr>
-          <a:xfrm>
-            <a:off x="9308592" y="2441448"/>
-            <a:ext cx="548640" cy="228600"/>
-          </a:xfrm>
-          <a:prstGeom prst="rect">
-            <a:avLst/>
-          </a:prstGeom>
-          <a:noFill/>
-        </p:spPr>
-        <p:txBody>
-          <a:bodyPr wrap="square" anchor="t" lIns="50800" rIns="50800" tIns="25400" bIns="25400">
-            <a:spAutoFit/>
-          </a:bodyPr>
-          <a:lstStyle/>
-          <a:p>
-            <a:pPr algn="ctr"/>
-            <a:r>
-              <a:rPr sz="900" b="0" i="0">
-                <a:solidFill>
-                  <a:srgbClr val="6B7280"/>
-                </a:solidFill>
-                <a:latin typeface="Segoe UI"/>
-              </a:rPr>
-              <a:t>Oct</a:t>
-            </a:r>
-          </a:p>
-        </p:txBody>
-      </p:sp>
-      <p:sp>
-        <p:nvSpPr>
-          <p:cNvPr id="17" name="Rectangle 16"/>
-          <p:cNvSpPr/>
-          <p:nvPr/>
-        </p:nvSpPr>
-        <p:spPr>
-          <a:xfrm>
-            <a:off x="11521440" y="1188720"/>
-            <a:ext cx="12700" cy="1234440"/>
-          </a:xfrm>
-          <a:prstGeom prst="rect">
-            <a:avLst/>
-          </a:prstGeom>
-          <a:solidFill>
-            <a:srgbClr val="DDE3EA"/>
-          </a:solidFill>
-          <a:ln>
-            <a:noFill/>
-          </a:ln>
-          <a:effectLst/>
-        </p:spPr>
-        <p:style>
-          <a:lnRef idx="1">
-            <a:schemeClr val="accent1"/>
-          </a:lnRef>
-          <a:fillRef idx="3">
-            <a:schemeClr val="accent1"/>
-          </a:fillRef>
-          <a:effectRef idx="2">
-            <a:schemeClr val="accent1"/>
-          </a:effectRef>
-          <a:fontRef idx="minor">
-            <a:schemeClr val="lt1"/>
-          </a:fontRef>
-        </p:style>
-        <p:txBody>
-          <a:bodyPr rtlCol="0" anchor="ctr"/>
-          <a:lstStyle/>
-          <a:p>
-            <a:pPr algn="ctr"/>
-          </a:p>
-        </p:txBody>
-      </p:sp>
-      <p:sp>
-        <p:nvSpPr>
-          <p:cNvPr id="18" name="TextBox 17"/>
-          <p:cNvSpPr txBox="1"/>
-          <p:nvPr/>
-        </p:nvSpPr>
-        <p:spPr>
-          <a:xfrm>
-            <a:off x="11247120" y="2441448"/>
-            <a:ext cx="548640" cy="228600"/>
-          </a:xfrm>
-          <a:prstGeom prst="rect">
-            <a:avLst/>
-          </a:prstGeom>
-          <a:noFill/>
-        </p:spPr>
-        <p:txBody>
-          <a:bodyPr wrap="square" anchor="t" lIns="50800" rIns="50800" tIns="25400" bIns="25400">
-            <a:spAutoFit/>
-          </a:bodyPr>
-          <a:lstStyle/>
-          <a:p>
-            <a:pPr algn="ctr"/>
-            <a:r>
-              <a:rPr sz="900" b="0" i="0">
-                <a:solidFill>
-                  <a:srgbClr val="6B7280"/>
-                </a:solidFill>
-                <a:latin typeface="Segoe UI"/>
-              </a:rPr>
-              <a:t>Nov</a:t>
-            </a:r>
-          </a:p>
-        </p:txBody>
-      </p:sp>
-      <p:sp>
-        <p:nvSpPr>
-          <p:cNvPr id="19" name="TextBox 18"/>
-          <p:cNvSpPr txBox="1"/>
-          <p:nvPr/>
-        </p:nvSpPr>
-        <p:spPr>
-          <a:xfrm>
-            <a:off x="502920" y="1188720"/>
-            <a:ext cx="1280160" cy="1234440"/>
-          </a:xfrm>
-          <a:prstGeom prst="rect">
-            <a:avLst/>
-          </a:prstGeom>
-          <a:noFill/>
-        </p:spPr>
-        <p:txBody>
-          <a:bodyPr wrap="square" anchor="ctr" lIns="50800" rIns="50800" tIns="25400" bIns="25400">
-            <a:spAutoFit/>
-          </a:bodyPr>
-          <a:lstStyle/>
-          <a:p>
-            <a:pPr algn="l"/>
-            <a:r>
-              <a:rPr sz="900" b="1" i="0">
-                <a:solidFill>
-                  <a:srgbClr val="6B7280"/>
-                </a:solidFill>
-                <a:latin typeface="Segoe UI"/>
-              </a:rPr>
-              <a:t>Windows</a:t>
-            </a:r>
-          </a:p>
-        </p:txBody>
-      </p:sp>
-      <p:sp>
-        <p:nvSpPr>
-          <p:cNvPr id="20" name="Rectangle 19"/>
-          <p:cNvSpPr/>
-          <p:nvPr/>
-        </p:nvSpPr>
-        <p:spPr>
-          <a:xfrm>
-            <a:off x="3767328" y="1243584"/>
-            <a:ext cx="7628107" cy="292608"/>
-          </a:xfrm>
-          <a:prstGeom prst="rect">
-            <a:avLst/>
-          </a:prstGeom>
-          <a:solidFill>
-            <a:srgbClr val="2E6DB4"/>
-          </a:solidFill>
-          <a:ln>
-            <a:noFill/>
-          </a:ln>
-          <a:effectLst/>
-        </p:spPr>
-        <p:style>
-          <a:lnRef idx="1">
-            <a:schemeClr val="accent1"/>
-          </a:lnRef>
-          <a:fillRef idx="3">
-            <a:schemeClr val="accent1"/>
-          </a:fillRef>
-          <a:effectRef idx="2">
-            <a:schemeClr val="accent1"/>
-          </a:effectRef>
-          <a:fontRef idx="minor">
-            <a:schemeClr val="lt1"/>
-          </a:fontRef>
-        </p:style>
-        <p:txBody>
-          <a:bodyPr rtlCol="0" anchor="ctr"/>
-          <a:lstStyle/>
-          <a:p>
-            <a:pPr algn="ctr"/>
-          </a:p>
-        </p:txBody>
-      </p:sp>
-      <p:sp>
-        <p:nvSpPr>
-          <p:cNvPr id="21" name="TextBox 20"/>
-          <p:cNvSpPr txBox="1"/>
-          <p:nvPr/>
-        </p:nvSpPr>
-        <p:spPr>
-          <a:xfrm>
-            <a:off x="3840480" y="1243584"/>
-            <a:ext cx="7518379" cy="292608"/>
-          </a:xfrm>
-          <a:prstGeom prst="rect">
-            <a:avLst/>
-          </a:prstGeom>
-          <a:noFill/>
-        </p:spPr>
-        <p:txBody>
-          <a:bodyPr wrap="square" anchor="ctr" lIns="50800" rIns="50800" tIns="25400" bIns="25400">
-            <a:spAutoFit/>
-          </a:bodyPr>
-          <a:lstStyle/>
-          <a:p>
-            <a:pPr algn="l"/>
-            <a:r>
-              <a:rPr sz="950" b="1" i="0">
-                <a:solidFill>
-                  <a:srgbClr val="FFFFFF"/>
-                </a:solidFill>
-                <a:latin typeface="Segoe UI"/>
-              </a:rPr>
-              <a:t>Delivery window   Jul 1 - Oct 30</a:t>
-            </a:r>
-          </a:p>
-        </p:txBody>
-      </p:sp>
-      <p:sp>
-        <p:nvSpPr>
-          <p:cNvPr id="22" name="Rectangle 21"/>
-          <p:cNvSpPr/>
-          <p:nvPr/>
-        </p:nvSpPr>
-        <p:spPr>
-          <a:xfrm>
-            <a:off x="1828800" y="1613916"/>
-            <a:ext cx="4065093" cy="292608"/>
-          </a:xfrm>
-          <a:prstGeom prst="rect">
-            <a:avLst/>
-          </a:prstGeom>
-          <a:solidFill>
-            <a:srgbClr val="6E88AE"/>
-          </a:solidFill>
-          <a:ln>
-            <a:noFill/>
-          </a:ln>
-          <a:effectLst/>
-        </p:spPr>
-        <p:style>
-          <a:lnRef idx="1">
-            <a:schemeClr val="accent1"/>
-          </a:lnRef>
-          <a:fillRef idx="3">
-            <a:schemeClr val="accent1"/>
-          </a:fillRef>
-          <a:effectRef idx="2">
-            <a:schemeClr val="accent1"/>
-          </a:effectRef>
-          <a:fontRef idx="minor">
-            <a:schemeClr val="lt1"/>
-          </a:fontRef>
-        </p:style>
-        <p:txBody>
-          <a:bodyPr rtlCol="0" anchor="ctr"/>
-          <a:lstStyle/>
-          <a:p>
-            <a:pPr algn="ctr"/>
-          </a:p>
-        </p:txBody>
-      </p:sp>
-      <p:sp>
-        <p:nvSpPr>
-          <p:cNvPr id="23" name="TextBox 22"/>
-          <p:cNvSpPr txBox="1"/>
-          <p:nvPr/>
-        </p:nvSpPr>
-        <p:spPr>
-          <a:xfrm>
-            <a:off x="1901952" y="1613916"/>
-            <a:ext cx="3955365" cy="292608"/>
-          </a:xfrm>
-          <a:prstGeom prst="rect">
-            <a:avLst/>
-          </a:prstGeom>
-          <a:noFill/>
-        </p:spPr>
-        <p:txBody>
-          <a:bodyPr wrap="square" anchor="ctr" lIns="50800" rIns="50800" tIns="25400" bIns="25400">
-            <a:spAutoFit/>
-          </a:bodyPr>
-          <a:lstStyle/>
-          <a:p>
-            <a:pPr algn="l"/>
-            <a:r>
-              <a:rPr sz="950" b="1" i="0">
-                <a:solidFill>
-                  <a:srgbClr val="FFFFFF"/>
-                </a:solidFill>
-                <a:latin typeface="Segoe UI"/>
-              </a:rPr>
-              <a:t>PI-2  (-&gt; Aug 4)</a:t>
-            </a:r>
-          </a:p>
-        </p:txBody>
-      </p:sp>
-      <p:sp>
-        <p:nvSpPr>
-          <p:cNvPr id="24" name="Rectangle 23"/>
-          <p:cNvSpPr/>
-          <p:nvPr/>
-        </p:nvSpPr>
-        <p:spPr>
-          <a:xfrm>
-            <a:off x="5955926" y="1984248"/>
-            <a:ext cx="5253410" cy="292608"/>
-          </a:xfrm>
-          <a:prstGeom prst="rect">
-            <a:avLst/>
-          </a:prstGeom>
-          <a:solidFill>
-            <a:srgbClr val="2E8B57"/>
-          </a:solidFill>
-          <a:ln>
-            <a:noFill/>
-          </a:ln>
-          <a:effectLst/>
-        </p:spPr>
-        <p:style>
-          <a:lnRef idx="1">
-            <a:schemeClr val="accent1"/>
-          </a:lnRef>
-          <a:fillRef idx="3">
-            <a:schemeClr val="accent1"/>
-          </a:fillRef>
-          <a:effectRef idx="2">
-            <a:schemeClr val="accent1"/>
-          </a:effectRef>
-          <a:fontRef idx="minor">
-            <a:schemeClr val="lt1"/>
-          </a:fontRef>
-        </p:style>
-        <p:txBody>
-          <a:bodyPr rtlCol="0" anchor="ctr"/>
-          <a:lstStyle/>
-          <a:p>
-            <a:pPr algn="ctr"/>
-          </a:p>
-        </p:txBody>
-      </p:sp>
-      <p:sp>
-        <p:nvSpPr>
-          <p:cNvPr id="25" name="TextBox 24"/>
-          <p:cNvSpPr txBox="1"/>
-          <p:nvPr/>
-        </p:nvSpPr>
-        <p:spPr>
-          <a:xfrm>
-            <a:off x="6029078" y="1984248"/>
-            <a:ext cx="5143682" cy="292608"/>
-          </a:xfrm>
-          <a:prstGeom prst="rect">
-            <a:avLst/>
-          </a:prstGeom>
-          <a:noFill/>
-        </p:spPr>
-        <p:txBody>
-          <a:bodyPr wrap="square" anchor="ctr" lIns="50800" rIns="50800" tIns="25400" bIns="25400">
-            <a:spAutoFit/>
-          </a:bodyPr>
-          <a:lstStyle/>
-          <a:p>
-            <a:pPr algn="l"/>
-            <a:r>
-              <a:rPr sz="950" b="1" i="0">
-                <a:solidFill>
-                  <a:srgbClr val="FFFFFF"/>
-                </a:solidFill>
-                <a:latin typeface="Segoe UI"/>
-              </a:rPr>
-              <a:t>PI-3  Aug 5 - Oct 27</a:t>
-            </a:r>
-          </a:p>
-        </p:txBody>
-      </p:sp>
-      <p:graphicFrame>
-        <p:nvGraphicFramePr>
-          <p:cNvPr id="26" name="Table 25"/>
-          <p:cNvGraphicFramePr>
-            <a:graphicFrameLocks noGrp="1"/>
-          </p:cNvGraphicFramePr>
-          <p:nvPr/>
-        </p:nvGraphicFramePr>
-        <p:xfrm>
-          <a:off x="502920" y="3063240"/>
-          <a:ext cx="11155680" cy="2834640"/>
-        </p:xfrm>
-        <a:graphic>
-          <a:graphicData uri="http://schemas.openxmlformats.org/drawingml/2006/table">
-            <a:tbl>
-              <a:tblPr firstRow="1" bandRow="1">
-                <a:tableStyleId>{5C22544A-7EE6-4342-B048-85BDC9FD1C3A}</a:tableStyleId>
-              </a:tblPr>
-              <a:tblGrid>
-                <a:gridCol w="1371600"/>
-                <a:gridCol w="7223760"/>
-                <a:gridCol w="2560320"/>
-              </a:tblGrid>
-              <a:tr h="354330">
-                <a:tc>
-                  <a:txBody>
-                    <a:bodyPr wrap="square"/>
-                    <a:lstStyle/>
-                    <a:p>
-                      <a:pPr algn="ctr"/>
-                      <a:r>
-                        <a:rPr sz="1100" b="1" i="0">
-                          <a:solidFill>
-                            <a:srgbClr val="FFFFFF"/>
-                          </a:solidFill>
-                          <a:latin typeface="Segoe UI"/>
-                        </a:rPr>
-                        <a:t>When</a:t>
-                      </a:r>
-                    </a:p>
-                  </a:txBody>
-                  <a:tcPr>
-                    <a:solidFill>
-                      <a:srgbClr val="1F3A5F"/>
-                    </a:solidFill>
-                  </a:tcPr>
-                </a:tc>
-                <a:tc>
-                  <a:txBody>
-                    <a:bodyPr wrap="square"/>
-                    <a:lstStyle/>
-                    <a:p>
-                      <a:pPr algn="l"/>
-                      <a:r>
-                        <a:rPr sz="1100" b="1" i="0">
-                          <a:solidFill>
-                            <a:srgbClr val="FFFFFF"/>
-                          </a:solidFill>
-                          <a:latin typeface="Segoe UI"/>
-                        </a:rPr>
-                        <a:t>What's due</a:t>
-                      </a:r>
-                    </a:p>
-                  </a:txBody>
-                  <a:tcPr>
-                    <a:solidFill>
-                      <a:srgbClr val="1F3A5F"/>
-                    </a:solidFill>
-                  </a:tcPr>
-                </a:tc>
-                <a:tc>
-                  <a:txBody>
-                    <a:bodyPr wrap="square"/>
-                    <a:lstStyle/>
-                    <a:p>
-                      <a:pPr algn="ctr"/>
-                      <a:r>
-                        <a:rPr sz="1100" b="1" i="0">
-                          <a:solidFill>
-                            <a:srgbClr val="FFFFFF"/>
-                          </a:solidFill>
-                          <a:latin typeface="Segoe UI"/>
-                        </a:rPr>
-                        <a:t>Lands in</a:t>
-                      </a:r>
-                    </a:p>
-                  </a:txBody>
-                  <a:tcPr>
-                    <a:solidFill>
-                      <a:srgbClr val="1F3A5F"/>
-                    </a:solidFill>
-                  </a:tcPr>
-                </a:tc>
-              </a:tr>
-              <a:tr h="354330">
-                <a:tc>
-                  <a:txBody>
-                    <a:bodyPr wrap="square"/>
-                    <a:lstStyle/>
-                    <a:p>
-                      <a:pPr algn="ctr"/>
-                      <a:r>
-                        <a:rPr sz="1050" b="1" i="0">
-                          <a:solidFill>
-                            <a:srgbClr val="1F3A5F"/>
-                          </a:solidFill>
-                          <a:latin typeface="Segoe UI"/>
-                        </a:rPr>
-                        <a:t>Jul 31</a:t>
-                      </a:r>
-                    </a:p>
-                  </a:txBody>
-                  <a:tcPr>
-                    <a:solidFill>
-                      <a:srgbClr val="F4F6F9"/>
-                    </a:solidFill>
-                  </a:tcPr>
-                </a:tc>
-                <a:tc>
-                  <a:txBody>
-                    <a:bodyPr wrap="square"/>
-                    <a:lstStyle/>
-                    <a:p>
-                      <a:pPr algn="l"/>
-                      <a:r>
-                        <a:rPr sz="900" b="0" i="0">
-                          <a:solidFill>
-                            <a:srgbClr val="2D2D2D"/>
-                          </a:solidFill>
-                          <a:latin typeface="Segoe UI"/>
-                        </a:rPr>
-                        <a:t>CMDB Governance (data dictionary incl. Databases; Data Cert all CI classes; ESS-02; SOX)  ·  CI Coverage foundation (Computers &amp; Servers precedence)</a:t>
-                      </a:r>
-                    </a:p>
-                  </a:txBody>
-                  <a:tcPr>
-                    <a:solidFill>
-                      <a:srgbClr val="F4F6F9"/>
-                    </a:solidFill>
-                  </a:tcPr>
-                </a:tc>
-                <a:tc>
-                  <a:txBody>
-                    <a:bodyPr wrap="square"/>
-                    <a:lstStyle/>
-                    <a:p>
-                      <a:pPr algn="ctr"/>
-                      <a:r>
-                        <a:rPr sz="950" b="1" i="0">
-                          <a:solidFill>
-                            <a:srgbClr val="2E6DB4"/>
-                          </a:solidFill>
-                          <a:latin typeface="Segoe UI"/>
-                        </a:rPr>
-                        <a:t>PI-2 Iter 2.5 / 2.6 (IP)</a:t>
-                      </a:r>
-                    </a:p>
-                  </a:txBody>
-                  <a:tcPr>
-                    <a:solidFill>
-                      <a:srgbClr val="F4F6F9"/>
-                    </a:solidFill>
-                  </a:tcPr>
-                </a:tc>
-              </a:tr>
-              <a:tr h="354330">
-                <a:tc>
-                  <a:txBody>
-                    <a:bodyPr wrap="square"/>
-                    <a:lstStyle/>
-                    <a:p>
-                      <a:pPr algn="ctr"/>
-                      <a:r>
-                        <a:rPr sz="1050" b="1" i="0">
-                          <a:solidFill>
-                            <a:srgbClr val="1F3A5F"/>
-                          </a:solidFill>
-                          <a:latin typeface="Segoe UI"/>
-                        </a:rPr>
-                        <a:t>Aug 31</a:t>
-                      </a:r>
-                    </a:p>
-                  </a:txBody>
-                  <a:tcPr>
-                    <a:solidFill>
-                      <a:srgbClr val="FFFFFF"/>
-                    </a:solidFill>
-                  </a:tcPr>
-                </a:tc>
-                <a:tc>
-                  <a:txBody>
-                    <a:bodyPr wrap="square"/>
-                    <a:lstStyle/>
-                    <a:p>
-                      <a:pPr algn="l"/>
-                      <a:r>
-                        <a:rPr sz="900" b="0" i="0">
-                          <a:solidFill>
-                            <a:srgbClr val="2D2D2D"/>
-                          </a:solidFill>
-                          <a:latin typeface="Segoe UI"/>
-                        </a:rPr>
-                        <a:t>Network Gear (creds &amp; schedules)  ·  Service Mapping (initial maps)  ·  Legacy Platform (analysis) - staged</a:t>
-                      </a:r>
-                    </a:p>
-                  </a:txBody>
-                  <a:tcPr>
-                    <a:solidFill>
-                      <a:srgbClr val="FFFFFF"/>
-                    </a:solidFill>
-                  </a:tcPr>
-                </a:tc>
-                <a:tc>
-                  <a:txBody>
-                    <a:bodyPr wrap="square"/>
-                    <a:lstStyle/>
-                    <a:p>
-                      <a:pPr algn="ctr"/>
-                      <a:r>
-                        <a:rPr sz="950" b="1" i="0">
-                          <a:solidFill>
-                            <a:srgbClr val="2E6DB4"/>
-                          </a:solidFill>
-                          <a:latin typeface="Segoe UI"/>
-                        </a:rPr>
-                        <a:t>PI-3</a:t>
-                      </a:r>
-                    </a:p>
-                  </a:txBody>
-                  <a:tcPr>
-                    <a:solidFill>
-                      <a:srgbClr val="FFFFFF"/>
-                    </a:solidFill>
-                  </a:tcPr>
-                </a:tc>
-              </a:tr>
-              <a:tr h="354330">
-                <a:tc>
-                  <a:txBody>
-                    <a:bodyPr wrap="square"/>
-                    <a:lstStyle/>
-                    <a:p>
-                      <a:pPr algn="ctr"/>
-                      <a:r>
-                        <a:rPr sz="1050" b="1" i="0">
-                          <a:solidFill>
-                            <a:srgbClr val="1F3A5F"/>
-                          </a:solidFill>
-                          <a:latin typeface="Segoe UI"/>
-                        </a:rPr>
-                        <a:t>Sep 30</a:t>
-                      </a:r>
-                    </a:p>
-                  </a:txBody>
-                  <a:tcPr>
-                    <a:solidFill>
-                      <a:srgbClr val="F4F6F9"/>
-                    </a:solidFill>
-                  </a:tcPr>
-                </a:tc>
-                <a:tc>
-                  <a:txBody>
-                    <a:bodyPr wrap="square"/>
-                    <a:lstStyle/>
-                    <a:p>
-                      <a:pPr algn="l"/>
-                      <a:r>
-                        <a:rPr sz="900" b="0" i="0">
-                          <a:solidFill>
-                            <a:srgbClr val="2D2D2D"/>
-                          </a:solidFill>
-                          <a:latin typeface="Segoe UI"/>
-                        </a:rPr>
-                        <a:t>CI Coverage - Computers 90% managed  ·  Network Gear mandatory attributes</a:t>
-                      </a:r>
-                    </a:p>
-                  </a:txBody>
-                  <a:tcPr>
-                    <a:solidFill>
-                      <a:srgbClr val="F4F6F9"/>
-                    </a:solidFill>
-                  </a:tcPr>
-                </a:tc>
-                <a:tc>
-                  <a:txBody>
-                    <a:bodyPr wrap="square"/>
-                    <a:lstStyle/>
-                    <a:p>
-                      <a:pPr algn="ctr"/>
-                      <a:r>
-                        <a:rPr sz="950" b="1" i="0">
-                          <a:solidFill>
-                            <a:srgbClr val="2E6DB4"/>
-                          </a:solidFill>
-                          <a:latin typeface="Segoe UI"/>
-                        </a:rPr>
-                        <a:t>PI-3</a:t>
-                      </a:r>
-                    </a:p>
-                  </a:txBody>
-                  <a:tcPr>
-                    <a:solidFill>
-                      <a:srgbClr val="F4F6F9"/>
-                    </a:solidFill>
-                  </a:tcPr>
-                </a:tc>
-              </a:tr>
-              <a:tr h="354330">
-                <a:tc>
-                  <a:txBody>
-                    <a:bodyPr wrap="square"/>
-                    <a:lstStyle/>
-                    <a:p>
-                      <a:pPr algn="ctr"/>
-                      <a:r>
-                        <a:rPr sz="1050" b="1" i="0">
-                          <a:solidFill>
-                            <a:srgbClr val="1F3A5F"/>
-                          </a:solidFill>
-                          <a:latin typeface="Segoe UI"/>
-                        </a:rPr>
-                        <a:t>Oct 27</a:t>
-                      </a:r>
-                    </a:p>
-                  </a:txBody>
-                  <a:tcPr>
-                    <a:solidFill>
-                      <a:srgbClr val="FFFFFF"/>
-                    </a:solidFill>
-                  </a:tcPr>
-                </a:tc>
-                <a:tc>
-                  <a:txBody>
-                    <a:bodyPr wrap="square"/>
-                    <a:lstStyle/>
-                    <a:p>
-                      <a:pPr algn="l"/>
-                      <a:r>
-                        <a:rPr sz="900" b="0" i="0">
-                          <a:solidFill>
-                            <a:srgbClr val="2D2D2D"/>
-                          </a:solidFill>
-                          <a:latin typeface="Segoe UI"/>
-                        </a:rPr>
-                        <a:t>Qualys -&gt; ServiceNow live in PROD</a:t>
-                      </a:r>
-                    </a:p>
-                  </a:txBody>
-                  <a:tcPr>
-                    <a:solidFill>
-                      <a:srgbClr val="FFFFFF"/>
-                    </a:solidFill>
-                  </a:tcPr>
-                </a:tc>
-                <a:tc>
-                  <a:txBody>
-                    <a:bodyPr wrap="square"/>
-                    <a:lstStyle/>
-                    <a:p>
-                      <a:pPr algn="ctr"/>
-                      <a:r>
-                        <a:rPr sz="950" b="1" i="0">
-                          <a:solidFill>
-                            <a:srgbClr val="2E6DB4"/>
-                          </a:solidFill>
-                          <a:latin typeface="Segoe UI"/>
-                        </a:rPr>
-                        <a:t>PI-3</a:t>
-                      </a:r>
-                    </a:p>
-                  </a:txBody>
-                  <a:tcPr>
-                    <a:solidFill>
-                      <a:srgbClr val="FFFFFF"/>
-                    </a:solidFill>
-                  </a:tcPr>
-                </a:tc>
-              </a:tr>
-              <a:tr h="354330">
-                <a:tc>
-                  <a:txBody>
-                    <a:bodyPr wrap="square"/>
-                    <a:lstStyle/>
-                    <a:p>
-                      <a:pPr algn="ctr"/>
-                      <a:r>
-                        <a:rPr sz="1050" b="1" i="0">
-                          <a:solidFill>
-                            <a:srgbClr val="1F3A5F"/>
-                          </a:solidFill>
-                          <a:latin typeface="Segoe UI"/>
-                        </a:rPr>
-                        <a:t>Oct 30</a:t>
-                      </a:r>
-                    </a:p>
-                  </a:txBody>
-                  <a:tcPr>
-                    <a:solidFill>
-                      <a:srgbClr val="F4F6F9"/>
-                    </a:solidFill>
-                  </a:tcPr>
-                </a:tc>
-                <a:tc>
-                  <a:txBody>
-                    <a:bodyPr wrap="square"/>
-                    <a:lstStyle/>
-                    <a:p>
-                      <a:pPr algn="l"/>
-                      <a:r>
-                        <a:rPr sz="900" b="0" i="0">
-                          <a:solidFill>
-                            <a:srgbClr val="2D2D2D"/>
-                          </a:solidFill>
-                          <a:latin typeface="Segoe UI"/>
-                        </a:rPr>
-                        <a:t>CI Coverage - Servers 90%  ·  Network Gear 90%  ·  Service Mapping (10 apps)  ·  Legacy Platform (migration plan)</a:t>
-                      </a:r>
-                    </a:p>
-                  </a:txBody>
-                  <a:tcPr>
-                    <a:solidFill>
-                      <a:srgbClr val="F4F6F9"/>
-                    </a:solidFill>
-                  </a:tcPr>
-                </a:tc>
-                <a:tc>
-                  <a:txBody>
-                    <a:bodyPr wrap="square"/>
-                    <a:lstStyle/>
-                    <a:p>
-                      <a:pPr algn="ctr"/>
-                      <a:r>
-                        <a:rPr sz="950" b="1" i="0">
-                          <a:solidFill>
-                            <a:srgbClr val="2E6DB4"/>
-                          </a:solidFill>
-                          <a:latin typeface="Segoe UI"/>
-                        </a:rPr>
-                        <a:t>PI-3</a:t>
-                      </a:r>
-                    </a:p>
-                  </a:txBody>
-                  <a:tcPr>
-                    <a:solidFill>
-                      <a:srgbClr val="F4F6F9"/>
-                    </a:solidFill>
-                  </a:tcPr>
-                </a:tc>
-              </a:tr>
-              <a:tr h="354330">
-                <a:tc>
-                  <a:txBody>
-                    <a:bodyPr wrap="square"/>
-                    <a:lstStyle/>
-                    <a:p>
-                      <a:pPr algn="ctr"/>
-                      <a:r>
-                        <a:rPr sz="1050" b="1" i="0">
-                          <a:solidFill>
-                            <a:srgbClr val="1F3A5F"/>
-                          </a:solidFill>
-                          <a:latin typeface="Segoe UI"/>
-                        </a:rPr>
-                        <a:t>Oct 31</a:t>
-                      </a:r>
-                    </a:p>
-                  </a:txBody>
-                  <a:tcPr>
-                    <a:solidFill>
-                      <a:srgbClr val="FFFFFF"/>
-                    </a:solidFill>
-                  </a:tcPr>
-                </a:tc>
-                <a:tc>
-                  <a:txBody>
-                    <a:bodyPr wrap="square"/>
-                    <a:lstStyle/>
-                    <a:p>
-                      <a:pPr algn="l"/>
-                      <a:r>
-                        <a:rPr sz="900" b="0" i="0">
-                          <a:solidFill>
-                            <a:srgbClr val="2D2D2D"/>
-                          </a:solidFill>
-                          <a:latin typeface="Segoe UI"/>
-                        </a:rPr>
-                        <a:t>ATF Strategy (rollout plan)</a:t>
-                      </a:r>
-                    </a:p>
-                  </a:txBody>
-                  <a:tcPr>
-                    <a:solidFill>
-                      <a:srgbClr val="FFFFFF"/>
-                    </a:solidFill>
-                  </a:tcPr>
-                </a:tc>
-                <a:tc>
-                  <a:txBody>
-                    <a:bodyPr wrap="square"/>
-                    <a:lstStyle/>
-                    <a:p>
-                      <a:pPr algn="ctr"/>
-                      <a:r>
-                        <a:rPr sz="950" b="1" i="0">
-                          <a:solidFill>
-                            <a:srgbClr val="2E6DB4"/>
-                          </a:solidFill>
-                          <a:latin typeface="Segoe UI"/>
-                        </a:rPr>
-                        <a:t>PI-3</a:t>
-                      </a:r>
-                    </a:p>
-                  </a:txBody>
-                  <a:tcPr>
-                    <a:solidFill>
-                      <a:srgbClr val="FFFFFF"/>
-                    </a:solidFill>
-                  </a:tcPr>
-                </a:tc>
-              </a:tr>
-              <a:tr h="354330">
-                <a:tc>
-                  <a:txBody>
-                    <a:bodyPr wrap="square"/>
-                    <a:lstStyle/>
-                    <a:p>
-                      <a:pPr algn="ctr"/>
-                      <a:r>
-                        <a:rPr sz="1050" b="1" i="0">
-                          <a:solidFill>
-                            <a:srgbClr val="1F3A5F"/>
-                          </a:solidFill>
-                          <a:latin typeface="Segoe UI"/>
-                        </a:rPr>
-                        <a:t>Ongoing</a:t>
-                      </a:r>
-                    </a:p>
-                  </a:txBody>
-                  <a:tcPr>
-                    <a:solidFill>
-                      <a:srgbClr val="F4F6F9"/>
-                    </a:solidFill>
-                  </a:tcPr>
-                </a:tc>
-                <a:tc>
-                  <a:txBody>
-                    <a:bodyPr wrap="square"/>
-                    <a:lstStyle/>
-                    <a:p>
-                      <a:pPr algn="l"/>
-                      <a:r>
-                        <a:rPr sz="900" b="0" i="0">
-                          <a:solidFill>
-                            <a:srgbClr val="2D2D2D"/>
-                          </a:solidFill>
-                          <a:latin typeface="Segoe UI"/>
-                        </a:rPr>
-                        <a:t>ITSM Product Management &amp; Platform Support - monthly</a:t>
-                      </a:r>
-                    </a:p>
-                  </a:txBody>
-                  <a:tcPr>
-                    <a:solidFill>
-                      <a:srgbClr val="F4F6F9"/>
-                    </a:solidFill>
-                  </a:tcPr>
-                </a:tc>
-                <a:tc>
-                  <a:txBody>
-                    <a:bodyPr wrap="square"/>
-                    <a:lstStyle/>
-                    <a:p>
-                      <a:pPr algn="ctr"/>
-                      <a:r>
-                        <a:rPr sz="950" b="1" i="0">
-                          <a:solidFill>
-                            <a:srgbClr val="2E6DB4"/>
-                          </a:solidFill>
-                          <a:latin typeface="Segoe UI"/>
-                        </a:rPr>
-                        <a:t>PI-2 tail -&gt; PI-3</a:t>
-                      </a:r>
-                    </a:p>
-                  </a:txBody>
-                  <a:tcPr>
-                    <a:solidFill>
-                      <a:srgbClr val="F4F6F9"/>
-                    </a:solidFill>
-                  </a:tcPr>
-                </a:tc>
-              </a:tr>
-            </a:tbl>
-          </a:graphicData>
-        </a:graphic>
-      </p:graphicFrame>
+            <a:pPr algn="l"/>
+            <a:r>
+              <a:rPr sz="1100" b="1" i="0">
+                <a:solidFill>
+                  <a:srgbClr val="7A4F10"/>
+                </a:solidFill>
+                <a:latin typeface="Segoe UI"/>
+              </a:rPr>
+              <a:t>Watch-outs / dependencies</a:t>
+            </a:r>
+          </a:p>
+          <a:p>
+            <a:pPr algn="l"/>
+            <a:r>
+              <a:rPr sz="950" b="0" i="0">
+                <a:solidFill>
+                  <a:srgbClr val="5A4A2A"/>
+                </a:solidFill>
+                <a:latin typeface="Segoe UI"/>
+              </a:rPr>
+              <a:t>•  90% coverage has no measurement story - stand it up</a:t>
+            </a:r>
+          </a:p>
+          <a:p>
+            <a:pPr algn="l"/>
+            <a:r>
+              <a:rPr sz="950" b="0" i="0">
+                <a:solidFill>
+                  <a:srgbClr val="5A4A2A"/>
+                </a:solidFill>
+                <a:latin typeface="Segoe UI"/>
+              </a:rPr>
+              <a:t>•  Life-cycle process depends on the Asset Management team</a:t>
+            </a:r>
+          </a:p>
+          <a:p>
+            <a:pPr algn="l"/>
+            <a:r>
+              <a:rPr sz="950" b="0" i="0">
+                <a:solidFill>
+                  <a:srgbClr val="5A4A2A"/>
+                </a:solidFill>
+                <a:latin typeface="Segoe UI"/>
+              </a:rPr>
+              <a:t>•  Only on-network devices discovered - hard to prove the physical-device total</a:t>
+            </a:r>
+          </a:p>
+        </p:txBody>
+      </p:sp>
     </p:spTree>
   </p:cSld>
   <p:clrMapOvr>
@@ -7156,7 +10015,7 @@
                 </a:solidFill>
                 <a:latin typeface="Segoe UI"/>
               </a:rPr>
-              <a:t>Where to Focus</a:t>
+              <a:t>CI Coverage - Servers</a:t>
             </a:r>
           </a:p>
         </p:txBody>
@@ -7191,7 +10050,7 @@
                 </a:solidFill>
                 <a:latin typeface="Segoe UI"/>
               </a:rPr>
-              <a:t>Priorities for Development + supporting roles</a:t>
+              <a:t>Due Jul 31 -&gt; Oct 30   ·   PI-2 / PI-3</a:t>
             </a:r>
           </a:p>
         </p:txBody>
@@ -7239,8 +10098,549 @@
         </p:nvSpPr>
         <p:spPr>
           <a:xfrm>
-            <a:off x="502920" y="1316736"/>
-            <a:ext cx="109728" cy="566928"/>
+            <a:off x="502920" y="1115568"/>
+            <a:ext cx="11155680" cy="457200"/>
+          </a:xfrm>
+          <a:prstGeom prst="rect">
+            <a:avLst/>
+          </a:prstGeom>
+          <a:solidFill>
+            <a:srgbClr val="E9F0F8"/>
+          </a:solidFill>
+          <a:ln w="9525">
+            <a:solidFill>
+              <a:srgbClr val="2E6DB4"/>
+            </a:solidFill>
+          </a:ln>
+          <a:effectLst/>
+        </p:spPr>
+        <p:style>
+          <a:lnRef idx="1">
+            <a:schemeClr val="accent1"/>
+          </a:lnRef>
+          <a:fillRef idx="3">
+            <a:schemeClr val="accent1"/>
+          </a:fillRef>
+          <a:effectRef idx="2">
+            <a:schemeClr val="accent1"/>
+          </a:effectRef>
+          <a:fontRef idx="minor">
+            <a:schemeClr val="lt1"/>
+          </a:fontRef>
+        </p:style>
+        <p:txBody>
+          <a:bodyPr rtlCol="0" anchor="ctr"/>
+          <a:lstStyle/>
+          <a:p>
+            <a:pPr algn="ctr"/>
+          </a:p>
+        </p:txBody>
+      </p:sp>
+      <p:sp>
+        <p:nvSpPr>
+          <p:cNvPr id="8" name="TextBox 7"/>
+          <p:cNvSpPr txBox="1"/>
+          <p:nvPr/>
+        </p:nvSpPr>
+        <p:spPr>
+          <a:xfrm>
+            <a:off x="658368" y="1133856"/>
+            <a:ext cx="10881360" cy="420624"/>
+          </a:xfrm>
+          <a:prstGeom prst="rect">
+            <a:avLst/>
+          </a:prstGeom>
+          <a:noFill/>
+        </p:spPr>
+        <p:txBody>
+          <a:bodyPr wrap="square" anchor="ctr" lIns="50800" rIns="50800" tIns="25400" bIns="25400">
+            <a:spAutoFit/>
+          </a:bodyPr>
+          <a:lstStyle/>
+          <a:p>
+            <a:pPr algn="l"/>
+            <a:r>
+              <a:rPr sz="1100" b="0" i="0">
+                <a:solidFill>
+                  <a:srgbClr val="1F3A5F"/>
+                </a:solidFill>
+                <a:latin typeface="Segoe UI"/>
+              </a:rPr>
+              <a:t>Server precedence, enhanced MS-SQL / Oracle discovery, and 90% of non-NERC-CIP servers.</a:t>
+            </a:r>
+          </a:p>
+        </p:txBody>
+      </p:sp>
+      <p:sp>
+        <p:nvSpPr>
+          <p:cNvPr id="9" name="TextBox 8"/>
+          <p:cNvSpPr txBox="1"/>
+          <p:nvPr/>
+        </p:nvSpPr>
+        <p:spPr>
+          <a:xfrm>
+            <a:off x="502920" y="1755648"/>
+            <a:ext cx="5486400" cy="2286000"/>
+          </a:xfrm>
+          <a:prstGeom prst="rect">
+            <a:avLst/>
+          </a:prstGeom>
+          <a:noFill/>
+        </p:spPr>
+        <p:txBody>
+          <a:bodyPr wrap="square" anchor="t" lIns="50800" rIns="50800" tIns="25400" bIns="25400">
+            <a:spAutoFit/>
+          </a:bodyPr>
+          <a:lstStyle/>
+          <a:p>
+            <a:pPr algn="l"/>
+            <a:r>
+              <a:rPr sz="1200" b="1" i="0">
+                <a:solidFill>
+                  <a:srgbClr val="1F3A5F"/>
+                </a:solidFill>
+                <a:latin typeface="Segoe UI"/>
+              </a:rPr>
+              <a:t>Done when (acceptance)</a:t>
+            </a:r>
+          </a:p>
+          <a:p>
+            <a:pPr algn="l"/>
+            <a:r>
+              <a:rPr sz="1000" b="0" i="0">
+                <a:solidFill>
+                  <a:srgbClr val="2D2D2D"/>
+                </a:solidFill>
+                <a:latin typeface="Segoe UI"/>
+              </a:rPr>
+              <a:t>•  SCCM/Discovery precedence reconciled and applied for servers</a:t>
+            </a:r>
+          </a:p>
+          <a:p>
+            <a:pPr algn="l"/>
+            <a:r>
+              <a:rPr sz="1000" b="0" i="0">
+                <a:solidFill>
+                  <a:srgbClr val="2D2D2D"/>
+                </a:solidFill>
+                <a:latin typeface="Segoe UI"/>
+              </a:rPr>
+              <a:t>•  Enhanced Discovery working for MS-SQL &amp; Oracle databases</a:t>
+            </a:r>
+          </a:p>
+          <a:p>
+            <a:pPr algn="l"/>
+            <a:r>
+              <a:rPr sz="1000" b="0" i="0">
+                <a:solidFill>
+                  <a:srgbClr val="2D2D2D"/>
+                </a:solidFill>
+                <a:latin typeface="Segoe UI"/>
+              </a:rPr>
+              <a:t>•  90% of non-NERC-CIP servers discovered</a:t>
+            </a:r>
+          </a:p>
+        </p:txBody>
+      </p:sp>
+      <p:sp>
+        <p:nvSpPr>
+          <p:cNvPr id="10" name="TextBox 9"/>
+          <p:cNvSpPr txBox="1"/>
+          <p:nvPr/>
+        </p:nvSpPr>
+        <p:spPr>
+          <a:xfrm>
+            <a:off x="6172200" y="1755648"/>
+            <a:ext cx="5486400" cy="2286000"/>
+          </a:xfrm>
+          <a:prstGeom prst="rect">
+            <a:avLst/>
+          </a:prstGeom>
+          <a:noFill/>
+        </p:spPr>
+        <p:txBody>
+          <a:bodyPr wrap="square" anchor="t" lIns="50800" rIns="50800" tIns="25400" bIns="25400">
+            <a:spAutoFit/>
+          </a:bodyPr>
+          <a:lstStyle/>
+          <a:p>
+            <a:pPr algn="l"/>
+            <a:r>
+              <a:rPr sz="1200" b="1" i="0">
+                <a:solidFill>
+                  <a:srgbClr val="1F3A5F"/>
+                </a:solidFill>
+                <a:latin typeface="Segoe UI"/>
+              </a:rPr>
+              <a:t>Scope</a:t>
+            </a:r>
+          </a:p>
+          <a:p>
+            <a:pPr algn="l"/>
+            <a:r>
+              <a:rPr sz="1050" b="1" i="0">
+                <a:solidFill>
+                  <a:srgbClr val="2E8B57"/>
+                </a:solidFill>
+                <a:latin typeface="Segoe UI"/>
+              </a:rPr>
+              <a:t>In scope</a:t>
+            </a:r>
+          </a:p>
+          <a:p>
+            <a:pPr algn="l"/>
+            <a:r>
+              <a:rPr sz="950" b="0" i="0">
+                <a:solidFill>
+                  <a:srgbClr val="2D2D2D"/>
+                </a:solidFill>
+                <a:latin typeface="Segoe UI"/>
+              </a:rPr>
+              <a:t>•  Server precedence; MS-SQL / Oracle discovery; coverage measurement</a:t>
+            </a:r>
+          </a:p>
+          <a:p>
+            <a:pPr algn="l"/>
+            <a:r>
+              <a:rPr sz="1050" b="1" i="0">
+                <a:solidFill>
+                  <a:srgbClr val="C0392B"/>
+                </a:solidFill>
+                <a:latin typeface="Segoe UI"/>
+              </a:rPr>
+              <a:t>Out of scope</a:t>
+            </a:r>
+          </a:p>
+          <a:p>
+            <a:pPr algn="l"/>
+            <a:r>
+              <a:rPr sz="950" b="0" i="0">
+                <a:solidFill>
+                  <a:srgbClr val="2D2D2D"/>
+                </a:solidFill>
+                <a:latin typeface="Segoe UI"/>
+              </a:rPr>
+              <a:t>•  SOX indicators (manually maintained - excluded from automation)</a:t>
+            </a:r>
+          </a:p>
+          <a:p>
+            <a:pPr algn="l"/>
+            <a:r>
+              <a:rPr sz="950" b="0" i="0">
+                <a:solidFill>
+                  <a:srgbClr val="2D2D2D"/>
+                </a:solidFill>
+                <a:latin typeface="Segoe UI"/>
+              </a:rPr>
+              <a:t>•  NERC / CIP servers (excluded from the 90% target)</a:t>
+            </a:r>
+          </a:p>
+        </p:txBody>
+      </p:sp>
+      <p:sp>
+        <p:nvSpPr>
+          <p:cNvPr id="11" name="Rectangle 10"/>
+          <p:cNvSpPr/>
+          <p:nvPr/>
+        </p:nvSpPr>
+        <p:spPr>
+          <a:xfrm>
+            <a:off x="502920" y="4114800"/>
+            <a:ext cx="11155680" cy="1234440"/>
+          </a:xfrm>
+          <a:prstGeom prst="rect">
+            <a:avLst/>
+          </a:prstGeom>
+          <a:solidFill>
+            <a:srgbClr val="F4F6F9"/>
+          </a:solidFill>
+          <a:ln>
+            <a:noFill/>
+          </a:ln>
+          <a:effectLst/>
+        </p:spPr>
+        <p:style>
+          <a:lnRef idx="1">
+            <a:schemeClr val="accent1"/>
+          </a:lnRef>
+          <a:fillRef idx="3">
+            <a:schemeClr val="accent1"/>
+          </a:fillRef>
+          <a:effectRef idx="2">
+            <a:schemeClr val="accent1"/>
+          </a:effectRef>
+          <a:fontRef idx="minor">
+            <a:schemeClr val="lt1"/>
+          </a:fontRef>
+        </p:style>
+        <p:txBody>
+          <a:bodyPr rtlCol="0" anchor="ctr"/>
+          <a:lstStyle/>
+          <a:p>
+            <a:pPr algn="ctr"/>
+          </a:p>
+        </p:txBody>
+      </p:sp>
+      <p:sp>
+        <p:nvSpPr>
+          <p:cNvPr id="12" name="TextBox 11"/>
+          <p:cNvSpPr txBox="1"/>
+          <p:nvPr/>
+        </p:nvSpPr>
+        <p:spPr>
+          <a:xfrm>
+            <a:off x="658368" y="4160520"/>
+            <a:ext cx="10881360" cy="1161288"/>
+          </a:xfrm>
+          <a:prstGeom prst="rect">
+            <a:avLst/>
+          </a:prstGeom>
+          <a:noFill/>
+        </p:spPr>
+        <p:txBody>
+          <a:bodyPr wrap="square" anchor="t" lIns="50800" rIns="50800" tIns="25400" bIns="25400">
+            <a:spAutoFit/>
+          </a:bodyPr>
+          <a:lstStyle/>
+          <a:p>
+            <a:pPr algn="l"/>
+            <a:r>
+              <a:rPr sz="1150" b="1" i="0">
+                <a:solidFill>
+                  <a:srgbClr val="1F3A5F"/>
+                </a:solidFill>
+                <a:latin typeface="Segoe UI"/>
+              </a:rPr>
+              <a:t>Current stories</a:t>
+            </a:r>
+          </a:p>
+          <a:p>
+            <a:pPr algn="l"/>
+            <a:r>
+              <a:rPr sz="950" b="0" i="0">
+                <a:solidFill>
+                  <a:srgbClr val="2D2D2D"/>
+                </a:solidFill>
+                <a:latin typeface="Segoe UI"/>
+              </a:rPr>
+              <a:t>•  SCCM Server 1356826 (1403759 / 60 / 62 / 63 - validation)</a:t>
+            </a:r>
+          </a:p>
+          <a:p>
+            <a:pPr algn="l"/>
+            <a:r>
+              <a:rPr sz="950" b="0" i="0">
+                <a:solidFill>
+                  <a:srgbClr val="2D2D2D"/>
+                </a:solidFill>
+                <a:latin typeface="Segoe UI"/>
+              </a:rPr>
+              <a:t>•  Credentials 1444864 (validation; child tasks active)  ·  1459721 SNMP / MID</a:t>
+            </a:r>
+          </a:p>
+          <a:p>
+            <a:pPr algn="l"/>
+            <a:r>
+              <a:rPr sz="950" b="0" i="0">
+                <a:solidFill>
+                  <a:srgbClr val="2D2D2D"/>
+                </a:solidFill>
+                <a:latin typeface="Segoe UI"/>
+              </a:rPr>
+              <a:t>•  90% coverage measurement - no story yet</a:t>
+            </a:r>
+          </a:p>
+        </p:txBody>
+      </p:sp>
+      <p:sp>
+        <p:nvSpPr>
+          <p:cNvPr id="13" name="Rectangle 12"/>
+          <p:cNvSpPr/>
+          <p:nvPr/>
+        </p:nvSpPr>
+        <p:spPr>
+          <a:xfrm>
+            <a:off x="502920" y="5413248"/>
+            <a:ext cx="11155680" cy="896112"/>
+          </a:xfrm>
+          <a:prstGeom prst="rect">
+            <a:avLst/>
+          </a:prstGeom>
+          <a:solidFill>
+            <a:srgbClr val="FBEEDB"/>
+          </a:solidFill>
+          <a:ln w="9525">
+            <a:solidFill>
+              <a:srgbClr val="E08A00"/>
+            </a:solidFill>
+          </a:ln>
+          <a:effectLst/>
+        </p:spPr>
+        <p:style>
+          <a:lnRef idx="1">
+            <a:schemeClr val="accent1"/>
+          </a:lnRef>
+          <a:fillRef idx="3">
+            <a:schemeClr val="accent1"/>
+          </a:fillRef>
+          <a:effectRef idx="2">
+            <a:schemeClr val="accent1"/>
+          </a:effectRef>
+          <a:fontRef idx="minor">
+            <a:schemeClr val="lt1"/>
+          </a:fontRef>
+        </p:style>
+        <p:txBody>
+          <a:bodyPr rtlCol="0" anchor="ctr"/>
+          <a:lstStyle/>
+          <a:p>
+            <a:pPr algn="ctr"/>
+          </a:p>
+        </p:txBody>
+      </p:sp>
+      <p:sp>
+        <p:nvSpPr>
+          <p:cNvPr id="14" name="TextBox 13"/>
+          <p:cNvSpPr txBox="1"/>
+          <p:nvPr/>
+        </p:nvSpPr>
+        <p:spPr>
+          <a:xfrm>
+            <a:off x="658368" y="5449824"/>
+            <a:ext cx="10881360" cy="822960"/>
+          </a:xfrm>
+          <a:prstGeom prst="rect">
+            <a:avLst/>
+          </a:prstGeom>
+          <a:noFill/>
+        </p:spPr>
+        <p:txBody>
+          <a:bodyPr wrap="square" anchor="t" lIns="50800" rIns="50800" tIns="25400" bIns="25400">
+            <a:spAutoFit/>
+          </a:bodyPr>
+          <a:lstStyle/>
+          <a:p>
+            <a:pPr algn="l"/>
+            <a:r>
+              <a:rPr sz="1100" b="1" i="0">
+                <a:solidFill>
+                  <a:srgbClr val="7A4F10"/>
+                </a:solidFill>
+                <a:latin typeface="Segoe UI"/>
+              </a:rPr>
+              <a:t>Watch-outs / dependencies</a:t>
+            </a:r>
+          </a:p>
+          <a:p>
+            <a:pPr algn="l"/>
+            <a:r>
+              <a:rPr sz="950" b="0" i="0">
+                <a:solidFill>
+                  <a:srgbClr val="5A4A2A"/>
+                </a:solidFill>
+                <a:latin typeface="Segoe UI"/>
+              </a:rPr>
+              <a:t>•  Credential distribution to target CIs - no scalable solution yet (gates servers + DBs)</a:t>
+            </a:r>
+          </a:p>
+          <a:p>
+            <a:pPr algn="l"/>
+            <a:r>
+              <a:rPr sz="950" b="0" i="0">
+                <a:solidFill>
+                  <a:srgbClr val="5A4A2A"/>
+                </a:solidFill>
+                <a:latin typeface="Segoe UI"/>
+              </a:rPr>
+              <a:t>•  SCCM precedence has no full field-by-field map - rework risk</a:t>
+            </a:r>
+          </a:p>
+          <a:p>
+            <a:pPr algn="l"/>
+            <a:r>
+              <a:rPr sz="950" b="0" i="0">
+                <a:solidFill>
+                  <a:srgbClr val="5A4A2A"/>
+                </a:solidFill>
+                <a:latin typeface="Segoe UI"/>
+              </a:rPr>
+              <a:t>•  90% coverage has no measurement story</a:t>
+            </a:r>
+          </a:p>
+        </p:txBody>
+      </p:sp>
+    </p:spTree>
+  </p:cSld>
+  <p:clrMapOvr>
+    <a:masterClrMapping/>
+  </p:clrMapOvr>
+</p:sld>
+</file>
+
+<file path=ppt/slides/slide6.xml><?xml version="1.0" encoding="utf-8"?>
+<p:sld xmlns:a="http://schemas.openxmlformats.org/drawingml/2006/main" xmlns:p="http://schemas.openxmlformats.org/presentationml/2006/main" xmlns:r="http://schemas.openxmlformats.org/officeDocument/2006/relationships">
+  <p:cSld>
+    <p:spTree>
+      <p:nvGrpSpPr>
+        <p:cNvPr id="1" name=""/>
+        <p:cNvGrpSpPr/>
+        <p:nvPr/>
+      </p:nvGrpSpPr>
+      <p:grpSpPr/>
+      <p:sp>
+        <p:nvSpPr>
+          <p:cNvPr id="2" name="Rectangle 1"/>
+          <p:cNvSpPr/>
+          <p:nvPr/>
+        </p:nvSpPr>
+        <p:spPr>
+          <a:xfrm>
+            <a:off x="0" y="0"/>
+            <a:ext cx="12191695" cy="960120"/>
+          </a:xfrm>
+          <a:prstGeom prst="rect">
+            <a:avLst/>
+          </a:prstGeom>
+          <a:solidFill>
+            <a:srgbClr val="1F3A5F"/>
+          </a:solidFill>
+          <a:ln>
+            <a:noFill/>
+          </a:ln>
+          <a:effectLst/>
+        </p:spPr>
+        <p:style>
+          <a:lnRef idx="1">
+            <a:schemeClr val="accent1"/>
+          </a:lnRef>
+          <a:fillRef idx="3">
+            <a:schemeClr val="accent1"/>
+          </a:fillRef>
+          <a:effectRef idx="2">
+            <a:schemeClr val="accent1"/>
+          </a:effectRef>
+          <a:fontRef idx="minor">
+            <a:schemeClr val="lt1"/>
+          </a:fontRef>
+        </p:style>
+        <p:txBody>
+          <a:bodyPr rtlCol="0" anchor="ctr"/>
+          <a:lstStyle/>
+          <a:p>
+            <a:pPr algn="ctr"/>
+          </a:p>
+        </p:txBody>
+      </p:sp>
+      <p:sp>
+        <p:nvSpPr>
+          <p:cNvPr id="3" name="Rectangle 2"/>
+          <p:cNvSpPr/>
+          <p:nvPr/>
+        </p:nvSpPr>
+        <p:spPr>
+          <a:xfrm>
+            <a:off x="0" y="960120"/>
+            <a:ext cx="12191695" cy="54864"/>
           </a:xfrm>
           <a:prstGeom prst="rect">
             <a:avLst/>
@@ -7277,14 +10677,84 @@
       </p:sp>
       <p:sp>
         <p:nvSpPr>
-          <p:cNvPr id="8" name="TextBox 7"/>
+          <p:cNvPr id="4" name="TextBox 3"/>
           <p:cNvSpPr txBox="1"/>
           <p:nvPr/>
         </p:nvSpPr>
         <p:spPr>
           <a:xfrm>
-            <a:off x="749808" y="1280160"/>
-            <a:ext cx="10881360" cy="292608"/>
+            <a:off x="502920" y="164592"/>
+            <a:ext cx="11155680" cy="502920"/>
+          </a:xfrm>
+          <a:prstGeom prst="rect">
+            <a:avLst/>
+          </a:prstGeom>
+          <a:noFill/>
+        </p:spPr>
+        <p:txBody>
+          <a:bodyPr wrap="square" anchor="ctr" lIns="50800" rIns="50800" tIns="25400" bIns="25400">
+            <a:spAutoFit/>
+          </a:bodyPr>
+          <a:lstStyle/>
+          <a:p>
+            <a:pPr algn="l"/>
+            <a:r>
+              <a:rPr sz="2600" b="1" i="0">
+                <a:solidFill>
+                  <a:srgbClr val="FFFFFF"/>
+                </a:solidFill>
+                <a:latin typeface="Segoe UI"/>
+              </a:rPr>
+              <a:t>Network Gear Discovery</a:t>
+            </a:r>
+          </a:p>
+        </p:txBody>
+      </p:sp>
+      <p:sp>
+        <p:nvSpPr>
+          <p:cNvPr id="5" name="TextBox 4"/>
+          <p:cNvSpPr txBox="1"/>
+          <p:nvPr/>
+        </p:nvSpPr>
+        <p:spPr>
+          <a:xfrm>
+            <a:off x="521207" y="603504"/>
+            <a:ext cx="11155680" cy="292608"/>
+          </a:xfrm>
+          <a:prstGeom prst="rect">
+            <a:avLst/>
+          </a:prstGeom>
+          <a:noFill/>
+        </p:spPr>
+        <p:txBody>
+          <a:bodyPr wrap="square" anchor="ctr" lIns="50800" rIns="50800" tIns="25400" bIns="25400">
+            <a:spAutoFit/>
+          </a:bodyPr>
+          <a:lstStyle/>
+          <a:p>
+            <a:pPr algn="l"/>
+            <a:r>
+              <a:rPr sz="1200" b="0" i="0">
+                <a:solidFill>
+                  <a:srgbClr val="C9D6E6"/>
+                </a:solidFill>
+                <a:latin typeface="Segoe UI"/>
+              </a:rPr>
+              <a:t>Due Aug 31 -&gt; Oct 30   ·   PI-3</a:t>
+            </a:r>
+          </a:p>
+        </p:txBody>
+      </p:sp>
+      <p:sp>
+        <p:nvSpPr>
+          <p:cNvPr id="6" name="TextBox 5"/>
+          <p:cNvSpPr txBox="1"/>
+          <p:nvPr/>
+        </p:nvSpPr>
+        <p:spPr>
+          <a:xfrm>
+            <a:off x="502920" y="6473952"/>
+            <a:ext cx="9144000" cy="292608"/>
           </a:xfrm>
           <a:prstGeom prst="rect">
             <a:avLst/>
@@ -7299,13 +10769,94 @@
           <a:p>
             <a:pPr algn="l"/>
             <a:r>
-              <a:rPr sz="1350" b="1" i="0">
+              <a:rPr sz="900" b="0" i="0">
+                <a:solidFill>
+                  <a:srgbClr val="6B7280"/>
+                </a:solidFill>
+                <a:latin typeface="Segoe UI"/>
+              </a:rPr>
+              <a:t>PPL CMDB-CSDM  |  CO6 Deliverables  |  Team Focus  -  Jul 10, 2026</a:t>
+            </a:r>
+          </a:p>
+        </p:txBody>
+      </p:sp>
+      <p:sp>
+        <p:nvSpPr>
+          <p:cNvPr id="7" name="Rectangle 6"/>
+          <p:cNvSpPr/>
+          <p:nvPr/>
+        </p:nvSpPr>
+        <p:spPr>
+          <a:xfrm>
+            <a:off x="502920" y="1115568"/>
+            <a:ext cx="11155680" cy="457200"/>
+          </a:xfrm>
+          <a:prstGeom prst="rect">
+            <a:avLst/>
+          </a:prstGeom>
+          <a:solidFill>
+            <a:srgbClr val="E9F0F8"/>
+          </a:solidFill>
+          <a:ln w="9525">
+            <a:solidFill>
+              <a:srgbClr val="2E6DB4"/>
+            </a:solidFill>
+          </a:ln>
+          <a:effectLst/>
+        </p:spPr>
+        <p:style>
+          <a:lnRef idx="1">
+            <a:schemeClr val="accent1"/>
+          </a:lnRef>
+          <a:fillRef idx="3">
+            <a:schemeClr val="accent1"/>
+          </a:fillRef>
+          <a:effectRef idx="2">
+            <a:schemeClr val="accent1"/>
+          </a:effectRef>
+          <a:fontRef idx="minor">
+            <a:schemeClr val="lt1"/>
+          </a:fontRef>
+        </p:style>
+        <p:txBody>
+          <a:bodyPr rtlCol="0" anchor="ctr"/>
+          <a:lstStyle/>
+          <a:p>
+            <a:pPr algn="ctr"/>
+          </a:p>
+        </p:txBody>
+      </p:sp>
+      <p:sp>
+        <p:nvSpPr>
+          <p:cNvPr id="8" name="TextBox 7"/>
+          <p:cNvSpPr txBox="1"/>
+          <p:nvPr/>
+        </p:nvSpPr>
+        <p:spPr>
+          <a:xfrm>
+            <a:off x="658368" y="1133856"/>
+            <a:ext cx="10881360" cy="420624"/>
+          </a:xfrm>
+          <a:prstGeom prst="rect">
+            <a:avLst/>
+          </a:prstGeom>
+          <a:noFill/>
+        </p:spPr>
+        <p:txBody>
+          <a:bodyPr wrap="square" anchor="ctr" lIns="50800" rIns="50800" tIns="25400" bIns="25400">
+            <a:spAutoFit/>
+          </a:bodyPr>
+          <a:lstStyle/>
+          <a:p>
+            <a:pPr algn="l"/>
+            <a:r>
+              <a:rPr sz="1100" b="0" i="0">
                 <a:solidFill>
                   <a:srgbClr val="1F3A5F"/>
                 </a:solidFill>
                 <a:latin typeface="Segoe UI"/>
               </a:rPr>
-              <a:t>Focus first: the Jul 31 items.</a:t>
+              <a:t>Discover and populate network devices in the CMDB, to 90% coverage.</a:t>
             </a:r>
           </a:p>
         </p:txBody>
@@ -7318,8 +10869,8 @@
         </p:nvSpPr>
         <p:spPr>
           <a:xfrm>
-            <a:off x="749808" y="1591056"/>
-            <a:ext cx="10881360" cy="457200"/>
+            <a:off x="502920" y="1755648"/>
+            <a:ext cx="5486400" cy="2286000"/>
           </a:xfrm>
           <a:prstGeom prst="rect">
             <a:avLst/>
@@ -7334,27 +10885,452 @@
           <a:p>
             <a:pPr algn="l"/>
             <a:r>
-              <a:rPr sz="1100" b="0" i="0">
+              <a:rPr sz="1200" b="1" i="0">
+                <a:solidFill>
+                  <a:srgbClr val="1F3A5F"/>
+                </a:solidFill>
+                <a:latin typeface="Segoe UI"/>
+              </a:rPr>
+              <a:t>Done when (acceptance)</a:t>
+            </a:r>
+          </a:p>
+          <a:p>
+            <a:pPr algn="l"/>
+            <a:r>
+              <a:rPr sz="1000" b="0" i="0">
                 <a:solidFill>
                   <a:srgbClr val="2D2D2D"/>
                 </a:solidFill>
                 <a:latin typeface="Segoe UI"/>
               </a:rPr>
-              <a:t>CMDB Governance and CI Coverage foundation (Computers &amp; Servers precedence) are due first and land in PI-2 - keep these moving now.</a:t>
-            </a:r>
-          </a:p>
-        </p:txBody>
-      </p:sp>
-      <p:sp>
-        <p:nvSpPr>
-          <p:cNvPr id="10" name="Rectangle 9"/>
+              <a:t>•  Credentials configured &amp; validated (excluding OT)</a:t>
+            </a:r>
+          </a:p>
+          <a:p>
+            <a:pPr algn="l"/>
+            <a:r>
+              <a:rPr sz="1000" b="0" i="0">
+                <a:solidFill>
+                  <a:srgbClr val="2D2D2D"/>
+                </a:solidFill>
+                <a:latin typeface="Segoe UI"/>
+              </a:rPr>
+              <a:t>•  Discovery schedules active</a:t>
+            </a:r>
+          </a:p>
+          <a:p>
+            <a:pPr algn="l"/>
+            <a:r>
+              <a:rPr sz="1000" b="0" i="0">
+                <a:solidFill>
+                  <a:srgbClr val="2D2D2D"/>
+                </a:solidFill>
+                <a:latin typeface="Segoe UI"/>
+              </a:rPr>
+              <a:t>•  Mandatory attributes populated</a:t>
+            </a:r>
+          </a:p>
+          <a:p>
+            <a:pPr algn="l"/>
+            <a:r>
+              <a:rPr sz="1000" b="0" i="0">
+                <a:solidFill>
+                  <a:srgbClr val="2D2D2D"/>
+                </a:solidFill>
+                <a:latin typeface="Segoe UI"/>
+              </a:rPr>
+              <a:t>•  90% coverage, business-owner validated</a:t>
+            </a:r>
+          </a:p>
+        </p:txBody>
+      </p:sp>
+      <p:sp>
+        <p:nvSpPr>
+          <p:cNvPr id="10" name="TextBox 9"/>
+          <p:cNvSpPr txBox="1"/>
+          <p:nvPr/>
+        </p:nvSpPr>
+        <p:spPr>
+          <a:xfrm>
+            <a:off x="6172200" y="1755648"/>
+            <a:ext cx="5486400" cy="2286000"/>
+          </a:xfrm>
+          <a:prstGeom prst="rect">
+            <a:avLst/>
+          </a:prstGeom>
+          <a:noFill/>
+        </p:spPr>
+        <p:txBody>
+          <a:bodyPr wrap="square" anchor="t" lIns="50800" rIns="50800" tIns="25400" bIns="25400">
+            <a:spAutoFit/>
+          </a:bodyPr>
+          <a:lstStyle/>
+          <a:p>
+            <a:pPr algn="l"/>
+            <a:r>
+              <a:rPr sz="1200" b="1" i="0">
+                <a:solidFill>
+                  <a:srgbClr val="1F3A5F"/>
+                </a:solidFill>
+                <a:latin typeface="Segoe UI"/>
+              </a:rPr>
+              <a:t>Scope</a:t>
+            </a:r>
+          </a:p>
+          <a:p>
+            <a:pPr algn="l"/>
+            <a:r>
+              <a:rPr sz="1050" b="1" i="0">
+                <a:solidFill>
+                  <a:srgbClr val="2E8B57"/>
+                </a:solidFill>
+                <a:latin typeface="Segoe UI"/>
+              </a:rPr>
+              <a:t>In scope</a:t>
+            </a:r>
+          </a:p>
+          <a:p>
+            <a:pPr algn="l"/>
+            <a:r>
+              <a:rPr sz="950" b="0" i="0">
+                <a:solidFill>
+                  <a:srgbClr val="2D2D2D"/>
+                </a:solidFill>
+                <a:latin typeface="Segoe UI"/>
+              </a:rPr>
+              <a:t>•  Network gear: credentials / SNMP, schedules, attributes, coverage</a:t>
+            </a:r>
+          </a:p>
+          <a:p>
+            <a:pPr algn="l"/>
+            <a:r>
+              <a:rPr sz="1050" b="1" i="0">
+                <a:solidFill>
+                  <a:srgbClr val="C0392B"/>
+                </a:solidFill>
+                <a:latin typeface="Segoe UI"/>
+              </a:rPr>
+              <a:t>Out of scope</a:t>
+            </a:r>
+          </a:p>
+          <a:p>
+            <a:pPr algn="l"/>
+            <a:r>
+              <a:rPr sz="950" b="0" i="0">
+                <a:solidFill>
+                  <a:srgbClr val="2D2D2D"/>
+                </a:solidFill>
+                <a:latin typeface="Segoe UI"/>
+              </a:rPr>
+              <a:t>•  OT (operational technology) devices - explicitly excluded</a:t>
+            </a:r>
+          </a:p>
+        </p:txBody>
+      </p:sp>
+      <p:sp>
+        <p:nvSpPr>
+          <p:cNvPr id="11" name="Rectangle 10"/>
           <p:cNvSpPr/>
           <p:nvPr/>
         </p:nvSpPr>
         <p:spPr>
           <a:xfrm>
-            <a:off x="502920" y="2157984"/>
-            <a:ext cx="109728" cy="566928"/>
+            <a:off x="502920" y="4114800"/>
+            <a:ext cx="11155680" cy="1234440"/>
+          </a:xfrm>
+          <a:prstGeom prst="rect">
+            <a:avLst/>
+          </a:prstGeom>
+          <a:solidFill>
+            <a:srgbClr val="F4F6F9"/>
+          </a:solidFill>
+          <a:ln>
+            <a:noFill/>
+          </a:ln>
+          <a:effectLst/>
+        </p:spPr>
+        <p:style>
+          <a:lnRef idx="1">
+            <a:schemeClr val="accent1"/>
+          </a:lnRef>
+          <a:fillRef idx="3">
+            <a:schemeClr val="accent1"/>
+          </a:fillRef>
+          <a:effectRef idx="2">
+            <a:schemeClr val="accent1"/>
+          </a:effectRef>
+          <a:fontRef idx="minor">
+            <a:schemeClr val="lt1"/>
+          </a:fontRef>
+        </p:style>
+        <p:txBody>
+          <a:bodyPr rtlCol="0" anchor="ctr"/>
+          <a:lstStyle/>
+          <a:p>
+            <a:pPr algn="ctr"/>
+          </a:p>
+        </p:txBody>
+      </p:sp>
+      <p:sp>
+        <p:nvSpPr>
+          <p:cNvPr id="12" name="TextBox 11"/>
+          <p:cNvSpPr txBox="1"/>
+          <p:nvPr/>
+        </p:nvSpPr>
+        <p:spPr>
+          <a:xfrm>
+            <a:off x="658368" y="4160520"/>
+            <a:ext cx="10881360" cy="1161288"/>
+          </a:xfrm>
+          <a:prstGeom prst="rect">
+            <a:avLst/>
+          </a:prstGeom>
+          <a:noFill/>
+        </p:spPr>
+        <p:txBody>
+          <a:bodyPr wrap="square" anchor="t" lIns="50800" rIns="50800" tIns="25400" bIns="25400">
+            <a:spAutoFit/>
+          </a:bodyPr>
+          <a:lstStyle/>
+          <a:p>
+            <a:pPr algn="l"/>
+            <a:r>
+              <a:rPr sz="1150" b="1" i="0">
+                <a:solidFill>
+                  <a:srgbClr val="1F3A5F"/>
+                </a:solidFill>
+                <a:latin typeface="Segoe UI"/>
+              </a:rPr>
+              <a:t>Current stories</a:t>
+            </a:r>
+          </a:p>
+          <a:p>
+            <a:pPr algn="l"/>
+            <a:r>
+              <a:rPr sz="950" b="0" i="0">
+                <a:solidFill>
+                  <a:srgbClr val="2D2D2D"/>
+                </a:solidFill>
+                <a:latin typeface="Segoe UI"/>
+              </a:rPr>
+              <a:t>•  1356646 Network Device Coverage (feature)</a:t>
+            </a:r>
+          </a:p>
+          <a:p>
+            <a:pPr algn="l"/>
+            <a:r>
+              <a:rPr sz="950" b="0" i="0">
+                <a:solidFill>
+                  <a:srgbClr val="2D2D2D"/>
+                </a:solidFill>
+                <a:latin typeface="Segoe UI"/>
+              </a:rPr>
+              <a:t>•  1402572 / 574 / 575 discovery config + rerun  ·  1402555 / 1402559 spikes</a:t>
+            </a:r>
+          </a:p>
+          <a:p>
+            <a:pPr algn="l"/>
+            <a:r>
+              <a:rPr sz="950" b="0" i="0">
+                <a:solidFill>
+                  <a:srgbClr val="2D2D2D"/>
+                </a:solidFill>
+                <a:latin typeface="Segoe UI"/>
+              </a:rPr>
+              <a:t>•  Creds 1444864 / 1459721  ·  stakeholder dependency 1383487</a:t>
+            </a:r>
+          </a:p>
+        </p:txBody>
+      </p:sp>
+      <p:sp>
+        <p:nvSpPr>
+          <p:cNvPr id="13" name="Rectangle 12"/>
+          <p:cNvSpPr/>
+          <p:nvPr/>
+        </p:nvSpPr>
+        <p:spPr>
+          <a:xfrm>
+            <a:off x="502920" y="5413248"/>
+            <a:ext cx="11155680" cy="896112"/>
+          </a:xfrm>
+          <a:prstGeom prst="rect">
+            <a:avLst/>
+          </a:prstGeom>
+          <a:solidFill>
+            <a:srgbClr val="FBEEDB"/>
+          </a:solidFill>
+          <a:ln w="9525">
+            <a:solidFill>
+              <a:srgbClr val="E08A00"/>
+            </a:solidFill>
+          </a:ln>
+          <a:effectLst/>
+        </p:spPr>
+        <p:style>
+          <a:lnRef idx="1">
+            <a:schemeClr val="accent1"/>
+          </a:lnRef>
+          <a:fillRef idx="3">
+            <a:schemeClr val="accent1"/>
+          </a:fillRef>
+          <a:effectRef idx="2">
+            <a:schemeClr val="accent1"/>
+          </a:effectRef>
+          <a:fontRef idx="minor">
+            <a:schemeClr val="lt1"/>
+          </a:fontRef>
+        </p:style>
+        <p:txBody>
+          <a:bodyPr rtlCol="0" anchor="ctr"/>
+          <a:lstStyle/>
+          <a:p>
+            <a:pPr algn="ctr"/>
+          </a:p>
+        </p:txBody>
+      </p:sp>
+      <p:sp>
+        <p:nvSpPr>
+          <p:cNvPr id="14" name="TextBox 13"/>
+          <p:cNvSpPr txBox="1"/>
+          <p:nvPr/>
+        </p:nvSpPr>
+        <p:spPr>
+          <a:xfrm>
+            <a:off x="658368" y="5449824"/>
+            <a:ext cx="10881360" cy="822960"/>
+          </a:xfrm>
+          <a:prstGeom prst="rect">
+            <a:avLst/>
+          </a:prstGeom>
+          <a:noFill/>
+        </p:spPr>
+        <p:txBody>
+          <a:bodyPr wrap="square" anchor="t" lIns="50800" rIns="50800" tIns="25400" bIns="25400">
+            <a:spAutoFit/>
+          </a:bodyPr>
+          <a:lstStyle/>
+          <a:p>
+            <a:pPr algn="l"/>
+            <a:r>
+              <a:rPr sz="1100" b="1" i="0">
+                <a:solidFill>
+                  <a:srgbClr val="7A4F10"/>
+                </a:solidFill>
+                <a:latin typeface="Segoe UI"/>
+              </a:rPr>
+              <a:t>Watch-outs / dependencies</a:t>
+            </a:r>
+          </a:p>
+          <a:p>
+            <a:pPr algn="l"/>
+            <a:r>
+              <a:rPr sz="950" b="0" i="0">
+                <a:solidFill>
+                  <a:srgbClr val="5A4A2A"/>
+                </a:solidFill>
+                <a:latin typeface="Segoe UI"/>
+              </a:rPr>
+              <a:t>•  OT boundary - confirm with stakeholders</a:t>
+            </a:r>
+          </a:p>
+          <a:p>
+            <a:pPr algn="l"/>
+            <a:r>
+              <a:rPr sz="950" b="0" i="0">
+                <a:solidFill>
+                  <a:srgbClr val="5A4A2A"/>
+                </a:solidFill>
+                <a:latin typeface="Segoe UI"/>
+              </a:rPr>
+              <a:t>•  Stakeholder requirements (1383487) still open</a:t>
+            </a:r>
+          </a:p>
+          <a:p>
+            <a:pPr algn="l"/>
+            <a:r>
+              <a:rPr sz="950" b="0" i="0">
+                <a:solidFill>
+                  <a:srgbClr val="5A4A2A"/>
+                </a:solidFill>
+                <a:latin typeface="Segoe UI"/>
+              </a:rPr>
+              <a:t>•  Shares credential work with servers / databases</a:t>
+            </a:r>
+          </a:p>
+        </p:txBody>
+      </p:sp>
+    </p:spTree>
+  </p:cSld>
+  <p:clrMapOvr>
+    <a:masterClrMapping/>
+  </p:clrMapOvr>
+</p:sld>
+</file>
+
+<file path=ppt/slides/slide7.xml><?xml version="1.0" encoding="utf-8"?>
+<p:sld xmlns:a="http://schemas.openxmlformats.org/drawingml/2006/main" xmlns:p="http://schemas.openxmlformats.org/presentationml/2006/main" xmlns:r="http://schemas.openxmlformats.org/officeDocument/2006/relationships">
+  <p:cSld>
+    <p:spTree>
+      <p:nvGrpSpPr>
+        <p:cNvPr id="1" name=""/>
+        <p:cNvGrpSpPr/>
+        <p:nvPr/>
+      </p:nvGrpSpPr>
+      <p:grpSpPr/>
+      <p:sp>
+        <p:nvSpPr>
+          <p:cNvPr id="2" name="Rectangle 1"/>
+          <p:cNvSpPr/>
+          <p:nvPr/>
+        </p:nvSpPr>
+        <p:spPr>
+          <a:xfrm>
+            <a:off x="0" y="0"/>
+            <a:ext cx="12191695" cy="960120"/>
+          </a:xfrm>
+          <a:prstGeom prst="rect">
+            <a:avLst/>
+          </a:prstGeom>
+          <a:solidFill>
+            <a:srgbClr val="1F3A5F"/>
+          </a:solidFill>
+          <a:ln>
+            <a:noFill/>
+          </a:ln>
+          <a:effectLst/>
+        </p:spPr>
+        <p:style>
+          <a:lnRef idx="1">
+            <a:schemeClr val="accent1"/>
+          </a:lnRef>
+          <a:fillRef idx="3">
+            <a:schemeClr val="accent1"/>
+          </a:fillRef>
+          <a:effectRef idx="2">
+            <a:schemeClr val="accent1"/>
+          </a:effectRef>
+          <a:fontRef idx="minor">
+            <a:schemeClr val="lt1"/>
+          </a:fontRef>
+        </p:style>
+        <p:txBody>
+          <a:bodyPr rtlCol="0" anchor="ctr"/>
+          <a:lstStyle/>
+          <a:p>
+            <a:pPr algn="ctr"/>
+          </a:p>
+        </p:txBody>
+      </p:sp>
+      <p:sp>
+        <p:nvSpPr>
+          <p:cNvPr id="3" name="Rectangle 2"/>
+          <p:cNvSpPr/>
+          <p:nvPr/>
+        </p:nvSpPr>
+        <p:spPr>
+          <a:xfrm>
+            <a:off x="0" y="960120"/>
+            <a:ext cx="12191695" cy="54864"/>
           </a:xfrm>
           <a:prstGeom prst="rect">
             <a:avLst/>
@@ -7391,14 +11367,84 @@
       </p:sp>
       <p:sp>
         <p:nvSpPr>
-          <p:cNvPr id="11" name="TextBox 10"/>
+          <p:cNvPr id="4" name="TextBox 3"/>
           <p:cNvSpPr txBox="1"/>
           <p:nvPr/>
         </p:nvSpPr>
         <p:spPr>
           <a:xfrm>
-            <a:off x="749808" y="2121408"/>
-            <a:ext cx="10881360" cy="292608"/>
+            <a:off x="502920" y="164592"/>
+            <a:ext cx="11155680" cy="502920"/>
+          </a:xfrm>
+          <a:prstGeom prst="rect">
+            <a:avLst/>
+          </a:prstGeom>
+          <a:noFill/>
+        </p:spPr>
+        <p:txBody>
+          <a:bodyPr wrap="square" anchor="ctr" lIns="50800" rIns="50800" tIns="25400" bIns="25400">
+            <a:spAutoFit/>
+          </a:bodyPr>
+          <a:lstStyle/>
+          <a:p>
+            <a:pPr algn="l"/>
+            <a:r>
+              <a:rPr sz="2600" b="1" i="0">
+                <a:solidFill>
+                  <a:srgbClr val="FFFFFF"/>
+                </a:solidFill>
+                <a:latin typeface="Segoe UI"/>
+              </a:rPr>
+              <a:t>Service Mapping</a:t>
+            </a:r>
+          </a:p>
+        </p:txBody>
+      </p:sp>
+      <p:sp>
+        <p:nvSpPr>
+          <p:cNvPr id="5" name="TextBox 4"/>
+          <p:cNvSpPr txBox="1"/>
+          <p:nvPr/>
+        </p:nvSpPr>
+        <p:spPr>
+          <a:xfrm>
+            <a:off x="521207" y="603504"/>
+            <a:ext cx="11155680" cy="292608"/>
+          </a:xfrm>
+          <a:prstGeom prst="rect">
+            <a:avLst/>
+          </a:prstGeom>
+          <a:noFill/>
+        </p:spPr>
+        <p:txBody>
+          <a:bodyPr wrap="square" anchor="ctr" lIns="50800" rIns="50800" tIns="25400" bIns="25400">
+            <a:spAutoFit/>
+          </a:bodyPr>
+          <a:lstStyle/>
+          <a:p>
+            <a:pPr algn="l"/>
+            <a:r>
+              <a:rPr sz="1200" b="0" i="0">
+                <a:solidFill>
+                  <a:srgbClr val="C9D6E6"/>
+                </a:solidFill>
+                <a:latin typeface="Segoe UI"/>
+              </a:rPr>
+              <a:t>Due Aug 31 -&gt; Oct 30   ·   PI-3</a:t>
+            </a:r>
+          </a:p>
+        </p:txBody>
+      </p:sp>
+      <p:sp>
+        <p:nvSpPr>
+          <p:cNvPr id="6" name="TextBox 5"/>
+          <p:cNvSpPr txBox="1"/>
+          <p:nvPr/>
+        </p:nvSpPr>
+        <p:spPr>
+          <a:xfrm>
+            <a:off x="502920" y="6473952"/>
+            <a:ext cx="9144000" cy="292608"/>
           </a:xfrm>
           <a:prstGeom prst="rect">
             <a:avLst/>
@@ -7413,27 +11459,108 @@
           <a:p>
             <a:pPr algn="l"/>
             <a:r>
-              <a:rPr sz="1350" b="1" i="0">
+              <a:rPr sz="900" b="0" i="0">
+                <a:solidFill>
+                  <a:srgbClr val="6B7280"/>
+                </a:solidFill>
+                <a:latin typeface="Segoe UI"/>
+              </a:rPr>
+              <a:t>PPL CMDB-CSDM  |  CO6 Deliverables  |  Team Focus  -  Jul 10, 2026</a:t>
+            </a:r>
+          </a:p>
+        </p:txBody>
+      </p:sp>
+      <p:sp>
+        <p:nvSpPr>
+          <p:cNvPr id="7" name="Rectangle 6"/>
+          <p:cNvSpPr/>
+          <p:nvPr/>
+        </p:nvSpPr>
+        <p:spPr>
+          <a:xfrm>
+            <a:off x="502920" y="1115568"/>
+            <a:ext cx="11155680" cy="457200"/>
+          </a:xfrm>
+          <a:prstGeom prst="rect">
+            <a:avLst/>
+          </a:prstGeom>
+          <a:solidFill>
+            <a:srgbClr val="E9F0F8"/>
+          </a:solidFill>
+          <a:ln w="9525">
+            <a:solidFill>
+              <a:srgbClr val="2E6DB4"/>
+            </a:solidFill>
+          </a:ln>
+          <a:effectLst/>
+        </p:spPr>
+        <p:style>
+          <a:lnRef idx="1">
+            <a:schemeClr val="accent1"/>
+          </a:lnRef>
+          <a:fillRef idx="3">
+            <a:schemeClr val="accent1"/>
+          </a:fillRef>
+          <a:effectRef idx="2">
+            <a:schemeClr val="accent1"/>
+          </a:effectRef>
+          <a:fontRef idx="minor">
+            <a:schemeClr val="lt1"/>
+          </a:fontRef>
+        </p:style>
+        <p:txBody>
+          <a:bodyPr rtlCol="0" anchor="ctr"/>
+          <a:lstStyle/>
+          <a:p>
+            <a:pPr algn="ctr"/>
+          </a:p>
+        </p:txBody>
+      </p:sp>
+      <p:sp>
+        <p:nvSpPr>
+          <p:cNvPr id="8" name="TextBox 7"/>
+          <p:cNvSpPr txBox="1"/>
+          <p:nvPr/>
+        </p:nvSpPr>
+        <p:spPr>
+          <a:xfrm>
+            <a:off x="658368" y="1133856"/>
+            <a:ext cx="10881360" cy="420624"/>
+          </a:xfrm>
+          <a:prstGeom prst="rect">
+            <a:avLst/>
+          </a:prstGeom>
+          <a:noFill/>
+        </p:spPr>
+        <p:txBody>
+          <a:bodyPr wrap="square" anchor="ctr" lIns="50800" rIns="50800" tIns="25400" bIns="25400">
+            <a:spAutoFit/>
+          </a:bodyPr>
+          <a:lstStyle/>
+          <a:p>
+            <a:pPr algn="l"/>
+            <a:r>
+              <a:rPr sz="1100" b="0" i="0">
                 <a:solidFill>
                   <a:srgbClr val="1F3A5F"/>
                 </a:solidFill>
                 <a:latin typeface="Segoe UI"/>
               </a:rPr>
-              <a:t>Biggest PI-3 build: Discovery + Mapping.</a:t>
-            </a:r>
-          </a:p>
-        </p:txBody>
-      </p:sp>
-      <p:sp>
-        <p:nvSpPr>
-          <p:cNvPr id="12" name="TextBox 11"/>
+              <a:t>End-to-end maps for 10 priority business apps down to infrastructure CIs.</a:t>
+            </a:r>
+          </a:p>
+        </p:txBody>
+      </p:sp>
+      <p:sp>
+        <p:nvSpPr>
+          <p:cNvPr id="9" name="TextBox 8"/>
           <p:cNvSpPr txBox="1"/>
           <p:nvPr/>
         </p:nvSpPr>
         <p:spPr>
           <a:xfrm>
-            <a:off x="749808" y="2432303"/>
-            <a:ext cx="10881360" cy="457200"/>
+            <a:off x="502920" y="1755648"/>
+            <a:ext cx="5486400" cy="2286000"/>
           </a:xfrm>
           <a:prstGeom prst="rect">
             <a:avLst/>
@@ -7448,13 +11575,235 @@
           <a:p>
             <a:pPr algn="l"/>
             <a:r>
-              <a:rPr sz="1100" b="0" i="0">
+              <a:rPr sz="1200" b="1" i="0">
+                <a:solidFill>
+                  <a:srgbClr val="1F3A5F"/>
+                </a:solidFill>
+                <a:latin typeface="Segoe UI"/>
+              </a:rPr>
+              <a:t>Done when (acceptance)</a:t>
+            </a:r>
+          </a:p>
+          <a:p>
+            <a:pPr algn="l"/>
+            <a:r>
+              <a:rPr sz="1000" b="0" i="0">
                 <a:solidFill>
                   <a:srgbClr val="2D2D2D"/>
                 </a:solidFill>
                 <a:latin typeface="Segoe UI"/>
               </a:rPr>
-              <a:t>Network Gear, Service Mapping and the 90% coverage targets (Sep 30 / Oct 30) are the bulk of the work - discovery, credentials, and app-owner validation.</a:t>
+              <a:t>•  Service maps built for 10 priority business apps</a:t>
+            </a:r>
+          </a:p>
+          <a:p>
+            <a:pPr algn="l"/>
+            <a:r>
+              <a:rPr sz="1000" b="0" i="0">
+                <a:solidFill>
+                  <a:srgbClr val="2D2D2D"/>
+                </a:solidFill>
+                <a:latin typeface="Segoe UI"/>
+              </a:rPr>
+              <a:t>•  Maps validated by application owners</a:t>
+            </a:r>
+          </a:p>
+          <a:p>
+            <a:pPr algn="l"/>
+            <a:r>
+              <a:rPr sz="1000" b="0" i="0">
+                <a:solidFill>
+                  <a:srgbClr val="2D2D2D"/>
+                </a:solidFill>
+                <a:latin typeface="Segoe UI"/>
+              </a:rPr>
+              <a:t>•  Maps consumable in ServiceNow</a:t>
+            </a:r>
+          </a:p>
+        </p:txBody>
+      </p:sp>
+      <p:sp>
+        <p:nvSpPr>
+          <p:cNvPr id="10" name="TextBox 9"/>
+          <p:cNvSpPr txBox="1"/>
+          <p:nvPr/>
+        </p:nvSpPr>
+        <p:spPr>
+          <a:xfrm>
+            <a:off x="6172200" y="1755648"/>
+            <a:ext cx="5486400" cy="2286000"/>
+          </a:xfrm>
+          <a:prstGeom prst="rect">
+            <a:avLst/>
+          </a:prstGeom>
+          <a:noFill/>
+        </p:spPr>
+        <p:txBody>
+          <a:bodyPr wrap="square" anchor="t" lIns="50800" rIns="50800" tIns="25400" bIns="25400">
+            <a:spAutoFit/>
+          </a:bodyPr>
+          <a:lstStyle/>
+          <a:p>
+            <a:pPr algn="l"/>
+            <a:r>
+              <a:rPr sz="1200" b="1" i="0">
+                <a:solidFill>
+                  <a:srgbClr val="1F3A5F"/>
+                </a:solidFill>
+                <a:latin typeface="Segoe UI"/>
+              </a:rPr>
+              <a:t>Scope</a:t>
+            </a:r>
+          </a:p>
+          <a:p>
+            <a:pPr algn="l"/>
+            <a:r>
+              <a:rPr sz="1050" b="1" i="0">
+                <a:solidFill>
+                  <a:srgbClr val="2E8B57"/>
+                </a:solidFill>
+                <a:latin typeface="Segoe UI"/>
+              </a:rPr>
+              <a:t>In scope</a:t>
+            </a:r>
+          </a:p>
+          <a:p>
+            <a:pPr algn="l"/>
+            <a:r>
+              <a:rPr sz="950" b="0" i="0">
+                <a:solidFill>
+                  <a:srgbClr val="2D2D2D"/>
+                </a:solidFill>
+                <a:latin typeface="Segoe UI"/>
+              </a:rPr>
+              <a:t>•  The 10 priority apps; app -&gt; infra mapping; owner validation</a:t>
+            </a:r>
+          </a:p>
+          <a:p>
+            <a:pPr algn="l"/>
+            <a:r>
+              <a:rPr sz="1050" b="1" i="0">
+                <a:solidFill>
+                  <a:srgbClr val="C0392B"/>
+                </a:solidFill>
+                <a:latin typeface="Segoe UI"/>
+              </a:rPr>
+              <a:t>Out of scope</a:t>
+            </a:r>
+          </a:p>
+          <a:p>
+            <a:pPr algn="l"/>
+            <a:r>
+              <a:rPr sz="950" b="0" i="0">
+                <a:solidFill>
+                  <a:srgbClr val="2D2D2D"/>
+                </a:solidFill>
+                <a:latin typeface="Segoe UI"/>
+              </a:rPr>
+              <a:t>•  Apps beyond the 10 priority set</a:t>
+            </a:r>
+          </a:p>
+        </p:txBody>
+      </p:sp>
+      <p:sp>
+        <p:nvSpPr>
+          <p:cNvPr id="11" name="Rectangle 10"/>
+          <p:cNvSpPr/>
+          <p:nvPr/>
+        </p:nvSpPr>
+        <p:spPr>
+          <a:xfrm>
+            <a:off x="502920" y="4114800"/>
+            <a:ext cx="11155680" cy="1234440"/>
+          </a:xfrm>
+          <a:prstGeom prst="rect">
+            <a:avLst/>
+          </a:prstGeom>
+          <a:solidFill>
+            <a:srgbClr val="F4F6F9"/>
+          </a:solidFill>
+          <a:ln>
+            <a:noFill/>
+          </a:ln>
+          <a:effectLst/>
+        </p:spPr>
+        <p:style>
+          <a:lnRef idx="1">
+            <a:schemeClr val="accent1"/>
+          </a:lnRef>
+          <a:fillRef idx="3">
+            <a:schemeClr val="accent1"/>
+          </a:fillRef>
+          <a:effectRef idx="2">
+            <a:schemeClr val="accent1"/>
+          </a:effectRef>
+          <a:fontRef idx="minor">
+            <a:schemeClr val="lt1"/>
+          </a:fontRef>
+        </p:style>
+        <p:txBody>
+          <a:bodyPr rtlCol="0" anchor="ctr"/>
+          <a:lstStyle/>
+          <a:p>
+            <a:pPr algn="ctr"/>
+          </a:p>
+        </p:txBody>
+      </p:sp>
+      <p:sp>
+        <p:nvSpPr>
+          <p:cNvPr id="12" name="TextBox 11"/>
+          <p:cNvSpPr txBox="1"/>
+          <p:nvPr/>
+        </p:nvSpPr>
+        <p:spPr>
+          <a:xfrm>
+            <a:off x="658368" y="4160520"/>
+            <a:ext cx="10881360" cy="1161288"/>
+          </a:xfrm>
+          <a:prstGeom prst="rect">
+            <a:avLst/>
+          </a:prstGeom>
+          <a:noFill/>
+        </p:spPr>
+        <p:txBody>
+          <a:bodyPr wrap="square" anchor="t" lIns="50800" rIns="50800" tIns="25400" bIns="25400">
+            <a:spAutoFit/>
+          </a:bodyPr>
+          <a:lstStyle/>
+          <a:p>
+            <a:pPr algn="l"/>
+            <a:r>
+              <a:rPr sz="1150" b="1" i="0">
+                <a:solidFill>
+                  <a:srgbClr val="1F3A5F"/>
+                </a:solidFill>
+                <a:latin typeface="Segoe UI"/>
+              </a:rPr>
+              <a:t>Current stories</a:t>
+            </a:r>
+          </a:p>
+          <a:p>
+            <a:pPr algn="l"/>
+            <a:r>
+              <a:rPr sz="950" b="0" i="0">
+                <a:solidFill>
+                  <a:srgbClr val="2D2D2D"/>
+                </a:solidFill>
+                <a:latin typeface="Segoe UI"/>
+              </a:rPr>
+              <a:t>•  Wave features 1355866 / 1355868 / 1355871</a:t>
+            </a:r>
+          </a:p>
+          <a:p>
+            <a:pPr algn="l"/>
+            <a:r>
+              <a:rPr sz="950" b="0" i="0">
+                <a:solidFill>
+                  <a:srgbClr val="2D2D2D"/>
+                </a:solidFill>
+                <a:latin typeface="Segoe UI"/>
+              </a:rPr>
+              <a:t>•  Per-app: WATT  ·  Oceana  ·  SolarWinds PoC 1431652</a:t>
             </a:r>
           </a:p>
         </p:txBody>
@@ -7467,8 +11816,187 @@
         </p:nvSpPr>
         <p:spPr>
           <a:xfrm>
-            <a:off x="502920" y="2999232"/>
-            <a:ext cx="109728" cy="566928"/>
+            <a:off x="502920" y="5413248"/>
+            <a:ext cx="11155680" cy="896112"/>
+          </a:xfrm>
+          <a:prstGeom prst="rect">
+            <a:avLst/>
+          </a:prstGeom>
+          <a:solidFill>
+            <a:srgbClr val="FBEEDB"/>
+          </a:solidFill>
+          <a:ln w="9525">
+            <a:solidFill>
+              <a:srgbClr val="E08A00"/>
+            </a:solidFill>
+          </a:ln>
+          <a:effectLst/>
+        </p:spPr>
+        <p:style>
+          <a:lnRef idx="1">
+            <a:schemeClr val="accent1"/>
+          </a:lnRef>
+          <a:fillRef idx="3">
+            <a:schemeClr val="accent1"/>
+          </a:fillRef>
+          <a:effectRef idx="2">
+            <a:schemeClr val="accent1"/>
+          </a:effectRef>
+          <a:fontRef idx="minor">
+            <a:schemeClr val="lt1"/>
+          </a:fontRef>
+        </p:style>
+        <p:txBody>
+          <a:bodyPr rtlCol="0" anchor="ctr"/>
+          <a:lstStyle/>
+          <a:p>
+            <a:pPr algn="ctr"/>
+          </a:p>
+        </p:txBody>
+      </p:sp>
+      <p:sp>
+        <p:nvSpPr>
+          <p:cNvPr id="14" name="TextBox 13"/>
+          <p:cNvSpPr txBox="1"/>
+          <p:nvPr/>
+        </p:nvSpPr>
+        <p:spPr>
+          <a:xfrm>
+            <a:off x="658368" y="5449824"/>
+            <a:ext cx="10881360" cy="822960"/>
+          </a:xfrm>
+          <a:prstGeom prst="rect">
+            <a:avLst/>
+          </a:prstGeom>
+          <a:noFill/>
+        </p:spPr>
+        <p:txBody>
+          <a:bodyPr wrap="square" anchor="t" lIns="50800" rIns="50800" tIns="25400" bIns="25400">
+            <a:spAutoFit/>
+          </a:bodyPr>
+          <a:lstStyle/>
+          <a:p>
+            <a:pPr algn="l"/>
+            <a:r>
+              <a:rPr sz="1100" b="1" i="0">
+                <a:solidFill>
+                  <a:srgbClr val="7A4F10"/>
+                </a:solidFill>
+                <a:latin typeface="Segoe UI"/>
+              </a:rPr>
+              <a:t>Watch-outs / dependencies</a:t>
+            </a:r>
+          </a:p>
+          <a:p>
+            <a:pPr algn="l"/>
+            <a:r>
+              <a:rPr sz="950" b="0" i="0">
+                <a:solidFill>
+                  <a:srgbClr val="5A4A2A"/>
+                </a:solidFill>
+                <a:latin typeface="Segoe UI"/>
+              </a:rPr>
+              <a:t>•  App-owner validation is the gating dependency - need named owners</a:t>
+            </a:r>
+          </a:p>
+          <a:p>
+            <a:pPr algn="l"/>
+            <a:r>
+              <a:rPr sz="950" b="0" i="0">
+                <a:solidFill>
+                  <a:srgbClr val="5A4A2A"/>
+                </a:solidFill>
+                <a:latin typeface="Segoe UI"/>
+              </a:rPr>
+              <a:t>•  Choose the 10 apps deliberately - it's a fixed acceptance bar</a:t>
+            </a:r>
+          </a:p>
+          <a:p>
+            <a:pPr algn="l"/>
+            <a:r>
+              <a:rPr sz="950" b="0" i="0">
+                <a:solidFill>
+                  <a:srgbClr val="5A4A2A"/>
+                </a:solidFill>
+                <a:latin typeface="Segoe UI"/>
+              </a:rPr>
+              <a:t>•  Infra / credential access can stall mapping</a:t>
+            </a:r>
+          </a:p>
+        </p:txBody>
+      </p:sp>
+    </p:spTree>
+  </p:cSld>
+  <p:clrMapOvr>
+    <a:masterClrMapping/>
+  </p:clrMapOvr>
+</p:sld>
+</file>
+
+<file path=ppt/slides/slide8.xml><?xml version="1.0" encoding="utf-8"?>
+<p:sld xmlns:a="http://schemas.openxmlformats.org/drawingml/2006/main" xmlns:p="http://schemas.openxmlformats.org/presentationml/2006/main" xmlns:r="http://schemas.openxmlformats.org/officeDocument/2006/relationships">
+  <p:cSld>
+    <p:spTree>
+      <p:nvGrpSpPr>
+        <p:cNvPr id="1" name=""/>
+        <p:cNvGrpSpPr/>
+        <p:nvPr/>
+      </p:nvGrpSpPr>
+      <p:grpSpPr/>
+      <p:sp>
+        <p:nvSpPr>
+          <p:cNvPr id="2" name="Rectangle 1"/>
+          <p:cNvSpPr/>
+          <p:nvPr/>
+        </p:nvSpPr>
+        <p:spPr>
+          <a:xfrm>
+            <a:off x="0" y="0"/>
+            <a:ext cx="12191695" cy="960120"/>
+          </a:xfrm>
+          <a:prstGeom prst="rect">
+            <a:avLst/>
+          </a:prstGeom>
+          <a:solidFill>
+            <a:srgbClr val="1F3A5F"/>
+          </a:solidFill>
+          <a:ln>
+            <a:noFill/>
+          </a:ln>
+          <a:effectLst/>
+        </p:spPr>
+        <p:style>
+          <a:lnRef idx="1">
+            <a:schemeClr val="accent1"/>
+          </a:lnRef>
+          <a:fillRef idx="3">
+            <a:schemeClr val="accent1"/>
+          </a:fillRef>
+          <a:effectRef idx="2">
+            <a:schemeClr val="accent1"/>
+          </a:effectRef>
+          <a:fontRef idx="minor">
+            <a:schemeClr val="lt1"/>
+          </a:fontRef>
+        </p:style>
+        <p:txBody>
+          <a:bodyPr rtlCol="0" anchor="ctr"/>
+          <a:lstStyle/>
+          <a:p>
+            <a:pPr algn="ctr"/>
+          </a:p>
+        </p:txBody>
+      </p:sp>
+      <p:sp>
+        <p:nvSpPr>
+          <p:cNvPr id="3" name="Rectangle 2"/>
+          <p:cNvSpPr/>
+          <p:nvPr/>
+        </p:nvSpPr>
+        <p:spPr>
+          <a:xfrm>
+            <a:off x="0" y="960120"/>
+            <a:ext cx="12191695" cy="54864"/>
           </a:xfrm>
           <a:prstGeom prst="rect">
             <a:avLst/>
@@ -7505,14 +12033,84 @@
       </p:sp>
       <p:sp>
         <p:nvSpPr>
-          <p:cNvPr id="14" name="TextBox 13"/>
+          <p:cNvPr id="4" name="TextBox 3"/>
           <p:cNvSpPr txBox="1"/>
           <p:nvPr/>
         </p:nvSpPr>
         <p:spPr>
           <a:xfrm>
-            <a:off x="749808" y="2962656"/>
-            <a:ext cx="10881360" cy="292608"/>
+            <a:off x="502920" y="164592"/>
+            <a:ext cx="11155680" cy="502920"/>
+          </a:xfrm>
+          <a:prstGeom prst="rect">
+            <a:avLst/>
+          </a:prstGeom>
+          <a:noFill/>
+        </p:spPr>
+        <p:txBody>
+          <a:bodyPr wrap="square" anchor="ctr" lIns="50800" rIns="50800" tIns="25400" bIns="25400">
+            <a:spAutoFit/>
+          </a:bodyPr>
+          <a:lstStyle/>
+          <a:p>
+            <a:pPr algn="l"/>
+            <a:r>
+              <a:rPr sz="2600" b="1" i="0">
+                <a:solidFill>
+                  <a:srgbClr val="FFFFFF"/>
+                </a:solidFill>
+                <a:latin typeface="Segoe UI"/>
+              </a:rPr>
+              <a:t>Legacy Platform Rationalization</a:t>
+            </a:r>
+          </a:p>
+        </p:txBody>
+      </p:sp>
+      <p:sp>
+        <p:nvSpPr>
+          <p:cNvPr id="5" name="TextBox 4"/>
+          <p:cNvSpPr txBox="1"/>
+          <p:nvPr/>
+        </p:nvSpPr>
+        <p:spPr>
+          <a:xfrm>
+            <a:off x="521207" y="603504"/>
+            <a:ext cx="11155680" cy="292608"/>
+          </a:xfrm>
+          <a:prstGeom prst="rect">
+            <a:avLst/>
+          </a:prstGeom>
+          <a:noFill/>
+        </p:spPr>
+        <p:txBody>
+          <a:bodyPr wrap="square" anchor="ctr" lIns="50800" rIns="50800" tIns="25400" bIns="25400">
+            <a:spAutoFit/>
+          </a:bodyPr>
+          <a:lstStyle/>
+          <a:p>
+            <a:pPr algn="l"/>
+            <a:r>
+              <a:rPr sz="1200" b="0" i="0">
+                <a:solidFill>
+                  <a:srgbClr val="C9D6E6"/>
+                </a:solidFill>
+                <a:latin typeface="Segoe UI"/>
+              </a:rPr>
+              <a:t>Due Aug 31 -&gt; Oct 30   ·   PI-3</a:t>
+            </a:r>
+          </a:p>
+        </p:txBody>
+      </p:sp>
+      <p:sp>
+        <p:nvSpPr>
+          <p:cNvPr id="6" name="TextBox 5"/>
+          <p:cNvSpPr txBox="1"/>
+          <p:nvPr/>
+        </p:nvSpPr>
+        <p:spPr>
+          <a:xfrm>
+            <a:off x="502920" y="6473952"/>
+            <a:ext cx="9144000" cy="292608"/>
           </a:xfrm>
           <a:prstGeom prst="rect">
             <a:avLst/>
@@ -7527,27 +12125,108 @@
           <a:p>
             <a:pPr algn="l"/>
             <a:r>
-              <a:rPr sz="1350" b="1" i="0">
+              <a:rPr sz="900" b="0" i="0">
+                <a:solidFill>
+                  <a:srgbClr val="6B7280"/>
+                </a:solidFill>
+                <a:latin typeface="Segoe UI"/>
+              </a:rPr>
+              <a:t>PPL CMDB-CSDM  |  CO6 Deliverables  |  Team Focus  -  Jul 10, 2026</a:t>
+            </a:r>
+          </a:p>
+        </p:txBody>
+      </p:sp>
+      <p:sp>
+        <p:nvSpPr>
+          <p:cNvPr id="7" name="Rectangle 6"/>
+          <p:cNvSpPr/>
+          <p:nvPr/>
+        </p:nvSpPr>
+        <p:spPr>
+          <a:xfrm>
+            <a:off x="502920" y="1115568"/>
+            <a:ext cx="11155680" cy="457200"/>
+          </a:xfrm>
+          <a:prstGeom prst="rect">
+            <a:avLst/>
+          </a:prstGeom>
+          <a:solidFill>
+            <a:srgbClr val="E9F0F8"/>
+          </a:solidFill>
+          <a:ln w="9525">
+            <a:solidFill>
+              <a:srgbClr val="2E6DB4"/>
+            </a:solidFill>
+          </a:ln>
+          <a:effectLst/>
+        </p:spPr>
+        <p:style>
+          <a:lnRef idx="1">
+            <a:schemeClr val="accent1"/>
+          </a:lnRef>
+          <a:fillRef idx="3">
+            <a:schemeClr val="accent1"/>
+          </a:fillRef>
+          <a:effectRef idx="2">
+            <a:schemeClr val="accent1"/>
+          </a:effectRef>
+          <a:fontRef idx="minor">
+            <a:schemeClr val="lt1"/>
+          </a:fontRef>
+        </p:style>
+        <p:txBody>
+          <a:bodyPr rtlCol="0" anchor="ctr"/>
+          <a:lstStyle/>
+          <a:p>
+            <a:pPr algn="ctr"/>
+          </a:p>
+        </p:txBody>
+      </p:sp>
+      <p:sp>
+        <p:nvSpPr>
+          <p:cNvPr id="8" name="TextBox 7"/>
+          <p:cNvSpPr txBox="1"/>
+          <p:nvPr/>
+        </p:nvSpPr>
+        <p:spPr>
+          <a:xfrm>
+            <a:off x="658368" y="1133856"/>
+            <a:ext cx="10881360" cy="420624"/>
+          </a:xfrm>
+          <a:prstGeom prst="rect">
+            <a:avLst/>
+          </a:prstGeom>
+          <a:noFill/>
+        </p:spPr>
+        <p:txBody>
+          <a:bodyPr wrap="square" anchor="ctr" lIns="50800" rIns="50800" tIns="25400" bIns="25400">
+            <a:spAutoFit/>
+          </a:bodyPr>
+          <a:lstStyle/>
+          <a:p>
+            <a:pPr algn="l"/>
+            <a:r>
+              <a:rPr sz="1100" b="0" i="0">
                 <a:solidFill>
                   <a:srgbClr val="1F3A5F"/>
                 </a:solidFill>
                 <a:latin typeface="Segoe UI"/>
               </a:rPr>
-              <a:t>Unblock Qualys early.</a:t>
-            </a:r>
-          </a:p>
-        </p:txBody>
-      </p:sp>
-      <p:sp>
-        <p:nvSpPr>
-          <p:cNvPr id="15" name="TextBox 14"/>
+              <a:t>Analysis and migration plan for legacy data sources into the CMDB.</a:t>
+            </a:r>
+          </a:p>
+        </p:txBody>
+      </p:sp>
+      <p:sp>
+        <p:nvSpPr>
+          <p:cNvPr id="9" name="TextBox 8"/>
           <p:cNvSpPr txBox="1"/>
           <p:nvPr/>
         </p:nvSpPr>
         <p:spPr>
           <a:xfrm>
-            <a:off x="749808" y="3273551"/>
-            <a:ext cx="10881360" cy="457200"/>
+            <a:off x="502920" y="1755648"/>
+            <a:ext cx="5486400" cy="2286000"/>
           </a:xfrm>
           <a:prstGeom prst="rect">
             <a:avLst/>
@@ -7562,27 +12241,416 @@
           <a:p>
             <a:pPr algn="l"/>
             <a:r>
-              <a:rPr sz="1100" b="0" i="0">
+              <a:rPr sz="1200" b="1" i="0">
+                <a:solidFill>
+                  <a:srgbClr val="1F3A5F"/>
+                </a:solidFill>
+                <a:latin typeface="Segoe UI"/>
+              </a:rPr>
+              <a:t>Done when (acceptance)</a:t>
+            </a:r>
+          </a:p>
+          <a:p>
+            <a:pPr algn="l"/>
+            <a:r>
+              <a:rPr sz="1000" b="0" i="0">
                 <a:solidFill>
                   <a:srgbClr val="2D2D2D"/>
                 </a:solidFill>
                 <a:latin typeface="Segoe UI"/>
               </a:rPr>
-              <a:t>One-way feed to PROD by Oct 27 - the plugin blocker needs clearing before the build can finish.</a:t>
-            </a:r>
-          </a:p>
-        </p:txBody>
-      </p:sp>
-      <p:sp>
-        <p:nvSpPr>
-          <p:cNvPr id="16" name="Rectangle 15"/>
+              <a:t>•  Analysis complete for iTeam -&gt; DISCO / Cherwell -&gt; AIM</a:t>
+            </a:r>
+          </a:p>
+          <a:p>
+            <a:pPr algn="l"/>
+            <a:r>
+              <a:rPr sz="1000" b="0" i="0">
+                <a:solidFill>
+                  <a:srgbClr val="2D2D2D"/>
+                </a:solidFill>
+                <a:latin typeface="Segoe UI"/>
+              </a:rPr>
+              <a:t>•  Migration plan produced (Cherwell / AIM only if applicable at PI-3 planning)</a:t>
+            </a:r>
+          </a:p>
+        </p:txBody>
+      </p:sp>
+      <p:sp>
+        <p:nvSpPr>
+          <p:cNvPr id="10" name="TextBox 9"/>
+          <p:cNvSpPr txBox="1"/>
+          <p:nvPr/>
+        </p:nvSpPr>
+        <p:spPr>
+          <a:xfrm>
+            <a:off x="6172200" y="1755648"/>
+            <a:ext cx="5486400" cy="2286000"/>
+          </a:xfrm>
+          <a:prstGeom prst="rect">
+            <a:avLst/>
+          </a:prstGeom>
+          <a:noFill/>
+        </p:spPr>
+        <p:txBody>
+          <a:bodyPr wrap="square" anchor="t" lIns="50800" rIns="50800" tIns="25400" bIns="25400">
+            <a:spAutoFit/>
+          </a:bodyPr>
+          <a:lstStyle/>
+          <a:p>
+            <a:pPr algn="l"/>
+            <a:r>
+              <a:rPr sz="1200" b="1" i="0">
+                <a:solidFill>
+                  <a:srgbClr val="1F3A5F"/>
+                </a:solidFill>
+                <a:latin typeface="Segoe UI"/>
+              </a:rPr>
+              <a:t>Scope</a:t>
+            </a:r>
+          </a:p>
+          <a:p>
+            <a:pPr algn="l"/>
+            <a:r>
+              <a:rPr sz="1050" b="1" i="0">
+                <a:solidFill>
+                  <a:srgbClr val="2E8B57"/>
+                </a:solidFill>
+                <a:latin typeface="Segoe UI"/>
+              </a:rPr>
+              <a:t>In scope</a:t>
+            </a:r>
+          </a:p>
+          <a:p>
+            <a:pPr algn="l"/>
+            <a:r>
+              <a:rPr sz="950" b="0" i="0">
+                <a:solidFill>
+                  <a:srgbClr val="2D2D2D"/>
+                </a:solidFill>
+                <a:latin typeface="Segoe UI"/>
+              </a:rPr>
+              <a:t>•  iTeam import / migration; analysis of DISCO / Cherwell / AIM</a:t>
+            </a:r>
+          </a:p>
+          <a:p>
+            <a:pPr algn="l"/>
+            <a:r>
+              <a:rPr sz="1050" b="1" i="0">
+                <a:solidFill>
+                  <a:srgbClr val="C0392B"/>
+                </a:solidFill>
+                <a:latin typeface="Segoe UI"/>
+              </a:rPr>
+              <a:t>Out of scope</a:t>
+            </a:r>
+          </a:p>
+          <a:p>
+            <a:pPr algn="l"/>
+            <a:r>
+              <a:rPr sz="950" b="0" i="0">
+                <a:solidFill>
+                  <a:srgbClr val="2D2D2D"/>
+                </a:solidFill>
+                <a:latin typeface="Segoe UI"/>
+              </a:rPr>
+              <a:t>•  Cherwell / AIM execution unless confirmed applicable at PI-3 planning</a:t>
+            </a:r>
+          </a:p>
+        </p:txBody>
+      </p:sp>
+      <p:sp>
+        <p:nvSpPr>
+          <p:cNvPr id="11" name="Rectangle 10"/>
           <p:cNvSpPr/>
           <p:nvPr/>
         </p:nvSpPr>
         <p:spPr>
           <a:xfrm>
-            <a:off x="502920" y="3840480"/>
-            <a:ext cx="109728" cy="566928"/>
+            <a:off x="502920" y="4114800"/>
+            <a:ext cx="11155680" cy="1234440"/>
+          </a:xfrm>
+          <a:prstGeom prst="rect">
+            <a:avLst/>
+          </a:prstGeom>
+          <a:solidFill>
+            <a:srgbClr val="F4F6F9"/>
+          </a:solidFill>
+          <a:ln>
+            <a:noFill/>
+          </a:ln>
+          <a:effectLst/>
+        </p:spPr>
+        <p:style>
+          <a:lnRef idx="1">
+            <a:schemeClr val="accent1"/>
+          </a:lnRef>
+          <a:fillRef idx="3">
+            <a:schemeClr val="accent1"/>
+          </a:fillRef>
+          <a:effectRef idx="2">
+            <a:schemeClr val="accent1"/>
+          </a:effectRef>
+          <a:fontRef idx="minor">
+            <a:schemeClr val="lt1"/>
+          </a:fontRef>
+        </p:style>
+        <p:txBody>
+          <a:bodyPr rtlCol="0" anchor="ctr"/>
+          <a:lstStyle/>
+          <a:p>
+            <a:pPr algn="ctr"/>
+          </a:p>
+        </p:txBody>
+      </p:sp>
+      <p:sp>
+        <p:nvSpPr>
+          <p:cNvPr id="12" name="TextBox 11"/>
+          <p:cNvSpPr txBox="1"/>
+          <p:nvPr/>
+        </p:nvSpPr>
+        <p:spPr>
+          <a:xfrm>
+            <a:off x="658368" y="4160520"/>
+            <a:ext cx="10881360" cy="1161288"/>
+          </a:xfrm>
+          <a:prstGeom prst="rect">
+            <a:avLst/>
+          </a:prstGeom>
+          <a:noFill/>
+        </p:spPr>
+        <p:txBody>
+          <a:bodyPr wrap="square" anchor="t" lIns="50800" rIns="50800" tIns="25400" bIns="25400">
+            <a:spAutoFit/>
+          </a:bodyPr>
+          <a:lstStyle/>
+          <a:p>
+            <a:pPr algn="l"/>
+            <a:r>
+              <a:rPr sz="1150" b="1" i="0">
+                <a:solidFill>
+                  <a:srgbClr val="1F3A5F"/>
+                </a:solidFill>
+                <a:latin typeface="Segoe UI"/>
+              </a:rPr>
+              <a:t>Current stories</a:t>
+            </a:r>
+          </a:p>
+          <a:p>
+            <a:pPr algn="l"/>
+            <a:r>
+              <a:rPr sz="950" b="0" i="0">
+                <a:solidFill>
+                  <a:srgbClr val="2D2D2D"/>
+                </a:solidFill>
+                <a:latin typeface="Segoe UI"/>
+              </a:rPr>
+              <a:t>•  iTeam import 1452028 (only current story)</a:t>
+            </a:r>
+          </a:p>
+          <a:p>
+            <a:pPr algn="l"/>
+            <a:r>
+              <a:rPr sz="950" b="0" i="0">
+                <a:solidFill>
+                  <a:srgbClr val="2D2D2D"/>
+                </a:solidFill>
+                <a:latin typeface="Segoe UI"/>
+              </a:rPr>
+              <a:t>•  Analysis / migration-plan stories - not created yet</a:t>
+            </a:r>
+          </a:p>
+        </p:txBody>
+      </p:sp>
+      <p:sp>
+        <p:nvSpPr>
+          <p:cNvPr id="13" name="Rectangle 12"/>
+          <p:cNvSpPr/>
+          <p:nvPr/>
+        </p:nvSpPr>
+        <p:spPr>
+          <a:xfrm>
+            <a:off x="502920" y="5413248"/>
+            <a:ext cx="11155680" cy="896112"/>
+          </a:xfrm>
+          <a:prstGeom prst="rect">
+            <a:avLst/>
+          </a:prstGeom>
+          <a:solidFill>
+            <a:srgbClr val="FBEEDB"/>
+          </a:solidFill>
+          <a:ln w="9525">
+            <a:solidFill>
+              <a:srgbClr val="E08A00"/>
+            </a:solidFill>
+          </a:ln>
+          <a:effectLst/>
+        </p:spPr>
+        <p:style>
+          <a:lnRef idx="1">
+            <a:schemeClr val="accent1"/>
+          </a:lnRef>
+          <a:fillRef idx="3">
+            <a:schemeClr val="accent1"/>
+          </a:fillRef>
+          <a:effectRef idx="2">
+            <a:schemeClr val="accent1"/>
+          </a:effectRef>
+          <a:fontRef idx="minor">
+            <a:schemeClr val="lt1"/>
+          </a:fontRef>
+        </p:style>
+        <p:txBody>
+          <a:bodyPr rtlCol="0" anchor="ctr"/>
+          <a:lstStyle/>
+          <a:p>
+            <a:pPr algn="ctr"/>
+          </a:p>
+        </p:txBody>
+      </p:sp>
+      <p:sp>
+        <p:nvSpPr>
+          <p:cNvPr id="14" name="TextBox 13"/>
+          <p:cNvSpPr txBox="1"/>
+          <p:nvPr/>
+        </p:nvSpPr>
+        <p:spPr>
+          <a:xfrm>
+            <a:off x="658368" y="5449824"/>
+            <a:ext cx="10881360" cy="822960"/>
+          </a:xfrm>
+          <a:prstGeom prst="rect">
+            <a:avLst/>
+          </a:prstGeom>
+          <a:noFill/>
+        </p:spPr>
+        <p:txBody>
+          <a:bodyPr wrap="square" anchor="t" lIns="50800" rIns="50800" tIns="25400" bIns="25400">
+            <a:spAutoFit/>
+          </a:bodyPr>
+          <a:lstStyle/>
+          <a:p>
+            <a:pPr algn="l"/>
+            <a:r>
+              <a:rPr sz="1100" b="1" i="0">
+                <a:solidFill>
+                  <a:srgbClr val="7A4F10"/>
+                </a:solidFill>
+                <a:latin typeface="Segoe UI"/>
+              </a:rPr>
+              <a:t>Watch-outs / dependencies</a:t>
+            </a:r>
+          </a:p>
+          <a:p>
+            <a:pPr algn="l"/>
+            <a:r>
+              <a:rPr sz="950" b="0" i="0">
+                <a:solidFill>
+                  <a:srgbClr val="5A4A2A"/>
+                </a:solidFill>
+                <a:latin typeface="Segoe UI"/>
+              </a:rPr>
+              <a:t>•  Greenfield - scope the analysis / plan stories at PI-3 planning</a:t>
+            </a:r>
+          </a:p>
+          <a:p>
+            <a:pPr algn="l"/>
+            <a:r>
+              <a:rPr sz="950" b="0" i="0">
+                <a:solidFill>
+                  <a:srgbClr val="5A4A2A"/>
+                </a:solidFill>
+                <a:latin typeface="Segoe UI"/>
+              </a:rPr>
+              <a:t>•  Ties to the ~450-server application-to-server gap</a:t>
+            </a:r>
+          </a:p>
+          <a:p>
+            <a:pPr algn="l"/>
+            <a:r>
+              <a:rPr sz="950" b="0" i="0">
+                <a:solidFill>
+                  <a:srgbClr val="5A4A2A"/>
+                </a:solidFill>
+                <a:latin typeface="Segoe UI"/>
+              </a:rPr>
+              <a:t>•  Cherwell / AIM applicability decided at PI-3 planning</a:t>
+            </a:r>
+          </a:p>
+        </p:txBody>
+      </p:sp>
+    </p:spTree>
+  </p:cSld>
+  <p:clrMapOvr>
+    <a:masterClrMapping/>
+  </p:clrMapOvr>
+</p:sld>
+</file>
+
+<file path=ppt/slides/slide9.xml><?xml version="1.0" encoding="utf-8"?>
+<p:sld xmlns:a="http://schemas.openxmlformats.org/drawingml/2006/main" xmlns:p="http://schemas.openxmlformats.org/presentationml/2006/main" xmlns:r="http://schemas.openxmlformats.org/officeDocument/2006/relationships">
+  <p:cSld>
+    <p:spTree>
+      <p:nvGrpSpPr>
+        <p:cNvPr id="1" name=""/>
+        <p:cNvGrpSpPr/>
+        <p:nvPr/>
+      </p:nvGrpSpPr>
+      <p:grpSpPr/>
+      <p:sp>
+        <p:nvSpPr>
+          <p:cNvPr id="2" name="Rectangle 1"/>
+          <p:cNvSpPr/>
+          <p:nvPr/>
+        </p:nvSpPr>
+        <p:spPr>
+          <a:xfrm>
+            <a:off x="0" y="0"/>
+            <a:ext cx="12191695" cy="960120"/>
+          </a:xfrm>
+          <a:prstGeom prst="rect">
+            <a:avLst/>
+          </a:prstGeom>
+          <a:solidFill>
+            <a:srgbClr val="1F3A5F"/>
+          </a:solidFill>
+          <a:ln>
+            <a:noFill/>
+          </a:ln>
+          <a:effectLst/>
+        </p:spPr>
+        <p:style>
+          <a:lnRef idx="1">
+            <a:schemeClr val="accent1"/>
+          </a:lnRef>
+          <a:fillRef idx="3">
+            <a:schemeClr val="accent1"/>
+          </a:fillRef>
+          <a:effectRef idx="2">
+            <a:schemeClr val="accent1"/>
+          </a:effectRef>
+          <a:fontRef idx="minor">
+            <a:schemeClr val="lt1"/>
+          </a:fontRef>
+        </p:style>
+        <p:txBody>
+          <a:bodyPr rtlCol="0" anchor="ctr"/>
+          <a:lstStyle/>
+          <a:p>
+            <a:pPr algn="ctr"/>
+          </a:p>
+        </p:txBody>
+      </p:sp>
+      <p:sp>
+        <p:nvSpPr>
+          <p:cNvPr id="3" name="Rectangle 2"/>
+          <p:cNvSpPr/>
+          <p:nvPr/>
+        </p:nvSpPr>
+        <p:spPr>
+          <a:xfrm>
+            <a:off x="0" y="960120"/>
+            <a:ext cx="12191695" cy="54864"/>
           </a:xfrm>
           <a:prstGeom prst="rect">
             <a:avLst/>
@@ -7619,14 +12687,84 @@
       </p:sp>
       <p:sp>
         <p:nvSpPr>
-          <p:cNvPr id="17" name="TextBox 16"/>
+          <p:cNvPr id="4" name="TextBox 3"/>
           <p:cNvSpPr txBox="1"/>
           <p:nvPr/>
         </p:nvSpPr>
         <p:spPr>
           <a:xfrm>
-            <a:off x="749808" y="3803904"/>
-            <a:ext cx="10881360" cy="292608"/>
+            <a:off x="502920" y="164592"/>
+            <a:ext cx="11155680" cy="502920"/>
+          </a:xfrm>
+          <a:prstGeom prst="rect">
+            <a:avLst/>
+          </a:prstGeom>
+          <a:noFill/>
+        </p:spPr>
+        <p:txBody>
+          <a:bodyPr wrap="square" anchor="ctr" lIns="50800" rIns="50800" tIns="25400" bIns="25400">
+            <a:spAutoFit/>
+          </a:bodyPr>
+          <a:lstStyle/>
+          <a:p>
+            <a:pPr algn="l"/>
+            <a:r>
+              <a:rPr sz="2600" b="1" i="0">
+                <a:solidFill>
+                  <a:srgbClr val="FFFFFF"/>
+                </a:solidFill>
+                <a:latin typeface="Segoe UI"/>
+              </a:rPr>
+              <a:t>Qualys Integration</a:t>
+            </a:r>
+          </a:p>
+        </p:txBody>
+      </p:sp>
+      <p:sp>
+        <p:nvSpPr>
+          <p:cNvPr id="5" name="TextBox 4"/>
+          <p:cNvSpPr txBox="1"/>
+          <p:nvPr/>
+        </p:nvSpPr>
+        <p:spPr>
+          <a:xfrm>
+            <a:off x="521207" y="603504"/>
+            <a:ext cx="11155680" cy="292608"/>
+          </a:xfrm>
+          <a:prstGeom prst="rect">
+            <a:avLst/>
+          </a:prstGeom>
+          <a:noFill/>
+        </p:spPr>
+        <p:txBody>
+          <a:bodyPr wrap="square" anchor="ctr" lIns="50800" rIns="50800" tIns="25400" bIns="25400">
+            <a:spAutoFit/>
+          </a:bodyPr>
+          <a:lstStyle/>
+          <a:p>
+            <a:pPr algn="l"/>
+            <a:r>
+              <a:rPr sz="1200" b="0" i="0">
+                <a:solidFill>
+                  <a:srgbClr val="C9D6E6"/>
+                </a:solidFill>
+                <a:latin typeface="Segoe UI"/>
+              </a:rPr>
+              <a:t>Due Oct 27   ·   PI-3</a:t>
+            </a:r>
+          </a:p>
+        </p:txBody>
+      </p:sp>
+      <p:sp>
+        <p:nvSpPr>
+          <p:cNvPr id="6" name="TextBox 5"/>
+          <p:cNvSpPr txBox="1"/>
+          <p:nvPr/>
+        </p:nvSpPr>
+        <p:spPr>
+          <a:xfrm>
+            <a:off x="502920" y="6473952"/>
+            <a:ext cx="9144000" cy="292608"/>
           </a:xfrm>
           <a:prstGeom prst="rect">
             <a:avLst/>
@@ -7641,27 +12779,108 @@
           <a:p>
             <a:pPr algn="l"/>
             <a:r>
-              <a:rPr sz="1350" b="1" i="0">
+              <a:rPr sz="900" b="0" i="0">
+                <a:solidFill>
+                  <a:srgbClr val="6B7280"/>
+                </a:solidFill>
+                <a:latin typeface="Segoe UI"/>
+              </a:rPr>
+              <a:t>PPL CMDB-CSDM  |  CO6 Deliverables  |  Team Focus  -  Jul 10, 2026</a:t>
+            </a:r>
+          </a:p>
+        </p:txBody>
+      </p:sp>
+      <p:sp>
+        <p:nvSpPr>
+          <p:cNvPr id="7" name="Rectangle 6"/>
+          <p:cNvSpPr/>
+          <p:nvPr/>
+        </p:nvSpPr>
+        <p:spPr>
+          <a:xfrm>
+            <a:off x="502920" y="1115568"/>
+            <a:ext cx="11155680" cy="457200"/>
+          </a:xfrm>
+          <a:prstGeom prst="rect">
+            <a:avLst/>
+          </a:prstGeom>
+          <a:solidFill>
+            <a:srgbClr val="E9F0F8"/>
+          </a:solidFill>
+          <a:ln w="9525">
+            <a:solidFill>
+              <a:srgbClr val="2E6DB4"/>
+            </a:solidFill>
+          </a:ln>
+          <a:effectLst/>
+        </p:spPr>
+        <p:style>
+          <a:lnRef idx="1">
+            <a:schemeClr val="accent1"/>
+          </a:lnRef>
+          <a:fillRef idx="3">
+            <a:schemeClr val="accent1"/>
+          </a:fillRef>
+          <a:effectRef idx="2">
+            <a:schemeClr val="accent1"/>
+          </a:effectRef>
+          <a:fontRef idx="minor">
+            <a:schemeClr val="lt1"/>
+          </a:fontRef>
+        </p:style>
+        <p:txBody>
+          <a:bodyPr rtlCol="0" anchor="ctr"/>
+          <a:lstStyle/>
+          <a:p>
+            <a:pPr algn="ctr"/>
+          </a:p>
+        </p:txBody>
+      </p:sp>
+      <p:sp>
+        <p:nvSpPr>
+          <p:cNvPr id="8" name="TextBox 7"/>
+          <p:cNvSpPr txBox="1"/>
+          <p:nvPr/>
+        </p:nvSpPr>
+        <p:spPr>
+          <a:xfrm>
+            <a:off x="658368" y="1133856"/>
+            <a:ext cx="10881360" cy="420624"/>
+          </a:xfrm>
+          <a:prstGeom prst="rect">
+            <a:avLst/>
+          </a:prstGeom>
+          <a:noFill/>
+        </p:spPr>
+        <p:txBody>
+          <a:bodyPr wrap="square" anchor="ctr" lIns="50800" rIns="50800" tIns="25400" bIns="25400">
+            <a:spAutoFit/>
+          </a:bodyPr>
+          <a:lstStyle/>
+          <a:p>
+            <a:pPr algn="l"/>
+            <a:r>
+              <a:rPr sz="1100" b="0" i="0">
                 <a:solidFill>
                   <a:srgbClr val="1F3A5F"/>
                 </a:solidFill>
                 <a:latin typeface="Segoe UI"/>
               </a:rPr>
-              <a:t>New to plan at PI-3 planning.</a:t>
-            </a:r>
-          </a:p>
-        </p:txBody>
-      </p:sp>
-      <p:sp>
-        <p:nvSpPr>
-          <p:cNvPr id="18" name="TextBox 17"/>
+              <a:t>One-way Qualys -&gt; ServiceNow vulnerability feed, deployed to PROD.</a:t>
+            </a:r>
+          </a:p>
+        </p:txBody>
+      </p:sp>
+      <p:sp>
+        <p:nvSpPr>
+          <p:cNvPr id="9" name="TextBox 8"/>
           <p:cNvSpPr txBox="1"/>
           <p:nvPr/>
         </p:nvSpPr>
         <p:spPr>
           <a:xfrm>
-            <a:off x="749808" y="4114800"/>
-            <a:ext cx="10881360" cy="457200"/>
+            <a:off x="502920" y="1755648"/>
+            <a:ext cx="5486400" cy="2286000"/>
           </a:xfrm>
           <a:prstGeom prst="rect">
             <a:avLst/>
@@ -7676,33 +12895,152 @@
           <a:p>
             <a:pPr algn="l"/>
             <a:r>
-              <a:rPr sz="1100" b="0" i="0">
+              <a:rPr sz="1200" b="1" i="0">
+                <a:solidFill>
+                  <a:srgbClr val="1F3A5F"/>
+                </a:solidFill>
+                <a:latin typeface="Segoe UI"/>
+              </a:rPr>
+              <a:t>Done when (acceptance)</a:t>
+            </a:r>
+          </a:p>
+          <a:p>
+            <a:pPr algn="l"/>
+            <a:r>
+              <a:rPr sz="1000" b="0" i="0">
                 <a:solidFill>
                   <a:srgbClr val="2D2D2D"/>
                 </a:solidFill>
                 <a:latin typeface="Segoe UI"/>
               </a:rPr>
-              <a:t>Legacy Platform Rationalization and ATF Strategy are greenfield - no stories yet; we scope and staff these at planning.</a:t>
-            </a:r>
-          </a:p>
-        </p:txBody>
-      </p:sp>
-      <p:sp>
-        <p:nvSpPr>
-          <p:cNvPr id="19" name="Rectangle 18"/>
+              <a:t>•  One-way Qualys -&gt; ServiceNow integration configured &amp; tested</a:t>
+            </a:r>
+          </a:p>
+          <a:p>
+            <a:pPr algn="l"/>
+            <a:r>
+              <a:rPr sz="1000" b="0" i="0">
+                <a:solidFill>
+                  <a:srgbClr val="2D2D2D"/>
+                </a:solidFill>
+                <a:latin typeface="Segoe UI"/>
+              </a:rPr>
+              <a:t>•  Deployed to PROD</a:t>
+            </a:r>
+          </a:p>
+          <a:p>
+            <a:pPr algn="l"/>
+            <a:r>
+              <a:rPr sz="1000" b="0" i="0">
+                <a:solidFill>
+                  <a:srgbClr val="2D2D2D"/>
+                </a:solidFill>
+                <a:latin typeface="Segoe UI"/>
+              </a:rPr>
+              <a:t>•  Vulnerability data ingests on schedule, no data loss</a:t>
+            </a:r>
+          </a:p>
+        </p:txBody>
+      </p:sp>
+      <p:sp>
+        <p:nvSpPr>
+          <p:cNvPr id="10" name="TextBox 9"/>
+          <p:cNvSpPr txBox="1"/>
+          <p:nvPr/>
+        </p:nvSpPr>
+        <p:spPr>
+          <a:xfrm>
+            <a:off x="6172200" y="1755648"/>
+            <a:ext cx="5486400" cy="2286000"/>
+          </a:xfrm>
+          <a:prstGeom prst="rect">
+            <a:avLst/>
+          </a:prstGeom>
+          <a:noFill/>
+        </p:spPr>
+        <p:txBody>
+          <a:bodyPr wrap="square" anchor="t" lIns="50800" rIns="50800" tIns="25400" bIns="25400">
+            <a:spAutoFit/>
+          </a:bodyPr>
+          <a:lstStyle/>
+          <a:p>
+            <a:pPr algn="l"/>
+            <a:r>
+              <a:rPr sz="1200" b="1" i="0">
+                <a:solidFill>
+                  <a:srgbClr val="1F3A5F"/>
+                </a:solidFill>
+                <a:latin typeface="Segoe UI"/>
+              </a:rPr>
+              <a:t>Scope</a:t>
+            </a:r>
+          </a:p>
+          <a:p>
+            <a:pPr algn="l"/>
+            <a:r>
+              <a:rPr sz="1050" b="1" i="0">
+                <a:solidFill>
+                  <a:srgbClr val="2E8B57"/>
+                </a:solidFill>
+                <a:latin typeface="Segoe UI"/>
+              </a:rPr>
+              <a:t>In scope</a:t>
+            </a:r>
+          </a:p>
+          <a:p>
+            <a:pPr algn="l"/>
+            <a:r>
+              <a:rPr sz="950" b="0" i="0">
+                <a:solidFill>
+                  <a:srgbClr val="2D2D2D"/>
+                </a:solidFill>
+                <a:latin typeface="Segoe UI"/>
+              </a:rPr>
+              <a:t>•  One-way Qualys -&gt; SNOW feed: config, test, PROD deploy</a:t>
+            </a:r>
+          </a:p>
+          <a:p>
+            <a:pPr algn="l"/>
+            <a:r>
+              <a:rPr sz="1050" b="1" i="0">
+                <a:solidFill>
+                  <a:srgbClr val="C0392B"/>
+                </a:solidFill>
+                <a:latin typeface="Segoe UI"/>
+              </a:rPr>
+              <a:t>Out of scope</a:t>
+            </a:r>
+          </a:p>
+          <a:p>
+            <a:pPr algn="l"/>
+            <a:r>
+              <a:rPr sz="950" b="0" i="0">
+                <a:solidFill>
+                  <a:srgbClr val="2D2D2D"/>
+                </a:solidFill>
+                <a:latin typeface="Segoe UI"/>
+              </a:rPr>
+              <a:t>•  Two-way sync; other integrations (Tanium was the alternative)</a:t>
+            </a:r>
+          </a:p>
+        </p:txBody>
+      </p:sp>
+      <p:sp>
+        <p:nvSpPr>
+          <p:cNvPr id="11" name="Rectangle 10"/>
           <p:cNvSpPr/>
           <p:nvPr/>
         </p:nvSpPr>
         <p:spPr>
           <a:xfrm>
-            <a:off x="502920" y="4681728"/>
-            <a:ext cx="109728" cy="566928"/>
+            <a:off x="502920" y="4114800"/>
+            <a:ext cx="11155680" cy="1234440"/>
           </a:xfrm>
           <a:prstGeom prst="rect">
             <a:avLst/>
           </a:prstGeom>
           <a:solidFill>
-            <a:srgbClr val="2E6DB4"/>
+            <a:srgbClr val="F4F6F9"/>
           </a:solidFill>
           <a:ln>
             <a:noFill/>
@@ -7733,14 +13071,14 @@
       </p:sp>
       <p:sp>
         <p:nvSpPr>
-          <p:cNvPr id="20" name="TextBox 19"/>
+          <p:cNvPr id="12" name="TextBox 11"/>
           <p:cNvSpPr txBox="1"/>
           <p:nvPr/>
         </p:nvSpPr>
         <p:spPr>
           <a:xfrm>
-            <a:off x="749808" y="4645152"/>
-            <a:ext cx="10881360" cy="292608"/>
+            <a:off x="658368" y="4160520"/>
+            <a:ext cx="10881360" cy="1161288"/>
           </a:xfrm>
           <a:prstGeom prst="rect">
             <a:avLst/>
@@ -7755,71 +13093,62 @@
           <a:p>
             <a:pPr algn="l"/>
             <a:r>
-              <a:rPr sz="1350" b="1" i="0">
+              <a:rPr sz="1150" b="1" i="0">
                 <a:solidFill>
                   <a:srgbClr val="1F3A5F"/>
                 </a:solidFill>
                 <a:latin typeface="Segoe UI"/>
               </a:rPr>
-              <a:t>Supporting lanes stand up separately.</a:t>
-            </a:r>
-          </a:p>
-        </p:txBody>
-      </p:sp>
-      <p:sp>
-        <p:nvSpPr>
-          <p:cNvPr id="21" name="TextBox 20"/>
-          <p:cNvSpPr txBox="1"/>
-          <p:nvPr/>
-        </p:nvSpPr>
-        <p:spPr>
-          <a:xfrm>
-            <a:off x="749808" y="4956048"/>
-            <a:ext cx="10881360" cy="457200"/>
-          </a:xfrm>
-          <a:prstGeom prst="rect">
-            <a:avLst/>
-          </a:prstGeom>
-          <a:noFill/>
-        </p:spPr>
-        <p:txBody>
-          <a:bodyPr wrap="square" anchor="t" lIns="50800" rIns="50800" tIns="25400" bIns="25400">
-            <a:spAutoFit/>
-          </a:bodyPr>
-          <a:lstStyle/>
-          <a:p>
-            <a:pPr algn="l"/>
-            <a:r>
-              <a:rPr sz="1100" b="0" i="0">
+              <a:t>Current stories</a:t>
+            </a:r>
+          </a:p>
+          <a:p>
+            <a:pPr algn="l"/>
+            <a:r>
+              <a:rPr sz="950" b="0" i="0">
                 <a:solidFill>
                   <a:srgbClr val="2D2D2D"/>
                 </a:solidFill>
                 <a:latin typeface="Segoe UI"/>
               </a:rPr>
-              <a:t>ITSM Product Management and Platform Support are PO / BAU capacity, not core CMDB dev - flagged so they're on the radar.</a:t>
-            </a:r>
-          </a:p>
-        </p:txBody>
-      </p:sp>
-      <p:sp>
-        <p:nvSpPr>
-          <p:cNvPr id="22" name="Rectangle 21"/>
+              <a:t>•  1428703 install plugin  ·  1428704 configure - both blocked</a:t>
+            </a:r>
+          </a:p>
+          <a:p>
+            <a:pPr algn="l"/>
+            <a:r>
+              <a:rPr sz="950" b="0" i="0">
+                <a:solidFill>
+                  <a:srgbClr val="2D2D2D"/>
+                </a:solidFill>
+                <a:latin typeface="Segoe UI"/>
+              </a:rPr>
+              <a:t>•  Data-scope spike 1234585  ·  1465952 plugin replacement (closed)</a:t>
+            </a:r>
+          </a:p>
+        </p:txBody>
+      </p:sp>
+      <p:sp>
+        <p:nvSpPr>
+          <p:cNvPr id="13" name="Rectangle 12"/>
           <p:cNvSpPr/>
           <p:nvPr/>
         </p:nvSpPr>
         <p:spPr>
           <a:xfrm>
-            <a:off x="502920" y="5522976"/>
-            <a:ext cx="109728" cy="566928"/>
+            <a:off x="502920" y="5413248"/>
+            <a:ext cx="11155680" cy="896112"/>
           </a:xfrm>
           <a:prstGeom prst="rect">
             <a:avLst/>
           </a:prstGeom>
           <a:solidFill>
-            <a:srgbClr val="2E6DB4"/>
+            <a:srgbClr val="FBEEDB"/>
           </a:solidFill>
-          <a:ln>
-            <a:noFill/>
+          <a:ln w="9525">
+            <a:solidFill>
+              <a:srgbClr val="E08A00"/>
+            </a:solidFill>
           </a:ln>
           <a:effectLst/>
         </p:spPr>
@@ -7847,14 +13176,14 @@
       </p:sp>
       <p:sp>
         <p:nvSpPr>
-          <p:cNvPr id="23" name="TextBox 22"/>
+          <p:cNvPr id="14" name="TextBox 13"/>
           <p:cNvSpPr txBox="1"/>
           <p:nvPr/>
         </p:nvSpPr>
         <p:spPr>
           <a:xfrm>
-            <a:off x="749808" y="5486400"/>
-            <a:ext cx="10881360" cy="292608"/>
+            <a:off x="658368" y="5449824"/>
+            <a:ext cx="10881360" cy="822960"/>
           </a:xfrm>
           <a:prstGeom prst="rect">
             <a:avLst/>
@@ -7869,48 +13198,49 @@
           <a:p>
             <a:pPr algn="l"/>
             <a:r>
-              <a:rPr sz="1350" b="1" i="0">
-                <a:solidFill>
-                  <a:srgbClr val="1F3A5F"/>
-                </a:solidFill>
-                <a:latin typeface="Segoe UI"/>
-              </a:rPr>
-              <a:t>Questions?</a:t>
-            </a:r>
-          </a:p>
-        </p:txBody>
-      </p:sp>
-      <p:sp>
-        <p:nvSpPr>
-          <p:cNvPr id="24" name="TextBox 23"/>
-          <p:cNvSpPr txBox="1"/>
-          <p:nvPr/>
-        </p:nvSpPr>
-        <p:spPr>
-          <a:xfrm>
-            <a:off x="749808" y="5797296"/>
-            <a:ext cx="10881360" cy="457200"/>
-          </a:xfrm>
-          <a:prstGeom prst="rect">
-            <a:avLst/>
-          </a:prstGeom>
-          <a:noFill/>
-        </p:spPr>
-        <p:txBody>
-          <a:bodyPr wrap="square" anchor="t" lIns="50800" rIns="50800" tIns="25400" bIns="25400">
-            <a:spAutoFit/>
-          </a:bodyPr>
-          <a:lstStyle/>
-          <a:p>
-            <a:pPr algn="l"/>
-            <a:r>
-              <a:rPr sz="1100" b="0" i="0">
-                <a:solidFill>
-                  <a:srgbClr val="2D2D2D"/>
-                </a:solidFill>
-                <a:latin typeface="Segoe UI"/>
-              </a:rPr>
-              <a:t>Jordan Yung is the CO6 SME; Joe Dames owns governance scope. Flag anything unclear to Manny.</a:t>
+              <a:rPr sz="1100" b="1" i="0">
+                <a:solidFill>
+                  <a:srgbClr val="7A4F10"/>
+                </a:solidFill>
+                <a:latin typeface="Segoe UI"/>
+              </a:rPr>
+              <a:t>Watch-outs / dependencies</a:t>
+            </a:r>
+          </a:p>
+          <a:p>
+            <a:pPr algn="l"/>
+            <a:r>
+              <a:rPr sz="950" b="0" i="0">
+                <a:solidFill>
+                  <a:srgbClr val="5A4A2A"/>
+                </a:solidFill>
+                <a:latin typeface="Segoe UI"/>
+              </a:rPr>
+              <a:t>•  Plugin blocker: replacement plugin pending approval (1465952 may have cleared it - confirm)</a:t>
+            </a:r>
+          </a:p>
+          <a:p>
+            <a:pPr algn="l"/>
+            <a:r>
+              <a:rPr sz="950" b="0" i="0">
+                <a:solidFill>
+                  <a:srgbClr val="5A4A2A"/>
+                </a:solidFill>
+                <a:latin typeface="Segoe UI"/>
+              </a:rPr>
+              <a:t>•  Story states were not auto-flipped - verify with Stan</a:t>
+            </a:r>
+          </a:p>
+          <a:p>
+            <a:pPr algn="l"/>
+            <a:r>
+              <a:rPr sz="950" b="0" i="0">
+                <a:solidFill>
+                  <a:srgbClr val="5A4A2A"/>
+                </a:solidFill>
+                <a:latin typeface="Segoe UI"/>
+              </a:rPr>
+              <a:t>•  Build cannot finish until the plugin is unblocked</a:t>
             </a:r>
           </a:p>
         </p:txBody>
